--- a/zajecia/robo/robo_w4.pptx
+++ b/zajecia/robo/robo_w4.pptx
@@ -3528,14 +3528,21 @@
             <a:avLst/>
           </a:prstGeom>
           <a:solidFill>
-            <a:srgbClr val="1A3550"/>
+            <a:schemeClr val="bg1"/>
           </a:solidFill>
-          <a:ln w="38100">
+          <a:ln w="76200">
             <a:solidFill>
               <a:srgbClr val="00B4D8"/>
             </a:solidFill>
             <a:prstDash val="solid"/>
           </a:ln>
+          <a:effectLst>
+            <a:outerShdw blurRad="50800" dist="38100" dir="2700000" algn="tl" rotWithShape="0">
+              <a:prstClr val="black">
+                <a:alpha val="40000"/>
+              </a:prstClr>
+            </a:outerShdw>
+          </a:effectLst>
         </p:spPr>
       </p:sp>
       <p:pic>
@@ -3554,8 +3561,8 @@
         </p:blipFill>
         <p:spPr>
           <a:xfrm>
-            <a:off x="6720840" y="1234440"/>
-            <a:ext cx="1554480" cy="1554480"/>
+            <a:off x="6813550" y="1327150"/>
+            <a:ext cx="1369060" cy="1369060"/>
           </a:xfrm>
           <a:prstGeom prst="rect">
             <a:avLst/>
@@ -3626,7 +3633,7 @@
               <a:buNone/>
             </a:pPr>
             <a:r>
-              <a:rPr lang="en-US" sz="3800" b="1" dirty="0">
+              <a:rPr lang="en-US" sz="4400" b="1" dirty="0">
                 <a:solidFill>
                   <a:srgbClr val="FFFFFF"/>
                 </a:solidFill>
@@ -3636,7 +3643,7 @@
               </a:rPr>
               <a:t>WYKŁAD 4</a:t>
             </a:r>
-            <a:endParaRPr lang="en-US" sz="3800" dirty="0"/>
+            <a:endParaRPr lang="en-US" sz="4400" dirty="0"/>
           </a:p>
         </p:txBody>
       </p:sp>
@@ -3713,8 +3720,8 @@
         </p:nvSpPr>
         <p:spPr>
           <a:xfrm>
-            <a:off x="320040" y="3154680"/>
-            <a:ext cx="5760720" cy="365760"/>
+            <a:off x="320040" y="3116580"/>
+            <a:ext cx="5760720" cy="228600"/>
           </a:xfrm>
           <a:prstGeom prst="rect">
             <a:avLst/>
@@ -3738,18 +3745,7 @@
                 <a:ea typeface="Calibri" pitchFamily="34" charset="-122"/>
                 <a:cs typeface="Calibri" pitchFamily="34" charset="-120"/>
               </a:rPr>
-              <a:t>dr inż. </a:t>
-            </a:r>
-            <a:r>
-              <a:rPr lang="pl-PL" sz="1200" b="1" smtClean="0">
-                <a:solidFill>
-                  <a:srgbClr val="00B4D8"/>
-                </a:solidFill>
-                <a:latin typeface="Calibri" pitchFamily="34" charset="0"/>
-                <a:ea typeface="Calibri" pitchFamily="34" charset="-122"/>
-                <a:cs typeface="Calibri" pitchFamily="34" charset="-120"/>
-              </a:rPr>
-              <a:t>Mateusz Pomianek</a:t>
+              <a:t>dr inż. Mateusz Pomianek</a:t>
             </a:r>
             <a:endParaRPr lang="en-US" sz="1200" dirty="0"/>
           </a:p>
@@ -3805,7 +3801,7 @@
               <a:buNone/>
             </a:pPr>
             <a:r>
-              <a:rPr lang="en-US" sz="1000" b="1" dirty="0">
+              <a:rPr lang="en-US" sz="1200" b="1" dirty="0">
                 <a:solidFill>
                   <a:srgbClr val="90E0EF"/>
                 </a:solidFill>
@@ -3815,7 +3811,7 @@
               </a:rPr>
               <a:t>Stabilność i lokomocja</a:t>
             </a:r>
-            <a:endParaRPr lang="en-US" sz="1000" dirty="0"/>
+            <a:endParaRPr lang="en-US" sz="1200" dirty="0"/>
           </a:p>
         </p:txBody>
       </p:sp>
@@ -3869,7 +3865,7 @@
               <a:buNone/>
             </a:pPr>
             <a:r>
-              <a:rPr lang="en-US" sz="1000" b="1" dirty="0">
+              <a:rPr lang="en-US" sz="1200" b="1" dirty="0">
                 <a:solidFill>
                   <a:srgbClr val="90E0EF"/>
                 </a:solidFill>
@@ -3879,7 +3875,7 @@
               </a:rPr>
               <a:t>Kontrola wykonania</a:t>
             </a:r>
-            <a:endParaRPr lang="en-US" sz="1000" dirty="0"/>
+            <a:endParaRPr lang="en-US" sz="1200" dirty="0"/>
           </a:p>
         </p:txBody>
       </p:sp>
@@ -3933,7 +3929,7 @@
               <a:buNone/>
             </a:pPr>
             <a:r>
-              <a:rPr lang="en-US" sz="1000" b="1" dirty="0">
+              <a:rPr lang="en-US" sz="1200" b="1" dirty="0">
                 <a:solidFill>
                   <a:srgbClr val="90E0EF"/>
                 </a:solidFill>
@@ -3943,7 +3939,7 @@
               </a:rPr>
               <a:t>Architektura ROS 2</a:t>
             </a:r>
-            <a:endParaRPr lang="en-US" sz="1000" dirty="0"/>
+            <a:endParaRPr lang="en-US" sz="1200" dirty="0"/>
           </a:p>
         </p:txBody>
       </p:sp>
@@ -3997,7 +3993,7 @@
               <a:buNone/>
             </a:pPr>
             <a:r>
-              <a:rPr lang="en-US" sz="1000" b="1" dirty="0">
+              <a:rPr lang="en-US" sz="1200" b="1" dirty="0">
                 <a:solidFill>
                   <a:srgbClr val="90E0EF"/>
                 </a:solidFill>
@@ -4007,7 +4003,7 @@
               </a:rPr>
               <a:t>Bezpieczeństwo</a:t>
             </a:r>
-            <a:endParaRPr lang="en-US" sz="1000" dirty="0"/>
+            <a:endParaRPr lang="en-US" sz="1200" dirty="0"/>
           </a:p>
         </p:txBody>
       </p:sp>
@@ -6602,7 +6598,7 @@
         <p:spPr>
           <a:xfrm>
             <a:off x="274320" y="1097280"/>
-            <a:ext cx="8595360" cy="3749040"/>
+            <a:ext cx="8595360" cy="2560320"/>
           </a:xfrm>
           <a:prstGeom prst="rect">
             <a:avLst/>
@@ -6633,8 +6629,8 @@
         </p:nvSpPr>
         <p:spPr>
           <a:xfrm>
-            <a:off x="457200" y="1188720"/>
-            <a:ext cx="8229600" cy="3520440"/>
+            <a:off x="403860" y="1188720"/>
+            <a:ext cx="8229600" cy="2344676"/>
           </a:xfrm>
           <a:prstGeom prst="rect">
             <a:avLst/>
@@ -6643,10 +6639,12 @@
           <a:ln/>
         </p:spPr>
         <p:txBody>
-          <a:bodyPr wrap="square" lIns="127000" tIns="127000" rIns="127000" bIns="127000" rtlCol="0" anchor="t"/>
+          <a:bodyPr wrap="square" lIns="127000" tIns="36000" rIns="127000" bIns="0" rtlCol="0" anchor="t">
+            <a:spAutoFit/>
+          </a:bodyPr>
           <a:lstStyle/>
           <a:p>
-            <a:pPr marL="342900" indent="-342900">
+            <a:pPr marL="180000" indent="-180000">
               <a:spcAft>
                 <a:spcPts val="900"/>
               </a:spcAft>
@@ -6654,7 +6652,7 @@
               <a:buChar char="•"/>
             </a:pPr>
             <a:r>
-              <a:rPr lang="en-US" sz="1450" dirty="0">
+              <a:rPr lang="en-US" sz="1500" b="1" dirty="0">
                 <a:solidFill>
                   <a:srgbClr val="0D1B2A"/>
                 </a:solidFill>
@@ -6662,12 +6660,23 @@
                 <a:ea typeface="Calibri" pitchFamily="34" charset="-122"/>
                 <a:cs typeface="Calibri" pitchFamily="34" charset="-120"/>
               </a:rPr>
-              <a:t>Pchnięcie (push): nagła zmiana prędkości CoM → CP wychodzi z dozwolonej strefy → korekta kroku</a:t>
-            </a:r>
-            <a:endParaRPr lang="en-US" sz="1450" dirty="0"/>
-          </a:p>
-          <a:p>
-            <a:pPr marL="342900" indent="-342900">
+              <a:t>Pchnięcie (push): </a:t>
+            </a:r>
+            <a:r>
+              <a:rPr lang="en-US" sz="1500" dirty="0">
+                <a:solidFill>
+                  <a:srgbClr val="0D1B2A"/>
+                </a:solidFill>
+                <a:latin typeface="Calibri" pitchFamily="34" charset="0"/>
+                <a:ea typeface="Calibri" pitchFamily="34" charset="-122"/>
+                <a:cs typeface="Calibri" pitchFamily="34" charset="-120"/>
+              </a:rPr>
+              <a:t>nagła zmiana prędkości CoM → CP wychodzi z dozwolonej strefy → korekta kroku</a:t>
+            </a:r>
+            <a:endParaRPr lang="en-US" sz="1500" dirty="0"/>
+          </a:p>
+          <a:p>
+            <a:pPr marL="180000" indent="-180000">
               <a:spcAft>
                 <a:spcPts val="900"/>
               </a:spcAft>
@@ -6675,7 +6684,7 @@
               <a:buChar char="•"/>
             </a:pPr>
             <a:r>
-              <a:rPr lang="en-US" sz="1450" dirty="0">
+              <a:rPr lang="en-US" sz="1500" b="1" dirty="0">
                 <a:solidFill>
                   <a:srgbClr val="0D1B2A"/>
                 </a:solidFill>
@@ -6683,12 +6692,23 @@
                 <a:ea typeface="Calibri" pitchFamily="34" charset="-122"/>
                 <a:cs typeface="Calibri" pitchFamily="34" charset="-120"/>
               </a:rPr>
-              <a:t>Mechanizm ankle strategy: regulacja momentu w stawie skokowym (małe zakłócenia ≤ ~5 N·s)</a:t>
-            </a:r>
-            <a:endParaRPr lang="en-US" sz="1450" dirty="0"/>
-          </a:p>
-          <a:p>
-            <a:pPr marL="342900" indent="-342900">
+              <a:t>Mechanizm ankle strategy</a:t>
+            </a:r>
+            <a:r>
+              <a:rPr lang="en-US" sz="1500" dirty="0">
+                <a:solidFill>
+                  <a:srgbClr val="0D1B2A"/>
+                </a:solidFill>
+                <a:latin typeface="Calibri" pitchFamily="34" charset="0"/>
+                <a:ea typeface="Calibri" pitchFamily="34" charset="-122"/>
+                <a:cs typeface="Calibri" pitchFamily="34" charset="-120"/>
+              </a:rPr>
+              <a:t>: regulacja momentu w stawie skokowym (małe zakłócenia ≤ ~5 N·s)</a:t>
+            </a:r>
+            <a:endParaRPr lang="en-US" sz="1500" dirty="0"/>
+          </a:p>
+          <a:p>
+            <a:pPr marL="180000" indent="-180000">
               <a:spcAft>
                 <a:spcPts val="900"/>
               </a:spcAft>
@@ -6696,7 +6716,7 @@
               <a:buChar char="•"/>
             </a:pPr>
             <a:r>
-              <a:rPr lang="en-US" sz="1450" dirty="0">
+              <a:rPr lang="en-US" sz="1500" b="1" dirty="0">
                 <a:solidFill>
                   <a:srgbClr val="0D1B2A"/>
                 </a:solidFill>
@@ -6704,12 +6724,23 @@
                 <a:ea typeface="Calibri" pitchFamily="34" charset="-122"/>
                 <a:cs typeface="Calibri" pitchFamily="34" charset="-120"/>
               </a:rPr>
-              <a:t>Mechanizm hip strategy: ruch tułowia kompensuje przesunięcie CP (średnie zakłócenia)</a:t>
-            </a:r>
-            <a:endParaRPr lang="en-US" sz="1450" dirty="0"/>
-          </a:p>
-          <a:p>
-            <a:pPr marL="342900" indent="-342900">
+              <a:t>Mechanizm hip strategy</a:t>
+            </a:r>
+            <a:r>
+              <a:rPr lang="en-US" sz="1500" dirty="0">
+                <a:solidFill>
+                  <a:srgbClr val="0D1B2A"/>
+                </a:solidFill>
+                <a:latin typeface="Calibri" pitchFamily="34" charset="0"/>
+                <a:ea typeface="Calibri" pitchFamily="34" charset="-122"/>
+                <a:cs typeface="Calibri" pitchFamily="34" charset="-120"/>
+              </a:rPr>
+              <a:t>: ruch tułowia kompensuje przesunięcie CP (średnie zakłócenia)</a:t>
+            </a:r>
+            <a:endParaRPr lang="en-US" sz="1500" dirty="0"/>
+          </a:p>
+          <a:p>
+            <a:pPr marL="180000" indent="-180000">
               <a:spcAft>
                 <a:spcPts val="900"/>
               </a:spcAft>
@@ -6717,7 +6748,7 @@
               <a:buChar char="•"/>
             </a:pPr>
             <a:r>
-              <a:rPr lang="en-US" sz="1450" dirty="0">
+              <a:rPr lang="en-US" sz="1500" b="1" dirty="0">
                 <a:solidFill>
                   <a:srgbClr val="0D1B2A"/>
                 </a:solidFill>
@@ -6725,12 +6756,23 @@
                 <a:ea typeface="Calibri" pitchFamily="34" charset="-122"/>
                 <a:cs typeface="Calibri" pitchFamily="34" charset="-120"/>
               </a:rPr>
-              <a:t>Mechanizm stepping strategy: postawienie dodatkowego kroku w kierunku CP (duże zakłócenia)</a:t>
-            </a:r>
-            <a:endParaRPr lang="en-US" sz="1450" dirty="0"/>
-          </a:p>
-          <a:p>
-            <a:pPr marL="342900" indent="-342900">
+              <a:t>Mechanizm stepping strategy</a:t>
+            </a:r>
+            <a:r>
+              <a:rPr lang="en-US" sz="1500" dirty="0">
+                <a:solidFill>
+                  <a:srgbClr val="0D1B2A"/>
+                </a:solidFill>
+                <a:latin typeface="Calibri" pitchFamily="34" charset="0"/>
+                <a:ea typeface="Calibri" pitchFamily="34" charset="-122"/>
+                <a:cs typeface="Calibri" pitchFamily="34" charset="-120"/>
+              </a:rPr>
+              <a:t>: postawienie dodatkowego kroku w kierunku CP (duże zakłócenia)</a:t>
+            </a:r>
+            <a:endParaRPr lang="en-US" sz="1500" dirty="0"/>
+          </a:p>
+          <a:p>
+            <a:pPr marL="180000" indent="-180000">
               <a:spcAft>
                 <a:spcPts val="900"/>
               </a:spcAft>
@@ -6738,7 +6780,7 @@
               <a:buChar char="•"/>
             </a:pPr>
             <a:r>
-              <a:rPr lang="en-US" sz="1450" dirty="0">
+              <a:rPr lang="en-US" sz="1500" b="1" dirty="0">
                 <a:solidFill>
                   <a:srgbClr val="0D1B2A"/>
                 </a:solidFill>
@@ -6746,12 +6788,23 @@
                 <a:ea typeface="Calibri" pitchFamily="34" charset="-122"/>
                 <a:cs typeface="Calibri" pitchFamily="34" charset="-120"/>
               </a:rPr>
-              <a:t>Poślizg stopy: detekcja z czujnika F/T – nagły skok siły bocznej → reset estymatora i replan</a:t>
-            </a:r>
-            <a:endParaRPr lang="en-US" sz="1450" dirty="0"/>
-          </a:p>
-          <a:p>
-            <a:pPr marL="342900" indent="-342900">
+              <a:t>Poślizg stopy</a:t>
+            </a:r>
+            <a:r>
+              <a:rPr lang="en-US" sz="1500" dirty="0">
+                <a:solidFill>
+                  <a:srgbClr val="0D1B2A"/>
+                </a:solidFill>
+                <a:latin typeface="Calibri" pitchFamily="34" charset="0"/>
+                <a:ea typeface="Calibri" pitchFamily="34" charset="-122"/>
+                <a:cs typeface="Calibri" pitchFamily="34" charset="-120"/>
+              </a:rPr>
+              <a:t>: detekcja z czujnika F/T – nagły skok siły bocznej → reset estymatora i replan</a:t>
+            </a:r>
+            <a:endParaRPr lang="en-US" sz="1500" dirty="0"/>
+          </a:p>
+          <a:p>
+            <a:pPr marL="180000" indent="-180000">
               <a:spcAft>
                 <a:spcPts val="900"/>
               </a:spcAft>
@@ -6759,7 +6812,7 @@
               <a:buChar char="•"/>
             </a:pPr>
             <a:r>
-              <a:rPr lang="en-US" sz="1450" dirty="0">
+              <a:rPr lang="en-US" sz="1500" b="1" dirty="0">
                 <a:solidFill>
                   <a:srgbClr val="0D1B2A"/>
                 </a:solidFill>
@@ -6767,12 +6820,23 @@
                 <a:ea typeface="Calibri" pitchFamily="34" charset="-122"/>
                 <a:cs typeface="Calibri" pitchFamily="34" charset="-120"/>
               </a:rPr>
-              <a:t>Utrata kontaktu: siła normalna F_z &lt; 10 N → przejście do trybu push-recovery</a:t>
-            </a:r>
-            <a:endParaRPr lang="en-US" sz="1450" dirty="0"/>
-          </a:p>
-          <a:p>
-            <a:pPr marL="342900" indent="-342900">
+              <a:t>Utrata kontaktu</a:t>
+            </a:r>
+            <a:r>
+              <a:rPr lang="en-US" sz="1500" dirty="0">
+                <a:solidFill>
+                  <a:srgbClr val="0D1B2A"/>
+                </a:solidFill>
+                <a:latin typeface="Calibri" pitchFamily="34" charset="0"/>
+                <a:ea typeface="Calibri" pitchFamily="34" charset="-122"/>
+                <a:cs typeface="Calibri" pitchFamily="34" charset="-120"/>
+              </a:rPr>
+              <a:t>: siła normalna F_z &lt; 10 N → przejście do trybu push-recovery</a:t>
+            </a:r>
+            <a:endParaRPr lang="en-US" sz="1500" dirty="0"/>
+          </a:p>
+          <a:p>
+            <a:pPr marL="180000" indent="-180000">
               <a:spcAft>
                 <a:spcPts val="900"/>
               </a:spcAft>
@@ -6780,7 +6844,7 @@
               <a:buChar char="•"/>
             </a:pPr>
             <a:r>
-              <a:rPr lang="en-US" sz="1450" dirty="0">
+              <a:rPr lang="en-US" sz="1500" b="1" dirty="0">
                 <a:solidFill>
                   <a:srgbClr val="0D1B2A"/>
                 </a:solidFill>
@@ -6788,9 +6852,20 @@
                 <a:ea typeface="Calibri" pitchFamily="34" charset="-122"/>
                 <a:cs typeface="Calibri" pitchFamily="34" charset="-120"/>
               </a:rPr>
-              <a:t>Opóźniona detekcja przeszkody: aktywacja hamowania awaryjnego i replan lokalny (10 ms)</a:t>
-            </a:r>
-            <a:endParaRPr lang="en-US" sz="1450" dirty="0"/>
+              <a:t>Opóźniona detekcja przeszkody</a:t>
+            </a:r>
+            <a:r>
+              <a:rPr lang="en-US" sz="1500" dirty="0">
+                <a:solidFill>
+                  <a:srgbClr val="0D1B2A"/>
+                </a:solidFill>
+                <a:latin typeface="Calibri" pitchFamily="34" charset="0"/>
+                <a:ea typeface="Calibri" pitchFamily="34" charset="-122"/>
+                <a:cs typeface="Calibri" pitchFamily="34" charset="-120"/>
+              </a:rPr>
+              <a:t>: aktywacja hamowania awaryjnego i replan lokalny (10 ms)</a:t>
+            </a:r>
+            <a:endParaRPr lang="en-US" sz="1500" dirty="0"/>
           </a:p>
         </p:txBody>
       </p:sp>
@@ -6997,7 +7072,7 @@
         <p:spPr>
           <a:xfrm>
             <a:off x="274320" y="1097280"/>
-            <a:ext cx="8595360" cy="3749040"/>
+            <a:ext cx="8595360" cy="2552700"/>
           </a:xfrm>
           <a:prstGeom prst="rect">
             <a:avLst/>
@@ -7028,8 +7103,8 @@
         </p:nvSpPr>
         <p:spPr>
           <a:xfrm>
-            <a:off x="457200" y="1188720"/>
-            <a:ext cx="8229600" cy="3520440"/>
+            <a:off x="289560" y="1150620"/>
+            <a:ext cx="8542020" cy="2213871"/>
           </a:xfrm>
           <a:prstGeom prst="rect">
             <a:avLst/>
@@ -7038,17 +7113,30 @@
           <a:ln/>
         </p:spPr>
         <p:txBody>
-          <a:bodyPr wrap="square" lIns="127000" tIns="127000" rIns="127000" bIns="127000" rtlCol="0" anchor="t"/>
+          <a:bodyPr wrap="square" lIns="127000" tIns="36000" rIns="127000" bIns="0" rtlCol="0" anchor="t">
+            <a:spAutoFit/>
+          </a:bodyPr>
           <a:lstStyle/>
           <a:p>
-            <a:pPr marL="342900" indent="-342900">
+            <a:pPr marL="144000" indent="-144000">
               <a:spcAft>
-                <a:spcPts val="900"/>
+                <a:spcPts val="800"/>
               </a:spcAft>
               <a:buSzPct val="100000"/>
               <a:buChar char="•"/>
             </a:pPr>
             <a:r>
+              <a:rPr lang="en-US" sz="1450" b="1" dirty="0">
+                <a:solidFill>
+                  <a:srgbClr val="0D1B2A"/>
+                </a:solidFill>
+                <a:latin typeface="Calibri" pitchFamily="34" charset="0"/>
+                <a:ea typeface="Calibri" pitchFamily="34" charset="-122"/>
+                <a:cs typeface="Calibri" pitchFamily="34" charset="-120"/>
+              </a:rPr>
+              <a:t>Reguła nadrzędna</a:t>
+            </a:r>
+            <a:r>
               <a:rPr lang="en-US" sz="1450" dirty="0">
                 <a:solidFill>
                   <a:srgbClr val="0D1B2A"/>
@@ -7057,19 +7145,74 @@
                 <a:ea typeface="Calibri" pitchFamily="34" charset="-122"/>
                 <a:cs typeface="Calibri" pitchFamily="34" charset="-120"/>
               </a:rPr>
-              <a:t>Reguła nadrzędna: decyzja o ruchu jest akceptowana tylko wtedy, gdy predykcja ZMP pozostaje w wieloboku</a:t>
+              <a:t>: decyzja o ruchu jest akceptowana tylko wtedy, gdy predykcja ZMP pozostaje w wieloboku</a:t>
             </a:r>
             <a:endParaRPr lang="en-US" sz="1450" dirty="0"/>
           </a:p>
           <a:p>
-            <a:pPr marL="342900" indent="-342900">
+            <a:pPr marL="144000" indent="-144000">
               <a:spcAft>
-                <a:spcPts val="900"/>
+                <a:spcPts val="800"/>
               </a:spcAft>
               <a:buSzPct val="100000"/>
               <a:buChar char="•"/>
             </a:pPr>
             <a:r>
+              <a:rPr lang="en-US" sz="1450" b="1" dirty="0" err="1">
+                <a:solidFill>
+                  <a:srgbClr val="0D1B2A"/>
+                </a:solidFill>
+                <a:latin typeface="Calibri" pitchFamily="34" charset="0"/>
+                <a:ea typeface="Calibri" pitchFamily="34" charset="-122"/>
+                <a:cs typeface="Calibri" pitchFamily="34" charset="-120"/>
+              </a:rPr>
+              <a:t>Sprzężenie</a:t>
+            </a:r>
+            <a:r>
+              <a:rPr lang="en-US" sz="1450" b="1" dirty="0">
+                <a:solidFill>
+                  <a:srgbClr val="0D1B2A"/>
+                </a:solidFill>
+                <a:latin typeface="Calibri" pitchFamily="34" charset="0"/>
+                <a:ea typeface="Calibri" pitchFamily="34" charset="-122"/>
+                <a:cs typeface="Calibri" pitchFamily="34" charset="-120"/>
+              </a:rPr>
+              <a:t> </a:t>
+            </a:r>
+            <a:r>
+              <a:rPr lang="en-US" sz="1450" b="1" dirty="0" err="1" smtClean="0">
+                <a:solidFill>
+                  <a:srgbClr val="0D1B2A"/>
+                </a:solidFill>
+                <a:latin typeface="Calibri" pitchFamily="34" charset="0"/>
+                <a:ea typeface="Calibri" pitchFamily="34" charset="-122"/>
+                <a:cs typeface="Calibri" pitchFamily="34" charset="-120"/>
+              </a:rPr>
+              <a:t>planista</a:t>
+            </a:r>
+            <a:r>
+              <a:rPr lang="pl-PL" sz="1450" b="1" dirty="0" smtClean="0">
+                <a:solidFill>
+                  <a:srgbClr val="0D1B2A"/>
+                </a:solidFill>
+                <a:latin typeface="Calibri" pitchFamily="34" charset="0"/>
+                <a:ea typeface="Calibri" pitchFamily="34" charset="-122"/>
+                <a:cs typeface="Calibri" pitchFamily="34" charset="-120"/>
+              </a:rPr>
+              <a:t>-</a:t>
+            </a:r>
+            <a:r>
+              <a:rPr lang="en-US" sz="1450" b="1" dirty="0" err="1" smtClean="0">
+                <a:solidFill>
+                  <a:srgbClr val="0D1B2A"/>
+                </a:solidFill>
+                <a:latin typeface="Calibri" pitchFamily="34" charset="0"/>
+                <a:ea typeface="Calibri" pitchFamily="34" charset="-122"/>
+                <a:cs typeface="Calibri" pitchFamily="34" charset="-120"/>
+              </a:rPr>
+              <a:t>kontroler</a:t>
+            </a:r>
+            <a:r>
               <a:rPr lang="en-US" sz="1450" dirty="0">
                 <a:solidFill>
                   <a:srgbClr val="0D1B2A"/>
@@ -7078,19 +7221,85 @@
                 <a:ea typeface="Calibri" pitchFamily="34" charset="-122"/>
                 <a:cs typeface="Calibri" pitchFamily="34" charset="-120"/>
               </a:rPr>
-              <a:t>Sprzężenie planista–kontroler: planista kroków przekazuje cele, kontroler zgłasza aktualny margines</a:t>
+              <a:t>: planista kroków przekazuje cele, kontroler zgłasza aktualny margines</a:t>
             </a:r>
             <a:endParaRPr lang="en-US" sz="1450" dirty="0"/>
           </a:p>
           <a:p>
-            <a:pPr marL="342900" indent="-342900">
+            <a:pPr marL="144000" indent="-144000">
               <a:spcAft>
-                <a:spcPts val="900"/>
+                <a:spcPts val="800"/>
               </a:spcAft>
               <a:buSzPct val="100000"/>
               <a:buChar char="•"/>
             </a:pPr>
             <a:r>
+              <a:rPr lang="en-US" sz="1450" b="1" dirty="0" err="1">
+                <a:solidFill>
+                  <a:srgbClr val="0D1B2A"/>
+                </a:solidFill>
+                <a:latin typeface="Calibri" pitchFamily="34" charset="0"/>
+                <a:ea typeface="Calibri" pitchFamily="34" charset="-122"/>
+                <a:cs typeface="Calibri" pitchFamily="34" charset="-120"/>
+              </a:rPr>
+              <a:t>Prędkość</a:t>
+            </a:r>
+            <a:r>
+              <a:rPr lang="en-US" sz="1450" b="1" dirty="0">
+                <a:solidFill>
+                  <a:srgbClr val="0D1B2A"/>
+                </a:solidFill>
+                <a:latin typeface="Calibri" pitchFamily="34" charset="0"/>
+                <a:ea typeface="Calibri" pitchFamily="34" charset="-122"/>
+                <a:cs typeface="Calibri" pitchFamily="34" charset="-120"/>
+              </a:rPr>
+              <a:t> </a:t>
+            </a:r>
+            <a:r>
+              <a:rPr lang="en-US" sz="1450" b="1" dirty="0" err="1" smtClean="0">
+                <a:solidFill>
+                  <a:srgbClr val="0D1B2A"/>
+                </a:solidFill>
+                <a:latin typeface="Calibri" pitchFamily="34" charset="0"/>
+                <a:ea typeface="Calibri" pitchFamily="34" charset="-122"/>
+                <a:cs typeface="Calibri" pitchFamily="34" charset="-120"/>
+              </a:rPr>
+              <a:t>chodu</a:t>
+            </a:r>
+            <a:r>
+              <a:rPr lang="pl-PL" sz="1450" b="1" dirty="0" smtClean="0">
+                <a:solidFill>
+                  <a:srgbClr val="0D1B2A"/>
+                </a:solidFill>
+                <a:latin typeface="Calibri" pitchFamily="34" charset="0"/>
+                <a:ea typeface="Calibri" pitchFamily="34" charset="-122"/>
+                <a:cs typeface="Calibri" pitchFamily="34" charset="-120"/>
+              </a:rPr>
+              <a:t>,</a:t>
+            </a:r>
+            <a:r>
+              <a:rPr lang="en-US" sz="1450" b="1" dirty="0" smtClean="0">
+                <a:solidFill>
+                  <a:srgbClr val="0D1B2A"/>
+                </a:solidFill>
+                <a:latin typeface="Calibri" pitchFamily="34" charset="0"/>
+                <a:ea typeface="Calibri" pitchFamily="34" charset="-122"/>
+                <a:cs typeface="Calibri" pitchFamily="34" charset="-120"/>
+              </a:rPr>
+              <a:t> </a:t>
+            </a:r>
+            <a:r>
+              <a:rPr lang="en-US" sz="1450" b="1" dirty="0">
+                <a:solidFill>
+                  <a:srgbClr val="0D1B2A"/>
+                </a:solidFill>
+                <a:latin typeface="Calibri" pitchFamily="34" charset="0"/>
+                <a:ea typeface="Calibri" pitchFamily="34" charset="-122"/>
+                <a:cs typeface="Calibri" pitchFamily="34" charset="-120"/>
+              </a:rPr>
+              <a:t>a stabilność</a:t>
+            </a:r>
+            <a:r>
               <a:rPr lang="en-US" sz="1450" dirty="0">
                 <a:solidFill>
                   <a:srgbClr val="0D1B2A"/>
@@ -7099,19 +7308,30 @@
                 <a:ea typeface="Calibri" pitchFamily="34" charset="-122"/>
                 <a:cs typeface="Calibri" pitchFamily="34" charset="-120"/>
               </a:rPr>
-              <a:t>Prędkość chodu a stabilność: wyższa prędkość = mniejszy czas podwójnego podparcia = wyższe ryzyko</a:t>
+              <a:t>: wyższa prędkość = mniejszy czas podwójnego podparcia = wyższe ryzyko</a:t>
             </a:r>
             <a:endParaRPr lang="en-US" sz="1450" dirty="0"/>
           </a:p>
           <a:p>
-            <a:pPr marL="342900" indent="-342900">
+            <a:pPr marL="144000" indent="-144000">
               <a:spcAft>
-                <a:spcPts val="900"/>
+                <a:spcPts val="800"/>
               </a:spcAft>
               <a:buSzPct val="100000"/>
               <a:buChar char="•"/>
             </a:pPr>
             <a:r>
+              <a:rPr lang="en-US" sz="1450" b="1" dirty="0">
+                <a:solidFill>
+                  <a:srgbClr val="0D1B2A"/>
+                </a:solidFill>
+                <a:latin typeface="Calibri" pitchFamily="34" charset="0"/>
+                <a:ea typeface="Calibri" pitchFamily="34" charset="-122"/>
+                <a:cs typeface="Calibri" pitchFamily="34" charset="-120"/>
+              </a:rPr>
+              <a:t>Teren pochyły lub śliski</a:t>
+            </a:r>
+            <a:r>
               <a:rPr lang="en-US" sz="1450" dirty="0">
                 <a:solidFill>
                   <a:srgbClr val="0D1B2A"/>
@@ -7120,19 +7340,30 @@
                 <a:ea typeface="Calibri" pitchFamily="34" charset="-122"/>
                 <a:cs typeface="Calibri" pitchFamily="34" charset="-120"/>
               </a:rPr>
-              <a:t>Teren pochyły lub śliski: kontroler redukuje prędkość i wydłuża fazę podwójnego podparcia</a:t>
+              <a:t>: kontroler redukuje prędkość i wydłuża fazę podwójnego podparcia</a:t>
             </a:r>
             <a:endParaRPr lang="en-US" sz="1450" dirty="0"/>
           </a:p>
           <a:p>
-            <a:pPr marL="342900" indent="-342900">
+            <a:pPr marL="144000" indent="-144000">
               <a:spcAft>
-                <a:spcPts val="900"/>
+                <a:spcPts val="800"/>
               </a:spcAft>
               <a:buSzPct val="100000"/>
               <a:buChar char="•"/>
             </a:pPr>
             <a:r>
+              <a:rPr lang="en-US" sz="1450" b="1" dirty="0">
+                <a:solidFill>
+                  <a:srgbClr val="0D1B2A"/>
+                </a:solidFill>
+                <a:latin typeface="Calibri" pitchFamily="34" charset="0"/>
+                <a:ea typeface="Calibri" pitchFamily="34" charset="-122"/>
+                <a:cs typeface="Calibri" pitchFamily="34" charset="-120"/>
+              </a:rPr>
+              <a:t>Sygnał margines stabilności</a:t>
+            </a:r>
+            <a:r>
               <a:rPr lang="en-US" sz="1450" dirty="0">
                 <a:solidFill>
                   <a:srgbClr val="0D1B2A"/>
@@ -7141,19 +7372,30 @@
                 <a:ea typeface="Calibri" pitchFamily="34" charset="-122"/>
                 <a:cs typeface="Calibri" pitchFamily="34" charset="-120"/>
               </a:rPr>
-              <a:t>Sygnał margines stabilności: gdy SM &lt; threshold → planista obniża prędkość lub zatrzymuje robota</a:t>
+              <a:t>: gdy SM &lt; threshold → planista obniża prędkość lub zatrzymuje robota</a:t>
             </a:r>
             <a:endParaRPr lang="en-US" sz="1450" dirty="0"/>
           </a:p>
           <a:p>
-            <a:pPr marL="342900" indent="-342900">
+            <a:pPr marL="144000" indent="-144000">
               <a:spcAft>
-                <a:spcPts val="900"/>
+                <a:spcPts val="800"/>
               </a:spcAft>
               <a:buSzPct val="100000"/>
               <a:buChar char="•"/>
             </a:pPr>
             <a:r>
+              <a:rPr lang="en-US" sz="1450" b="1" dirty="0">
+                <a:solidFill>
+                  <a:srgbClr val="0D1B2A"/>
+                </a:solidFill>
+                <a:latin typeface="Calibri" pitchFamily="34" charset="0"/>
+                <a:ea typeface="Calibri" pitchFamily="34" charset="-122"/>
+                <a:cs typeface="Calibri" pitchFamily="34" charset="-120"/>
+              </a:rPr>
+              <a:t>Priorytet</a:t>
+            </a:r>
+            <a:r>
               <a:rPr lang="en-US" sz="1450" dirty="0">
                 <a:solidFill>
                   <a:srgbClr val="0D1B2A"/>
@@ -7162,19 +7404,30 @@
                 <a:ea typeface="Calibri" pitchFamily="34" charset="-122"/>
                 <a:cs typeface="Calibri" pitchFamily="34" charset="-120"/>
               </a:rPr>
-              <a:t>Priorytet: stabilność &gt; plan ruchu &gt; optymalizacja energii &gt; czas misji</a:t>
+              <a:t>: stabilność &gt; plan ruchu &gt; optymalizacja energii &gt; czas misji</a:t>
             </a:r>
             <a:endParaRPr lang="en-US" sz="1450" dirty="0"/>
           </a:p>
           <a:p>
-            <a:pPr marL="342900" indent="-342900">
+            <a:pPr marL="144000" indent="-144000">
               <a:spcAft>
-                <a:spcPts val="900"/>
+                <a:spcPts val="800"/>
               </a:spcAft>
               <a:buSzPct val="100000"/>
               <a:buChar char="•"/>
             </a:pPr>
             <a:r>
+              <a:rPr lang="en-US" sz="1450" b="1" dirty="0">
+                <a:solidFill>
+                  <a:srgbClr val="0D1B2A"/>
+                </a:solidFill>
+                <a:latin typeface="Calibri" pitchFamily="34" charset="0"/>
+                <a:ea typeface="Calibri" pitchFamily="34" charset="-122"/>
+                <a:cs typeface="Calibri" pitchFamily="34" charset="-120"/>
+              </a:rPr>
+              <a:t>Architektura</a:t>
+            </a:r>
+            <a:r>
               <a:rPr lang="en-US" sz="1450" dirty="0">
                 <a:solidFill>
                   <a:srgbClr val="0D1B2A"/>
@@ -7183,7 +7436,7 @@
                 <a:ea typeface="Calibri" pitchFamily="34" charset="-122"/>
                 <a:cs typeface="Calibri" pitchFamily="34" charset="-120"/>
               </a:rPr>
-              <a:t>Architektura: stability monitor działa w pętli 1 kHz i może vetować komendy planisty lokalnego</a:t>
+              <a:t>: stability monitor działa w pętli 1 kHz i może vetować komendy planisty lokalnego</a:t>
             </a:r>
             <a:endParaRPr lang="en-US" sz="1450" dirty="0"/>
           </a:p>
@@ -7288,6 +7541,13 @@
           </a:prstGeom>
           <a:noFill/>
           <a:ln/>
+          <a:effectLst>
+            <a:outerShdw blurRad="50800" dist="38100" dir="2700000" algn="tl" rotWithShape="0">
+              <a:prstClr val="black">
+                <a:alpha val="40000"/>
+              </a:prstClr>
+            </a:outerShdw>
+          </a:effectLst>
         </p:spPr>
         <p:txBody>
           <a:bodyPr wrap="square" lIns="0" tIns="0" rIns="0" bIns="0" rtlCol="0" anchor="ctr"/>
@@ -7328,14 +7588,21 @@
             <a:avLst/>
           </a:prstGeom>
           <a:solidFill>
-            <a:srgbClr val="0D1B2A"/>
+            <a:schemeClr val="bg1"/>
           </a:solidFill>
-          <a:ln w="25400">
+          <a:ln w="57150">
             <a:solidFill>
               <a:srgbClr val="6366F1"/>
             </a:solidFill>
             <a:prstDash val="solid"/>
           </a:ln>
+          <a:effectLst>
+            <a:outerShdw blurRad="50800" dist="38100" dir="2700000" algn="tl" rotWithShape="0">
+              <a:prstClr val="black">
+                <a:alpha val="40000"/>
+              </a:prstClr>
+            </a:outerShdw>
+          </a:effectLst>
         </p:spPr>
       </p:sp>
       <p:pic>
@@ -7480,6 +7747,13 @@
             </a:solidFill>
             <a:prstDash val="solid"/>
           </a:ln>
+          <a:effectLst>
+            <a:outerShdw blurRad="50800" dist="38100" dir="2700000" algn="tl" rotWithShape="0">
+              <a:prstClr val="black">
+                <a:alpha val="40000"/>
+              </a:prstClr>
+            </a:outerShdw>
+          </a:effectLst>
         </p:spPr>
       </p:sp>
       <p:sp>
@@ -7691,7 +7965,7 @@
         <p:spPr>
           <a:xfrm>
             <a:off x="274320" y="1143000"/>
-            <a:ext cx="2651760" cy="3749040"/>
+            <a:ext cx="2651760" cy="2202180"/>
           </a:xfrm>
           <a:prstGeom prst="rect">
             <a:avLst/>
@@ -7764,7 +8038,7 @@
               <a:buNone/>
             </a:pPr>
             <a:r>
-              <a:rPr lang="en-US" sz="1250" b="1" dirty="0">
+              <a:rPr lang="en-US" sz="1400" b="1" dirty="0">
                 <a:solidFill>
                   <a:srgbClr val="FFFFFF"/>
                 </a:solidFill>
@@ -7774,7 +8048,7 @@
               </a:rPr>
               <a:t>Warstwa wysoka (High-level)</a:t>
             </a:r>
-            <a:endParaRPr lang="en-US" sz="1250" dirty="0"/>
+            <a:endParaRPr lang="en-US" sz="1400" dirty="0"/>
           </a:p>
         </p:txBody>
       </p:sp>
@@ -7787,7 +8061,7 @@
         <p:spPr>
           <a:xfrm>
             <a:off x="384048" y="1627632"/>
-            <a:ext cx="2432304" cy="3154680"/>
+            <a:ext cx="2432304" cy="1472198"/>
           </a:xfrm>
           <a:prstGeom prst="rect">
             <a:avLst/>
@@ -7796,7 +8070,9 @@
           <a:ln/>
         </p:spPr>
         <p:txBody>
-          <a:bodyPr wrap="square" lIns="50800" tIns="76200" rIns="50800" bIns="50800" rtlCol="0" anchor="t"/>
+          <a:bodyPr wrap="square" lIns="50800" tIns="0" rIns="50800" bIns="0" rtlCol="0" anchor="t">
+            <a:spAutoFit/>
+          </a:bodyPr>
           <a:lstStyle/>
           <a:p>
             <a:pPr marL="342900" indent="-342900">
@@ -7914,7 +8190,7 @@
         <p:spPr>
           <a:xfrm>
             <a:off x="3154680" y="1143000"/>
-            <a:ext cx="2651760" cy="3749040"/>
+            <a:ext cx="2651760" cy="2202180"/>
           </a:xfrm>
           <a:prstGeom prst="rect">
             <a:avLst/>
@@ -7987,7 +8263,7 @@
               <a:buNone/>
             </a:pPr>
             <a:r>
-              <a:rPr lang="en-US" sz="1250" b="1" dirty="0">
+              <a:rPr lang="en-US" sz="1400" b="1" dirty="0">
                 <a:solidFill>
                   <a:srgbClr val="FFFFFF"/>
                 </a:solidFill>
@@ -7997,7 +8273,7 @@
               </a:rPr>
               <a:t>Warstwa środkowa (WBC)</a:t>
             </a:r>
-            <a:endParaRPr lang="en-US" sz="1250" dirty="0"/>
+            <a:endParaRPr lang="en-US" sz="1400" dirty="0"/>
           </a:p>
         </p:txBody>
       </p:sp>
@@ -8010,7 +8286,7 @@
         <p:spPr>
           <a:xfrm>
             <a:off x="3264408" y="1627632"/>
-            <a:ext cx="2432304" cy="3154680"/>
+            <a:ext cx="2432304" cy="1472198"/>
           </a:xfrm>
           <a:prstGeom prst="rect">
             <a:avLst/>
@@ -8019,7 +8295,9 @@
           <a:ln/>
         </p:spPr>
         <p:txBody>
-          <a:bodyPr wrap="square" lIns="50800" tIns="76200" rIns="50800" bIns="50800" rtlCol="0" anchor="t"/>
+          <a:bodyPr wrap="square" lIns="50800" tIns="0" rIns="50800" bIns="0" rtlCol="0" anchor="t">
+            <a:spAutoFit/>
+          </a:bodyPr>
           <a:lstStyle/>
           <a:p>
             <a:pPr marL="342900" indent="-342900">
@@ -8137,7 +8415,7 @@
         <p:spPr>
           <a:xfrm>
             <a:off x="6035040" y="1143000"/>
-            <a:ext cx="2651760" cy="3749040"/>
+            <a:ext cx="2651760" cy="2202180"/>
           </a:xfrm>
           <a:prstGeom prst="rect">
             <a:avLst/>
@@ -8210,7 +8488,7 @@
               <a:buNone/>
             </a:pPr>
             <a:r>
-              <a:rPr lang="en-US" sz="1250" b="1" dirty="0">
+              <a:rPr lang="en-US" sz="1400" b="1" dirty="0">
                 <a:solidFill>
                   <a:srgbClr val="FFFFFF"/>
                 </a:solidFill>
@@ -8220,7 +8498,7 @@
               </a:rPr>
               <a:t>Warstwa niska (aktuator)</a:t>
             </a:r>
-            <a:endParaRPr lang="en-US" sz="1250" dirty="0"/>
+            <a:endParaRPr lang="en-US" sz="1400" dirty="0"/>
           </a:p>
         </p:txBody>
       </p:sp>
@@ -8233,7 +8511,7 @@
         <p:spPr>
           <a:xfrm>
             <a:off x="6144768" y="1627632"/>
-            <a:ext cx="2432304" cy="3154680"/>
+            <a:ext cx="2432304" cy="1472198"/>
           </a:xfrm>
           <a:prstGeom prst="rect">
             <a:avLst/>
@@ -8242,7 +8520,9 @@
           <a:ln/>
         </p:spPr>
         <p:txBody>
-          <a:bodyPr wrap="square" lIns="50800" tIns="76200" rIns="50800" bIns="50800" rtlCol="0" anchor="t"/>
+          <a:bodyPr wrap="square" lIns="50800" tIns="0" rIns="50800" bIns="0" rtlCol="0" anchor="t">
+            <a:spAutoFit/>
+          </a:bodyPr>
           <a:lstStyle/>
           <a:p>
             <a:pPr marL="342900" indent="-342900">
@@ -9490,7 +9770,7 @@
         <p:spPr>
           <a:xfrm>
             <a:off x="274320" y="1097280"/>
-            <a:ext cx="8595360" cy="3749040"/>
+            <a:ext cx="8595360" cy="2743200"/>
           </a:xfrm>
           <a:prstGeom prst="rect">
             <a:avLst/>
@@ -9521,8 +9801,8 @@
         </p:nvSpPr>
         <p:spPr>
           <a:xfrm>
-            <a:off x="457200" y="1188720"/>
-            <a:ext cx="8229600" cy="3520440"/>
+            <a:off x="358140" y="1188720"/>
+            <a:ext cx="8229600" cy="2452398"/>
           </a:xfrm>
           <a:prstGeom prst="rect">
             <a:avLst/>
@@ -9531,10 +9811,12 @@
           <a:ln/>
         </p:spPr>
         <p:txBody>
-          <a:bodyPr wrap="square" lIns="127000" tIns="127000" rIns="127000" bIns="127000" rtlCol="0" anchor="t"/>
+          <a:bodyPr wrap="square" lIns="127000" tIns="36000" rIns="127000" bIns="0" rtlCol="0" anchor="t">
+            <a:spAutoFit/>
+          </a:bodyPr>
           <a:lstStyle/>
           <a:p>
-            <a:pPr marL="342900" indent="-342900">
+            <a:pPr marL="180000" indent="-180000">
               <a:spcAft>
                 <a:spcPts val="900"/>
               </a:spcAft>
@@ -9542,7 +9824,7 @@
               <a:buChar char="•"/>
             </a:pPr>
             <a:r>
-              <a:rPr lang="en-US" sz="1450" b="1" dirty="0">
+              <a:rPr lang="en-US" sz="1600" b="1" dirty="0">
                 <a:solidFill>
                   <a:srgbClr val="0D1B2A"/>
                 </a:solidFill>
@@ -9553,7 +9835,7 @@
               <a:t>WBC</a:t>
             </a:r>
             <a:r>
-              <a:rPr lang="en-US" sz="1450" dirty="0">
+              <a:rPr lang="en-US" sz="1600" dirty="0">
                 <a:solidFill>
                   <a:srgbClr val="0D1B2A"/>
                 </a:solidFill>
@@ -9563,10 +9845,10 @@
               </a:rPr>
               <a:t> wyznacza optymalny wektor momentów τ dla wszystkich stawów jednocześnie</a:t>
             </a:r>
-            <a:endParaRPr lang="en-US" sz="1450" dirty="0"/>
-          </a:p>
-          <a:p>
-            <a:pPr marL="342900" indent="-342900">
+            <a:endParaRPr lang="en-US" sz="1600" dirty="0"/>
+          </a:p>
+          <a:p>
+            <a:pPr marL="180000" indent="-180000">
               <a:spcAft>
                 <a:spcPts val="900"/>
               </a:spcAft>
@@ -9574,7 +9856,7 @@
               <a:buChar char="•"/>
             </a:pPr>
             <a:r>
-              <a:rPr lang="en-US" sz="1450" b="1" dirty="0">
+              <a:rPr lang="en-US" sz="1600" b="1" dirty="0">
                 <a:solidFill>
                   <a:srgbClr val="0D1B2A"/>
                 </a:solidFill>
@@ -9585,7 +9867,7 @@
               <a:t>Formułowane jako QP </a:t>
             </a:r>
             <a:r>
-              <a:rPr lang="en-US" sz="1450" dirty="0">
+              <a:rPr lang="en-US" sz="1600" dirty="0">
                 <a:solidFill>
                   <a:srgbClr val="0D1B2A"/>
                 </a:solidFill>
@@ -9595,10 +9877,10 @@
               </a:rPr>
               <a:t>(Quadratic Programming): min ½·τᵀQτ  s.t.  Aτ ≤ b</a:t>
             </a:r>
-            <a:endParaRPr lang="en-US" sz="1450" dirty="0"/>
-          </a:p>
-          <a:p>
-            <a:pPr marL="342900" indent="-342900">
+            <a:endParaRPr lang="en-US" sz="1600" dirty="0"/>
+          </a:p>
+          <a:p>
+            <a:pPr marL="180000" indent="-180000">
               <a:spcAft>
                 <a:spcPts val="900"/>
               </a:spcAft>
@@ -9606,7 +9888,7 @@
               <a:buChar char="•"/>
             </a:pPr>
             <a:r>
-              <a:rPr lang="en-US" sz="1450" b="1" dirty="0">
+              <a:rPr lang="en-US" sz="1600" b="1" dirty="0">
                 <a:solidFill>
                   <a:srgbClr val="0D1B2A"/>
                 </a:solidFill>
@@ -9617,7 +9899,7 @@
               <a:t>Ograniczenia</a:t>
             </a:r>
             <a:r>
-              <a:rPr lang="en-US" sz="1450" dirty="0">
+              <a:rPr lang="en-US" sz="1600" dirty="0">
                 <a:solidFill>
                   <a:srgbClr val="0D1B2A"/>
                 </a:solidFill>
@@ -9627,10 +9909,10 @@
               </a:rPr>
               <a:t>: równania dynamiki, siły kontaktu, zasięgi stawów, ograniczenia ZMP</a:t>
             </a:r>
-            <a:endParaRPr lang="en-US" sz="1450" dirty="0"/>
-          </a:p>
-          <a:p>
-            <a:pPr marL="342900" indent="-342900">
+            <a:endParaRPr lang="en-US" sz="1600" dirty="0"/>
+          </a:p>
+          <a:p>
+            <a:pPr marL="180000" indent="-180000">
               <a:spcAft>
                 <a:spcPts val="900"/>
               </a:spcAft>
@@ -9638,7 +9920,7 @@
               <a:buChar char="•"/>
             </a:pPr>
             <a:r>
-              <a:rPr lang="en-US" sz="1450" b="1" dirty="0">
+              <a:rPr lang="en-US" sz="1600" b="1" dirty="0">
                 <a:solidFill>
                   <a:srgbClr val="0D1B2A"/>
                 </a:solidFill>
@@ -9649,7 +9931,7 @@
               <a:t>Hierarchia zadań</a:t>
             </a:r>
             <a:r>
-              <a:rPr lang="en-US" sz="1450" dirty="0">
+              <a:rPr lang="en-US" sz="1600" dirty="0">
                 <a:solidFill>
                   <a:srgbClr val="0D1B2A"/>
                 </a:solidFill>
@@ -9659,10 +9941,10 @@
               </a:rPr>
               <a:t>: każde zadanie ma macierz wagową; zadania niższe nie zakłócają wyższych</a:t>
             </a:r>
-            <a:endParaRPr lang="en-US" sz="1450" dirty="0"/>
-          </a:p>
-          <a:p>
-            <a:pPr marL="342900" indent="-342900">
+            <a:endParaRPr lang="en-US" sz="1600" dirty="0"/>
+          </a:p>
+          <a:p>
+            <a:pPr marL="180000" indent="-180000">
               <a:spcAft>
                 <a:spcPts val="900"/>
               </a:spcAft>
@@ -9670,7 +9952,7 @@
               <a:buChar char="•"/>
             </a:pPr>
             <a:r>
-              <a:rPr lang="en-US" sz="1450" b="1" dirty="0">
+              <a:rPr lang="en-US" sz="1600" b="1" dirty="0">
                 <a:solidFill>
                   <a:srgbClr val="0D1B2A"/>
                 </a:solidFill>
@@ -9681,7 +9963,7 @@
               <a:t>Null-space projection</a:t>
             </a:r>
             <a:r>
-              <a:rPr lang="en-US" sz="1450" dirty="0">
+              <a:rPr lang="en-US" sz="1600" dirty="0">
                 <a:solidFill>
                   <a:srgbClr val="0D1B2A"/>
                 </a:solidFill>
@@ -9691,10 +9973,10 @@
               </a:rPr>
               <a:t>: niższe priorytety realizowane w przestrzeni zerowej wyższych</a:t>
             </a:r>
-            <a:endParaRPr lang="en-US" sz="1450" dirty="0"/>
-          </a:p>
-          <a:p>
-            <a:pPr marL="342900" indent="-342900">
+            <a:endParaRPr lang="en-US" sz="1600" dirty="0"/>
+          </a:p>
+          <a:p>
+            <a:pPr marL="180000" indent="-180000">
               <a:spcAft>
                 <a:spcPts val="900"/>
               </a:spcAft>
@@ -9702,7 +9984,7 @@
               <a:buChar char="•"/>
             </a:pPr>
             <a:r>
-              <a:rPr lang="en-US" sz="1450" b="1" dirty="0">
+              <a:rPr lang="en-US" sz="1600" b="1" dirty="0">
                 <a:solidFill>
                   <a:srgbClr val="0D1B2A"/>
                 </a:solidFill>
@@ -9713,7 +9995,7 @@
               <a:t>Czas obliczeń</a:t>
             </a:r>
             <a:r>
-              <a:rPr lang="en-US" sz="1450" dirty="0">
+              <a:rPr lang="en-US" sz="1600" dirty="0">
                 <a:solidFill>
                   <a:srgbClr val="0D1B2A"/>
                 </a:solidFill>
@@ -9723,10 +10005,10 @@
               </a:rPr>
               <a:t>: solver OSQP lub qpOASES wyznacza rozwiązanie w ~1 ms na CPU embedded</a:t>
             </a:r>
-            <a:endParaRPr lang="en-US" sz="1450" dirty="0"/>
-          </a:p>
-          <a:p>
-            <a:pPr marL="342900" indent="-342900">
+            <a:endParaRPr lang="en-US" sz="1600" dirty="0"/>
+          </a:p>
+          <a:p>
+            <a:pPr marL="180000" indent="-180000">
               <a:spcAft>
                 <a:spcPts val="900"/>
               </a:spcAft>
@@ -9734,7 +10016,7 @@
               <a:buChar char="•"/>
             </a:pPr>
             <a:r>
-              <a:rPr lang="en-US" sz="1450" b="1" dirty="0">
+              <a:rPr lang="en-US" sz="1600" b="1" dirty="0">
                 <a:solidFill>
                   <a:srgbClr val="0D1B2A"/>
                 </a:solidFill>
@@ -9745,7 +10027,7 @@
               <a:t>Integracja z LIPM</a:t>
             </a:r>
             <a:r>
-              <a:rPr lang="en-US" sz="1450" dirty="0">
+              <a:rPr lang="en-US" sz="1600" dirty="0">
                 <a:solidFill>
                   <a:srgbClr val="0D1B2A"/>
                 </a:solidFill>
@@ -9755,7 +10037,7 @@
               </a:rPr>
               <a:t>: trajektoria CoM z modelu LIPM → WBC → momenty stawów</a:t>
             </a:r>
-            <a:endParaRPr lang="en-US" sz="1450" dirty="0"/>
+            <a:endParaRPr lang="en-US" sz="1600" dirty="0"/>
           </a:p>
         </p:txBody>
       </p:sp>
@@ -12555,7 +12837,7 @@
         <p:spPr>
           <a:xfrm>
             <a:off x="274320" y="1097280"/>
-            <a:ext cx="8595360" cy="3749040"/>
+            <a:ext cx="8595360" cy="2651760"/>
           </a:xfrm>
           <a:prstGeom prst="rect">
             <a:avLst/>
@@ -12586,8 +12868,8 @@
         </p:nvSpPr>
         <p:spPr>
           <a:xfrm>
-            <a:off x="457200" y="1188720"/>
-            <a:ext cx="8229600" cy="2903359"/>
+            <a:off x="289560" y="1135380"/>
+            <a:ext cx="8519160" cy="2467786"/>
           </a:xfrm>
           <a:prstGeom prst="rect">
             <a:avLst/>
@@ -12596,7 +12878,7 @@
           <a:ln/>
         </p:spPr>
         <p:txBody>
-          <a:bodyPr wrap="square" lIns="127000" tIns="127000" rIns="127000" bIns="127000" rtlCol="0" anchor="t">
+          <a:bodyPr wrap="square" lIns="127000" tIns="36000" rIns="127000" bIns="0" rtlCol="0" anchor="t">
             <a:spAutoFit/>
           </a:bodyPr>
           <a:lstStyle/>
@@ -12628,7 +12910,170 @@
                 <a:ea typeface="Calibri" pitchFamily="34" charset="-122"/>
                 <a:cs typeface="Calibri" pitchFamily="34" charset="-120"/>
               </a:rPr>
-              <a:t>: robot ma podążać za zadaną trajektorią (x_ref(t), y_ref(t), yaw_ref(t)) z minimalnym błędem</a:t>
+              <a:t>: robot ma podążać za zadaną trajektorią </a:t>
+            </a:r>
+            <a:r>
+              <a:rPr lang="en-US" sz="1400" dirty="0">
+                <a:solidFill>
+                  <a:srgbClr val="0D1B2A"/>
+                </a:solidFill>
+                <a:ea typeface="JetBrains Mono NL ExtraBold" panose="02000009000000000000" pitchFamily="49" charset="0"/>
+                <a:cs typeface="JetBrains Mono NL ExtraBold" panose="02000009000000000000" pitchFamily="49" charset="0"/>
+              </a:rPr>
+              <a:t>(</a:t>
+            </a:r>
+            <a:r>
+              <a:rPr lang="en-US" sz="1400" dirty="0" err="1" smtClean="0">
+                <a:solidFill>
+                  <a:srgbClr val="0D1B2A"/>
+                </a:solidFill>
+                <a:latin typeface="JetBrains Mono NL ExtraBold" panose="02000009000000000000" pitchFamily="49" charset="0"/>
+                <a:ea typeface="JetBrains Mono NL ExtraBold" panose="02000009000000000000" pitchFamily="49" charset="0"/>
+                <a:cs typeface="JetBrains Mono NL ExtraBold" panose="02000009000000000000" pitchFamily="49" charset="0"/>
+              </a:rPr>
+              <a:t>x</a:t>
+            </a:r>
+            <a:r>
+              <a:rPr lang="en-US" sz="1400" baseline="-25000" dirty="0" err="1" smtClean="0">
+                <a:solidFill>
+                  <a:srgbClr val="0D1B2A"/>
+                </a:solidFill>
+                <a:latin typeface="JetBrains Mono NL ExtraBold" panose="02000009000000000000" pitchFamily="49" charset="0"/>
+                <a:ea typeface="JetBrains Mono NL ExtraBold" panose="02000009000000000000" pitchFamily="49" charset="0"/>
+                <a:cs typeface="JetBrains Mono NL ExtraBold" panose="02000009000000000000" pitchFamily="49" charset="0"/>
+              </a:rPr>
+              <a:t>ref</a:t>
+            </a:r>
+            <a:r>
+              <a:rPr lang="en-US" sz="1400" dirty="0" smtClean="0">
+                <a:solidFill>
+                  <a:srgbClr val="0D1B2A"/>
+                </a:solidFill>
+                <a:latin typeface="JetBrains Mono NL ExtraBold" panose="02000009000000000000" pitchFamily="49" charset="0"/>
+                <a:ea typeface="JetBrains Mono NL ExtraBold" panose="02000009000000000000" pitchFamily="49" charset="0"/>
+                <a:cs typeface="JetBrains Mono NL ExtraBold" panose="02000009000000000000" pitchFamily="49" charset="0"/>
+              </a:rPr>
+              <a:t>(t</a:t>
+            </a:r>
+            <a:r>
+              <a:rPr lang="en-US" sz="1400" dirty="0">
+                <a:solidFill>
+                  <a:srgbClr val="0D1B2A"/>
+                </a:solidFill>
+                <a:latin typeface="JetBrains Mono NL ExtraBold" panose="02000009000000000000" pitchFamily="49" charset="0"/>
+                <a:ea typeface="JetBrains Mono NL ExtraBold" panose="02000009000000000000" pitchFamily="49" charset="0"/>
+                <a:cs typeface="JetBrains Mono NL ExtraBold" panose="02000009000000000000" pitchFamily="49" charset="0"/>
+              </a:rPr>
+              <a:t>), </a:t>
+            </a:r>
+            <a:r>
+              <a:rPr lang="en-US" sz="1400" dirty="0" err="1" smtClean="0">
+                <a:solidFill>
+                  <a:srgbClr val="0D1B2A"/>
+                </a:solidFill>
+                <a:latin typeface="JetBrains Mono NL ExtraBold" panose="02000009000000000000" pitchFamily="49" charset="0"/>
+                <a:ea typeface="JetBrains Mono NL ExtraBold" panose="02000009000000000000" pitchFamily="49" charset="0"/>
+                <a:cs typeface="JetBrains Mono NL ExtraBold" panose="02000009000000000000" pitchFamily="49" charset="0"/>
+              </a:rPr>
+              <a:t>y</a:t>
+            </a:r>
+            <a:r>
+              <a:rPr lang="en-US" sz="1400" baseline="-25000" dirty="0" err="1" smtClean="0">
+                <a:solidFill>
+                  <a:srgbClr val="0D1B2A"/>
+                </a:solidFill>
+                <a:latin typeface="JetBrains Mono NL ExtraBold" panose="02000009000000000000" pitchFamily="49" charset="0"/>
+                <a:ea typeface="JetBrains Mono NL ExtraBold" panose="02000009000000000000" pitchFamily="49" charset="0"/>
+                <a:cs typeface="JetBrains Mono NL ExtraBold" panose="02000009000000000000" pitchFamily="49" charset="0"/>
+              </a:rPr>
+              <a:t>ref</a:t>
+            </a:r>
+            <a:r>
+              <a:rPr lang="en-US" sz="1400" dirty="0" smtClean="0">
+                <a:solidFill>
+                  <a:srgbClr val="0D1B2A"/>
+                </a:solidFill>
+                <a:latin typeface="JetBrains Mono NL ExtraBold" panose="02000009000000000000" pitchFamily="49" charset="0"/>
+                <a:ea typeface="JetBrains Mono NL ExtraBold" panose="02000009000000000000" pitchFamily="49" charset="0"/>
+                <a:cs typeface="JetBrains Mono NL ExtraBold" panose="02000009000000000000" pitchFamily="49" charset="0"/>
+              </a:rPr>
+              <a:t>(t</a:t>
+            </a:r>
+            <a:r>
+              <a:rPr lang="en-US" sz="1400" dirty="0">
+                <a:solidFill>
+                  <a:srgbClr val="0D1B2A"/>
+                </a:solidFill>
+                <a:latin typeface="JetBrains Mono NL ExtraBold" panose="02000009000000000000" pitchFamily="49" charset="0"/>
+                <a:ea typeface="JetBrains Mono NL ExtraBold" panose="02000009000000000000" pitchFamily="49" charset="0"/>
+                <a:cs typeface="JetBrains Mono NL ExtraBold" panose="02000009000000000000" pitchFamily="49" charset="0"/>
+              </a:rPr>
+              <a:t>), </a:t>
+            </a:r>
+            <a:r>
+              <a:rPr lang="en-US" sz="1400" dirty="0" err="1" smtClean="0">
+                <a:solidFill>
+                  <a:srgbClr val="0D1B2A"/>
+                </a:solidFill>
+                <a:latin typeface="JetBrains Mono NL ExtraBold" panose="02000009000000000000" pitchFamily="49" charset="0"/>
+                <a:ea typeface="JetBrains Mono NL ExtraBold" panose="02000009000000000000" pitchFamily="49" charset="0"/>
+                <a:cs typeface="JetBrains Mono NL ExtraBold" panose="02000009000000000000" pitchFamily="49" charset="0"/>
+              </a:rPr>
+              <a:t>yaw</a:t>
+            </a:r>
+            <a:r>
+              <a:rPr lang="en-US" sz="1400" baseline="-25000" dirty="0" err="1" smtClean="0">
+                <a:solidFill>
+                  <a:srgbClr val="0D1B2A"/>
+                </a:solidFill>
+                <a:latin typeface="JetBrains Mono NL ExtraBold" panose="02000009000000000000" pitchFamily="49" charset="0"/>
+                <a:ea typeface="JetBrains Mono NL ExtraBold" panose="02000009000000000000" pitchFamily="49" charset="0"/>
+                <a:cs typeface="JetBrains Mono NL ExtraBold" panose="02000009000000000000" pitchFamily="49" charset="0"/>
+              </a:rPr>
+              <a:t>ref</a:t>
+            </a:r>
+            <a:r>
+              <a:rPr lang="en-US" sz="1400" dirty="0" smtClean="0">
+                <a:solidFill>
+                  <a:srgbClr val="0D1B2A"/>
+                </a:solidFill>
+                <a:latin typeface="JetBrains Mono NL ExtraBold" panose="02000009000000000000" pitchFamily="49" charset="0"/>
+                <a:ea typeface="JetBrains Mono NL ExtraBold" panose="02000009000000000000" pitchFamily="49" charset="0"/>
+                <a:cs typeface="JetBrains Mono NL ExtraBold" panose="02000009000000000000" pitchFamily="49" charset="0"/>
+              </a:rPr>
+              <a:t>(t</a:t>
+            </a:r>
+            <a:r>
+              <a:rPr lang="en-US" sz="1400" dirty="0">
+                <a:solidFill>
+                  <a:srgbClr val="0D1B2A"/>
+                </a:solidFill>
+                <a:latin typeface="JetBrains Mono NL ExtraBold" panose="02000009000000000000" pitchFamily="49" charset="0"/>
+                <a:ea typeface="JetBrains Mono NL ExtraBold" panose="02000009000000000000" pitchFamily="49" charset="0"/>
+                <a:cs typeface="JetBrains Mono NL ExtraBold" panose="02000009000000000000" pitchFamily="49" charset="0"/>
+              </a:rPr>
+              <a:t>)</a:t>
+            </a:r>
+            <a:r>
+              <a:rPr lang="en-US" sz="1400" dirty="0">
+                <a:solidFill>
+                  <a:srgbClr val="0D1B2A"/>
+                </a:solidFill>
+                <a:ea typeface="JetBrains Mono NL ExtraBold" panose="02000009000000000000" pitchFamily="49" charset="0"/>
+                <a:cs typeface="JetBrains Mono NL ExtraBold" panose="02000009000000000000" pitchFamily="49" charset="0"/>
+              </a:rPr>
+              <a:t>) </a:t>
+            </a:r>
+            <a:r>
+              <a:rPr lang="en-US" sz="1400" dirty="0">
+                <a:solidFill>
+                  <a:srgbClr val="0D1B2A"/>
+                </a:solidFill>
+                <a:latin typeface="Calibri" pitchFamily="34" charset="0"/>
+                <a:ea typeface="Calibri" pitchFamily="34" charset="-122"/>
+                <a:cs typeface="Calibri" pitchFamily="34" charset="-120"/>
+              </a:rPr>
+              <a:t>z minimalnym błędem</a:t>
             </a:r>
             <a:endParaRPr lang="en-US" sz="1400" dirty="0"/>
           </a:p>
@@ -12692,9 +13137,24 @@
                 <a:ea typeface="Calibri" pitchFamily="34" charset="-122"/>
                 <a:cs typeface="Calibri" pitchFamily="34" charset="-120"/>
               </a:rPr>
-              <a:t>(along-track error): opóźnienie lub wyprzedzenie względem parametru t</a:t>
-            </a:r>
-            <a:endParaRPr lang="en-US" sz="1400" dirty="0"/>
+              <a:t>(along-track error): opóźnienie lub wyprzedzenie względem parametru </a:t>
+            </a:r>
+            <a:r>
+              <a:rPr lang="en-US" sz="1400" dirty="0">
+                <a:solidFill>
+                  <a:srgbClr val="0D1B2A"/>
+                </a:solidFill>
+                <a:latin typeface="JetBrains Mono NL ExtraBold" panose="02000009000000000000" pitchFamily="49" charset="0"/>
+                <a:ea typeface="JetBrains Mono NL ExtraBold" panose="02000009000000000000" pitchFamily="49" charset="0"/>
+                <a:cs typeface="JetBrains Mono NL ExtraBold" panose="02000009000000000000" pitchFamily="49" charset="0"/>
+              </a:rPr>
+              <a:t>t</a:t>
+            </a:r>
+            <a:endParaRPr lang="en-US" sz="1400" dirty="0">
+              <a:latin typeface="JetBrains Mono NL ExtraBold" panose="02000009000000000000" pitchFamily="49" charset="0"/>
+              <a:ea typeface="JetBrains Mono NL ExtraBold" panose="02000009000000000000" pitchFamily="49" charset="0"/>
+              <a:cs typeface="JetBrains Mono NL ExtraBold" panose="02000009000000000000" pitchFamily="49" charset="0"/>
+            </a:endParaRPr>
           </a:p>
           <a:p>
             <a:pPr marL="144000" indent="-144000">
@@ -12724,7 +13184,51 @@
                 <a:ea typeface="Calibri" pitchFamily="34" charset="-122"/>
                 <a:cs typeface="Calibri" pitchFamily="34" charset="-120"/>
               </a:rPr>
-              <a:t>: cel = punkt na trajektorii w odległości look-ahead L_d od robota</a:t>
+              <a:t>: cel = punkt na trajektorii w odległości look-ahead </a:t>
+            </a:r>
+            <a:r>
+              <a:rPr lang="en-US" sz="1400" dirty="0" err="1" smtClean="0">
+                <a:solidFill>
+                  <a:srgbClr val="0D1B2A"/>
+                </a:solidFill>
+                <a:latin typeface="JetBrains Mono NL ExtraBold" panose="02000009000000000000" pitchFamily="49" charset="0"/>
+                <a:ea typeface="JetBrains Mono NL ExtraBold" panose="02000009000000000000" pitchFamily="49" charset="0"/>
+                <a:cs typeface="JetBrains Mono NL ExtraBold" panose="02000009000000000000" pitchFamily="49" charset="0"/>
+              </a:rPr>
+              <a:t>L</a:t>
+            </a:r>
+            <a:r>
+              <a:rPr lang="en-US" sz="1400" baseline="-25000" dirty="0" err="1" smtClean="0">
+                <a:solidFill>
+                  <a:srgbClr val="0D1B2A"/>
+                </a:solidFill>
+                <a:latin typeface="JetBrains Mono NL ExtraBold" panose="02000009000000000000" pitchFamily="49" charset="0"/>
+                <a:ea typeface="JetBrains Mono NL ExtraBold" panose="02000009000000000000" pitchFamily="49" charset="0"/>
+                <a:cs typeface="JetBrains Mono NL ExtraBold" panose="02000009000000000000" pitchFamily="49" charset="0"/>
+              </a:rPr>
+              <a:t>d</a:t>
+            </a:r>
+            <a:r>
+              <a:rPr lang="en-US" sz="1400" dirty="0" smtClean="0">
+                <a:solidFill>
+                  <a:srgbClr val="0D1B2A"/>
+                </a:solidFill>
+                <a:latin typeface="Calibri" pitchFamily="34" charset="0"/>
+                <a:ea typeface="Calibri" pitchFamily="34" charset="-122"/>
+                <a:cs typeface="Calibri" pitchFamily="34" charset="-120"/>
+              </a:rPr>
+              <a:t> </a:t>
+            </a:r>
+            <a:r>
+              <a:rPr lang="en-US" sz="1400" dirty="0">
+                <a:solidFill>
+                  <a:srgbClr val="0D1B2A"/>
+                </a:solidFill>
+                <a:latin typeface="Calibri" pitchFamily="34" charset="0"/>
+                <a:ea typeface="Calibri" pitchFamily="34" charset="-122"/>
+                <a:cs typeface="Calibri" pitchFamily="34" charset="-120"/>
+              </a:rPr>
+              <a:t>od robota</a:t>
             </a:r>
             <a:endParaRPr lang="en-US" sz="1400" dirty="0"/>
           </a:p>
@@ -12756,9 +13260,86 @@
                 <a:ea typeface="Calibri" pitchFamily="34" charset="-122"/>
                 <a:cs typeface="Calibri" pitchFamily="34" charset="-120"/>
               </a:rPr>
-              <a:t>: kombinacja błędu bocznego i kąta nagłówka – stosowana w autonomicznych pojazdach</a:t>
-            </a:r>
-            <a:endParaRPr lang="en-US" sz="1400" dirty="0"/>
+              <a:t>: </a:t>
+            </a:r>
+            <a:r>
+              <a:rPr lang="en-US" sz="1400" spc="-20" dirty="0">
+                <a:solidFill>
+                  <a:srgbClr val="0D1B2A"/>
+                </a:solidFill>
+                <a:latin typeface="Calibri" pitchFamily="34" charset="0"/>
+                <a:ea typeface="Calibri" pitchFamily="34" charset="-122"/>
+                <a:cs typeface="Calibri" pitchFamily="34" charset="-120"/>
+              </a:rPr>
+              <a:t>kombinacja błędu bocznego i </a:t>
+            </a:r>
+            <a:r>
+              <a:rPr lang="en-US" sz="1400" spc="-20" dirty="0" err="1">
+                <a:solidFill>
+                  <a:srgbClr val="0D1B2A"/>
+                </a:solidFill>
+                <a:latin typeface="Calibri" pitchFamily="34" charset="0"/>
+                <a:ea typeface="Calibri" pitchFamily="34" charset="-122"/>
+                <a:cs typeface="Calibri" pitchFamily="34" charset="-120"/>
+              </a:rPr>
+              <a:t>kąta</a:t>
+            </a:r>
+            <a:r>
+              <a:rPr lang="en-US" sz="1400" spc="-20" dirty="0">
+                <a:solidFill>
+                  <a:srgbClr val="0D1B2A"/>
+                </a:solidFill>
+                <a:latin typeface="Calibri" pitchFamily="34" charset="0"/>
+                <a:ea typeface="Calibri" pitchFamily="34" charset="-122"/>
+                <a:cs typeface="Calibri" pitchFamily="34" charset="-120"/>
+              </a:rPr>
+              <a:t> </a:t>
+            </a:r>
+            <a:r>
+              <a:rPr lang="en-US" sz="1400" spc="-20" dirty="0" err="1" smtClean="0">
+                <a:solidFill>
+                  <a:srgbClr val="0D1B2A"/>
+                </a:solidFill>
+                <a:latin typeface="Calibri" pitchFamily="34" charset="0"/>
+                <a:ea typeface="Calibri" pitchFamily="34" charset="-122"/>
+                <a:cs typeface="Calibri" pitchFamily="34" charset="-120"/>
+              </a:rPr>
+              <a:t>nagłówka</a:t>
+            </a:r>
+            <a:r>
+              <a:rPr lang="pl-PL" sz="1400" spc="-20" dirty="0">
+                <a:solidFill>
+                  <a:srgbClr val="0D1B2A"/>
+                </a:solidFill>
+                <a:latin typeface="Calibri" pitchFamily="34" charset="0"/>
+                <a:ea typeface="Calibri" pitchFamily="34" charset="-122"/>
+                <a:cs typeface="Calibri" pitchFamily="34" charset="-120"/>
+              </a:rPr>
+              <a:t>,</a:t>
+            </a:r>
+            <a:r>
+              <a:rPr lang="en-US" sz="1400" spc="-20" dirty="0" smtClean="0">
+                <a:solidFill>
+                  <a:srgbClr val="0D1B2A"/>
+                </a:solidFill>
+                <a:latin typeface="Calibri" pitchFamily="34" charset="0"/>
+                <a:ea typeface="Calibri" pitchFamily="34" charset="-122"/>
+                <a:cs typeface="Calibri" pitchFamily="34" charset="-120"/>
+              </a:rPr>
+              <a:t> </a:t>
+            </a:r>
+            <a:r>
+              <a:rPr lang="en-US" sz="1400" spc="-20" dirty="0">
+                <a:solidFill>
+                  <a:srgbClr val="0D1B2A"/>
+                </a:solidFill>
+                <a:latin typeface="Calibri" pitchFamily="34" charset="0"/>
+                <a:ea typeface="Calibri" pitchFamily="34" charset="-122"/>
+                <a:cs typeface="Calibri" pitchFamily="34" charset="-120"/>
+              </a:rPr>
+              <a:t>stosowana w autonomicznych pojazdach</a:t>
+            </a:r>
+            <a:endParaRPr lang="en-US" sz="1400" spc="-20" dirty="0"/>
           </a:p>
           <a:p>
             <a:pPr marL="144000" indent="-144000">
@@ -12996,7 +13577,7 @@
         <p:spPr>
           <a:xfrm>
             <a:off x="274320" y="1097280"/>
-            <a:ext cx="8595360" cy="3749040"/>
+            <a:ext cx="8595360" cy="2674620"/>
           </a:xfrm>
           <a:prstGeom prst="rect">
             <a:avLst/>
@@ -13027,8 +13608,8 @@
         </p:nvSpPr>
         <p:spPr>
           <a:xfrm>
-            <a:off x="457200" y="1188720"/>
-            <a:ext cx="8229600" cy="2687915"/>
+            <a:off x="441960" y="1143000"/>
+            <a:ext cx="8229600" cy="2467786"/>
           </a:xfrm>
           <a:prstGeom prst="rect">
             <a:avLst/>
@@ -13037,7 +13618,7 @@
           <a:ln/>
         </p:spPr>
         <p:txBody>
-          <a:bodyPr wrap="square" lIns="127000" tIns="127000" rIns="127000" bIns="127000" rtlCol="0" anchor="t">
+          <a:bodyPr wrap="square" lIns="127000" tIns="36000" rIns="127000" bIns="0" rtlCol="0" anchor="t">
             <a:spAutoFit/>
           </a:bodyPr>
           <a:lstStyle/>
@@ -13058,7 +13639,51 @@
                 <a:ea typeface="Calibri" pitchFamily="34" charset="-122"/>
                 <a:cs typeface="Calibri" pitchFamily="34" charset="-120"/>
               </a:rPr>
-              <a:t>Moment maksymalny τ_max</a:t>
+              <a:t>Moment </a:t>
+            </a:r>
+            <a:r>
+              <a:rPr lang="en-US" sz="1400" b="1" dirty="0" err="1">
+                <a:solidFill>
+                  <a:srgbClr val="0D1B2A"/>
+                </a:solidFill>
+                <a:latin typeface="Calibri" pitchFamily="34" charset="0"/>
+                <a:ea typeface="Calibri" pitchFamily="34" charset="-122"/>
+                <a:cs typeface="Calibri" pitchFamily="34" charset="-120"/>
+              </a:rPr>
+              <a:t>maksymalny</a:t>
+            </a:r>
+            <a:r>
+              <a:rPr lang="en-US" sz="1400" b="1" dirty="0">
+                <a:solidFill>
+                  <a:srgbClr val="0D1B2A"/>
+                </a:solidFill>
+                <a:latin typeface="Calibri" pitchFamily="34" charset="0"/>
+                <a:ea typeface="Calibri" pitchFamily="34" charset="-122"/>
+                <a:cs typeface="Calibri" pitchFamily="34" charset="-120"/>
+              </a:rPr>
+              <a:t> </a:t>
+            </a:r>
+            <a:r>
+              <a:rPr lang="en-US" sz="1400" b="1" dirty="0" err="1" smtClean="0">
+                <a:solidFill>
+                  <a:srgbClr val="0D1B2A"/>
+                </a:solidFill>
+                <a:latin typeface="JetBrains Mono NL ExtraBold" panose="02000009000000000000" pitchFamily="49" charset="0"/>
+                <a:ea typeface="JetBrains Mono NL ExtraBold" panose="02000009000000000000" pitchFamily="49" charset="0"/>
+                <a:cs typeface="JetBrains Mono NL ExtraBold" panose="02000009000000000000" pitchFamily="49" charset="0"/>
+              </a:rPr>
+              <a:t>τ</a:t>
+            </a:r>
+            <a:r>
+              <a:rPr lang="en-US" sz="1400" b="1" baseline="-25000" dirty="0" err="1" smtClean="0">
+                <a:solidFill>
+                  <a:srgbClr val="0D1B2A"/>
+                </a:solidFill>
+                <a:latin typeface="JetBrains Mono NL ExtraBold" panose="02000009000000000000" pitchFamily="49" charset="0"/>
+                <a:ea typeface="JetBrains Mono NL ExtraBold" panose="02000009000000000000" pitchFamily="49" charset="0"/>
+                <a:cs typeface="JetBrains Mono NL ExtraBold" panose="02000009000000000000" pitchFamily="49" charset="0"/>
+              </a:rPr>
+              <a:t>max</a:t>
             </a:r>
             <a:r>
               <a:rPr lang="en-US" sz="1400" dirty="0">
@@ -13090,7 +13715,62 @@
                 <a:ea typeface="Calibri" pitchFamily="34" charset="-122"/>
                 <a:cs typeface="Calibri" pitchFamily="34" charset="-120"/>
               </a:rPr>
-              <a:t>Prędkość kątowa ω_max</a:t>
+              <a:t>Prędkość </a:t>
+            </a:r>
+            <a:r>
+              <a:rPr lang="en-US" sz="1400" b="1" dirty="0" err="1">
+                <a:solidFill>
+                  <a:srgbClr val="0D1B2A"/>
+                </a:solidFill>
+                <a:latin typeface="Calibri" pitchFamily="34" charset="0"/>
+                <a:ea typeface="Calibri" pitchFamily="34" charset="-122"/>
+                <a:cs typeface="Calibri" pitchFamily="34" charset="-120"/>
+              </a:rPr>
+              <a:t>kątowa</a:t>
+            </a:r>
+            <a:r>
+              <a:rPr lang="en-US" sz="1400" b="1" dirty="0">
+                <a:solidFill>
+                  <a:srgbClr val="0D1B2A"/>
+                </a:solidFill>
+                <a:latin typeface="Calibri" pitchFamily="34" charset="0"/>
+                <a:ea typeface="Calibri" pitchFamily="34" charset="-122"/>
+                <a:cs typeface="Calibri" pitchFamily="34" charset="-120"/>
+              </a:rPr>
+              <a:t> </a:t>
+            </a:r>
+            <a:r>
+              <a:rPr lang="en-US" sz="1400" b="1" spc="100" dirty="0" err="1" smtClean="0">
+                <a:solidFill>
+                  <a:srgbClr val="0D1B2A"/>
+                </a:solidFill>
+                <a:latin typeface="JetBrains Mono NL ExtraBold" panose="02000009000000000000" pitchFamily="49" charset="0"/>
+                <a:ea typeface="JetBrains Mono NL ExtraBold" panose="02000009000000000000" pitchFamily="49" charset="0"/>
+                <a:cs typeface="JetBrains Mono NL ExtraBold" panose="02000009000000000000" pitchFamily="49" charset="0"/>
+              </a:rPr>
+              <a:t>ω</a:t>
+            </a:r>
+            <a:r>
+              <a:rPr lang="en-US" sz="1400" b="1" spc="100" baseline="-25000" dirty="0" err="1" smtClean="0">
+                <a:solidFill>
+                  <a:srgbClr val="0D1B2A"/>
+                </a:solidFill>
+                <a:latin typeface="JetBrains Mono NL ExtraBold" panose="02000009000000000000" pitchFamily="49" charset="0"/>
+                <a:ea typeface="JetBrains Mono NL ExtraBold" panose="02000009000000000000" pitchFamily="49" charset="0"/>
+                <a:cs typeface="JetBrains Mono NL ExtraBold" panose="02000009000000000000" pitchFamily="49" charset="0"/>
+              </a:rPr>
+              <a:t>ma</a:t>
+            </a:r>
+            <a:r>
+              <a:rPr lang="en-US" sz="1400" b="1" spc="100" baseline="-25000" dirty="0" err="1" smtClean="0">
+                <a:solidFill>
+                  <a:srgbClr val="0D1B2A"/>
+                </a:solidFill>
+                <a:latin typeface="Calibri" pitchFamily="34" charset="0"/>
+                <a:ea typeface="Calibri" pitchFamily="34" charset="-122"/>
+                <a:cs typeface="Calibri" pitchFamily="34" charset="-120"/>
+              </a:rPr>
+              <a:t>x</a:t>
             </a:r>
             <a:r>
               <a:rPr lang="en-US" sz="1400" dirty="0">
@@ -13165,7 +13845,84 @@
                 <a:ea typeface="Calibri" pitchFamily="34" charset="-122"/>
                 <a:cs typeface="Calibri" pitchFamily="34" charset="-120"/>
               </a:rPr>
-              <a:t>: ciągła praca przy τ_max skraca żywotność; monitoring temperatury uzwojeń</a:t>
+              <a:t>: ciągła praca </a:t>
+            </a:r>
+            <a:r>
+              <a:rPr lang="en-US" sz="1400" dirty="0" err="1">
+                <a:solidFill>
+                  <a:srgbClr val="0D1B2A"/>
+                </a:solidFill>
+                <a:latin typeface="Calibri" pitchFamily="34" charset="0"/>
+                <a:ea typeface="Calibri" pitchFamily="34" charset="-122"/>
+                <a:cs typeface="Calibri" pitchFamily="34" charset="-120"/>
+              </a:rPr>
+              <a:t>przy</a:t>
+            </a:r>
+            <a:r>
+              <a:rPr lang="en-US" sz="1400" dirty="0">
+                <a:solidFill>
+                  <a:srgbClr val="0D1B2A"/>
+                </a:solidFill>
+                <a:latin typeface="Calibri" pitchFamily="34" charset="0"/>
+                <a:ea typeface="Calibri" pitchFamily="34" charset="-122"/>
+                <a:cs typeface="Calibri" pitchFamily="34" charset="-120"/>
+              </a:rPr>
+              <a:t> </a:t>
+            </a:r>
+            <a:r>
+              <a:rPr lang="en-US" sz="1400" dirty="0" err="1" smtClean="0">
+                <a:solidFill>
+                  <a:srgbClr val="0D1B2A"/>
+                </a:solidFill>
+                <a:latin typeface="JetBrains Mono NL ExtraBold" panose="02000009000000000000" pitchFamily="49" charset="0"/>
+                <a:ea typeface="JetBrains Mono NL ExtraBold" panose="02000009000000000000" pitchFamily="49" charset="0"/>
+                <a:cs typeface="JetBrains Mono NL ExtraBold" panose="02000009000000000000" pitchFamily="49" charset="0"/>
+              </a:rPr>
+              <a:t>τ</a:t>
+            </a:r>
+            <a:r>
+              <a:rPr lang="en-US" sz="1400" spc="100" baseline="-25000" dirty="0" err="1" smtClean="0">
+                <a:solidFill>
+                  <a:srgbClr val="0D1B2A"/>
+                </a:solidFill>
+                <a:latin typeface="JetBrains Mono NL ExtraBold" panose="02000009000000000000" pitchFamily="49" charset="0"/>
+                <a:ea typeface="JetBrains Mono NL ExtraBold" panose="02000009000000000000" pitchFamily="49" charset="0"/>
+                <a:cs typeface="JetBrains Mono NL ExtraBold" panose="02000009000000000000" pitchFamily="49" charset="0"/>
+              </a:rPr>
+              <a:t>ma</a:t>
+            </a:r>
+            <a:r>
+              <a:rPr lang="en-US" sz="1400" spc="100" baseline="-25000" dirty="0" err="1" smtClean="0">
+                <a:solidFill>
+                  <a:srgbClr val="0D1B2A"/>
+                </a:solidFill>
+                <a:latin typeface="Calibri" pitchFamily="34" charset="0"/>
+                <a:ea typeface="Calibri" pitchFamily="34" charset="-122"/>
+                <a:cs typeface="Calibri" pitchFamily="34" charset="-120"/>
+              </a:rPr>
+              <a:t>x</a:t>
+            </a:r>
+            <a:r>
+              <a:rPr lang="en-US" sz="1400" dirty="0" smtClean="0">
+                <a:solidFill>
+                  <a:srgbClr val="0D1B2A"/>
+                </a:solidFill>
+                <a:latin typeface="Calibri" pitchFamily="34" charset="0"/>
+                <a:ea typeface="Calibri" pitchFamily="34" charset="-122"/>
+                <a:cs typeface="Calibri" pitchFamily="34" charset="-120"/>
+              </a:rPr>
+              <a:t> </a:t>
+            </a:r>
+            <a:r>
+              <a:rPr lang="en-US" sz="1400" dirty="0">
+                <a:solidFill>
+                  <a:srgbClr val="0D1B2A"/>
+                </a:solidFill>
+                <a:latin typeface="Calibri" pitchFamily="34" charset="0"/>
+                <a:ea typeface="Calibri" pitchFamily="34" charset="-122"/>
+                <a:cs typeface="Calibri" pitchFamily="34" charset="-120"/>
+              </a:rPr>
+              <a:t>skraca żywotność; monitoring temperatury uzwojeń</a:t>
             </a:r>
             <a:endParaRPr lang="en-US" sz="1400" dirty="0"/>
           </a:p>
@@ -16262,7 +17019,7 @@
         <p:spPr>
           <a:xfrm>
             <a:off x="274320" y="1097280"/>
-            <a:ext cx="8595360" cy="3749040"/>
+            <a:ext cx="8595360" cy="2682240"/>
           </a:xfrm>
           <a:prstGeom prst="rect">
             <a:avLst/>
@@ -16293,8 +17050,8 @@
         </p:nvSpPr>
         <p:spPr>
           <a:xfrm>
-            <a:off x="457200" y="1188720"/>
-            <a:ext cx="8229600" cy="3520440"/>
+            <a:off x="335280" y="1165860"/>
+            <a:ext cx="8404860" cy="2467786"/>
           </a:xfrm>
           <a:prstGeom prst="rect">
             <a:avLst/>
@@ -16303,7 +17060,9 @@
           <a:ln/>
         </p:spPr>
         <p:txBody>
-          <a:bodyPr wrap="square" lIns="127000" tIns="127000" rIns="127000" bIns="127000" rtlCol="0" anchor="t"/>
+          <a:bodyPr wrap="square" lIns="127000" tIns="36000" rIns="127000" bIns="0" rtlCol="0" anchor="t">
+            <a:spAutoFit/>
+          </a:bodyPr>
           <a:lstStyle/>
           <a:p>
             <a:pPr marL="144000" indent="-144000">
@@ -16442,7 +17201,7 @@
               <a:buChar char="•"/>
             </a:pPr>
             <a:r>
-              <a:rPr lang="en-US" sz="1400" b="1" dirty="0">
+              <a:rPr lang="en-US" sz="1400" b="1" spc="-40" dirty="0">
                 <a:solidFill>
                   <a:srgbClr val="0D1B2A"/>
                 </a:solidFill>
@@ -16453,7 +17212,7 @@
               <a:t>Zasada bezpiecznego przejścia</a:t>
             </a:r>
             <a:r>
-              <a:rPr lang="en-US" sz="1400" dirty="0">
+              <a:rPr lang="en-US" sz="1400" spc="-40" dirty="0">
                 <a:solidFill>
                   <a:srgbClr val="0D1B2A"/>
                 </a:solidFill>
@@ -16463,7 +17222,7 @@
               </a:rPr>
               <a:t>: algorytm działa poprawnie w symulacji → testy na robocie w ograniczonej przestrzeni</a:t>
             </a:r>
-            <a:endParaRPr lang="en-US" sz="1400" dirty="0"/>
+            <a:endParaRPr lang="en-US" sz="1400" spc="-40" dirty="0"/>
           </a:p>
           <a:p>
             <a:pPr marL="144000" indent="-144000">
@@ -18959,6 +19718,13 @@
           </a:prstGeom>
           <a:noFill/>
           <a:ln/>
+          <a:effectLst>
+            <a:outerShdw blurRad="50800" dist="38100" dir="2700000" algn="tl" rotWithShape="0">
+              <a:prstClr val="black">
+                <a:alpha val="40000"/>
+              </a:prstClr>
+            </a:outerShdw>
+          </a:effectLst>
         </p:spPr>
         <p:txBody>
           <a:bodyPr wrap="square" lIns="0" tIns="0" rIns="0" bIns="0" rtlCol="0" anchor="ctr"/>
@@ -18999,14 +19765,21 @@
             <a:avLst/>
           </a:prstGeom>
           <a:solidFill>
-            <a:srgbClr val="0D1B2A"/>
+            <a:schemeClr val="bg1"/>
           </a:solidFill>
-          <a:ln w="25400">
+          <a:ln w="57150">
             <a:solidFill>
               <a:srgbClr val="0077A8"/>
             </a:solidFill>
             <a:prstDash val="solid"/>
           </a:ln>
+          <a:effectLst>
+            <a:outerShdw blurRad="50800" dist="38100" dir="2700000" algn="tl" rotWithShape="0">
+              <a:prstClr val="black">
+                <a:alpha val="40000"/>
+              </a:prstClr>
+            </a:outerShdw>
+          </a:effectLst>
         </p:spPr>
       </p:sp>
       <p:pic>
@@ -19080,8 +19853,8 @@
         </p:nvSpPr>
         <p:spPr>
           <a:xfrm>
-            <a:off x="2926080" y="1600200"/>
-            <a:ext cx="3931920" cy="1005840"/>
+            <a:off x="2913380" y="1619250"/>
+            <a:ext cx="4109720" cy="805688"/>
           </a:xfrm>
           <a:prstGeom prst="rect">
             <a:avLst/>
@@ -19097,7 +19870,7 @@
               <a:buNone/>
             </a:pPr>
             <a:r>
-              <a:rPr lang="en-US" sz="2600" b="1" dirty="0">
+              <a:rPr lang="en-US" sz="2400" b="1" dirty="0">
                 <a:solidFill>
                   <a:srgbClr val="FFFFFF"/>
                 </a:solidFill>
@@ -19107,14 +19880,14 @@
               </a:rPr>
               <a:t>Architektura systemowa,</a:t>
             </a:r>
-            <a:endParaRPr lang="en-US" sz="2600" dirty="0"/>
+            <a:endParaRPr lang="en-US" sz="2400" dirty="0"/>
           </a:p>
           <a:p>
             <a:pPr marL="0" indent="0">
               <a:buNone/>
             </a:pPr>
             <a:r>
-              <a:rPr lang="en-US" sz="2600" b="1" dirty="0">
+              <a:rPr lang="en-US" sz="2400" b="1" dirty="0">
                 <a:solidFill>
                   <a:srgbClr val="FFFFFF"/>
                 </a:solidFill>
@@ -19124,7 +19897,7 @@
               </a:rPr>
               <a:t>bezpieczeństwo i walidacja</a:t>
             </a:r>
-            <a:endParaRPr lang="en-US" sz="2600" dirty="0"/>
+            <a:endParaRPr lang="en-US" sz="2400" dirty="0"/>
           </a:p>
         </p:txBody>
       </p:sp>
@@ -19151,6 +19924,13 @@
             </a:solidFill>
             <a:prstDash val="solid"/>
           </a:ln>
+          <a:effectLst>
+            <a:outerShdw blurRad="50800" dist="38100" dir="2700000" algn="tl" rotWithShape="0">
+              <a:prstClr val="black">
+                <a:alpha val="40000"/>
+              </a:prstClr>
+            </a:outerShdw>
+          </a:effectLst>
         </p:spPr>
       </p:sp>
       <p:sp>
@@ -19162,7 +19942,7 @@
         <p:spPr>
           <a:xfrm>
             <a:off x="2926080" y="2834640"/>
-            <a:ext cx="3931920" cy="822960"/>
+            <a:ext cx="4090670" cy="365760"/>
           </a:xfrm>
           <a:prstGeom prst="rect">
             <a:avLst/>
@@ -19856,7 +20636,7 @@
         <p:spPr>
           <a:xfrm>
             <a:off x="274320" y="1143000"/>
-            <a:ext cx="2651760" cy="1691640"/>
+            <a:ext cx="2651760" cy="1363980"/>
           </a:xfrm>
           <a:prstGeom prst="rect">
             <a:avLst/>
@@ -19929,7 +20709,7 @@
               <a:buNone/>
             </a:pPr>
             <a:r>
-              <a:rPr lang="en-US" sz="1600" b="1" dirty="0">
+              <a:rPr lang="en-US" b="1" dirty="0">
                 <a:solidFill>
                   <a:srgbClr val="0D1B2A"/>
                 </a:solidFill>
@@ -19939,7 +20719,7 @@
               </a:rPr>
               <a:t>1. Sensory</a:t>
             </a:r>
-            <a:endParaRPr lang="en-US" sz="1600" dirty="0"/>
+            <a:endParaRPr lang="en-US" dirty="0"/>
           </a:p>
         </p:txBody>
       </p:sp>
@@ -19951,8 +20731,8 @@
         </p:nvSpPr>
         <p:spPr>
           <a:xfrm>
-            <a:off x="384048" y="1853489"/>
-            <a:ext cx="2432304" cy="930402"/>
+            <a:off x="384048" y="1777289"/>
+            <a:ext cx="2432304" cy="653491"/>
           </a:xfrm>
           <a:prstGeom prst="rect">
             <a:avLst/>
@@ -20067,7 +20847,7 @@
         <p:spPr>
           <a:xfrm>
             <a:off x="3154680" y="1143000"/>
-            <a:ext cx="2651760" cy="1691640"/>
+            <a:ext cx="2651760" cy="1363980"/>
           </a:xfrm>
           <a:prstGeom prst="rect">
             <a:avLst/>
@@ -20140,7 +20920,7 @@
               <a:buNone/>
             </a:pPr>
             <a:r>
-              <a:rPr lang="en-US" sz="1600" b="1" dirty="0">
+              <a:rPr lang="en-US" b="1" dirty="0">
                 <a:solidFill>
                   <a:srgbClr val="0D1B2A"/>
                 </a:solidFill>
@@ -20150,7 +20930,7 @@
               </a:rPr>
               <a:t>2. Lokalizacja</a:t>
             </a:r>
-            <a:endParaRPr lang="en-US" sz="1600" dirty="0"/>
+            <a:endParaRPr lang="en-US" dirty="0"/>
           </a:p>
         </p:txBody>
       </p:sp>
@@ -20162,8 +20942,8 @@
         </p:nvSpPr>
         <p:spPr>
           <a:xfrm>
-            <a:off x="3264408" y="1853489"/>
-            <a:ext cx="2432304" cy="930402"/>
+            <a:off x="3264408" y="1777289"/>
+            <a:ext cx="2432304" cy="653491"/>
           </a:xfrm>
           <a:prstGeom prst="rect">
             <a:avLst/>
@@ -20278,7 +21058,7 @@
         <p:spPr>
           <a:xfrm>
             <a:off x="6035040" y="1143000"/>
-            <a:ext cx="2651760" cy="1691640"/>
+            <a:ext cx="2651760" cy="1363980"/>
           </a:xfrm>
           <a:prstGeom prst="rect">
             <a:avLst/>
@@ -20351,7 +21131,7 @@
               <a:buNone/>
             </a:pPr>
             <a:r>
-              <a:rPr lang="en-US" sz="1600" b="1" dirty="0">
+              <a:rPr lang="en-US" b="1" dirty="0">
                 <a:solidFill>
                   <a:srgbClr val="0D1B2A"/>
                 </a:solidFill>
@@ -20361,7 +21141,7 @@
               </a:rPr>
               <a:t>3. Mapa kosztów</a:t>
             </a:r>
-            <a:endParaRPr lang="en-US" sz="1600" dirty="0"/>
+            <a:endParaRPr lang="en-US" dirty="0"/>
           </a:p>
         </p:txBody>
       </p:sp>
@@ -20373,8 +21153,8 @@
         </p:nvSpPr>
         <p:spPr>
           <a:xfrm>
-            <a:off x="6144768" y="1853489"/>
-            <a:ext cx="2432304" cy="930402"/>
+            <a:off x="6144768" y="1777289"/>
+            <a:ext cx="2432304" cy="653491"/>
           </a:xfrm>
           <a:prstGeom prst="rect">
             <a:avLst/>
@@ -20542,8 +21322,8 @@
         </p:nvSpPr>
         <p:spPr>
           <a:xfrm>
-            <a:off x="274320" y="2971800"/>
-            <a:ext cx="2651760" cy="1691640"/>
+            <a:off x="274320" y="2705100"/>
+            <a:ext cx="2651760" cy="1363980"/>
           </a:xfrm>
           <a:prstGeom prst="rect">
             <a:avLst/>
@@ -20574,7 +21354,7 @@
         </p:nvSpPr>
         <p:spPr>
           <a:xfrm>
-            <a:off x="274320" y="2971800"/>
+            <a:off x="274320" y="2705100"/>
             <a:ext cx="2651760" cy="54864"/>
           </a:xfrm>
           <a:prstGeom prst="rect">
@@ -20599,7 +21379,7 @@
         </p:nvSpPr>
         <p:spPr>
           <a:xfrm>
-            <a:off x="384048" y="3063240"/>
+            <a:off x="384048" y="2796540"/>
             <a:ext cx="2432304" cy="642823"/>
           </a:xfrm>
           <a:prstGeom prst="rect">
@@ -20616,7 +21396,7 @@
               <a:buNone/>
             </a:pPr>
             <a:r>
-              <a:rPr lang="en-US" sz="1600" b="1" dirty="0">
+              <a:rPr lang="en-US" b="1" dirty="0">
                 <a:solidFill>
                   <a:srgbClr val="0D1B2A"/>
                 </a:solidFill>
@@ -20626,7 +21406,7 @@
               </a:rPr>
               <a:t>4. Planista globalny</a:t>
             </a:r>
-            <a:endParaRPr lang="en-US" sz="1600" dirty="0"/>
+            <a:endParaRPr lang="en-US" dirty="0"/>
           </a:p>
         </p:txBody>
       </p:sp>
@@ -20638,8 +21418,8 @@
         </p:nvSpPr>
         <p:spPr>
           <a:xfrm>
-            <a:off x="384048" y="3682289"/>
-            <a:ext cx="2432304" cy="930402"/>
+            <a:off x="384048" y="3339389"/>
+            <a:ext cx="2432304" cy="653491"/>
           </a:xfrm>
           <a:prstGeom prst="rect">
             <a:avLst/>
@@ -20677,8 +21457,8 @@
         </p:nvSpPr>
         <p:spPr>
           <a:xfrm>
-            <a:off x="3154680" y="2971800"/>
-            <a:ext cx="2651760" cy="1691640"/>
+            <a:off x="3154680" y="2705100"/>
+            <a:ext cx="2651760" cy="1363980"/>
           </a:xfrm>
           <a:prstGeom prst="rect">
             <a:avLst/>
@@ -20709,7 +21489,7 @@
         </p:nvSpPr>
         <p:spPr>
           <a:xfrm>
-            <a:off x="3154680" y="2971800"/>
+            <a:off x="3154680" y="2705100"/>
             <a:ext cx="2651760" cy="54864"/>
           </a:xfrm>
           <a:prstGeom prst="rect">
@@ -20734,7 +21514,7 @@
         </p:nvSpPr>
         <p:spPr>
           <a:xfrm>
-            <a:off x="3264408" y="3063240"/>
+            <a:off x="3264408" y="2796540"/>
             <a:ext cx="2432304" cy="642823"/>
           </a:xfrm>
           <a:prstGeom prst="rect">
@@ -20751,7 +21531,7 @@
               <a:buNone/>
             </a:pPr>
             <a:r>
-              <a:rPr lang="en-US" sz="1600" b="1" dirty="0">
+              <a:rPr lang="en-US" b="1" dirty="0">
                 <a:solidFill>
                   <a:srgbClr val="0D1B2A"/>
                 </a:solidFill>
@@ -20761,7 +21541,7 @@
               </a:rPr>
               <a:t>5. Planista lokalny</a:t>
             </a:r>
-            <a:endParaRPr lang="en-US" sz="1600" dirty="0"/>
+            <a:endParaRPr lang="en-US" dirty="0"/>
           </a:p>
         </p:txBody>
       </p:sp>
@@ -20773,8 +21553,8 @@
         </p:nvSpPr>
         <p:spPr>
           <a:xfrm>
-            <a:off x="3264408" y="3682289"/>
-            <a:ext cx="2432304" cy="930402"/>
+            <a:off x="3264408" y="3339389"/>
+            <a:ext cx="2432304" cy="653491"/>
           </a:xfrm>
           <a:prstGeom prst="rect">
             <a:avLst/>
@@ -20812,8 +21592,8 @@
         </p:nvSpPr>
         <p:spPr>
           <a:xfrm>
-            <a:off x="6035040" y="2971800"/>
-            <a:ext cx="2651760" cy="1691640"/>
+            <a:off x="6035040" y="2705100"/>
+            <a:ext cx="2651760" cy="1363980"/>
           </a:xfrm>
           <a:prstGeom prst="rect">
             <a:avLst/>
@@ -20844,7 +21624,7 @@
         </p:nvSpPr>
         <p:spPr>
           <a:xfrm>
-            <a:off x="6035040" y="2971800"/>
+            <a:off x="6035040" y="2705100"/>
             <a:ext cx="2651760" cy="54864"/>
           </a:xfrm>
           <a:prstGeom prst="rect">
@@ -20869,7 +21649,7 @@
         </p:nvSpPr>
         <p:spPr>
           <a:xfrm>
-            <a:off x="6144768" y="3063240"/>
+            <a:off x="6144768" y="2796540"/>
             <a:ext cx="2432304" cy="642823"/>
           </a:xfrm>
           <a:prstGeom prst="rect">
@@ -20886,7 +21666,7 @@
               <a:buNone/>
             </a:pPr>
             <a:r>
-              <a:rPr lang="en-US" sz="1600" b="1" dirty="0">
+              <a:rPr lang="en-US" b="1" dirty="0">
                 <a:solidFill>
                   <a:srgbClr val="0D1B2A"/>
                 </a:solidFill>
@@ -20896,7 +21676,7 @@
               </a:rPr>
               <a:t>6. WBC + wykonanie</a:t>
             </a:r>
-            <a:endParaRPr lang="en-US" sz="1600" dirty="0"/>
+            <a:endParaRPr lang="en-US" dirty="0"/>
           </a:p>
         </p:txBody>
       </p:sp>
@@ -20908,8 +21688,8 @@
         </p:nvSpPr>
         <p:spPr>
           <a:xfrm>
-            <a:off x="6144768" y="3682289"/>
-            <a:ext cx="2432304" cy="930402"/>
+            <a:off x="6144768" y="3339389"/>
+            <a:ext cx="2432304" cy="653491"/>
           </a:xfrm>
           <a:prstGeom prst="rect">
             <a:avLst/>
@@ -23269,7 +24049,7 @@
         <p:spPr>
           <a:xfrm>
             <a:off x="274320" y="1097280"/>
-            <a:ext cx="4160520" cy="3749040"/>
+            <a:ext cx="4160520" cy="2583180"/>
           </a:xfrm>
           <a:prstGeom prst="rect">
             <a:avLst/>
@@ -23301,7 +24081,7 @@
         <p:spPr>
           <a:xfrm>
             <a:off x="4709160" y="1097280"/>
-            <a:ext cx="4160520" cy="3749040"/>
+            <a:ext cx="4160520" cy="2583180"/>
           </a:xfrm>
           <a:prstGeom prst="rect">
             <a:avLst/>
@@ -23446,7 +24226,18 @@
                 <a:ea typeface="Trebuchet MS" pitchFamily="34" charset="-122"/>
                 <a:cs typeface="Trebuchet MS" pitchFamily="34" charset="-120"/>
               </a:rPr>
-              <a:t>Reakcje bezpieczne (fail-safe)</a:t>
+              <a:t>Reakcje bezpieczne </a:t>
+            </a:r>
+            <a:r>
+              <a:rPr lang="en-US" sz="1600" dirty="0">
+                <a:solidFill>
+                  <a:srgbClr val="FFFFFF"/>
+                </a:solidFill>
+                <a:latin typeface="Trebuchet MS" pitchFamily="34" charset="0"/>
+                <a:ea typeface="Trebuchet MS" pitchFamily="34" charset="-122"/>
+                <a:cs typeface="Trebuchet MS" pitchFamily="34" charset="-120"/>
+              </a:rPr>
+              <a:t>(fail-safe)</a:t>
             </a:r>
             <a:endParaRPr lang="en-US" sz="1600" dirty="0"/>
           </a:p>
@@ -23460,8 +24251,8 @@
         </p:nvSpPr>
         <p:spPr>
           <a:xfrm>
-            <a:off x="457200" y="1600200"/>
-            <a:ext cx="3794760" cy="3108960"/>
+            <a:off x="335280" y="1600200"/>
+            <a:ext cx="4030980" cy="1703475"/>
           </a:xfrm>
           <a:prstGeom prst="rect">
             <a:avLst/>
@@ -23470,10 +24261,12 @@
           <a:ln/>
         </p:spPr>
         <p:txBody>
-          <a:bodyPr wrap="square" lIns="63500" tIns="101600" rIns="101600" bIns="63500" rtlCol="0" anchor="t"/>
+          <a:bodyPr wrap="square" lIns="63500" tIns="36000" rIns="101600" bIns="0" rtlCol="0" anchor="t">
+            <a:spAutoFit/>
+          </a:bodyPr>
           <a:lstStyle/>
           <a:p>
-            <a:pPr marL="342900" indent="-342900">
+            <a:pPr marL="144000" indent="-144000">
               <a:spcAft>
                 <a:spcPts val="800"/>
               </a:spcAft>
@@ -23481,7 +24274,7 @@
               <a:buChar char="•"/>
             </a:pPr>
             <a:r>
-              <a:rPr lang="en-US" sz="1250" dirty="0">
+              <a:rPr lang="en-US" sz="1250" b="1" spc="-40" dirty="0">
                 <a:solidFill>
                   <a:srgbClr val="0D1B2A"/>
                 </a:solidFill>
@@ -23489,12 +24282,23 @@
                 <a:ea typeface="Calibri" pitchFamily="34" charset="-122"/>
                 <a:cs typeface="Calibri" pitchFamily="34" charset="-120"/>
               </a:rPr>
-              <a:t>Detekcja upadku: akcelerometr |a| &gt; 3g lub roll/pitch &gt; 45°</a:t>
-            </a:r>
-            <a:endParaRPr lang="en-US" sz="1250" dirty="0"/>
-          </a:p>
-          <a:p>
-            <a:pPr marL="342900" indent="-342900">
+              <a:t>Detekcja upadku</a:t>
+            </a:r>
+            <a:r>
+              <a:rPr lang="en-US" sz="1250" spc="-40" dirty="0">
+                <a:solidFill>
+                  <a:srgbClr val="0D1B2A"/>
+                </a:solidFill>
+                <a:latin typeface="Calibri" pitchFamily="34" charset="0"/>
+                <a:ea typeface="Calibri" pitchFamily="34" charset="-122"/>
+                <a:cs typeface="Calibri" pitchFamily="34" charset="-120"/>
+              </a:rPr>
+              <a:t>: akcelerometr |a| &gt; 3g lub roll/pitch &gt; 45°</a:t>
+            </a:r>
+            <a:endParaRPr lang="en-US" sz="1250" spc="-40" dirty="0"/>
+          </a:p>
+          <a:p>
+            <a:pPr marL="144000" indent="-144000">
               <a:spcAft>
                 <a:spcPts val="800"/>
               </a:spcAft>
@@ -23502,7 +24306,7 @@
               <a:buChar char="•"/>
             </a:pPr>
             <a:r>
-              <a:rPr lang="en-US" sz="1250" dirty="0">
+              <a:rPr lang="en-US" sz="1250" b="1" spc="-40" dirty="0">
                 <a:solidFill>
                   <a:srgbClr val="0D1B2A"/>
                 </a:solidFill>
@@ -23510,12 +24314,23 @@
                 <a:ea typeface="Calibri" pitchFamily="34" charset="-122"/>
                 <a:cs typeface="Calibri" pitchFamily="34" charset="-120"/>
               </a:rPr>
-              <a:t>Brak kontaktu obu stóp: F_z_L + F_z_R &lt; 20 N przez &gt;200 ms</a:t>
-            </a:r>
-            <a:endParaRPr lang="en-US" sz="1250" dirty="0"/>
-          </a:p>
-          <a:p>
-            <a:pPr marL="342900" indent="-342900">
+              <a:t>Brak kontaktu obu stóp</a:t>
+            </a:r>
+            <a:r>
+              <a:rPr lang="en-US" sz="1250" spc="-40" dirty="0">
+                <a:solidFill>
+                  <a:srgbClr val="0D1B2A"/>
+                </a:solidFill>
+                <a:latin typeface="Calibri" pitchFamily="34" charset="0"/>
+                <a:ea typeface="Calibri" pitchFamily="34" charset="-122"/>
+                <a:cs typeface="Calibri" pitchFamily="34" charset="-120"/>
+              </a:rPr>
+              <a:t>: F_z_L + F_z_R &lt; 20 N przez &gt;200 ms</a:t>
+            </a:r>
+            <a:endParaRPr lang="en-US" sz="1250" spc="-40" dirty="0"/>
+          </a:p>
+          <a:p>
+            <a:pPr marL="144000" indent="-144000">
               <a:spcAft>
                 <a:spcPts val="800"/>
               </a:spcAft>
@@ -23523,7 +24338,7 @@
               <a:buChar char="•"/>
             </a:pPr>
             <a:r>
-              <a:rPr lang="en-US" sz="1250" dirty="0">
+              <a:rPr lang="en-US" sz="1250" b="1" spc="-40" dirty="0" err="1" smtClean="0">
                 <a:solidFill>
                   <a:srgbClr val="0D1B2A"/>
                 </a:solidFill>
@@ -23531,12 +24346,122 @@
                 <a:ea typeface="Calibri" pitchFamily="34" charset="-122"/>
                 <a:cs typeface="Calibri" pitchFamily="34" charset="-120"/>
               </a:rPr>
-              <a:t>Przekroczenie limitu momentu: τ &gt; 1,2 · τ_max przez &gt;50 ms</a:t>
-            </a:r>
-            <a:endParaRPr lang="en-US" sz="1250" dirty="0"/>
-          </a:p>
-          <a:p>
-            <a:pPr marL="342900" indent="-342900">
+              <a:t>Przekroczenie</a:t>
+            </a:r>
+            <a:r>
+              <a:rPr lang="en-US" sz="1250" b="1" spc="-40" dirty="0" smtClean="0">
+                <a:solidFill>
+                  <a:srgbClr val="0D1B2A"/>
+                </a:solidFill>
+                <a:latin typeface="Calibri" pitchFamily="34" charset="0"/>
+                <a:ea typeface="Calibri" pitchFamily="34" charset="-122"/>
+                <a:cs typeface="Calibri" pitchFamily="34" charset="-120"/>
+              </a:rPr>
+              <a:t> </a:t>
+            </a:r>
+            <a:r>
+              <a:rPr lang="en-US" sz="1250" b="1" spc="-40" dirty="0" err="1" smtClean="0">
+                <a:solidFill>
+                  <a:srgbClr val="0D1B2A"/>
+                </a:solidFill>
+                <a:latin typeface="Calibri" pitchFamily="34" charset="0"/>
+                <a:ea typeface="Calibri" pitchFamily="34" charset="-122"/>
+                <a:cs typeface="Calibri" pitchFamily="34" charset="-120"/>
+              </a:rPr>
+              <a:t>limitu</a:t>
+            </a:r>
+            <a:r>
+              <a:rPr lang="en-US" sz="1250" b="1" spc="-40" dirty="0" smtClean="0">
+                <a:solidFill>
+                  <a:srgbClr val="0D1B2A"/>
+                </a:solidFill>
+                <a:latin typeface="Calibri" pitchFamily="34" charset="0"/>
+                <a:ea typeface="Calibri" pitchFamily="34" charset="-122"/>
+                <a:cs typeface="Calibri" pitchFamily="34" charset="-120"/>
+              </a:rPr>
+              <a:t> </a:t>
+            </a:r>
+            <a:r>
+              <a:rPr lang="en-US" sz="1250" b="1" spc="-40" dirty="0" err="1" smtClean="0">
+                <a:solidFill>
+                  <a:srgbClr val="0D1B2A"/>
+                </a:solidFill>
+                <a:latin typeface="Calibri" pitchFamily="34" charset="0"/>
+                <a:ea typeface="Calibri" pitchFamily="34" charset="-122"/>
+                <a:cs typeface="Calibri" pitchFamily="34" charset="-120"/>
+              </a:rPr>
+              <a:t>momentu</a:t>
+            </a:r>
+            <a:r>
+              <a:rPr lang="en-US" sz="1250" spc="-40" dirty="0" smtClean="0">
+                <a:solidFill>
+                  <a:srgbClr val="0D1B2A"/>
+                </a:solidFill>
+                <a:latin typeface="Calibri" pitchFamily="34" charset="0"/>
+                <a:ea typeface="Calibri" pitchFamily="34" charset="-122"/>
+                <a:cs typeface="Calibri" pitchFamily="34" charset="-120"/>
+              </a:rPr>
+              <a:t>: </a:t>
+            </a:r>
+            <a:r>
+              <a:rPr lang="en-US" sz="1250" spc="-40" dirty="0">
+                <a:solidFill>
+                  <a:srgbClr val="0D1B2A"/>
+                </a:solidFill>
+                <a:latin typeface="Calibri" pitchFamily="34" charset="0"/>
+                <a:ea typeface="Calibri" pitchFamily="34" charset="-122"/>
+                <a:cs typeface="Calibri" pitchFamily="34" charset="-120"/>
+              </a:rPr>
+              <a:t>τ &gt; 1,2 · </a:t>
+            </a:r>
+            <a:r>
+              <a:rPr lang="en-US" sz="1250" spc="-40" dirty="0" err="1" smtClean="0">
+                <a:solidFill>
+                  <a:srgbClr val="0D1B2A"/>
+                </a:solidFill>
+                <a:latin typeface="Calibri" pitchFamily="34" charset="0"/>
+                <a:ea typeface="Calibri" pitchFamily="34" charset="-122"/>
+                <a:cs typeface="Calibri" pitchFamily="34" charset="-120"/>
+              </a:rPr>
+              <a:t>τ</a:t>
+            </a:r>
+            <a:r>
+              <a:rPr lang="en-US" sz="1250" spc="-40" baseline="-25000" dirty="0" err="1" smtClean="0">
+                <a:solidFill>
+                  <a:srgbClr val="0D1B2A"/>
+                </a:solidFill>
+                <a:latin typeface="Calibri" pitchFamily="34" charset="0"/>
+                <a:ea typeface="Calibri" pitchFamily="34" charset="-122"/>
+                <a:cs typeface="Calibri" pitchFamily="34" charset="-120"/>
+              </a:rPr>
+              <a:t>max</a:t>
+            </a:r>
+            <a:r>
+              <a:rPr lang="en-US" sz="1250" spc="-40" dirty="0" smtClean="0">
+                <a:solidFill>
+                  <a:srgbClr val="0D1B2A"/>
+                </a:solidFill>
+                <a:latin typeface="Calibri" pitchFamily="34" charset="0"/>
+                <a:ea typeface="Calibri" pitchFamily="34" charset="-122"/>
+                <a:cs typeface="Calibri" pitchFamily="34" charset="-120"/>
+              </a:rPr>
+              <a:t> </a:t>
+            </a:r>
+            <a:r>
+              <a:rPr lang="en-US" sz="1250" spc="-40" dirty="0">
+                <a:solidFill>
+                  <a:srgbClr val="0D1B2A"/>
+                </a:solidFill>
+                <a:latin typeface="Calibri" pitchFamily="34" charset="0"/>
+                <a:ea typeface="Calibri" pitchFamily="34" charset="-122"/>
+                <a:cs typeface="Calibri" pitchFamily="34" charset="-120"/>
+              </a:rPr>
+              <a:t>przez &gt;50 ms</a:t>
+            </a:r>
+            <a:endParaRPr lang="en-US" sz="1250" spc="-40" dirty="0"/>
+          </a:p>
+          <a:p>
+            <a:pPr marL="144000" indent="-144000">
               <a:spcAft>
                 <a:spcPts val="800"/>
               </a:spcAft>
@@ -23544,7 +24469,7 @@
               <a:buChar char="•"/>
             </a:pPr>
             <a:r>
-              <a:rPr lang="en-US" sz="1250" dirty="0">
+              <a:rPr lang="en-US" sz="1250" b="1" spc="-60" dirty="0">
                 <a:solidFill>
                   <a:srgbClr val="0D1B2A"/>
                 </a:solidFill>
@@ -23552,12 +24477,23 @@
                 <a:ea typeface="Calibri" pitchFamily="34" charset="-122"/>
                 <a:cs typeface="Calibri" pitchFamily="34" charset="-120"/>
               </a:rPr>
-              <a:t>Utrata sensorów: brak wiadomości IMU przez &gt;50 ms → alarm</a:t>
-            </a:r>
-            <a:endParaRPr lang="en-US" sz="1250" dirty="0"/>
-          </a:p>
-          <a:p>
-            <a:pPr marL="342900" indent="-342900">
+              <a:t>Utrata sensorów</a:t>
+            </a:r>
+            <a:r>
+              <a:rPr lang="en-US" sz="1250" spc="-60" dirty="0">
+                <a:solidFill>
+                  <a:srgbClr val="0D1B2A"/>
+                </a:solidFill>
+                <a:latin typeface="Calibri" pitchFamily="34" charset="0"/>
+                <a:ea typeface="Calibri" pitchFamily="34" charset="-122"/>
+                <a:cs typeface="Calibri" pitchFamily="34" charset="-120"/>
+              </a:rPr>
+              <a:t>: brak wiadomości IMU przez &gt;50 ms → alarm</a:t>
+            </a:r>
+            <a:endParaRPr lang="en-US" sz="1250" spc="-60" dirty="0"/>
+          </a:p>
+          <a:p>
+            <a:pPr marL="144000" indent="-144000">
               <a:spcAft>
                 <a:spcPts val="800"/>
               </a:spcAft>
@@ -23565,7 +24501,7 @@
               <a:buChar char="•"/>
             </a:pPr>
             <a:r>
-              <a:rPr lang="en-US" sz="1250" dirty="0">
+              <a:rPr lang="en-US" sz="1250" b="1" spc="-40" dirty="0">
                 <a:solidFill>
                   <a:srgbClr val="0D1B2A"/>
                 </a:solidFill>
@@ -23573,12 +24509,23 @@
                 <a:ea typeface="Calibri" pitchFamily="34" charset="-122"/>
                 <a:cs typeface="Calibri" pitchFamily="34" charset="-120"/>
               </a:rPr>
-              <a:t>Kolizja: siła na strukturze &gt; F_collision_thresh</a:t>
-            </a:r>
-            <a:endParaRPr lang="en-US" sz="1250" dirty="0"/>
-          </a:p>
-          <a:p>
-            <a:pPr marL="342900" indent="-342900">
+              <a:t>Kolizja</a:t>
+            </a:r>
+            <a:r>
+              <a:rPr lang="en-US" sz="1250" spc="-40" dirty="0">
+                <a:solidFill>
+                  <a:srgbClr val="0D1B2A"/>
+                </a:solidFill>
+                <a:latin typeface="Calibri" pitchFamily="34" charset="0"/>
+                <a:ea typeface="Calibri" pitchFamily="34" charset="-122"/>
+                <a:cs typeface="Calibri" pitchFamily="34" charset="-120"/>
+              </a:rPr>
+              <a:t>: siła na strukturze &gt; F_collision_thresh</a:t>
+            </a:r>
+            <a:endParaRPr lang="en-US" sz="1250" spc="-40" dirty="0"/>
+          </a:p>
+          <a:p>
+            <a:pPr marL="144000" indent="-144000">
               <a:spcAft>
                 <a:spcPts val="800"/>
               </a:spcAft>
@@ -23586,7 +24533,7 @@
               <a:buChar char="•"/>
             </a:pPr>
             <a:r>
-              <a:rPr lang="en-US" sz="1250" dirty="0">
+              <a:rPr lang="en-US" sz="1250" b="1" spc="-40" dirty="0">
                 <a:solidFill>
                   <a:srgbClr val="0D1B2A"/>
                 </a:solidFill>
@@ -23594,9 +24541,64 @@
                 <a:ea typeface="Calibri" pitchFamily="34" charset="-122"/>
                 <a:cs typeface="Calibri" pitchFamily="34" charset="-120"/>
               </a:rPr>
-              <a:t>Błąd lokalizacji: kowariancja P &gt; P_max → stop i relokalizacja</a:t>
-            </a:r>
-            <a:endParaRPr lang="en-US" sz="1250" dirty="0"/>
+              <a:t>Błąd lokalizacji</a:t>
+            </a:r>
+            <a:r>
+              <a:rPr lang="en-US" sz="1250" spc="-40" dirty="0">
+                <a:solidFill>
+                  <a:srgbClr val="0D1B2A"/>
+                </a:solidFill>
+                <a:latin typeface="Calibri" pitchFamily="34" charset="0"/>
+                <a:ea typeface="Calibri" pitchFamily="34" charset="-122"/>
+                <a:cs typeface="Calibri" pitchFamily="34" charset="-120"/>
+              </a:rPr>
+              <a:t>: kowariancja P &gt; </a:t>
+            </a:r>
+            <a:r>
+              <a:rPr lang="en-US" sz="1250" spc="-40" dirty="0" err="1" smtClean="0">
+                <a:solidFill>
+                  <a:srgbClr val="0D1B2A"/>
+                </a:solidFill>
+                <a:latin typeface="Calibri" pitchFamily="34" charset="0"/>
+                <a:ea typeface="Calibri" pitchFamily="34" charset="-122"/>
+                <a:cs typeface="Calibri" pitchFamily="34" charset="-120"/>
+              </a:rPr>
+              <a:t>P</a:t>
+            </a:r>
+            <a:r>
+              <a:rPr lang="en-US" sz="1250" spc="-40" baseline="-25000" dirty="0" err="1" smtClean="0">
+                <a:solidFill>
+                  <a:srgbClr val="0D1B2A"/>
+                </a:solidFill>
+                <a:latin typeface="Calibri" pitchFamily="34" charset="0"/>
+                <a:ea typeface="Calibri" pitchFamily="34" charset="-122"/>
+                <a:cs typeface="Calibri" pitchFamily="34" charset="-120"/>
+              </a:rPr>
+              <a:t>max</a:t>
+            </a:r>
+            <a:r>
+              <a:rPr lang="en-US" sz="1250" spc="-40" dirty="0" smtClean="0">
+                <a:solidFill>
+                  <a:srgbClr val="0D1B2A"/>
+                </a:solidFill>
+                <a:latin typeface="Calibri" pitchFamily="34" charset="0"/>
+                <a:ea typeface="Calibri" pitchFamily="34" charset="-122"/>
+                <a:cs typeface="Calibri" pitchFamily="34" charset="-120"/>
+              </a:rPr>
+              <a:t> </a:t>
+            </a:r>
+            <a:r>
+              <a:rPr lang="en-US" sz="1250" spc="-40" dirty="0">
+                <a:solidFill>
+                  <a:srgbClr val="0D1B2A"/>
+                </a:solidFill>
+                <a:latin typeface="Calibri" pitchFamily="34" charset="0"/>
+                <a:ea typeface="Calibri" pitchFamily="34" charset="-122"/>
+                <a:cs typeface="Calibri" pitchFamily="34" charset="-120"/>
+              </a:rPr>
+              <a:t>→ stop i relokalizacja</a:t>
+            </a:r>
+            <a:endParaRPr lang="en-US" sz="1250" spc="-40" dirty="0"/>
           </a:p>
         </p:txBody>
       </p:sp>
@@ -23608,8 +24610,8 @@
         </p:nvSpPr>
         <p:spPr>
           <a:xfrm>
-            <a:off x="4892040" y="1600200"/>
-            <a:ext cx="3794760" cy="3108960"/>
+            <a:off x="4770120" y="1600200"/>
+            <a:ext cx="4099560" cy="1895835"/>
           </a:xfrm>
           <a:prstGeom prst="rect">
             <a:avLst/>
@@ -23618,10 +24620,12 @@
           <a:ln/>
         </p:spPr>
         <p:txBody>
-          <a:bodyPr wrap="square" lIns="63500" tIns="101600" rIns="101600" bIns="63500" rtlCol="0" anchor="t"/>
+          <a:bodyPr wrap="square" lIns="63500" tIns="36000" rIns="101600" bIns="0" rtlCol="0" anchor="t">
+            <a:spAutoFit/>
+          </a:bodyPr>
           <a:lstStyle/>
           <a:p>
-            <a:pPr marL="342900" indent="-342900">
+            <a:pPr marL="144000" indent="-144000">
               <a:spcAft>
                 <a:spcPts val="800"/>
               </a:spcAft>
@@ -23629,6 +24633,17 @@
               <a:buChar char="•"/>
             </a:pPr>
             <a:r>
+              <a:rPr lang="en-US" sz="1250" b="1" dirty="0">
+                <a:solidFill>
+                  <a:srgbClr val="0D1B2A"/>
+                </a:solidFill>
+                <a:latin typeface="Calibri" pitchFamily="34" charset="0"/>
+                <a:ea typeface="Calibri" pitchFamily="34" charset="-122"/>
+                <a:cs typeface="Calibri" pitchFamily="34" charset="-120"/>
+              </a:rPr>
+              <a:t>Zatrzymanie awaryjne</a:t>
+            </a:r>
+            <a:r>
               <a:rPr lang="en-US" sz="1250" dirty="0">
                 <a:solidFill>
                   <a:srgbClr val="0D1B2A"/>
@@ -23637,12 +24652,12 @@
                 <a:ea typeface="Calibri" pitchFamily="34" charset="-122"/>
                 <a:cs typeface="Calibri" pitchFamily="34" charset="-120"/>
               </a:rPr>
-              <a:t>Zatrzymanie awaryjne: momenty → 0 w ciągu 50 ms</a:t>
+              <a:t>: momenty → 0 w ciągu 50 ms</a:t>
             </a:r>
             <a:endParaRPr lang="en-US" sz="1250" dirty="0"/>
           </a:p>
           <a:p>
-            <a:pPr marL="342900" indent="-342900">
+            <a:pPr marL="144000" indent="-144000">
               <a:spcAft>
                 <a:spcPts val="800"/>
               </a:spcAft>
@@ -23650,7 +24665,7 @@
               <a:buChar char="•"/>
             </a:pPr>
             <a:r>
-              <a:rPr lang="en-US" sz="1250" dirty="0">
+              <a:rPr lang="en-US" sz="1250" b="1" spc="-40" dirty="0">
                 <a:solidFill>
                   <a:srgbClr val="0D1B2A"/>
                 </a:solidFill>
@@ -23658,12 +24673,23 @@
                 <a:ea typeface="Calibri" pitchFamily="34" charset="-122"/>
                 <a:cs typeface="Calibri" pitchFamily="34" charset="-120"/>
               </a:rPr>
-              <a:t>Bezpieczna postura: zejście do pozycji kucającej lub siadania</a:t>
-            </a:r>
-            <a:endParaRPr lang="en-US" sz="1250" dirty="0"/>
-          </a:p>
-          <a:p>
-            <a:pPr marL="342900" indent="-342900">
+              <a:t>Bezpieczna postura</a:t>
+            </a:r>
+            <a:r>
+              <a:rPr lang="en-US" sz="1250" spc="-40" dirty="0">
+                <a:solidFill>
+                  <a:srgbClr val="0D1B2A"/>
+                </a:solidFill>
+                <a:latin typeface="Calibri" pitchFamily="34" charset="0"/>
+                <a:ea typeface="Calibri" pitchFamily="34" charset="-122"/>
+                <a:cs typeface="Calibri" pitchFamily="34" charset="-120"/>
+              </a:rPr>
+              <a:t>: zejście do pozycji kucającej lub siadania</a:t>
+            </a:r>
+            <a:endParaRPr lang="en-US" sz="1250" spc="-40" dirty="0"/>
+          </a:p>
+          <a:p>
+            <a:pPr marL="144000" indent="-144000">
               <a:spcAft>
                 <a:spcPts val="800"/>
               </a:spcAft>
@@ -23671,6 +24697,17 @@
               <a:buChar char="•"/>
             </a:pPr>
             <a:r>
+              <a:rPr lang="en-US" sz="1250" b="1" dirty="0">
+                <a:solidFill>
+                  <a:srgbClr val="0D1B2A"/>
+                </a:solidFill>
+                <a:latin typeface="Calibri" pitchFamily="34" charset="0"/>
+                <a:ea typeface="Calibri" pitchFamily="34" charset="-122"/>
+                <a:cs typeface="Calibri" pitchFamily="34" charset="-120"/>
+              </a:rPr>
+              <a:t>Tryb degradacji</a:t>
+            </a:r>
+            <a:r>
               <a:rPr lang="en-US" sz="1250" dirty="0">
                 <a:solidFill>
                   <a:srgbClr val="0D1B2A"/>
@@ -23679,12 +24716,12 @@
                 <a:ea typeface="Calibri" pitchFamily="34" charset="-122"/>
                 <a:cs typeface="Calibri" pitchFamily="34" charset="-120"/>
               </a:rPr>
-              <a:t>Tryb degradacji: nawigacja tylko na IMU + enkodery</a:t>
+              <a:t>: nawigacja tylko na IMU + enkodery</a:t>
             </a:r>
             <a:endParaRPr lang="en-US" sz="1250" dirty="0"/>
           </a:p>
           <a:p>
-            <a:pPr marL="342900" indent="-342900">
+            <a:pPr marL="144000" indent="-144000">
               <a:spcAft>
                 <a:spcPts val="800"/>
               </a:spcAft>
@@ -23692,6 +24729,17 @@
               <a:buChar char="•"/>
             </a:pPr>
             <a:r>
+              <a:rPr lang="en-US" sz="1250" b="1" dirty="0">
+                <a:solidFill>
+                  <a:srgbClr val="0D1B2A"/>
+                </a:solidFill>
+                <a:latin typeface="Calibri" pitchFamily="34" charset="0"/>
+                <a:ea typeface="Calibri" pitchFamily="34" charset="-122"/>
+                <a:cs typeface="Calibri" pitchFamily="34" charset="-120"/>
+              </a:rPr>
+              <a:t>Powiadomienie operatora</a:t>
+            </a:r>
+            <a:r>
               <a:rPr lang="en-US" sz="1250" dirty="0">
                 <a:solidFill>
                   <a:srgbClr val="0D1B2A"/>
@@ -23700,12 +24748,12 @@
                 <a:ea typeface="Calibri" pitchFamily="34" charset="-122"/>
                 <a:cs typeface="Calibri" pitchFamily="34" charset="-120"/>
               </a:rPr>
-              <a:t>Powiadomienie operatora: alert przez ROS 2 diagnostics</a:t>
+              <a:t>: alert przez ROS 2 diagnostics</a:t>
             </a:r>
             <a:endParaRPr lang="en-US" sz="1250" dirty="0"/>
           </a:p>
           <a:p>
-            <a:pPr marL="342900" indent="-342900">
+            <a:pPr marL="144000" indent="-144000">
               <a:spcAft>
                 <a:spcPts val="800"/>
               </a:spcAft>
@@ -23713,6 +24761,17 @@
               <a:buChar char="•"/>
             </a:pPr>
             <a:r>
+              <a:rPr lang="en-US" sz="1250" b="1" dirty="0">
+                <a:solidFill>
+                  <a:srgbClr val="0D1B2A"/>
+                </a:solidFill>
+                <a:latin typeface="Calibri" pitchFamily="34" charset="0"/>
+                <a:ea typeface="Calibri" pitchFamily="34" charset="-122"/>
+                <a:cs typeface="Calibri" pitchFamily="34" charset="-120"/>
+              </a:rPr>
+              <a:t>Automatyczny restart </a:t>
+            </a:r>
+            <a:r>
               <a:rPr lang="en-US" sz="1250" dirty="0">
                 <a:solidFill>
                   <a:srgbClr val="0D1B2A"/>
@@ -23721,12 +24780,12 @@
                 <a:ea typeface="Calibri" pitchFamily="34" charset="-122"/>
                 <a:cs typeface="Calibri" pitchFamily="34" charset="-120"/>
               </a:rPr>
-              <a:t>Automatyczny restart po relokalizacji (autorecovery)</a:t>
+              <a:t>po relokalizacji (autorecovery)</a:t>
             </a:r>
             <a:endParaRPr lang="en-US" sz="1250" dirty="0"/>
           </a:p>
           <a:p>
-            <a:pPr marL="342900" indent="-342900">
+            <a:pPr marL="144000" indent="-144000">
               <a:spcAft>
                 <a:spcPts val="800"/>
               </a:spcAft>
@@ -23734,6 +24793,17 @@
               <a:buChar char="•"/>
             </a:pPr>
             <a:r>
+              <a:rPr lang="en-US" sz="1250" b="1" dirty="0">
+                <a:solidFill>
+                  <a:srgbClr val="0D1B2A"/>
+                </a:solidFill>
+                <a:latin typeface="Calibri" pitchFamily="34" charset="0"/>
+                <a:ea typeface="Calibri" pitchFamily="34" charset="-122"/>
+                <a:cs typeface="Calibri" pitchFamily="34" charset="-120"/>
+              </a:rPr>
+              <a:t>Hardware e-stop</a:t>
+            </a:r>
+            <a:r>
               <a:rPr lang="en-US" sz="1250" dirty="0">
                 <a:solidFill>
                   <a:srgbClr val="0D1B2A"/>
@@ -23742,7 +24812,7 @@
                 <a:ea typeface="Calibri" pitchFamily="34" charset="-122"/>
                 <a:cs typeface="Calibri" pitchFamily="34" charset="-120"/>
               </a:rPr>
-              <a:t>Hardware e-stop: przycisk fizyczny odcina zasilanie aktuatorów</a:t>
+              <a:t>: przycisk fizyczny odcina zasilanie aktuatorów</a:t>
             </a:r>
             <a:endParaRPr lang="en-US" sz="1250" dirty="0"/>
           </a:p>
@@ -24014,7 +25084,7 @@
         <p:spPr>
           <a:xfrm>
             <a:off x="274320" y="1097280"/>
-            <a:ext cx="8595360" cy="3749040"/>
+            <a:ext cx="8595360" cy="2583180"/>
           </a:xfrm>
           <a:prstGeom prst="rect">
             <a:avLst/>
@@ -24046,7 +25116,7 @@
         <p:spPr>
           <a:xfrm>
             <a:off x="457200" y="1188720"/>
-            <a:ext cx="8229600" cy="3520440"/>
+            <a:ext cx="8229600" cy="2290815"/>
           </a:xfrm>
           <a:prstGeom prst="rect">
             <a:avLst/>
@@ -24055,7 +25125,9 @@
           <a:ln/>
         </p:spPr>
         <p:txBody>
-          <a:bodyPr wrap="square" lIns="127000" tIns="127000" rIns="127000" bIns="127000" rtlCol="0" anchor="t"/>
+          <a:bodyPr wrap="square" lIns="127000" tIns="36000" rIns="127000" bIns="0" rtlCol="0" anchor="t">
+            <a:spAutoFit/>
+          </a:bodyPr>
           <a:lstStyle/>
           <a:p>
             <a:pPr marL="342900" indent="-342900">
@@ -24444,816 +25516,831 @@
           </a:p>
         </p:txBody>
       </p:sp>
-      <p:sp>
-        <p:nvSpPr>
-          <p:cNvPr id="6" name="Shape 4"/>
-          <p:cNvSpPr/>
-          <p:nvPr/>
-        </p:nvSpPr>
-        <p:spPr>
+      <p:grpSp>
+        <p:nvGrpSpPr>
+          <p:cNvPr id="30" name="Grupa 29"/>
+          <p:cNvGrpSpPr/>
+          <p:nvPr/>
+        </p:nvGrpSpPr>
+        <p:grpSpPr>
           <a:xfrm>
             <a:off x="274320" y="1143000"/>
-            <a:ext cx="2651760" cy="1691640"/>
-          </a:xfrm>
-          <a:prstGeom prst="rect">
-            <a:avLst/>
-          </a:prstGeom>
-          <a:solidFill>
-            <a:srgbClr val="FFFFFF"/>
-          </a:solidFill>
-          <a:ln w="12700">
+            <a:ext cx="8709660" cy="2720340"/>
+            <a:chOff x="274320" y="1143000"/>
+            <a:chExt cx="8412480" cy="3520440"/>
+          </a:xfrm>
+        </p:grpSpPr>
+        <p:sp>
+          <p:nvSpPr>
+            <p:cNvPr id="6" name="Shape 4"/>
+            <p:cNvSpPr/>
+            <p:nvPr/>
+          </p:nvSpPr>
+          <p:spPr>
+            <a:xfrm>
+              <a:off x="274320" y="1143000"/>
+              <a:ext cx="2651760" cy="1691640"/>
+            </a:xfrm>
+            <a:prstGeom prst="rect">
+              <a:avLst/>
+            </a:prstGeom>
             <a:solidFill>
-              <a:srgbClr val="E2EBF3"/>
+              <a:srgbClr val="FFFFFF"/>
             </a:solidFill>
-            <a:prstDash val="solid"/>
-          </a:ln>
-          <a:effectLst>
-            <a:outerShdw blurRad="76200" dist="25400" dir="8100000" algn="bl" rotWithShape="0">
-              <a:srgbClr val="000000">
-                <a:alpha val="12000"/>
-              </a:srgbClr>
-            </a:outerShdw>
-          </a:effectLst>
-        </p:spPr>
-      </p:sp>
-      <p:sp>
-        <p:nvSpPr>
-          <p:cNvPr id="7" name="Shape 5"/>
-          <p:cNvSpPr/>
-          <p:nvPr/>
-        </p:nvSpPr>
-        <p:spPr>
-          <a:xfrm>
-            <a:off x="274320" y="1143000"/>
-            <a:ext cx="2651760" cy="54864"/>
-          </a:xfrm>
-          <a:prstGeom prst="rect">
-            <a:avLst/>
-          </a:prstGeom>
-          <a:solidFill>
-            <a:srgbClr val="00B4D8"/>
-          </a:solidFill>
-          <a:ln w="12700">
+            <a:ln w="12700">
+              <a:solidFill>
+                <a:srgbClr val="E2EBF3"/>
+              </a:solidFill>
+              <a:prstDash val="solid"/>
+            </a:ln>
+            <a:effectLst>
+              <a:outerShdw blurRad="76200" dist="25400" dir="8100000" algn="bl" rotWithShape="0">
+                <a:srgbClr val="000000">
+                  <a:alpha val="12000"/>
+                </a:srgbClr>
+              </a:outerShdw>
+            </a:effectLst>
+          </p:spPr>
+        </p:sp>
+        <p:sp>
+          <p:nvSpPr>
+            <p:cNvPr id="7" name="Shape 5"/>
+            <p:cNvSpPr/>
+            <p:nvPr/>
+          </p:nvSpPr>
+          <p:spPr>
+            <a:xfrm>
+              <a:off x="274320" y="1143000"/>
+              <a:ext cx="2651760" cy="54864"/>
+            </a:xfrm>
+            <a:prstGeom prst="rect">
+              <a:avLst/>
+            </a:prstGeom>
             <a:solidFill>
               <a:srgbClr val="00B4D8"/>
             </a:solidFill>
-            <a:prstDash val="solid"/>
-          </a:ln>
-        </p:spPr>
-      </p:sp>
-      <p:sp>
-        <p:nvSpPr>
-          <p:cNvPr id="8" name="Text 6"/>
-          <p:cNvSpPr/>
-          <p:nvPr/>
-        </p:nvSpPr>
-        <p:spPr>
-          <a:xfrm>
-            <a:off x="384048" y="1234440"/>
-            <a:ext cx="2432304" cy="642823"/>
-          </a:xfrm>
-          <a:prstGeom prst="rect">
-            <a:avLst/>
-          </a:prstGeom>
-          <a:noFill/>
-          <a:ln/>
-        </p:spPr>
-        <p:txBody>
-          <a:bodyPr wrap="square" lIns="0" tIns="0" rIns="0" bIns="0" rtlCol="0" anchor="ctr"/>
-          <a:lstStyle/>
-          <a:p>
-            <a:pPr marL="0" indent="0">
-              <a:buNone/>
-            </a:pPr>
-            <a:r>
-              <a:rPr lang="en-US" b="1" dirty="0">
-                <a:solidFill>
-                  <a:srgbClr val="0D1B2A"/>
-                </a:solidFill>
-                <a:latin typeface="Trebuchet MS" pitchFamily="34" charset="0"/>
-                <a:ea typeface="Trebuchet MS" pitchFamily="34" charset="-122"/>
-                <a:cs typeface="Trebuchet MS" pitchFamily="34" charset="-120"/>
-              </a:rPr>
-              <a:t>Nawigacja prosta</a:t>
-            </a:r>
-            <a:endParaRPr lang="en-US" dirty="0"/>
-          </a:p>
-        </p:txBody>
-      </p:sp>
-      <p:sp>
-        <p:nvSpPr>
-          <p:cNvPr id="9" name="Text 7"/>
-          <p:cNvSpPr/>
-          <p:nvPr/>
-        </p:nvSpPr>
-        <p:spPr>
-          <a:xfrm>
-            <a:off x="384048" y="1853489"/>
-            <a:ext cx="2432304" cy="930402"/>
-          </a:xfrm>
-          <a:prstGeom prst="rect">
-            <a:avLst/>
-          </a:prstGeom>
-          <a:noFill/>
-          <a:ln/>
-        </p:spPr>
-        <p:txBody>
-          <a:bodyPr wrap="square" lIns="0" tIns="0" rIns="0" bIns="0" rtlCol="0" anchor="ctr"/>
-          <a:lstStyle/>
-          <a:p>
-            <a:pPr marL="0" indent="0">
-              <a:buNone/>
-            </a:pPr>
-            <a:r>
-              <a:rPr lang="en-US" sz="1200" dirty="0">
-                <a:solidFill>
-                  <a:srgbClr val="475569"/>
-                </a:solidFill>
-                <a:latin typeface="Calibri" pitchFamily="34" charset="0"/>
-                <a:ea typeface="Calibri" pitchFamily="34" charset="-122"/>
-                <a:cs typeface="Calibri" pitchFamily="34" charset="-120"/>
-              </a:rPr>
-              <a:t>Przejście A→B 10 m po równej powierzchni; metryka: RMSE pozycji, czas, zużycie energii</a:t>
-            </a:r>
-            <a:endParaRPr lang="en-US" sz="1200" dirty="0"/>
-          </a:p>
-        </p:txBody>
-      </p:sp>
-      <p:sp>
-        <p:nvSpPr>
-          <p:cNvPr id="10" name="Shape 8"/>
-          <p:cNvSpPr/>
-          <p:nvPr/>
-        </p:nvSpPr>
-        <p:spPr>
-          <a:xfrm>
-            <a:off x="3154680" y="1143000"/>
-            <a:ext cx="2651760" cy="1691640"/>
-          </a:xfrm>
-          <a:prstGeom prst="rect">
-            <a:avLst/>
-          </a:prstGeom>
-          <a:solidFill>
-            <a:srgbClr val="FFFFFF"/>
-          </a:solidFill>
-          <a:ln w="12700">
+            <a:ln w="12700">
+              <a:solidFill>
+                <a:srgbClr val="00B4D8"/>
+              </a:solidFill>
+              <a:prstDash val="solid"/>
+            </a:ln>
+          </p:spPr>
+        </p:sp>
+        <p:sp>
+          <p:nvSpPr>
+            <p:cNvPr id="8" name="Text 6"/>
+            <p:cNvSpPr/>
+            <p:nvPr/>
+          </p:nvSpPr>
+          <p:spPr>
+            <a:xfrm>
+              <a:off x="384048" y="1234440"/>
+              <a:ext cx="2432304" cy="642823"/>
+            </a:xfrm>
+            <a:prstGeom prst="rect">
+              <a:avLst/>
+            </a:prstGeom>
+            <a:noFill/>
+            <a:ln/>
+          </p:spPr>
+          <p:txBody>
+            <a:bodyPr wrap="square" lIns="0" tIns="0" rIns="0" bIns="0" rtlCol="0" anchor="ctr"/>
+            <a:lstStyle/>
+            <a:p>
+              <a:pPr marL="0" indent="0">
+                <a:buNone/>
+              </a:pPr>
+              <a:r>
+                <a:rPr lang="en-US" b="1" dirty="0">
+                  <a:solidFill>
+                    <a:srgbClr val="0D1B2A"/>
+                  </a:solidFill>
+                  <a:latin typeface="Trebuchet MS" pitchFamily="34" charset="0"/>
+                  <a:ea typeface="Trebuchet MS" pitchFamily="34" charset="-122"/>
+                  <a:cs typeface="Trebuchet MS" pitchFamily="34" charset="-120"/>
+                </a:rPr>
+                <a:t>Nawigacja prosta</a:t>
+              </a:r>
+              <a:endParaRPr lang="en-US" dirty="0"/>
+            </a:p>
+          </p:txBody>
+        </p:sp>
+        <p:sp>
+          <p:nvSpPr>
+            <p:cNvPr id="9" name="Text 7"/>
+            <p:cNvSpPr/>
+            <p:nvPr/>
+          </p:nvSpPr>
+          <p:spPr>
+            <a:xfrm>
+              <a:off x="384048" y="1853489"/>
+              <a:ext cx="2432304" cy="930402"/>
+            </a:xfrm>
+            <a:prstGeom prst="rect">
+              <a:avLst/>
+            </a:prstGeom>
+            <a:noFill/>
+            <a:ln/>
+          </p:spPr>
+          <p:txBody>
+            <a:bodyPr wrap="square" lIns="0" tIns="0" rIns="0" bIns="0" rtlCol="0" anchor="ctr"/>
+            <a:lstStyle/>
+            <a:p>
+              <a:pPr marL="0" indent="0">
+                <a:buNone/>
+              </a:pPr>
+              <a:r>
+                <a:rPr lang="en-US" sz="1200" dirty="0">
+                  <a:solidFill>
+                    <a:srgbClr val="475569"/>
+                  </a:solidFill>
+                  <a:latin typeface="Calibri" pitchFamily="34" charset="0"/>
+                  <a:ea typeface="Calibri" pitchFamily="34" charset="-122"/>
+                  <a:cs typeface="Calibri" pitchFamily="34" charset="-120"/>
+                </a:rPr>
+                <a:t>Przejście A→B 10 m po równej powierzchni; metryka: RMSE pozycji, czas, zużycie energii</a:t>
+              </a:r>
+              <a:endParaRPr lang="en-US" sz="1200" dirty="0"/>
+            </a:p>
+          </p:txBody>
+        </p:sp>
+        <p:sp>
+          <p:nvSpPr>
+            <p:cNvPr id="10" name="Shape 8"/>
+            <p:cNvSpPr/>
+            <p:nvPr/>
+          </p:nvSpPr>
+          <p:spPr>
+            <a:xfrm>
+              <a:off x="3154680" y="1143000"/>
+              <a:ext cx="2651760" cy="1691640"/>
+            </a:xfrm>
+            <a:prstGeom prst="rect">
+              <a:avLst/>
+            </a:prstGeom>
             <a:solidFill>
-              <a:srgbClr val="E2EBF3"/>
+              <a:srgbClr val="FFFFFF"/>
             </a:solidFill>
-            <a:prstDash val="solid"/>
-          </a:ln>
-          <a:effectLst>
-            <a:outerShdw blurRad="76200" dist="25400" dir="8100000" algn="bl" rotWithShape="0">
-              <a:srgbClr val="000000">
-                <a:alpha val="12000"/>
-              </a:srgbClr>
-            </a:outerShdw>
-          </a:effectLst>
-        </p:spPr>
-      </p:sp>
-      <p:sp>
-        <p:nvSpPr>
-          <p:cNvPr id="11" name="Shape 9"/>
-          <p:cNvSpPr/>
-          <p:nvPr/>
-        </p:nvSpPr>
-        <p:spPr>
-          <a:xfrm>
-            <a:off x="3154680" y="1143000"/>
-            <a:ext cx="2651760" cy="54864"/>
-          </a:xfrm>
-          <a:prstGeom prst="rect">
-            <a:avLst/>
-          </a:prstGeom>
-          <a:solidFill>
-            <a:srgbClr val="0077A8"/>
-          </a:solidFill>
-          <a:ln w="12700">
+            <a:ln w="12700">
+              <a:solidFill>
+                <a:srgbClr val="E2EBF3"/>
+              </a:solidFill>
+              <a:prstDash val="solid"/>
+            </a:ln>
+            <a:effectLst>
+              <a:outerShdw blurRad="76200" dist="25400" dir="8100000" algn="bl" rotWithShape="0">
+                <a:srgbClr val="000000">
+                  <a:alpha val="12000"/>
+                </a:srgbClr>
+              </a:outerShdw>
+            </a:effectLst>
+          </p:spPr>
+        </p:sp>
+        <p:sp>
+          <p:nvSpPr>
+            <p:cNvPr id="11" name="Shape 9"/>
+            <p:cNvSpPr/>
+            <p:nvPr/>
+          </p:nvSpPr>
+          <p:spPr>
+            <a:xfrm>
+              <a:off x="3154680" y="1143000"/>
+              <a:ext cx="2651760" cy="54864"/>
+            </a:xfrm>
+            <a:prstGeom prst="rect">
+              <a:avLst/>
+            </a:prstGeom>
             <a:solidFill>
               <a:srgbClr val="0077A8"/>
             </a:solidFill>
-            <a:prstDash val="solid"/>
-          </a:ln>
-        </p:spPr>
-      </p:sp>
-      <p:sp>
-        <p:nvSpPr>
-          <p:cNvPr id="12" name="Text 10"/>
-          <p:cNvSpPr/>
-          <p:nvPr/>
-        </p:nvSpPr>
-        <p:spPr>
-          <a:xfrm>
-            <a:off x="3264408" y="1234440"/>
-            <a:ext cx="2432304" cy="642823"/>
-          </a:xfrm>
-          <a:prstGeom prst="rect">
-            <a:avLst/>
-          </a:prstGeom>
-          <a:noFill/>
-          <a:ln/>
-        </p:spPr>
-        <p:txBody>
-          <a:bodyPr wrap="square" lIns="0" tIns="0" rIns="0" bIns="0" rtlCol="0" anchor="ctr"/>
-          <a:lstStyle/>
-          <a:p>
-            <a:pPr marL="0" indent="0">
-              <a:buNone/>
-            </a:pPr>
-            <a:r>
-              <a:rPr lang="en-US" b="1" dirty="0">
-                <a:solidFill>
-                  <a:srgbClr val="0D1B2A"/>
-                </a:solidFill>
-                <a:latin typeface="Trebuchet MS" pitchFamily="34" charset="0"/>
-                <a:ea typeface="Trebuchet MS" pitchFamily="34" charset="-122"/>
-                <a:cs typeface="Trebuchet MS" pitchFamily="34" charset="-120"/>
-              </a:rPr>
-              <a:t>Omijanie przeszkód</a:t>
-            </a:r>
-            <a:endParaRPr lang="en-US" dirty="0"/>
-          </a:p>
-        </p:txBody>
-      </p:sp>
-      <p:sp>
-        <p:nvSpPr>
-          <p:cNvPr id="13" name="Text 11"/>
-          <p:cNvSpPr/>
-          <p:nvPr/>
-        </p:nvSpPr>
-        <p:spPr>
-          <a:xfrm>
-            <a:off x="3264408" y="1853489"/>
-            <a:ext cx="2432304" cy="930402"/>
-          </a:xfrm>
-          <a:prstGeom prst="rect">
-            <a:avLst/>
-          </a:prstGeom>
-          <a:noFill/>
-          <a:ln/>
-        </p:spPr>
-        <p:txBody>
-          <a:bodyPr wrap="square" lIns="0" tIns="0" rIns="0" bIns="0" rtlCol="0" anchor="ctr"/>
-          <a:lstStyle/>
-          <a:p>
-            <a:pPr marL="0" indent="0">
-              <a:buNone/>
-            </a:pPr>
-            <a:r>
-              <a:rPr lang="en-US" sz="1200" dirty="0">
-                <a:solidFill>
-                  <a:srgbClr val="475569"/>
-                </a:solidFill>
-                <a:latin typeface="Calibri" pitchFamily="34" charset="0"/>
-                <a:ea typeface="Calibri" pitchFamily="34" charset="-122"/>
-                <a:cs typeface="Calibri" pitchFamily="34" charset="-120"/>
-              </a:rPr>
-              <a:t>5 statycznych + 2 dynamiczne przeszkody; metryka: liczba kolizji, liczba replanu</a:t>
-            </a:r>
-            <a:endParaRPr lang="en-US" sz="1200" dirty="0"/>
-          </a:p>
-        </p:txBody>
-      </p:sp>
-      <p:sp>
-        <p:nvSpPr>
-          <p:cNvPr id="14" name="Shape 12"/>
-          <p:cNvSpPr/>
-          <p:nvPr/>
-        </p:nvSpPr>
-        <p:spPr>
-          <a:xfrm>
-            <a:off x="6035040" y="1143000"/>
-            <a:ext cx="2651760" cy="1691640"/>
-          </a:xfrm>
-          <a:prstGeom prst="rect">
-            <a:avLst/>
-          </a:prstGeom>
-          <a:solidFill>
-            <a:srgbClr val="FFFFFF"/>
-          </a:solidFill>
-          <a:ln w="12700">
+            <a:ln w="12700">
+              <a:solidFill>
+                <a:srgbClr val="0077A8"/>
+              </a:solidFill>
+              <a:prstDash val="solid"/>
+            </a:ln>
+          </p:spPr>
+        </p:sp>
+        <p:sp>
+          <p:nvSpPr>
+            <p:cNvPr id="12" name="Text 10"/>
+            <p:cNvSpPr/>
+            <p:nvPr/>
+          </p:nvSpPr>
+          <p:spPr>
+            <a:xfrm>
+              <a:off x="3264408" y="1234440"/>
+              <a:ext cx="2432304" cy="642823"/>
+            </a:xfrm>
+            <a:prstGeom prst="rect">
+              <a:avLst/>
+            </a:prstGeom>
+            <a:noFill/>
+            <a:ln/>
+          </p:spPr>
+          <p:txBody>
+            <a:bodyPr wrap="square" lIns="0" tIns="0" rIns="0" bIns="0" rtlCol="0" anchor="ctr"/>
+            <a:lstStyle/>
+            <a:p>
+              <a:pPr marL="0" indent="0">
+                <a:buNone/>
+              </a:pPr>
+              <a:r>
+                <a:rPr lang="en-US" b="1" dirty="0">
+                  <a:solidFill>
+                    <a:srgbClr val="0D1B2A"/>
+                  </a:solidFill>
+                  <a:latin typeface="Trebuchet MS" pitchFamily="34" charset="0"/>
+                  <a:ea typeface="Trebuchet MS" pitchFamily="34" charset="-122"/>
+                  <a:cs typeface="Trebuchet MS" pitchFamily="34" charset="-120"/>
+                </a:rPr>
+                <a:t>Omijanie przeszkód</a:t>
+              </a:r>
+              <a:endParaRPr lang="en-US" dirty="0"/>
+            </a:p>
+          </p:txBody>
+        </p:sp>
+        <p:sp>
+          <p:nvSpPr>
+            <p:cNvPr id="13" name="Text 11"/>
+            <p:cNvSpPr/>
+            <p:nvPr/>
+          </p:nvSpPr>
+          <p:spPr>
+            <a:xfrm>
+              <a:off x="3264408" y="1853489"/>
+              <a:ext cx="2432304" cy="930402"/>
+            </a:xfrm>
+            <a:prstGeom prst="rect">
+              <a:avLst/>
+            </a:prstGeom>
+            <a:noFill/>
+            <a:ln/>
+          </p:spPr>
+          <p:txBody>
+            <a:bodyPr wrap="square" lIns="0" tIns="0" rIns="0" bIns="0" rtlCol="0" anchor="ctr"/>
+            <a:lstStyle/>
+            <a:p>
+              <a:pPr marL="0" indent="0">
+                <a:buNone/>
+              </a:pPr>
+              <a:r>
+                <a:rPr lang="en-US" sz="1200" dirty="0">
+                  <a:solidFill>
+                    <a:srgbClr val="475569"/>
+                  </a:solidFill>
+                  <a:latin typeface="Calibri" pitchFamily="34" charset="0"/>
+                  <a:ea typeface="Calibri" pitchFamily="34" charset="-122"/>
+                  <a:cs typeface="Calibri" pitchFamily="34" charset="-120"/>
+                </a:rPr>
+                <a:t>5 statycznych + 2 dynamiczne przeszkody; metryka: liczba kolizji, liczba replanu</a:t>
+              </a:r>
+              <a:endParaRPr lang="en-US" sz="1200" dirty="0"/>
+            </a:p>
+          </p:txBody>
+        </p:sp>
+        <p:sp>
+          <p:nvSpPr>
+            <p:cNvPr id="14" name="Shape 12"/>
+            <p:cNvSpPr/>
+            <p:nvPr/>
+          </p:nvSpPr>
+          <p:spPr>
+            <a:xfrm>
+              <a:off x="6035040" y="1143000"/>
+              <a:ext cx="2651760" cy="1691640"/>
+            </a:xfrm>
+            <a:prstGeom prst="rect">
+              <a:avLst/>
+            </a:prstGeom>
             <a:solidFill>
-              <a:srgbClr val="E2EBF3"/>
+              <a:srgbClr val="FFFFFF"/>
             </a:solidFill>
-            <a:prstDash val="solid"/>
-          </a:ln>
-          <a:effectLst>
-            <a:outerShdw blurRad="76200" dist="25400" dir="8100000" algn="bl" rotWithShape="0">
-              <a:srgbClr val="000000">
-                <a:alpha val="12000"/>
-              </a:srgbClr>
-            </a:outerShdw>
-          </a:effectLst>
-        </p:spPr>
-      </p:sp>
-      <p:sp>
-        <p:nvSpPr>
-          <p:cNvPr id="15" name="Shape 13"/>
-          <p:cNvSpPr/>
-          <p:nvPr/>
-        </p:nvSpPr>
-        <p:spPr>
-          <a:xfrm>
-            <a:off x="6035040" y="1143000"/>
-            <a:ext cx="2651760" cy="54864"/>
-          </a:xfrm>
-          <a:prstGeom prst="rect">
-            <a:avLst/>
-          </a:prstGeom>
-          <a:solidFill>
-            <a:srgbClr val="0077A8"/>
-          </a:solidFill>
-          <a:ln w="12700">
+            <a:ln w="12700">
+              <a:solidFill>
+                <a:srgbClr val="E2EBF3"/>
+              </a:solidFill>
+              <a:prstDash val="solid"/>
+            </a:ln>
+            <a:effectLst>
+              <a:outerShdw blurRad="76200" dist="25400" dir="8100000" algn="bl" rotWithShape="0">
+                <a:srgbClr val="000000">
+                  <a:alpha val="12000"/>
+                </a:srgbClr>
+              </a:outerShdw>
+            </a:effectLst>
+          </p:spPr>
+        </p:sp>
+        <p:sp>
+          <p:nvSpPr>
+            <p:cNvPr id="15" name="Shape 13"/>
+            <p:cNvSpPr/>
+            <p:nvPr/>
+          </p:nvSpPr>
+          <p:spPr>
+            <a:xfrm>
+              <a:off x="6035040" y="1143000"/>
+              <a:ext cx="2651760" cy="54864"/>
+            </a:xfrm>
+            <a:prstGeom prst="rect">
+              <a:avLst/>
+            </a:prstGeom>
             <a:solidFill>
               <a:srgbClr val="0077A8"/>
             </a:solidFill>
-            <a:prstDash val="solid"/>
-          </a:ln>
-        </p:spPr>
-      </p:sp>
-      <p:sp>
-        <p:nvSpPr>
-          <p:cNvPr id="16" name="Text 14"/>
-          <p:cNvSpPr/>
-          <p:nvPr/>
-        </p:nvSpPr>
-        <p:spPr>
-          <a:xfrm>
-            <a:off x="6144768" y="1234440"/>
-            <a:ext cx="2432304" cy="642823"/>
-          </a:xfrm>
-          <a:prstGeom prst="rect">
-            <a:avLst/>
-          </a:prstGeom>
-          <a:noFill/>
-          <a:ln/>
-        </p:spPr>
-        <p:txBody>
-          <a:bodyPr wrap="square" lIns="0" tIns="0" rIns="0" bIns="0" rtlCol="0" anchor="ctr"/>
-          <a:lstStyle/>
-          <a:p>
-            <a:pPr marL="0" indent="0">
-              <a:buNone/>
-            </a:pPr>
-            <a:r>
-              <a:rPr lang="en-US" b="1" dirty="0">
-                <a:solidFill>
-                  <a:srgbClr val="0D1B2A"/>
-                </a:solidFill>
-                <a:latin typeface="Trebuchet MS" pitchFamily="34" charset="0"/>
-                <a:ea typeface="Trebuchet MS" pitchFamily="34" charset="-122"/>
-                <a:cs typeface="Trebuchet MS" pitchFamily="34" charset="-120"/>
-              </a:rPr>
-              <a:t>Schody</a:t>
-            </a:r>
-            <a:endParaRPr lang="en-US" dirty="0"/>
-          </a:p>
-        </p:txBody>
-      </p:sp>
-      <p:sp>
-        <p:nvSpPr>
-          <p:cNvPr id="17" name="Text 15"/>
-          <p:cNvSpPr/>
-          <p:nvPr/>
-        </p:nvSpPr>
-        <p:spPr>
-          <a:xfrm>
-            <a:off x="6144768" y="1853489"/>
-            <a:ext cx="2432304" cy="930402"/>
-          </a:xfrm>
-          <a:prstGeom prst="rect">
-            <a:avLst/>
-          </a:prstGeom>
-          <a:noFill/>
-          <a:ln/>
-        </p:spPr>
-        <p:txBody>
-          <a:bodyPr wrap="square" lIns="0" tIns="0" rIns="0" bIns="0" rtlCol="0" anchor="ctr"/>
-          <a:lstStyle/>
-          <a:p>
-            <a:pPr marL="0" indent="0">
-              <a:buNone/>
-            </a:pPr>
-            <a:r>
-              <a:rPr lang="en-US" sz="1200" dirty="0">
-                <a:solidFill>
-                  <a:srgbClr val="475569"/>
-                </a:solidFill>
-                <a:latin typeface="Calibri" pitchFamily="34" charset="0"/>
-                <a:ea typeface="Calibri" pitchFamily="34" charset="-122"/>
-                <a:cs typeface="Calibri" pitchFamily="34" charset="-120"/>
-              </a:rPr>
-              <a:t>3 stopnie h=15 cm; metryka: powodzenie, czas, liczba korekt ZMP, szczyt momentów</a:t>
-            </a:r>
-            <a:endParaRPr lang="en-US" sz="1200" dirty="0"/>
-          </a:p>
-        </p:txBody>
-      </p:sp>
-      <p:sp>
-        <p:nvSpPr>
-          <p:cNvPr id="18" name="Shape 16"/>
-          <p:cNvSpPr/>
-          <p:nvPr/>
-        </p:nvSpPr>
-        <p:spPr>
-          <a:xfrm>
-            <a:off x="274320" y="2971800"/>
-            <a:ext cx="2651760" cy="1691640"/>
-          </a:xfrm>
-          <a:prstGeom prst="rect">
-            <a:avLst/>
-          </a:prstGeom>
-          <a:solidFill>
-            <a:srgbClr val="FFFFFF"/>
-          </a:solidFill>
-          <a:ln w="12700">
+            <a:ln w="12700">
+              <a:solidFill>
+                <a:srgbClr val="0077A8"/>
+              </a:solidFill>
+              <a:prstDash val="solid"/>
+            </a:ln>
+          </p:spPr>
+        </p:sp>
+        <p:sp>
+          <p:nvSpPr>
+            <p:cNvPr id="16" name="Text 14"/>
+            <p:cNvSpPr/>
+            <p:nvPr/>
+          </p:nvSpPr>
+          <p:spPr>
+            <a:xfrm>
+              <a:off x="6144768" y="1234440"/>
+              <a:ext cx="2432304" cy="642823"/>
+            </a:xfrm>
+            <a:prstGeom prst="rect">
+              <a:avLst/>
+            </a:prstGeom>
+            <a:noFill/>
+            <a:ln/>
+          </p:spPr>
+          <p:txBody>
+            <a:bodyPr wrap="square" lIns="0" tIns="0" rIns="0" bIns="0" rtlCol="0" anchor="ctr"/>
+            <a:lstStyle/>
+            <a:p>
+              <a:pPr marL="0" indent="0">
+                <a:buNone/>
+              </a:pPr>
+              <a:r>
+                <a:rPr lang="en-US" b="1" dirty="0">
+                  <a:solidFill>
+                    <a:srgbClr val="0D1B2A"/>
+                  </a:solidFill>
+                  <a:latin typeface="Trebuchet MS" pitchFamily="34" charset="0"/>
+                  <a:ea typeface="Trebuchet MS" pitchFamily="34" charset="-122"/>
+                  <a:cs typeface="Trebuchet MS" pitchFamily="34" charset="-120"/>
+                </a:rPr>
+                <a:t>Schody</a:t>
+              </a:r>
+              <a:endParaRPr lang="en-US" dirty="0"/>
+            </a:p>
+          </p:txBody>
+        </p:sp>
+        <p:sp>
+          <p:nvSpPr>
+            <p:cNvPr id="17" name="Text 15"/>
+            <p:cNvSpPr/>
+            <p:nvPr/>
+          </p:nvSpPr>
+          <p:spPr>
+            <a:xfrm>
+              <a:off x="6144768" y="1853489"/>
+              <a:ext cx="2432304" cy="930402"/>
+            </a:xfrm>
+            <a:prstGeom prst="rect">
+              <a:avLst/>
+            </a:prstGeom>
+            <a:noFill/>
+            <a:ln/>
+          </p:spPr>
+          <p:txBody>
+            <a:bodyPr wrap="square" lIns="0" tIns="0" rIns="0" bIns="0" rtlCol="0" anchor="ctr"/>
+            <a:lstStyle/>
+            <a:p>
+              <a:pPr marL="0" indent="0">
+                <a:buNone/>
+              </a:pPr>
+              <a:r>
+                <a:rPr lang="en-US" sz="1200" dirty="0">
+                  <a:solidFill>
+                    <a:srgbClr val="475569"/>
+                  </a:solidFill>
+                  <a:latin typeface="Calibri" pitchFamily="34" charset="0"/>
+                  <a:ea typeface="Calibri" pitchFamily="34" charset="-122"/>
+                  <a:cs typeface="Calibri" pitchFamily="34" charset="-120"/>
+                </a:rPr>
+                <a:t>3 stopnie h=15 cm; metryka: powodzenie, czas, liczba korekt ZMP, szczyt momentów</a:t>
+              </a:r>
+              <a:endParaRPr lang="en-US" sz="1200" dirty="0"/>
+            </a:p>
+          </p:txBody>
+        </p:sp>
+        <p:sp>
+          <p:nvSpPr>
+            <p:cNvPr id="18" name="Shape 16"/>
+            <p:cNvSpPr/>
+            <p:nvPr/>
+          </p:nvSpPr>
+          <p:spPr>
+            <a:xfrm>
+              <a:off x="274320" y="2971800"/>
+              <a:ext cx="2651760" cy="1691640"/>
+            </a:xfrm>
+            <a:prstGeom prst="rect">
+              <a:avLst/>
+            </a:prstGeom>
             <a:solidFill>
-              <a:srgbClr val="E2EBF3"/>
+              <a:srgbClr val="FFFFFF"/>
             </a:solidFill>
-            <a:prstDash val="solid"/>
-          </a:ln>
-          <a:effectLst>
-            <a:outerShdw blurRad="76200" dist="25400" dir="8100000" algn="bl" rotWithShape="0">
-              <a:srgbClr val="000000">
-                <a:alpha val="12000"/>
-              </a:srgbClr>
-            </a:outerShdw>
-          </a:effectLst>
-        </p:spPr>
-      </p:sp>
-      <p:sp>
-        <p:nvSpPr>
-          <p:cNvPr id="19" name="Shape 17"/>
-          <p:cNvSpPr/>
-          <p:nvPr/>
-        </p:nvSpPr>
-        <p:spPr>
-          <a:xfrm>
-            <a:off x="274320" y="2971800"/>
-            <a:ext cx="2651760" cy="54864"/>
-          </a:xfrm>
-          <a:prstGeom prst="rect">
-            <a:avLst/>
-          </a:prstGeom>
-          <a:solidFill>
-            <a:srgbClr val="F72585"/>
-          </a:solidFill>
-          <a:ln w="12700">
+            <a:ln w="12700">
+              <a:solidFill>
+                <a:srgbClr val="E2EBF3"/>
+              </a:solidFill>
+              <a:prstDash val="solid"/>
+            </a:ln>
+            <a:effectLst>
+              <a:outerShdw blurRad="76200" dist="25400" dir="8100000" algn="bl" rotWithShape="0">
+                <a:srgbClr val="000000">
+                  <a:alpha val="12000"/>
+                </a:srgbClr>
+              </a:outerShdw>
+            </a:effectLst>
+          </p:spPr>
+        </p:sp>
+        <p:sp>
+          <p:nvSpPr>
+            <p:cNvPr id="19" name="Shape 17"/>
+            <p:cNvSpPr/>
+            <p:nvPr/>
+          </p:nvSpPr>
+          <p:spPr>
+            <a:xfrm>
+              <a:off x="274320" y="2971800"/>
+              <a:ext cx="2651760" cy="54864"/>
+            </a:xfrm>
+            <a:prstGeom prst="rect">
+              <a:avLst/>
+            </a:prstGeom>
             <a:solidFill>
               <a:srgbClr val="F72585"/>
             </a:solidFill>
-            <a:prstDash val="solid"/>
-          </a:ln>
-        </p:spPr>
-      </p:sp>
-      <p:sp>
-        <p:nvSpPr>
-          <p:cNvPr id="20" name="Text 18"/>
-          <p:cNvSpPr/>
-          <p:nvPr/>
-        </p:nvSpPr>
-        <p:spPr>
-          <a:xfrm>
-            <a:off x="384048" y="3063240"/>
-            <a:ext cx="2432304" cy="642823"/>
-          </a:xfrm>
-          <a:prstGeom prst="rect">
-            <a:avLst/>
-          </a:prstGeom>
-          <a:noFill/>
-          <a:ln/>
-        </p:spPr>
-        <p:txBody>
-          <a:bodyPr wrap="square" lIns="0" tIns="0" rIns="0" bIns="0" rtlCol="0" anchor="ctr"/>
-          <a:lstStyle/>
-          <a:p>
-            <a:pPr marL="0" indent="0">
-              <a:buNone/>
-            </a:pPr>
-            <a:r>
-              <a:rPr lang="en-US" b="1" dirty="0">
-                <a:solidFill>
-                  <a:srgbClr val="0D1B2A"/>
-                </a:solidFill>
-                <a:latin typeface="Trebuchet MS" pitchFamily="34" charset="0"/>
-                <a:ea typeface="Trebuchet MS" pitchFamily="34" charset="-122"/>
-                <a:cs typeface="Trebuchet MS" pitchFamily="34" charset="-120"/>
-              </a:rPr>
-              <a:t>Pchnięcie boczne</a:t>
-            </a:r>
-            <a:endParaRPr lang="en-US" dirty="0"/>
-          </a:p>
-        </p:txBody>
-      </p:sp>
-      <p:sp>
-        <p:nvSpPr>
-          <p:cNvPr id="21" name="Text 19"/>
-          <p:cNvSpPr/>
-          <p:nvPr/>
-        </p:nvSpPr>
-        <p:spPr>
-          <a:xfrm>
-            <a:off x="384048" y="3682289"/>
-            <a:ext cx="2432304" cy="930402"/>
-          </a:xfrm>
-          <a:prstGeom prst="rect">
-            <a:avLst/>
-          </a:prstGeom>
-          <a:noFill/>
-          <a:ln/>
-        </p:spPr>
-        <p:txBody>
-          <a:bodyPr wrap="square" lIns="0" tIns="0" rIns="0" bIns="0" rtlCol="0" anchor="ctr"/>
-          <a:lstStyle/>
-          <a:p>
-            <a:pPr marL="0" indent="0">
-              <a:buNone/>
-            </a:pPr>
-            <a:r>
-              <a:rPr lang="en-US" sz="1200" dirty="0">
-                <a:solidFill>
-                  <a:srgbClr val="475569"/>
-                </a:solidFill>
-                <a:latin typeface="Calibri" pitchFamily="34" charset="0"/>
-                <a:ea typeface="Calibri" pitchFamily="34" charset="-122"/>
-                <a:cs typeface="Calibri" pitchFamily="34" charset="-120"/>
-              </a:rPr>
-              <a:t>Impuls 20 Ns; metryka: amplituda CP, czas odzyskania równowagi, krok korekcyjny</a:t>
-            </a:r>
-            <a:endParaRPr lang="en-US" sz="1200" dirty="0"/>
-          </a:p>
-        </p:txBody>
-      </p:sp>
-      <p:sp>
-        <p:nvSpPr>
-          <p:cNvPr id="22" name="Shape 20"/>
-          <p:cNvSpPr/>
-          <p:nvPr/>
-        </p:nvSpPr>
-        <p:spPr>
-          <a:xfrm>
-            <a:off x="3154680" y="2971800"/>
-            <a:ext cx="2651760" cy="1691640"/>
-          </a:xfrm>
-          <a:prstGeom prst="rect">
-            <a:avLst/>
-          </a:prstGeom>
-          <a:solidFill>
-            <a:srgbClr val="FFFFFF"/>
-          </a:solidFill>
-          <a:ln w="12700">
+            <a:ln w="12700">
+              <a:solidFill>
+                <a:srgbClr val="F72585"/>
+              </a:solidFill>
+              <a:prstDash val="solid"/>
+            </a:ln>
+          </p:spPr>
+        </p:sp>
+        <p:sp>
+          <p:nvSpPr>
+            <p:cNvPr id="20" name="Text 18"/>
+            <p:cNvSpPr/>
+            <p:nvPr/>
+          </p:nvSpPr>
+          <p:spPr>
+            <a:xfrm>
+              <a:off x="384048" y="3063240"/>
+              <a:ext cx="2432304" cy="642823"/>
+            </a:xfrm>
+            <a:prstGeom prst="rect">
+              <a:avLst/>
+            </a:prstGeom>
+            <a:noFill/>
+            <a:ln/>
+          </p:spPr>
+          <p:txBody>
+            <a:bodyPr wrap="square" lIns="0" tIns="0" rIns="0" bIns="0" rtlCol="0" anchor="ctr"/>
+            <a:lstStyle/>
+            <a:p>
+              <a:pPr marL="0" indent="0">
+                <a:buNone/>
+              </a:pPr>
+              <a:r>
+                <a:rPr lang="en-US" b="1" dirty="0">
+                  <a:solidFill>
+                    <a:srgbClr val="0D1B2A"/>
+                  </a:solidFill>
+                  <a:latin typeface="Trebuchet MS" pitchFamily="34" charset="0"/>
+                  <a:ea typeface="Trebuchet MS" pitchFamily="34" charset="-122"/>
+                  <a:cs typeface="Trebuchet MS" pitchFamily="34" charset="-120"/>
+                </a:rPr>
+                <a:t>Pchnięcie boczne</a:t>
+              </a:r>
+              <a:endParaRPr lang="en-US" dirty="0"/>
+            </a:p>
+          </p:txBody>
+        </p:sp>
+        <p:sp>
+          <p:nvSpPr>
+            <p:cNvPr id="21" name="Text 19"/>
+            <p:cNvSpPr/>
+            <p:nvPr/>
+          </p:nvSpPr>
+          <p:spPr>
+            <a:xfrm>
+              <a:off x="384048" y="3682289"/>
+              <a:ext cx="2432304" cy="930402"/>
+            </a:xfrm>
+            <a:prstGeom prst="rect">
+              <a:avLst/>
+            </a:prstGeom>
+            <a:noFill/>
+            <a:ln/>
+          </p:spPr>
+          <p:txBody>
+            <a:bodyPr wrap="square" lIns="0" tIns="0" rIns="0" bIns="0" rtlCol="0" anchor="ctr"/>
+            <a:lstStyle/>
+            <a:p>
+              <a:pPr marL="0" indent="0">
+                <a:buNone/>
+              </a:pPr>
+              <a:r>
+                <a:rPr lang="en-US" sz="1200" dirty="0">
+                  <a:solidFill>
+                    <a:srgbClr val="475569"/>
+                  </a:solidFill>
+                  <a:latin typeface="Calibri" pitchFamily="34" charset="0"/>
+                  <a:ea typeface="Calibri" pitchFamily="34" charset="-122"/>
+                  <a:cs typeface="Calibri" pitchFamily="34" charset="-120"/>
+                </a:rPr>
+                <a:t>Impuls 20 Ns; metryka: amplituda CP, czas odzyskania równowagi, krok korekcyjny</a:t>
+              </a:r>
+              <a:endParaRPr lang="en-US" sz="1200" dirty="0"/>
+            </a:p>
+          </p:txBody>
+        </p:sp>
+        <p:sp>
+          <p:nvSpPr>
+            <p:cNvPr id="22" name="Shape 20"/>
+            <p:cNvSpPr/>
+            <p:nvPr/>
+          </p:nvSpPr>
+          <p:spPr>
+            <a:xfrm>
+              <a:off x="3154680" y="2971800"/>
+              <a:ext cx="2651760" cy="1691640"/>
+            </a:xfrm>
+            <a:prstGeom prst="rect">
+              <a:avLst/>
+            </a:prstGeom>
             <a:solidFill>
-              <a:srgbClr val="E2EBF3"/>
+              <a:srgbClr val="FFFFFF"/>
             </a:solidFill>
-            <a:prstDash val="solid"/>
-          </a:ln>
-          <a:effectLst>
-            <a:outerShdw blurRad="76200" dist="25400" dir="8100000" algn="bl" rotWithShape="0">
-              <a:srgbClr val="000000">
-                <a:alpha val="12000"/>
-              </a:srgbClr>
-            </a:outerShdw>
-          </a:effectLst>
-        </p:spPr>
-      </p:sp>
-      <p:sp>
-        <p:nvSpPr>
-          <p:cNvPr id="23" name="Shape 21"/>
-          <p:cNvSpPr/>
-          <p:nvPr/>
-        </p:nvSpPr>
-        <p:spPr>
-          <a:xfrm>
-            <a:off x="3154680" y="2971800"/>
-            <a:ext cx="2651760" cy="54864"/>
-          </a:xfrm>
-          <a:prstGeom prst="rect">
-            <a:avLst/>
-          </a:prstGeom>
-          <a:solidFill>
-            <a:srgbClr val="1A3550"/>
-          </a:solidFill>
-          <a:ln w="12700">
+            <a:ln w="12700">
+              <a:solidFill>
+                <a:srgbClr val="E2EBF3"/>
+              </a:solidFill>
+              <a:prstDash val="solid"/>
+            </a:ln>
+            <a:effectLst>
+              <a:outerShdw blurRad="76200" dist="25400" dir="8100000" algn="bl" rotWithShape="0">
+                <a:srgbClr val="000000">
+                  <a:alpha val="12000"/>
+                </a:srgbClr>
+              </a:outerShdw>
+            </a:effectLst>
+          </p:spPr>
+        </p:sp>
+        <p:sp>
+          <p:nvSpPr>
+            <p:cNvPr id="23" name="Shape 21"/>
+            <p:cNvSpPr/>
+            <p:nvPr/>
+          </p:nvSpPr>
+          <p:spPr>
+            <a:xfrm>
+              <a:off x="3154680" y="2971800"/>
+              <a:ext cx="2651760" cy="54864"/>
+            </a:xfrm>
+            <a:prstGeom prst="rect">
+              <a:avLst/>
+            </a:prstGeom>
             <a:solidFill>
               <a:srgbClr val="1A3550"/>
             </a:solidFill>
-            <a:prstDash val="solid"/>
-          </a:ln>
-        </p:spPr>
-      </p:sp>
-      <p:sp>
-        <p:nvSpPr>
-          <p:cNvPr id="24" name="Text 22"/>
-          <p:cNvSpPr/>
-          <p:nvPr/>
-        </p:nvSpPr>
-        <p:spPr>
-          <a:xfrm>
-            <a:off x="3264408" y="3063240"/>
-            <a:ext cx="2432304" cy="642823"/>
-          </a:xfrm>
-          <a:prstGeom prst="rect">
-            <a:avLst/>
-          </a:prstGeom>
-          <a:noFill/>
-          <a:ln/>
-        </p:spPr>
-        <p:txBody>
-          <a:bodyPr wrap="square" lIns="0" tIns="0" rIns="0" bIns="0" rtlCol="0" anchor="ctr"/>
-          <a:lstStyle/>
-          <a:p>
-            <a:pPr marL="0" indent="0">
-              <a:buNone/>
-            </a:pPr>
-            <a:r>
-              <a:rPr lang="en-US" b="1" dirty="0">
-                <a:solidFill>
-                  <a:srgbClr val="0D1B2A"/>
-                </a:solidFill>
-                <a:latin typeface="Trebuchet MS" pitchFamily="34" charset="0"/>
-                <a:ea typeface="Trebuchet MS" pitchFamily="34" charset="-122"/>
-                <a:cs typeface="Trebuchet MS" pitchFamily="34" charset="-120"/>
-              </a:rPr>
-              <a:t>Drzwi i progi</a:t>
-            </a:r>
-            <a:endParaRPr lang="en-US" dirty="0"/>
-          </a:p>
-        </p:txBody>
-      </p:sp>
-      <p:sp>
-        <p:nvSpPr>
-          <p:cNvPr id="25" name="Text 23"/>
-          <p:cNvSpPr/>
-          <p:nvPr/>
-        </p:nvSpPr>
-        <p:spPr>
-          <a:xfrm>
-            <a:off x="3264408" y="3682289"/>
-            <a:ext cx="2432304" cy="930402"/>
-          </a:xfrm>
-          <a:prstGeom prst="rect">
-            <a:avLst/>
-          </a:prstGeom>
-          <a:noFill/>
-          <a:ln/>
-        </p:spPr>
-        <p:txBody>
-          <a:bodyPr wrap="square" lIns="0" tIns="0" rIns="0" bIns="0" rtlCol="0" anchor="ctr"/>
-          <a:lstStyle/>
-          <a:p>
-            <a:pPr marL="0" indent="0">
-              <a:buNone/>
-            </a:pPr>
-            <a:r>
-              <a:rPr lang="en-US" sz="1200" dirty="0">
-                <a:solidFill>
-                  <a:srgbClr val="475569"/>
-                </a:solidFill>
-                <a:latin typeface="Calibri" pitchFamily="34" charset="0"/>
-                <a:ea typeface="Calibri" pitchFamily="34" charset="-122"/>
-                <a:cs typeface="Calibri" pitchFamily="34" charset="-120"/>
-              </a:rPr>
-              <a:t>Otwieranie klamki, przekroczenie progu 3 cm; metryka: sukces, czas interakcji</a:t>
-            </a:r>
-            <a:endParaRPr lang="en-US" sz="1200" dirty="0"/>
-          </a:p>
-        </p:txBody>
-      </p:sp>
-      <p:sp>
-        <p:nvSpPr>
-          <p:cNvPr id="26" name="Shape 24"/>
-          <p:cNvSpPr/>
-          <p:nvPr/>
-        </p:nvSpPr>
-        <p:spPr>
-          <a:xfrm>
-            <a:off x="6035040" y="2971800"/>
-            <a:ext cx="2651760" cy="1691640"/>
-          </a:xfrm>
-          <a:prstGeom prst="rect">
-            <a:avLst/>
-          </a:prstGeom>
-          <a:solidFill>
-            <a:srgbClr val="FFFFFF"/>
-          </a:solidFill>
-          <a:ln w="12700">
+            <a:ln w="12700">
+              <a:solidFill>
+                <a:srgbClr val="1A3550"/>
+              </a:solidFill>
+              <a:prstDash val="solid"/>
+            </a:ln>
+          </p:spPr>
+        </p:sp>
+        <p:sp>
+          <p:nvSpPr>
+            <p:cNvPr id="24" name="Text 22"/>
+            <p:cNvSpPr/>
+            <p:nvPr/>
+          </p:nvSpPr>
+          <p:spPr>
+            <a:xfrm>
+              <a:off x="3264408" y="3063240"/>
+              <a:ext cx="2432304" cy="642823"/>
+            </a:xfrm>
+            <a:prstGeom prst="rect">
+              <a:avLst/>
+            </a:prstGeom>
+            <a:noFill/>
+            <a:ln/>
+          </p:spPr>
+          <p:txBody>
+            <a:bodyPr wrap="square" lIns="0" tIns="0" rIns="0" bIns="0" rtlCol="0" anchor="ctr"/>
+            <a:lstStyle/>
+            <a:p>
+              <a:pPr marL="0" indent="0">
+                <a:buNone/>
+              </a:pPr>
+              <a:r>
+                <a:rPr lang="en-US" b="1" dirty="0">
+                  <a:solidFill>
+                    <a:srgbClr val="0D1B2A"/>
+                  </a:solidFill>
+                  <a:latin typeface="Trebuchet MS" pitchFamily="34" charset="0"/>
+                  <a:ea typeface="Trebuchet MS" pitchFamily="34" charset="-122"/>
+                  <a:cs typeface="Trebuchet MS" pitchFamily="34" charset="-120"/>
+                </a:rPr>
+                <a:t>Drzwi i progi</a:t>
+              </a:r>
+              <a:endParaRPr lang="en-US" dirty="0"/>
+            </a:p>
+          </p:txBody>
+        </p:sp>
+        <p:sp>
+          <p:nvSpPr>
+            <p:cNvPr id="25" name="Text 23"/>
+            <p:cNvSpPr/>
+            <p:nvPr/>
+          </p:nvSpPr>
+          <p:spPr>
+            <a:xfrm>
+              <a:off x="3264408" y="3682289"/>
+              <a:ext cx="2432304" cy="930402"/>
+            </a:xfrm>
+            <a:prstGeom prst="rect">
+              <a:avLst/>
+            </a:prstGeom>
+            <a:noFill/>
+            <a:ln/>
+          </p:spPr>
+          <p:txBody>
+            <a:bodyPr wrap="square" lIns="0" tIns="0" rIns="0" bIns="0" rtlCol="0" anchor="ctr"/>
+            <a:lstStyle/>
+            <a:p>
+              <a:pPr marL="0" indent="0">
+                <a:buNone/>
+              </a:pPr>
+              <a:r>
+                <a:rPr lang="en-US" sz="1200" dirty="0">
+                  <a:solidFill>
+                    <a:srgbClr val="475569"/>
+                  </a:solidFill>
+                  <a:latin typeface="Calibri" pitchFamily="34" charset="0"/>
+                  <a:ea typeface="Calibri" pitchFamily="34" charset="-122"/>
+                  <a:cs typeface="Calibri" pitchFamily="34" charset="-120"/>
+                </a:rPr>
+                <a:t>Otwieranie klamki, przekroczenie progu 3 cm; metryka: sukces, czas interakcji</a:t>
+              </a:r>
+              <a:endParaRPr lang="en-US" sz="1200" dirty="0"/>
+            </a:p>
+          </p:txBody>
+        </p:sp>
+        <p:sp>
+          <p:nvSpPr>
+            <p:cNvPr id="26" name="Shape 24"/>
+            <p:cNvSpPr/>
+            <p:nvPr/>
+          </p:nvSpPr>
+          <p:spPr>
+            <a:xfrm>
+              <a:off x="6035040" y="2971800"/>
+              <a:ext cx="2651760" cy="1691640"/>
+            </a:xfrm>
+            <a:prstGeom prst="rect">
+              <a:avLst/>
+            </a:prstGeom>
             <a:solidFill>
-              <a:srgbClr val="E2EBF3"/>
+              <a:srgbClr val="FFFFFF"/>
             </a:solidFill>
-            <a:prstDash val="solid"/>
-          </a:ln>
-          <a:effectLst>
-            <a:outerShdw blurRad="76200" dist="25400" dir="8100000" algn="bl" rotWithShape="0">
-              <a:srgbClr val="000000">
-                <a:alpha val="12000"/>
-              </a:srgbClr>
-            </a:outerShdw>
-          </a:effectLst>
-        </p:spPr>
-      </p:sp>
-      <p:sp>
-        <p:nvSpPr>
-          <p:cNvPr id="27" name="Shape 25"/>
-          <p:cNvSpPr/>
-          <p:nvPr/>
-        </p:nvSpPr>
-        <p:spPr>
-          <a:xfrm>
-            <a:off x="6035040" y="2971800"/>
-            <a:ext cx="2651760" cy="54864"/>
-          </a:xfrm>
-          <a:prstGeom prst="rect">
-            <a:avLst/>
-          </a:prstGeom>
-          <a:solidFill>
-            <a:srgbClr val="6366F1"/>
-          </a:solidFill>
-          <a:ln w="12700">
+            <a:ln w="12700">
+              <a:solidFill>
+                <a:srgbClr val="E2EBF3"/>
+              </a:solidFill>
+              <a:prstDash val="solid"/>
+            </a:ln>
+            <a:effectLst>
+              <a:outerShdw blurRad="76200" dist="25400" dir="8100000" algn="bl" rotWithShape="0">
+                <a:srgbClr val="000000">
+                  <a:alpha val="12000"/>
+                </a:srgbClr>
+              </a:outerShdw>
+            </a:effectLst>
+          </p:spPr>
+        </p:sp>
+        <p:sp>
+          <p:nvSpPr>
+            <p:cNvPr id="27" name="Shape 25"/>
+            <p:cNvSpPr/>
+            <p:nvPr/>
+          </p:nvSpPr>
+          <p:spPr>
+            <a:xfrm>
+              <a:off x="6035040" y="2971800"/>
+              <a:ext cx="2651760" cy="54864"/>
+            </a:xfrm>
+            <a:prstGeom prst="rect">
+              <a:avLst/>
+            </a:prstGeom>
             <a:solidFill>
               <a:srgbClr val="6366F1"/>
             </a:solidFill>
-            <a:prstDash val="solid"/>
-          </a:ln>
-        </p:spPr>
-      </p:sp>
-      <p:sp>
-        <p:nvSpPr>
-          <p:cNvPr id="28" name="Text 26"/>
-          <p:cNvSpPr/>
-          <p:nvPr/>
-        </p:nvSpPr>
-        <p:spPr>
-          <a:xfrm>
-            <a:off x="6144768" y="3063240"/>
-            <a:ext cx="2432304" cy="642823"/>
-          </a:xfrm>
-          <a:prstGeom prst="rect">
-            <a:avLst/>
-          </a:prstGeom>
-          <a:noFill/>
-          <a:ln/>
-        </p:spPr>
-        <p:txBody>
-          <a:bodyPr wrap="square" lIns="0" tIns="0" rIns="0" bIns="0" rtlCol="0" anchor="ctr"/>
-          <a:lstStyle/>
-          <a:p>
-            <a:pPr marL="0" indent="0">
-              <a:buNone/>
-            </a:pPr>
-            <a:r>
-              <a:rPr lang="en-US" b="1" dirty="0">
-                <a:solidFill>
-                  <a:srgbClr val="0D1B2A"/>
-                </a:solidFill>
-                <a:latin typeface="Trebuchet MS" pitchFamily="34" charset="0"/>
-                <a:ea typeface="Trebuchet MS" pitchFamily="34" charset="-122"/>
-                <a:cs typeface="Trebuchet MS" pitchFamily="34" charset="-120"/>
-              </a:rPr>
-              <a:t>Długa misja</a:t>
-            </a:r>
-            <a:endParaRPr lang="en-US" dirty="0"/>
-          </a:p>
-        </p:txBody>
-      </p:sp>
-      <p:sp>
-        <p:nvSpPr>
-          <p:cNvPr id="29" name="Text 27"/>
-          <p:cNvSpPr/>
-          <p:nvPr/>
-        </p:nvSpPr>
-        <p:spPr>
-          <a:xfrm>
-            <a:off x="6144768" y="3682289"/>
-            <a:ext cx="2432304" cy="930402"/>
-          </a:xfrm>
-          <a:prstGeom prst="rect">
-            <a:avLst/>
-          </a:prstGeom>
-          <a:noFill/>
-          <a:ln/>
-        </p:spPr>
-        <p:txBody>
-          <a:bodyPr wrap="square" lIns="0" tIns="0" rIns="0" bIns="0" rtlCol="0" anchor="ctr"/>
-          <a:lstStyle/>
-          <a:p>
-            <a:pPr marL="0" indent="0">
-              <a:buNone/>
-            </a:pPr>
-            <a:r>
-              <a:rPr lang="en-US" sz="1200" dirty="0">
-                <a:solidFill>
-                  <a:srgbClr val="475569"/>
-                </a:solidFill>
-                <a:latin typeface="Calibri" pitchFamily="34" charset="0"/>
-                <a:ea typeface="Calibri" pitchFamily="34" charset="-122"/>
-                <a:cs typeface="Calibri" pitchFamily="34" charset="-120"/>
-              </a:rPr>
-              <a:t>45 min patrol budynku; metryka: dryft SLAM, zużycie energii, liczba incydentów</a:t>
-            </a:r>
-            <a:endParaRPr lang="en-US" sz="1200" dirty="0"/>
-          </a:p>
-        </p:txBody>
-      </p:sp>
+            <a:ln w="12700">
+              <a:solidFill>
+                <a:srgbClr val="6366F1"/>
+              </a:solidFill>
+              <a:prstDash val="solid"/>
+            </a:ln>
+          </p:spPr>
+        </p:sp>
+        <p:sp>
+          <p:nvSpPr>
+            <p:cNvPr id="28" name="Text 26"/>
+            <p:cNvSpPr/>
+            <p:nvPr/>
+          </p:nvSpPr>
+          <p:spPr>
+            <a:xfrm>
+              <a:off x="6144768" y="3063240"/>
+              <a:ext cx="2432304" cy="642823"/>
+            </a:xfrm>
+            <a:prstGeom prst="rect">
+              <a:avLst/>
+            </a:prstGeom>
+            <a:noFill/>
+            <a:ln/>
+          </p:spPr>
+          <p:txBody>
+            <a:bodyPr wrap="square" lIns="0" tIns="0" rIns="0" bIns="0" rtlCol="0" anchor="ctr"/>
+            <a:lstStyle/>
+            <a:p>
+              <a:pPr marL="0" indent="0">
+                <a:buNone/>
+              </a:pPr>
+              <a:r>
+                <a:rPr lang="en-US" b="1" dirty="0">
+                  <a:solidFill>
+                    <a:srgbClr val="0D1B2A"/>
+                  </a:solidFill>
+                  <a:latin typeface="Trebuchet MS" pitchFamily="34" charset="0"/>
+                  <a:ea typeface="Trebuchet MS" pitchFamily="34" charset="-122"/>
+                  <a:cs typeface="Trebuchet MS" pitchFamily="34" charset="-120"/>
+                </a:rPr>
+                <a:t>Długa misja</a:t>
+              </a:r>
+              <a:endParaRPr lang="en-US" dirty="0"/>
+            </a:p>
+          </p:txBody>
+        </p:sp>
+        <p:sp>
+          <p:nvSpPr>
+            <p:cNvPr id="29" name="Text 27"/>
+            <p:cNvSpPr/>
+            <p:nvPr/>
+          </p:nvSpPr>
+          <p:spPr>
+            <a:xfrm>
+              <a:off x="6144768" y="3682289"/>
+              <a:ext cx="2432304" cy="930402"/>
+            </a:xfrm>
+            <a:prstGeom prst="rect">
+              <a:avLst/>
+            </a:prstGeom>
+            <a:noFill/>
+            <a:ln/>
+          </p:spPr>
+          <p:txBody>
+            <a:bodyPr wrap="square" lIns="0" tIns="0" rIns="0" bIns="0" rtlCol="0" anchor="ctr"/>
+            <a:lstStyle/>
+            <a:p>
+              <a:pPr marL="0" indent="0">
+                <a:buNone/>
+              </a:pPr>
+              <a:r>
+                <a:rPr lang="en-US" sz="1200" dirty="0">
+                  <a:solidFill>
+                    <a:srgbClr val="475569"/>
+                  </a:solidFill>
+                  <a:latin typeface="Calibri" pitchFamily="34" charset="0"/>
+                  <a:ea typeface="Calibri" pitchFamily="34" charset="-122"/>
+                  <a:cs typeface="Calibri" pitchFamily="34" charset="-120"/>
+                </a:rPr>
+                <a:t>45 min patrol budynku; metryka: dryft SLAM, zużycie energii, liczba incydentów</a:t>
+              </a:r>
+              <a:endParaRPr lang="en-US" sz="1200" dirty="0"/>
+            </a:p>
+          </p:txBody>
+        </p:sp>
+      </p:grpSp>
     </p:spTree>
   </p:cSld>
   <p:clrMapOvr>
@@ -25353,6 +26440,13 @@
           </a:prstGeom>
           <a:noFill/>
           <a:ln/>
+          <a:effectLst>
+            <a:outerShdw blurRad="50800" dist="38100" dir="2700000" algn="tl" rotWithShape="0">
+              <a:prstClr val="black">
+                <a:alpha val="40000"/>
+              </a:prstClr>
+            </a:outerShdw>
+          </a:effectLst>
         </p:spPr>
         <p:txBody>
           <a:bodyPr wrap="square" lIns="0" tIns="0" rIns="0" bIns="0" rtlCol="0" anchor="ctr"/>
@@ -25393,14 +26487,21 @@
             <a:avLst/>
           </a:prstGeom>
           <a:solidFill>
-            <a:srgbClr val="0D1B2A"/>
+            <a:schemeClr val="bg1"/>
           </a:solidFill>
-          <a:ln w="25400">
+          <a:ln w="57150">
             <a:solidFill>
               <a:srgbClr val="00B4D8"/>
             </a:solidFill>
             <a:prstDash val="solid"/>
           </a:ln>
+          <a:effectLst>
+            <a:outerShdw blurRad="50800" dist="38100" dir="2700000" algn="tl" rotWithShape="0">
+              <a:prstClr val="black">
+                <a:alpha val="40000"/>
+              </a:prstClr>
+            </a:outerShdw>
+          </a:effectLst>
         </p:spPr>
       </p:sp>
       <p:pic>
@@ -25545,6 +26646,13 @@
             </a:solidFill>
             <a:prstDash val="solid"/>
           </a:ln>
+          <a:effectLst>
+            <a:outerShdw blurRad="50800" dist="38100" dir="2700000" algn="tl" rotWithShape="0">
+              <a:prstClr val="black">
+                <a:alpha val="40000"/>
+              </a:prstClr>
+            </a:outerShdw>
+          </a:effectLst>
         </p:spPr>
       </p:sp>
       <p:sp>
@@ -25756,7 +26864,7 @@
         <p:spPr>
           <a:xfrm>
             <a:off x="274320" y="1097280"/>
-            <a:ext cx="8595360" cy="3749040"/>
+            <a:ext cx="8595360" cy="2788920"/>
           </a:xfrm>
           <a:prstGeom prst="rect">
             <a:avLst/>
@@ -25788,7 +26896,7 @@
         <p:spPr>
           <a:xfrm>
             <a:off x="364273" y="1188720"/>
-            <a:ext cx="8393151" cy="3520440"/>
+            <a:ext cx="8393151" cy="2521647"/>
           </a:xfrm>
           <a:prstGeom prst="rect">
             <a:avLst/>
@@ -25797,7 +26905,9 @@
           <a:ln/>
         </p:spPr>
         <p:txBody>
-          <a:bodyPr wrap="square" lIns="127000" tIns="127000" rIns="127000" bIns="127000" rtlCol="0" anchor="t"/>
+          <a:bodyPr wrap="square" lIns="127000" tIns="36000" rIns="127000" bIns="0" rtlCol="0" anchor="t">
+            <a:spAutoFit/>
+          </a:bodyPr>
           <a:lstStyle/>
           <a:p>
             <a:pPr marL="342900" indent="-342900">
@@ -26195,7 +27305,7 @@
         <p:spPr>
           <a:xfrm>
             <a:off x="274320" y="1097280"/>
-            <a:ext cx="8595360" cy="3749040"/>
+            <a:ext cx="8595360" cy="2903220"/>
           </a:xfrm>
           <a:prstGeom prst="rect">
             <a:avLst/>
@@ -26226,8 +27336,8 @@
         </p:nvSpPr>
         <p:spPr>
           <a:xfrm>
-            <a:off x="367992" y="1188720"/>
-            <a:ext cx="8374564" cy="3520440"/>
+            <a:off x="345132" y="1150620"/>
+            <a:ext cx="8455968" cy="2683230"/>
           </a:xfrm>
           <a:prstGeom prst="rect">
             <a:avLst/>
@@ -26236,7 +27346,9 @@
           <a:ln/>
         </p:spPr>
         <p:txBody>
-          <a:bodyPr wrap="square" lIns="127000" tIns="127000" rIns="127000" bIns="127000" rtlCol="0" anchor="t"/>
+          <a:bodyPr wrap="square" lIns="36000" tIns="36000" rIns="36000" bIns="0" rtlCol="0" anchor="t">
+            <a:spAutoFit/>
+          </a:bodyPr>
           <a:lstStyle/>
           <a:p>
             <a:pPr marL="216000" indent="-216000">
@@ -26439,7 +27551,7 @@
               <a:buChar char="•"/>
             </a:pPr>
             <a:r>
-              <a:rPr lang="en-US" sz="1600" b="1" spc="-40" dirty="0">
+              <a:rPr lang="en-US" sz="1600" b="1" spc="-70" dirty="0">
                 <a:solidFill>
                   <a:srgbClr val="0D1B2A"/>
                 </a:solidFill>
@@ -26450,7 +27562,7 @@
               <a:t>Kluczowe wyzwania</a:t>
             </a:r>
             <a:r>
-              <a:rPr lang="en-US" sz="1600" spc="-40" dirty="0">
+              <a:rPr lang="en-US" sz="1600" spc="-70" dirty="0">
                 <a:solidFill>
                   <a:srgbClr val="0D1B2A"/>
                 </a:solidFill>
@@ -26460,7 +27572,7 @@
               </a:rPr>
               <a:t>: zachowanie w windzie (mała przestrzeń), interakcja z człowiekiem, niezawodność 45 min</a:t>
             </a:r>
-            <a:endParaRPr lang="en-US" sz="1600" spc="-40" dirty="0"/>
+            <a:endParaRPr lang="en-US" sz="1600" spc="-70" dirty="0"/>
           </a:p>
         </p:txBody>
       </p:sp>
@@ -26555,7 +27667,7 @@
         </p:nvSpPr>
         <p:spPr>
           <a:xfrm>
-            <a:off x="320040" y="457200"/>
+            <a:off x="320040" y="386080"/>
             <a:ext cx="8503920" cy="502920"/>
           </a:xfrm>
           <a:prstGeom prst="rect">
@@ -26572,7 +27684,7 @@
               <a:buNone/>
             </a:pPr>
             <a:r>
-              <a:rPr lang="en-US" sz="2800" b="1" dirty="0" smtClean="0">
+              <a:rPr lang="en-US" sz="3600" b="1" dirty="0" smtClean="0">
                 <a:solidFill>
                   <a:srgbClr val="FFFFFF"/>
                 </a:solidFill>
@@ -26582,7 +27694,7 @@
               </a:rPr>
               <a:t>PODSUMOWANIE</a:t>
             </a:r>
-            <a:endParaRPr lang="en-US" sz="2800" dirty="0"/>
+            <a:endParaRPr lang="en-US" sz="3600" dirty="0"/>
           </a:p>
         </p:txBody>
       </p:sp>
@@ -26594,7 +27706,7 @@
         </p:nvSpPr>
         <p:spPr>
           <a:xfrm>
-            <a:off x="2743200" y="1005840"/>
+            <a:off x="2743200" y="934720"/>
             <a:ext cx="3657600" cy="36576"/>
           </a:xfrm>
           <a:prstGeom prst="rect">
@@ -26708,7 +27820,40 @@
                 <a:ea typeface="Calibri" pitchFamily="34" charset="-122"/>
                 <a:cs typeface="Calibri" pitchFamily="34" charset="-120"/>
               </a:rPr>
-              <a:t>ZMP i Capture Point to fundamenty równowagi dynamicznej; planista CoM musi przestrzegać ich ograniczeń.</a:t>
+              <a:t>ZMP i Capture Point to fundamenty równowagi dynamicznej; planista CoM musi przestrzegać </a:t>
+            </a:r>
+            <a:r>
+              <a:rPr lang="en-US" sz="1500" spc="-50" dirty="0" err="1">
+                <a:solidFill>
+                  <a:srgbClr val="E2EBF3"/>
+                </a:solidFill>
+                <a:latin typeface="Calibri" pitchFamily="34" charset="0"/>
+                <a:ea typeface="Calibri" pitchFamily="34" charset="-122"/>
+                <a:cs typeface="Calibri" pitchFamily="34" charset="-120"/>
+              </a:rPr>
+              <a:t>ich</a:t>
+            </a:r>
+            <a:r>
+              <a:rPr lang="en-US" sz="1500" spc="-50" dirty="0">
+                <a:solidFill>
+                  <a:srgbClr val="E2EBF3"/>
+                </a:solidFill>
+                <a:latin typeface="Calibri" pitchFamily="34" charset="0"/>
+                <a:ea typeface="Calibri" pitchFamily="34" charset="-122"/>
+                <a:cs typeface="Calibri" pitchFamily="34" charset="-120"/>
+              </a:rPr>
+              <a:t> </a:t>
+            </a:r>
+            <a:r>
+              <a:rPr lang="en-US" sz="1500" spc="-50" dirty="0" err="1" smtClean="0">
+                <a:solidFill>
+                  <a:srgbClr val="E2EBF3"/>
+                </a:solidFill>
+                <a:latin typeface="Calibri" pitchFamily="34" charset="0"/>
+                <a:ea typeface="Calibri" pitchFamily="34" charset="-122"/>
+                <a:cs typeface="Calibri" pitchFamily="34" charset="-120"/>
+              </a:rPr>
+              <a:t>ograniczeń</a:t>
             </a:r>
             <a:endParaRPr lang="en-US" sz="1500" spc="-50" dirty="0"/>
           </a:p>
@@ -26803,7 +27948,7 @@
               <a:buNone/>
             </a:pPr>
             <a:r>
-              <a:rPr lang="en-US" sz="1500" spc="-50" dirty="0">
+              <a:rPr lang="en-US" sz="1600" spc="-50" dirty="0">
                 <a:solidFill>
                   <a:srgbClr val="E2EBF3"/>
                 </a:solidFill>
@@ -26811,9 +27956,42 @@
                 <a:ea typeface="Calibri" pitchFamily="34" charset="-122"/>
                 <a:cs typeface="Calibri" pitchFamily="34" charset="-120"/>
               </a:rPr>
-              <a:t>Whole-body control hierarchizuje zadania: stabilność &gt; kontakt stóp &gt; realizacja trajektorii.</a:t>
-            </a:r>
-            <a:endParaRPr lang="en-US" sz="1500" spc="-50" dirty="0"/>
+              <a:t>Whole-body control hierarchizuje zadania: stabilność &gt; kontakt stóp &gt; </a:t>
+            </a:r>
+            <a:r>
+              <a:rPr lang="en-US" sz="1600" spc="-50" dirty="0" err="1">
+                <a:solidFill>
+                  <a:srgbClr val="E2EBF3"/>
+                </a:solidFill>
+                <a:latin typeface="Calibri" pitchFamily="34" charset="0"/>
+                <a:ea typeface="Calibri" pitchFamily="34" charset="-122"/>
+                <a:cs typeface="Calibri" pitchFamily="34" charset="-120"/>
+              </a:rPr>
+              <a:t>realizacja</a:t>
+            </a:r>
+            <a:r>
+              <a:rPr lang="en-US" sz="1600" spc="-50" dirty="0">
+                <a:solidFill>
+                  <a:srgbClr val="E2EBF3"/>
+                </a:solidFill>
+                <a:latin typeface="Calibri" pitchFamily="34" charset="0"/>
+                <a:ea typeface="Calibri" pitchFamily="34" charset="-122"/>
+                <a:cs typeface="Calibri" pitchFamily="34" charset="-120"/>
+              </a:rPr>
+              <a:t> </a:t>
+            </a:r>
+            <a:r>
+              <a:rPr lang="en-US" sz="1600" spc="-50" dirty="0" err="1" smtClean="0">
+                <a:solidFill>
+                  <a:srgbClr val="E2EBF3"/>
+                </a:solidFill>
+                <a:latin typeface="Calibri" pitchFamily="34" charset="0"/>
+                <a:ea typeface="Calibri" pitchFamily="34" charset="-122"/>
+                <a:cs typeface="Calibri" pitchFamily="34" charset="-120"/>
+              </a:rPr>
+              <a:t>trajektorii</a:t>
+            </a:r>
+            <a:endParaRPr lang="en-US" sz="1600" spc="-50" dirty="0"/>
           </a:p>
         </p:txBody>
       </p:sp>
@@ -26906,7 +28084,7 @@
               <a:buNone/>
             </a:pPr>
             <a:r>
-              <a:rPr lang="en-US" sz="1500" spc="-50" dirty="0">
+              <a:rPr lang="en-US" sz="1600" spc="-50" dirty="0">
                 <a:solidFill>
                   <a:srgbClr val="E2EBF3"/>
                 </a:solidFill>
@@ -26914,9 +28092,42 @@
                 <a:ea typeface="Calibri" pitchFamily="34" charset="-122"/>
                 <a:cs typeface="Calibri" pitchFamily="34" charset="-120"/>
               </a:rPr>
-              <a:t>PID, śledzenie trajektorii i saturacja aktuatorów to warunki bezpiecznego wykonania ruchu.</a:t>
-            </a:r>
-            <a:endParaRPr lang="en-US" sz="1500" spc="-50" dirty="0"/>
+              <a:t>PID, śledzenie trajektorii i saturacja aktuatorów to warunki bezpiecznego </a:t>
+            </a:r>
+            <a:r>
+              <a:rPr lang="en-US" sz="1600" spc="-50" dirty="0" err="1">
+                <a:solidFill>
+                  <a:srgbClr val="E2EBF3"/>
+                </a:solidFill>
+                <a:latin typeface="Calibri" pitchFamily="34" charset="0"/>
+                <a:ea typeface="Calibri" pitchFamily="34" charset="-122"/>
+                <a:cs typeface="Calibri" pitchFamily="34" charset="-120"/>
+              </a:rPr>
+              <a:t>wykonania</a:t>
+            </a:r>
+            <a:r>
+              <a:rPr lang="en-US" sz="1600" spc="-50" dirty="0">
+                <a:solidFill>
+                  <a:srgbClr val="E2EBF3"/>
+                </a:solidFill>
+                <a:latin typeface="Calibri" pitchFamily="34" charset="0"/>
+                <a:ea typeface="Calibri" pitchFamily="34" charset="-122"/>
+                <a:cs typeface="Calibri" pitchFamily="34" charset="-120"/>
+              </a:rPr>
+              <a:t> </a:t>
+            </a:r>
+            <a:r>
+              <a:rPr lang="en-US" sz="1600" spc="-50" dirty="0" err="1" smtClean="0">
+                <a:solidFill>
+                  <a:srgbClr val="E2EBF3"/>
+                </a:solidFill>
+                <a:latin typeface="Calibri" pitchFamily="34" charset="0"/>
+                <a:ea typeface="Calibri" pitchFamily="34" charset="-122"/>
+                <a:cs typeface="Calibri" pitchFamily="34" charset="-120"/>
+              </a:rPr>
+              <a:t>ruchu</a:t>
+            </a:r>
+            <a:endParaRPr lang="en-US" sz="1600" spc="-50" dirty="0"/>
           </a:p>
         </p:txBody>
       </p:sp>
@@ -27009,7 +28220,7 @@
               <a:buNone/>
             </a:pPr>
             <a:r>
-              <a:rPr lang="en-US" sz="1500" spc="-50" dirty="0">
+              <a:rPr lang="en-US" sz="1600" spc="-50" dirty="0">
                 <a:solidFill>
                   <a:srgbClr val="E2EBF3"/>
                 </a:solidFill>
@@ -27017,9 +28228,42 @@
                 <a:ea typeface="Calibri" pitchFamily="34" charset="-122"/>
                 <a:cs typeface="Calibri" pitchFamily="34" charset="-120"/>
               </a:rPr>
-              <a:t>ROS 2 + TF2 integruje wszystkie moduły; synchronizacja i modularność są warunkiem niezawodności.</a:t>
-            </a:r>
-            <a:endParaRPr lang="en-US" sz="1500" spc="-50" dirty="0"/>
+              <a:t>ROS 2 + TF2 integruje wszystkie moduły; synchronizacja i modularność są </a:t>
+            </a:r>
+            <a:r>
+              <a:rPr lang="en-US" sz="1600" spc="-50" dirty="0" err="1">
+                <a:solidFill>
+                  <a:srgbClr val="E2EBF3"/>
+                </a:solidFill>
+                <a:latin typeface="Calibri" pitchFamily="34" charset="0"/>
+                <a:ea typeface="Calibri" pitchFamily="34" charset="-122"/>
+                <a:cs typeface="Calibri" pitchFamily="34" charset="-120"/>
+              </a:rPr>
+              <a:t>warunkiem</a:t>
+            </a:r>
+            <a:r>
+              <a:rPr lang="en-US" sz="1600" spc="-50" dirty="0">
+                <a:solidFill>
+                  <a:srgbClr val="E2EBF3"/>
+                </a:solidFill>
+                <a:latin typeface="Calibri" pitchFamily="34" charset="0"/>
+                <a:ea typeface="Calibri" pitchFamily="34" charset="-122"/>
+                <a:cs typeface="Calibri" pitchFamily="34" charset="-120"/>
+              </a:rPr>
+              <a:t> </a:t>
+            </a:r>
+            <a:r>
+              <a:rPr lang="en-US" sz="1600" spc="-50" dirty="0" err="1" smtClean="0">
+                <a:solidFill>
+                  <a:srgbClr val="E2EBF3"/>
+                </a:solidFill>
+                <a:latin typeface="Calibri" pitchFamily="34" charset="0"/>
+                <a:ea typeface="Calibri" pitchFamily="34" charset="-122"/>
+                <a:cs typeface="Calibri" pitchFamily="34" charset="-120"/>
+              </a:rPr>
+              <a:t>niezawodności</a:t>
+            </a:r>
+            <a:endParaRPr lang="en-US" sz="1600" spc="-50" dirty="0"/>
           </a:p>
         </p:txBody>
       </p:sp>
@@ -27096,7 +28340,7 @@
         <p:spPr>
           <a:xfrm>
             <a:off x="1005840" y="4240512"/>
-            <a:ext cx="7863840" cy="502920"/>
+            <a:ext cx="7947660" cy="502920"/>
           </a:xfrm>
           <a:prstGeom prst="rect">
             <a:avLst/>
@@ -27112,7 +28356,7 @@
               <a:buNone/>
             </a:pPr>
             <a:r>
-              <a:rPr lang="en-US" sz="1500" spc="-50" dirty="0">
+              <a:rPr lang="en-US" sz="1600" spc="-50" dirty="0">
                 <a:solidFill>
                   <a:srgbClr val="E2EBF3"/>
                 </a:solidFill>
@@ -27120,9 +28364,119 @@
                 <a:ea typeface="Calibri" pitchFamily="34" charset="-122"/>
                 <a:cs typeface="Calibri" pitchFamily="34" charset="-120"/>
               </a:rPr>
-              <a:t>Walidacja w symulacji (MuJoCo, Gazebo) poprzedza testy na robocie – cyfrowy bliźniak oszczędza sprzęt.</a:t>
-            </a:r>
-            <a:endParaRPr lang="en-US" sz="1500" spc="-50" dirty="0"/>
+              <a:t>Walidacja w symulacji (MuJoCo, Gazebo) poprzedza testy </a:t>
+            </a:r>
+            <a:r>
+              <a:rPr lang="en-US" sz="1600" spc="-50" dirty="0" err="1">
+                <a:solidFill>
+                  <a:srgbClr val="E2EBF3"/>
+                </a:solidFill>
+                <a:latin typeface="Calibri" pitchFamily="34" charset="0"/>
+                <a:ea typeface="Calibri" pitchFamily="34" charset="-122"/>
+                <a:cs typeface="Calibri" pitchFamily="34" charset="-120"/>
+              </a:rPr>
+              <a:t>na</a:t>
+            </a:r>
+            <a:r>
+              <a:rPr lang="en-US" sz="1600" spc="-50" dirty="0">
+                <a:solidFill>
+                  <a:srgbClr val="E2EBF3"/>
+                </a:solidFill>
+                <a:latin typeface="Calibri" pitchFamily="34" charset="0"/>
+                <a:ea typeface="Calibri" pitchFamily="34" charset="-122"/>
+                <a:cs typeface="Calibri" pitchFamily="34" charset="-120"/>
+              </a:rPr>
+              <a:t> </a:t>
+            </a:r>
+            <a:r>
+              <a:rPr lang="en-US" sz="1600" spc="-50" dirty="0" err="1" smtClean="0">
+                <a:solidFill>
+                  <a:srgbClr val="E2EBF3"/>
+                </a:solidFill>
+                <a:latin typeface="Calibri" pitchFamily="34" charset="0"/>
+                <a:ea typeface="Calibri" pitchFamily="34" charset="-122"/>
+                <a:cs typeface="Calibri" pitchFamily="34" charset="-120"/>
+              </a:rPr>
+              <a:t>robocie</a:t>
+            </a:r>
+            <a:r>
+              <a:rPr lang="pl-PL" sz="1600" spc="-50" dirty="0" smtClean="0">
+                <a:solidFill>
+                  <a:srgbClr val="E2EBF3"/>
+                </a:solidFill>
+                <a:latin typeface="Calibri" pitchFamily="34" charset="0"/>
+                <a:ea typeface="Calibri" pitchFamily="34" charset="-122"/>
+                <a:cs typeface="Calibri" pitchFamily="34" charset="-120"/>
+              </a:rPr>
+              <a:t>. C</a:t>
+            </a:r>
+            <a:r>
+              <a:rPr lang="en-US" sz="1600" spc="-50" dirty="0" err="1" smtClean="0">
+                <a:solidFill>
+                  <a:srgbClr val="E2EBF3"/>
+                </a:solidFill>
+                <a:latin typeface="Calibri" pitchFamily="34" charset="0"/>
+                <a:ea typeface="Calibri" pitchFamily="34" charset="-122"/>
+                <a:cs typeface="Calibri" pitchFamily="34" charset="-120"/>
+              </a:rPr>
+              <a:t>yfrowy</a:t>
+            </a:r>
+            <a:r>
+              <a:rPr lang="en-US" sz="1600" spc="-50" dirty="0" smtClean="0">
+                <a:solidFill>
+                  <a:srgbClr val="E2EBF3"/>
+                </a:solidFill>
+                <a:latin typeface="Calibri" pitchFamily="34" charset="0"/>
+                <a:ea typeface="Calibri" pitchFamily="34" charset="-122"/>
+                <a:cs typeface="Calibri" pitchFamily="34" charset="-120"/>
+              </a:rPr>
+              <a:t> </a:t>
+            </a:r>
+            <a:r>
+              <a:rPr lang="en-US" sz="1600" spc="-50" dirty="0">
+                <a:solidFill>
+                  <a:srgbClr val="E2EBF3"/>
+                </a:solidFill>
+                <a:latin typeface="Calibri" pitchFamily="34" charset="0"/>
+                <a:ea typeface="Calibri" pitchFamily="34" charset="-122"/>
+                <a:cs typeface="Calibri" pitchFamily="34" charset="-120"/>
+              </a:rPr>
+              <a:t>bliźniak </a:t>
+            </a:r>
+            <a:r>
+              <a:rPr lang="en-US" sz="1600" spc="-50" dirty="0" err="1">
+                <a:solidFill>
+                  <a:srgbClr val="E2EBF3"/>
+                </a:solidFill>
+                <a:latin typeface="Calibri" pitchFamily="34" charset="0"/>
+                <a:ea typeface="Calibri" pitchFamily="34" charset="-122"/>
+                <a:cs typeface="Calibri" pitchFamily="34" charset="-120"/>
+              </a:rPr>
+              <a:t>oszczędza</a:t>
+            </a:r>
+            <a:r>
+              <a:rPr lang="en-US" sz="1600" spc="-50" dirty="0">
+                <a:solidFill>
+                  <a:srgbClr val="E2EBF3"/>
+                </a:solidFill>
+                <a:latin typeface="Calibri" pitchFamily="34" charset="0"/>
+                <a:ea typeface="Calibri" pitchFamily="34" charset="-122"/>
+                <a:cs typeface="Calibri" pitchFamily="34" charset="-120"/>
+              </a:rPr>
+              <a:t> </a:t>
+            </a:r>
+            <a:r>
+              <a:rPr lang="en-US" sz="1600" spc="-50" dirty="0" err="1" smtClean="0">
+                <a:solidFill>
+                  <a:srgbClr val="E2EBF3"/>
+                </a:solidFill>
+                <a:latin typeface="Calibri" pitchFamily="34" charset="0"/>
+                <a:ea typeface="Calibri" pitchFamily="34" charset="-122"/>
+                <a:cs typeface="Calibri" pitchFamily="34" charset="-120"/>
+              </a:rPr>
+              <a:t>sprzęt</a:t>
+            </a:r>
+            <a:endParaRPr lang="en-US" sz="1600" spc="-50" dirty="0"/>
           </a:p>
         </p:txBody>
       </p:sp>
@@ -27273,7 +28627,7 @@
               <a:buNone/>
             </a:pPr>
             <a:r>
-              <a:rPr lang="en-US" sz="1800" b="1" dirty="0">
+              <a:rPr lang="en-US" sz="1800" b="1" dirty="0" err="1" smtClean="0">
                 <a:solidFill>
                   <a:srgbClr val="FFFFFF"/>
                 </a:solidFill>
@@ -27281,7 +28635,40 @@
                 <a:ea typeface="Trebuchet MS" pitchFamily="34" charset="-122"/>
                 <a:cs typeface="Trebuchet MS" pitchFamily="34" charset="-120"/>
               </a:rPr>
-              <a:t>4 Wykładów z Nawigacji Robotów Humanoidalnych</a:t>
+              <a:t>Nawigacji</a:t>
+            </a:r>
+            <a:r>
+              <a:rPr lang="pl-PL" sz="1800" b="1" dirty="0" smtClean="0">
+                <a:solidFill>
+                  <a:srgbClr val="FFFFFF"/>
+                </a:solidFill>
+                <a:latin typeface="Trebuchet MS" pitchFamily="34" charset="0"/>
+                <a:ea typeface="Trebuchet MS" pitchFamily="34" charset="-122"/>
+                <a:cs typeface="Trebuchet MS" pitchFamily="34" charset="-120"/>
+              </a:rPr>
+              <a:t>a</a:t>
+            </a:r>
+            <a:r>
+              <a:rPr lang="en-US" sz="1800" b="1" dirty="0" smtClean="0">
+                <a:solidFill>
+                  <a:srgbClr val="FFFFFF"/>
+                </a:solidFill>
+                <a:latin typeface="Trebuchet MS" pitchFamily="34" charset="0"/>
+                <a:ea typeface="Trebuchet MS" pitchFamily="34" charset="-122"/>
+                <a:cs typeface="Trebuchet MS" pitchFamily="34" charset="-120"/>
+              </a:rPr>
+              <a:t> </a:t>
+            </a:r>
+            <a:r>
+              <a:rPr lang="en-US" sz="1800" b="1" dirty="0">
+                <a:solidFill>
+                  <a:srgbClr val="FFFFFF"/>
+                </a:solidFill>
+                <a:latin typeface="Trebuchet MS" pitchFamily="34" charset="0"/>
+                <a:ea typeface="Trebuchet MS" pitchFamily="34" charset="-122"/>
+                <a:cs typeface="Trebuchet MS" pitchFamily="34" charset="-120"/>
+              </a:rPr>
+              <a:t>Robotów Humanoidalnych</a:t>
             </a:r>
             <a:endParaRPr lang="en-US" sz="1800" dirty="0"/>
           </a:p>
@@ -27433,7 +28820,7 @@
               <a:buNone/>
             </a:pPr>
             <a:r>
-              <a:rPr lang="en-US" sz="1100" dirty="0">
+              <a:rPr lang="en-US" sz="2000" dirty="0">
                 <a:solidFill>
                   <a:srgbClr val="FFFFFF"/>
                 </a:solidFill>
@@ -27443,14 +28830,14 @@
               </a:rPr>
               <a:t>Percepcja</a:t>
             </a:r>
-            <a:endParaRPr lang="en-US" sz="1100" dirty="0"/>
+            <a:endParaRPr lang="en-US" sz="2000" dirty="0"/>
           </a:p>
           <a:p>
             <a:pPr marL="0" indent="0" algn="ctr">
               <a:buNone/>
             </a:pPr>
             <a:r>
-              <a:rPr lang="en-US" sz="1100" dirty="0">
+              <a:rPr lang="en-US" sz="2000" dirty="0">
                 <a:solidFill>
                   <a:srgbClr val="FFFFFF"/>
                 </a:solidFill>
@@ -27460,7 +28847,7 @@
               </a:rPr>
               <a:t>i mapowanie</a:t>
             </a:r>
-            <a:endParaRPr lang="en-US" sz="1100" dirty="0"/>
+            <a:endParaRPr lang="en-US" sz="2000" dirty="0"/>
           </a:p>
         </p:txBody>
       </p:sp>
@@ -27568,8 +28955,8 @@
         </p:nvSpPr>
         <p:spPr>
           <a:xfrm>
-            <a:off x="2468880" y="1874520"/>
-            <a:ext cx="1965960" cy="1097280"/>
+            <a:off x="2542032" y="1874520"/>
+            <a:ext cx="1814068" cy="1097280"/>
           </a:xfrm>
           <a:prstGeom prst="rect">
             <a:avLst/>
@@ -27585,7 +28972,7 @@
               <a:buNone/>
             </a:pPr>
             <a:r>
-              <a:rPr lang="en-US" sz="1100" dirty="0">
+              <a:rPr lang="en-US" sz="2000" dirty="0">
                 <a:solidFill>
                   <a:srgbClr val="FFFFFF"/>
                 </a:solidFill>
@@ -27595,14 +28982,14 @@
               </a:rPr>
               <a:t>Lokalizacja</a:t>
             </a:r>
-            <a:endParaRPr lang="en-US" sz="1100" dirty="0"/>
+            <a:endParaRPr lang="en-US" sz="2000" dirty="0"/>
           </a:p>
           <a:p>
             <a:pPr marL="0" indent="0" algn="ctr">
               <a:buNone/>
             </a:pPr>
             <a:r>
-              <a:rPr lang="en-US" sz="1100" dirty="0">
+              <a:rPr lang="en-US" sz="2000" dirty="0">
                 <a:solidFill>
                   <a:srgbClr val="FFFFFF"/>
                 </a:solidFill>
@@ -27612,7 +28999,7 @@
               </a:rPr>
               <a:t>i fuzja sensoryczna</a:t>
             </a:r>
-            <a:endParaRPr lang="en-US" sz="1100" dirty="0"/>
+            <a:endParaRPr lang="en-US" sz="2000" dirty="0"/>
           </a:p>
         </p:txBody>
       </p:sp>
@@ -27737,7 +29124,7 @@
               <a:buNone/>
             </a:pPr>
             <a:r>
-              <a:rPr lang="en-US" sz="1100" dirty="0">
+              <a:rPr lang="en-US" sz="2000" dirty="0">
                 <a:solidFill>
                   <a:srgbClr val="FFFFFF"/>
                 </a:solidFill>
@@ -27747,14 +29134,14 @@
               </a:rPr>
               <a:t>Planowanie ruchu</a:t>
             </a:r>
-            <a:endParaRPr lang="en-US" sz="1100" dirty="0"/>
+            <a:endParaRPr lang="en-US" sz="2000" dirty="0"/>
           </a:p>
           <a:p>
             <a:pPr marL="0" indent="0" algn="ctr">
               <a:buNone/>
             </a:pPr>
             <a:r>
-              <a:rPr lang="en-US" sz="1100" dirty="0">
+              <a:rPr lang="en-US" sz="2000" dirty="0">
                 <a:solidFill>
                   <a:srgbClr val="FFFFFF"/>
                 </a:solidFill>
@@ -27764,7 +29151,7 @@
               </a:rPr>
               <a:t>i unikanie przeszkód</a:t>
             </a:r>
-            <a:endParaRPr lang="en-US" sz="1100" dirty="0"/>
+            <a:endParaRPr lang="en-US" sz="2000" dirty="0"/>
           </a:p>
         </p:txBody>
       </p:sp>
@@ -27889,7 +29276,7 @@
               <a:buNone/>
             </a:pPr>
             <a:r>
-              <a:rPr lang="en-US" sz="1100" dirty="0">
+              <a:rPr lang="en-US" sz="2000" dirty="0">
                 <a:solidFill>
                   <a:srgbClr val="FFFFFF"/>
                 </a:solidFill>
@@ -27899,14 +29286,14 @@
               </a:rPr>
               <a:t>Chód, stabilność</a:t>
             </a:r>
-            <a:endParaRPr lang="en-US" sz="1100" dirty="0"/>
+            <a:endParaRPr lang="en-US" sz="2000" dirty="0"/>
           </a:p>
           <a:p>
             <a:pPr marL="0" indent="0" algn="ctr">
               <a:buNone/>
             </a:pPr>
             <a:r>
-              <a:rPr lang="en-US" sz="1100" dirty="0">
+              <a:rPr lang="en-US" sz="2000" dirty="0">
                 <a:solidFill>
                   <a:srgbClr val="FFFFFF"/>
                 </a:solidFill>
@@ -27916,7 +29303,7 @@
               </a:rPr>
               <a:t>i integracja systemu</a:t>
             </a:r>
-            <a:endParaRPr lang="en-US" sz="1100" dirty="0"/>
+            <a:endParaRPr lang="en-US" sz="2000" dirty="0"/>
           </a:p>
         </p:txBody>
       </p:sp>
@@ -27970,7 +29357,7 @@
               <a:buNone/>
             </a:pPr>
             <a:r>
-              <a:rPr lang="en-US" sz="1250" i="1" dirty="0">
+              <a:rPr lang="en-US" sz="1400" i="1" dirty="0">
                 <a:solidFill>
                   <a:srgbClr val="90E0EF"/>
                 </a:solidFill>
@@ -27980,7 +29367,7 @@
               </a:rPr>
               <a:t>Pełna pętla nawigacyjna: Sensory → Estymacja stanu → Planowanie → Sterowanie → Aktuatory → Sensory</a:t>
             </a:r>
-            <a:endParaRPr lang="en-US" sz="1250" dirty="0"/>
+            <a:endParaRPr lang="en-US" sz="1400" dirty="0"/>
           </a:p>
         </p:txBody>
       </p:sp>
@@ -28034,7 +29421,7 @@
               <a:buNone/>
             </a:pPr>
             <a:r>
-              <a:rPr lang="en-US" sz="1050" b="1" dirty="0">
+              <a:rPr lang="en-US" sz="1400" b="1" dirty="0">
                 <a:solidFill>
                   <a:srgbClr val="90E0EF"/>
                 </a:solidFill>
@@ -28044,14 +29431,14 @@
               </a:rPr>
               <a:t>Reinforcement learning</a:t>
             </a:r>
-            <a:endParaRPr lang="en-US" sz="1050" dirty="0"/>
+            <a:endParaRPr lang="en-US" sz="1400" dirty="0"/>
           </a:p>
           <a:p>
             <a:pPr marL="0" indent="0" algn="ctr">
               <a:buNone/>
             </a:pPr>
             <a:r>
-              <a:rPr lang="en-US" sz="1050" b="1" dirty="0">
+              <a:rPr lang="en-US" sz="1400" b="1" dirty="0">
                 <a:solidFill>
                   <a:srgbClr val="90E0EF"/>
                 </a:solidFill>
@@ -28061,7 +29448,7 @@
               </a:rPr>
               <a:t>dla lokomocji</a:t>
             </a:r>
-            <a:endParaRPr lang="en-US" sz="1050" dirty="0"/>
+            <a:endParaRPr lang="en-US" sz="1400" dirty="0"/>
           </a:p>
         </p:txBody>
       </p:sp>
@@ -28115,7 +29502,7 @@
               <a:buNone/>
             </a:pPr>
             <a:r>
-              <a:rPr lang="en-US" sz="1050" b="1" dirty="0">
+              <a:rPr lang="en-US" sz="1400" b="1" dirty="0">
                 <a:solidFill>
                   <a:srgbClr val="90E0EF"/>
                 </a:solidFill>
@@ -28125,14 +29512,14 @@
               </a:rPr>
               <a:t>Nawigacja</a:t>
             </a:r>
-            <a:endParaRPr lang="en-US" sz="1050" dirty="0"/>
+            <a:endParaRPr lang="en-US" sz="1400" dirty="0"/>
           </a:p>
           <a:p>
             <a:pPr marL="0" indent="0" algn="ctr">
               <a:buNone/>
             </a:pPr>
             <a:r>
-              <a:rPr lang="en-US" sz="1050" b="1" dirty="0">
+              <a:rPr lang="en-US" sz="1400" b="1" dirty="0">
                 <a:solidFill>
                   <a:srgbClr val="90E0EF"/>
                 </a:solidFill>
@@ -28142,7 +29529,7 @@
               </a:rPr>
               <a:t>semantyczna</a:t>
             </a:r>
-            <a:endParaRPr lang="en-US" sz="1050" dirty="0"/>
+            <a:endParaRPr lang="en-US" sz="1400" dirty="0"/>
           </a:p>
         </p:txBody>
       </p:sp>
@@ -28196,7 +29583,7 @@
               <a:buNone/>
             </a:pPr>
             <a:r>
-              <a:rPr lang="en-US" sz="1050" b="1" dirty="0">
+              <a:rPr lang="en-US" sz="1400" b="1" dirty="0">
                 <a:solidFill>
                   <a:srgbClr val="90E0EF"/>
                 </a:solidFill>
@@ -28206,14 +29593,14 @@
               </a:rPr>
               <a:t>Social navigation</a:t>
             </a:r>
-            <a:endParaRPr lang="en-US" sz="1050" dirty="0"/>
+            <a:endParaRPr lang="en-US" sz="1400" dirty="0"/>
           </a:p>
           <a:p>
             <a:pPr marL="0" indent="0" algn="ctr">
               <a:buNone/>
             </a:pPr>
             <a:r>
-              <a:rPr lang="en-US" sz="1050" b="1" dirty="0">
+              <a:rPr lang="en-US" sz="1400" b="1" dirty="0">
                 <a:solidFill>
                   <a:srgbClr val="90E0EF"/>
                 </a:solidFill>
@@ -28223,7 +29610,7 @@
               </a:rPr>
               <a:t>i HRI</a:t>
             </a:r>
-            <a:endParaRPr lang="en-US" sz="1050" dirty="0"/>
+            <a:endParaRPr lang="en-US" sz="1400" dirty="0"/>
           </a:p>
         </p:txBody>
       </p:sp>
@@ -28277,7 +29664,7 @@
               <a:buNone/>
             </a:pPr>
             <a:r>
-              <a:rPr lang="en-US" sz="1050" b="1" dirty="0">
+              <a:rPr lang="en-US" sz="1400" b="1" dirty="0">
                 <a:solidFill>
                   <a:srgbClr val="90E0EF"/>
                 </a:solidFill>
@@ -28287,14 +29674,14 @@
               </a:rPr>
               <a:t>Multimodalna</a:t>
             </a:r>
-            <a:endParaRPr lang="en-US" sz="1050" dirty="0"/>
+            <a:endParaRPr lang="en-US" sz="1400" dirty="0"/>
           </a:p>
           <a:p>
             <a:pPr marL="0" indent="0" algn="ctr">
               <a:buNone/>
             </a:pPr>
             <a:r>
-              <a:rPr lang="en-US" sz="1050" b="1" dirty="0">
+              <a:rPr lang="en-US" sz="1400" b="1" dirty="0">
                 <a:solidFill>
                   <a:srgbClr val="90E0EF"/>
                 </a:solidFill>
@@ -28304,7 +29691,7 @@
               </a:rPr>
               <a:t>percepcja</a:t>
             </a:r>
-            <a:endParaRPr lang="en-US" sz="1050" dirty="0"/>
+            <a:endParaRPr lang="en-US" sz="1400" dirty="0"/>
           </a:p>
         </p:txBody>
       </p:sp>
@@ -28358,7 +29745,7 @@
               <a:buNone/>
             </a:pPr>
             <a:r>
-              <a:rPr lang="en-US" sz="1050" b="1" dirty="0">
+              <a:rPr lang="en-US" sz="1400" b="1" dirty="0">
                 <a:solidFill>
                   <a:srgbClr val="90E0EF"/>
                 </a:solidFill>
@@ -28368,14 +29755,14 @@
               </a:rPr>
               <a:t>Adaptacyjny</a:t>
             </a:r>
-            <a:endParaRPr lang="en-US" sz="1050" dirty="0"/>
+            <a:endParaRPr lang="en-US" sz="1400" dirty="0"/>
           </a:p>
           <a:p>
             <a:pPr marL="0" indent="0" algn="ctr">
               <a:buNone/>
             </a:pPr>
             <a:r>
-              <a:rPr lang="en-US" sz="1050" b="1" dirty="0">
+              <a:rPr lang="en-US" sz="1400" b="1" dirty="0">
                 <a:solidFill>
                   <a:srgbClr val="90E0EF"/>
                 </a:solidFill>
@@ -28385,7 +29772,7 @@
               </a:rPr>
               <a:t>chód</a:t>
             </a:r>
-            <a:endParaRPr lang="en-US" sz="1050" dirty="0"/>
+            <a:endParaRPr lang="en-US" sz="1400" dirty="0"/>
           </a:p>
         </p:txBody>
       </p:sp>
@@ -28559,7 +29946,7 @@
         <p:spPr>
           <a:xfrm>
             <a:off x="274320" y="1097280"/>
-            <a:ext cx="8595360" cy="3749040"/>
+            <a:ext cx="8595360" cy="2987040"/>
           </a:xfrm>
           <a:prstGeom prst="rect">
             <a:avLst/>
@@ -28591,7 +29978,7 @@
         <p:spPr>
           <a:xfrm>
             <a:off x="345689" y="1188720"/>
-            <a:ext cx="8404301" cy="3520440"/>
+            <a:ext cx="8404301" cy="2755933"/>
           </a:xfrm>
           <a:prstGeom prst="rect">
             <a:avLst/>
@@ -28600,7 +29987,9 @@
           <a:ln/>
         </p:spPr>
         <p:txBody>
-          <a:bodyPr wrap="square" lIns="127000" tIns="127000" rIns="127000" bIns="127000" rtlCol="0" anchor="t"/>
+          <a:bodyPr wrap="square" lIns="127000" tIns="36000" rIns="127000" bIns="0" rtlCol="0" anchor="t">
+            <a:spAutoFit/>
+          </a:bodyPr>
           <a:lstStyle/>
           <a:p>
             <a:pPr marL="216000" indent="-216000">
@@ -29007,702 +30396,902 @@
           </a:p>
         </p:txBody>
       </p:sp>
-      <p:sp>
-        <p:nvSpPr>
-          <p:cNvPr id="6" name="Shape 4"/>
-          <p:cNvSpPr/>
-          <p:nvPr/>
-        </p:nvSpPr>
-        <p:spPr>
+      <p:grpSp>
+        <p:nvGrpSpPr>
+          <p:cNvPr id="26" name="Grupa 25"/>
+          <p:cNvGrpSpPr/>
+          <p:nvPr/>
+        </p:nvGrpSpPr>
+        <p:grpSpPr>
           <a:xfrm>
             <a:off x="274320" y="1097280"/>
-            <a:ext cx="2011680" cy="3383280"/>
-          </a:xfrm>
-          <a:prstGeom prst="rect">
-            <a:avLst/>
-          </a:prstGeom>
-          <a:solidFill>
-            <a:srgbClr val="FFFFFF"/>
-          </a:solidFill>
-          <a:ln w="12700">
+            <a:ext cx="8694420" cy="2842260"/>
+            <a:chOff x="274320" y="1097280"/>
+            <a:chExt cx="8458200" cy="2842260"/>
+          </a:xfrm>
+        </p:grpSpPr>
+        <p:sp>
+          <p:nvSpPr>
+            <p:cNvPr id="6" name="Shape 4"/>
+            <p:cNvSpPr/>
+            <p:nvPr/>
+          </p:nvSpPr>
+          <p:spPr>
+            <a:xfrm>
+              <a:off x="274320" y="1097280"/>
+              <a:ext cx="2011680" cy="2842260"/>
+            </a:xfrm>
+            <a:prstGeom prst="rect">
+              <a:avLst/>
+            </a:prstGeom>
             <a:solidFill>
-              <a:srgbClr val="E2EBF3"/>
+              <a:srgbClr val="FFFFFF"/>
             </a:solidFill>
-            <a:prstDash val="solid"/>
-          </a:ln>
-          <a:effectLst>
-            <a:outerShdw blurRad="76200" dist="25400" dir="8100000" algn="bl" rotWithShape="0">
-              <a:srgbClr val="000000">
-                <a:alpha val="12000"/>
-              </a:srgbClr>
-            </a:outerShdw>
-          </a:effectLst>
-        </p:spPr>
-      </p:sp>
-      <p:sp>
-        <p:nvSpPr>
-          <p:cNvPr id="7" name="Shape 5"/>
-          <p:cNvSpPr/>
-          <p:nvPr/>
-        </p:nvSpPr>
-        <p:spPr>
-          <a:xfrm>
-            <a:off x="987552" y="1188720"/>
-            <a:ext cx="585216" cy="585216"/>
-          </a:xfrm>
-          <a:prstGeom prst="ellipse">
-            <a:avLst/>
-          </a:prstGeom>
-          <a:solidFill>
-            <a:srgbClr val="00B4D8"/>
-          </a:solidFill>
-          <a:ln w="12700">
+            <a:ln w="12700">
+              <a:solidFill>
+                <a:srgbClr val="E2EBF3"/>
+              </a:solidFill>
+              <a:prstDash val="solid"/>
+            </a:ln>
+            <a:effectLst>
+              <a:outerShdw blurRad="76200" dist="25400" dir="8100000" algn="bl" rotWithShape="0">
+                <a:srgbClr val="000000">
+                  <a:alpha val="12000"/>
+                </a:srgbClr>
+              </a:outerShdw>
+            </a:effectLst>
+          </p:spPr>
+        </p:sp>
+        <p:sp>
+          <p:nvSpPr>
+            <p:cNvPr id="7" name="Shape 5"/>
+            <p:cNvSpPr/>
+            <p:nvPr/>
+          </p:nvSpPr>
+          <p:spPr>
+            <a:xfrm>
+              <a:off x="987552" y="1234440"/>
+              <a:ext cx="585216" cy="585216"/>
+            </a:xfrm>
+            <a:prstGeom prst="ellipse">
+              <a:avLst/>
+            </a:prstGeom>
             <a:solidFill>
               <a:srgbClr val="00B4D8"/>
             </a:solidFill>
-            <a:prstDash val="solid"/>
-          </a:ln>
-        </p:spPr>
-      </p:sp>
-      <p:sp>
-        <p:nvSpPr>
-          <p:cNvPr id="8" name="Text 6"/>
-          <p:cNvSpPr/>
-          <p:nvPr/>
-        </p:nvSpPr>
-        <p:spPr>
-          <a:xfrm>
-            <a:off x="987552" y="1188720"/>
-            <a:ext cx="585216" cy="585216"/>
-          </a:xfrm>
-          <a:prstGeom prst="rect">
-            <a:avLst/>
-          </a:prstGeom>
-          <a:noFill/>
-          <a:ln/>
-        </p:spPr>
-        <p:txBody>
-          <a:bodyPr wrap="square" lIns="0" tIns="0" rIns="0" bIns="0" rtlCol="0" anchor="ctr"/>
-          <a:lstStyle/>
-          <a:p>
-            <a:pPr marL="0" indent="0" algn="ctr">
-              <a:buNone/>
-            </a:pPr>
-            <a:r>
-              <a:rPr lang="en-US" sz="2400" b="1" dirty="0">
-                <a:solidFill>
-                  <a:srgbClr val="FFFFFF"/>
-                </a:solidFill>
-                <a:latin typeface="Trebuchet MS" pitchFamily="34" charset="0"/>
-                <a:ea typeface="Trebuchet MS" pitchFamily="34" charset="-122"/>
-                <a:cs typeface="Trebuchet MS" pitchFamily="34" charset="-120"/>
-              </a:rPr>
-              <a:t>1</a:t>
-            </a:r>
-            <a:endParaRPr lang="en-US" sz="2400" dirty="0"/>
-          </a:p>
-        </p:txBody>
-      </p:sp>
-      <p:sp>
-        <p:nvSpPr>
-          <p:cNvPr id="9" name="Text 7"/>
-          <p:cNvSpPr/>
-          <p:nvPr/>
-        </p:nvSpPr>
-        <p:spPr>
-          <a:xfrm>
-            <a:off x="365760" y="1874520"/>
-            <a:ext cx="1828800" cy="502920"/>
-          </a:xfrm>
-          <a:prstGeom prst="rect">
-            <a:avLst/>
-          </a:prstGeom>
-          <a:noFill/>
-          <a:ln/>
-        </p:spPr>
-        <p:txBody>
-          <a:bodyPr wrap="square" lIns="0" tIns="0" rIns="0" bIns="0" rtlCol="0" anchor="ctr"/>
-          <a:lstStyle/>
-          <a:p>
-            <a:pPr marL="0" indent="0" algn="ctr">
-              <a:buNone/>
-            </a:pPr>
-            <a:r>
-              <a:rPr lang="en-US" b="1" dirty="0">
-                <a:solidFill>
-                  <a:srgbClr val="0D1B2A"/>
-                </a:solidFill>
-                <a:latin typeface="Trebuchet MS" pitchFamily="34" charset="0"/>
-                <a:ea typeface="Trebuchet MS" pitchFamily="34" charset="-122"/>
-                <a:cs typeface="Trebuchet MS" pitchFamily="34" charset="-120"/>
-              </a:rPr>
-              <a:t>Percepcja</a:t>
-            </a:r>
-            <a:endParaRPr lang="en-US" dirty="0"/>
-          </a:p>
-        </p:txBody>
-      </p:sp>
-      <p:sp>
-        <p:nvSpPr>
-          <p:cNvPr id="10" name="Text 8"/>
-          <p:cNvSpPr/>
-          <p:nvPr/>
-        </p:nvSpPr>
-        <p:spPr>
-          <a:xfrm>
-            <a:off x="365760" y="2423160"/>
-            <a:ext cx="1828800" cy="1965960"/>
-          </a:xfrm>
-          <a:prstGeom prst="rect">
-            <a:avLst/>
-          </a:prstGeom>
-          <a:noFill/>
-          <a:ln/>
-        </p:spPr>
-        <p:txBody>
-          <a:bodyPr wrap="square" lIns="0" tIns="0" rIns="0" bIns="0" rtlCol="0" anchor="ctr"/>
-          <a:lstStyle/>
-          <a:p>
-            <a:pPr marL="0" indent="0" algn="ctr">
-              <a:buNone/>
-            </a:pPr>
-            <a:r>
-              <a:rPr lang="en-US" sz="1600" dirty="0">
-                <a:solidFill>
-                  <a:srgbClr val="475569"/>
-                </a:solidFill>
-                <a:latin typeface="Calibri" pitchFamily="34" charset="0"/>
-                <a:ea typeface="Calibri" pitchFamily="34" charset="-122"/>
-                <a:cs typeface="Calibri" pitchFamily="34" charset="-120"/>
-              </a:rPr>
-              <a:t>IMU, LiDAR, RGB-D, enkodery – fuzja sensoryczna i estymacja stanu</a:t>
-            </a:r>
-            <a:endParaRPr lang="en-US" sz="1600" dirty="0"/>
-          </a:p>
-        </p:txBody>
-      </p:sp>
-      <p:sp>
-        <p:nvSpPr>
-          <p:cNvPr id="11" name="Shape 9"/>
-          <p:cNvSpPr/>
-          <p:nvPr/>
-        </p:nvSpPr>
-        <p:spPr>
-          <a:xfrm>
-            <a:off x="2423160" y="1097280"/>
-            <a:ext cx="2011680" cy="3383280"/>
-          </a:xfrm>
-          <a:prstGeom prst="rect">
-            <a:avLst/>
-          </a:prstGeom>
-          <a:solidFill>
-            <a:srgbClr val="FFFFFF"/>
-          </a:solidFill>
-          <a:ln w="12700">
+            <a:ln w="12700">
+              <a:solidFill>
+                <a:srgbClr val="00B4D8"/>
+              </a:solidFill>
+              <a:prstDash val="solid"/>
+            </a:ln>
+          </p:spPr>
+        </p:sp>
+        <p:sp>
+          <p:nvSpPr>
+            <p:cNvPr id="8" name="Text 6"/>
+            <p:cNvSpPr/>
+            <p:nvPr/>
+          </p:nvSpPr>
+          <p:spPr>
+            <a:xfrm>
+              <a:off x="987552" y="1234440"/>
+              <a:ext cx="585216" cy="585216"/>
+            </a:xfrm>
+            <a:prstGeom prst="rect">
+              <a:avLst/>
+            </a:prstGeom>
+            <a:noFill/>
+            <a:ln/>
+          </p:spPr>
+          <p:txBody>
+            <a:bodyPr wrap="square" lIns="0" tIns="0" rIns="0" bIns="0" rtlCol="0" anchor="ctr"/>
+            <a:lstStyle/>
+            <a:p>
+              <a:pPr marL="0" indent="0" algn="ctr">
+                <a:buNone/>
+              </a:pPr>
+              <a:r>
+                <a:rPr lang="en-US" sz="2400" b="1" dirty="0">
+                  <a:solidFill>
+                    <a:srgbClr val="FFFFFF"/>
+                  </a:solidFill>
+                  <a:latin typeface="Trebuchet MS" pitchFamily="34" charset="0"/>
+                  <a:ea typeface="Trebuchet MS" pitchFamily="34" charset="-122"/>
+                  <a:cs typeface="Trebuchet MS" pitchFamily="34" charset="-120"/>
+                </a:rPr>
+                <a:t>1</a:t>
+              </a:r>
+              <a:endParaRPr lang="en-US" sz="2400" dirty="0"/>
+            </a:p>
+          </p:txBody>
+        </p:sp>
+        <p:sp>
+          <p:nvSpPr>
+            <p:cNvPr id="9" name="Text 7"/>
+            <p:cNvSpPr/>
+            <p:nvPr/>
+          </p:nvSpPr>
+          <p:spPr>
+            <a:xfrm>
+              <a:off x="365760" y="1912620"/>
+              <a:ext cx="1828800" cy="502920"/>
+            </a:xfrm>
+            <a:prstGeom prst="rect">
+              <a:avLst/>
+            </a:prstGeom>
+            <a:noFill/>
+            <a:ln/>
+          </p:spPr>
+          <p:txBody>
+            <a:bodyPr wrap="square" lIns="0" tIns="0" rIns="0" bIns="0" rtlCol="0" anchor="ctr"/>
+            <a:lstStyle/>
+            <a:p>
+              <a:pPr marL="0" indent="0" algn="ctr">
+                <a:buNone/>
+              </a:pPr>
+              <a:r>
+                <a:rPr lang="en-US" b="1" dirty="0">
+                  <a:solidFill>
+                    <a:srgbClr val="0D1B2A"/>
+                  </a:solidFill>
+                  <a:latin typeface="Trebuchet MS" pitchFamily="34" charset="0"/>
+                  <a:ea typeface="Trebuchet MS" pitchFamily="34" charset="-122"/>
+                  <a:cs typeface="Trebuchet MS" pitchFamily="34" charset="-120"/>
+                </a:rPr>
+                <a:t>Percepcja</a:t>
+              </a:r>
+              <a:endParaRPr lang="en-US" dirty="0"/>
+            </a:p>
+          </p:txBody>
+        </p:sp>
+        <p:sp>
+          <p:nvSpPr>
+            <p:cNvPr id="10" name="Text 8"/>
+            <p:cNvSpPr/>
+            <p:nvPr/>
+          </p:nvSpPr>
+          <p:spPr>
+            <a:xfrm>
+              <a:off x="365760" y="2423160"/>
+              <a:ext cx="1828800" cy="1409700"/>
+            </a:xfrm>
+            <a:prstGeom prst="rect">
+              <a:avLst/>
+            </a:prstGeom>
+            <a:noFill/>
+            <a:ln/>
+          </p:spPr>
+          <p:txBody>
+            <a:bodyPr wrap="square" lIns="0" tIns="0" rIns="0" bIns="0" rtlCol="0" anchor="ctr"/>
+            <a:lstStyle/>
+            <a:p>
+              <a:pPr marL="0" indent="0" algn="ctr">
+                <a:buNone/>
+              </a:pPr>
+              <a:r>
+                <a:rPr lang="en-US" sz="1600" dirty="0">
+                  <a:solidFill>
+                    <a:srgbClr val="475569"/>
+                  </a:solidFill>
+                  <a:latin typeface="Calibri" pitchFamily="34" charset="0"/>
+                  <a:ea typeface="Calibri" pitchFamily="34" charset="-122"/>
+                  <a:cs typeface="Calibri" pitchFamily="34" charset="-120"/>
+                </a:rPr>
+                <a:t>IMU, LiDAR, RGB-D, </a:t>
+              </a:r>
+              <a:r>
+                <a:rPr lang="en-US" sz="1600" dirty="0" err="1" smtClean="0">
+                  <a:solidFill>
+                    <a:srgbClr val="475569"/>
+                  </a:solidFill>
+                  <a:latin typeface="Calibri" pitchFamily="34" charset="0"/>
+                  <a:ea typeface="Calibri" pitchFamily="34" charset="-122"/>
+                  <a:cs typeface="Calibri" pitchFamily="34" charset="-120"/>
+                </a:rPr>
+                <a:t>enkodery</a:t>
+              </a:r>
+              <a:r>
+                <a:rPr lang="pl-PL" sz="1600" dirty="0">
+                  <a:solidFill>
+                    <a:srgbClr val="475569"/>
+                  </a:solidFill>
+                  <a:latin typeface="Calibri" pitchFamily="34" charset="0"/>
+                  <a:ea typeface="Calibri" pitchFamily="34" charset="-122"/>
+                  <a:cs typeface="Calibri" pitchFamily="34" charset="-120"/>
+                </a:rPr>
+                <a:t>:</a:t>
+              </a:r>
+              <a:r>
+                <a:rPr lang="en-US" sz="1600" dirty="0" smtClean="0">
+                  <a:solidFill>
+                    <a:srgbClr val="475569"/>
+                  </a:solidFill>
+                  <a:latin typeface="Calibri" pitchFamily="34" charset="0"/>
+                  <a:ea typeface="Calibri" pitchFamily="34" charset="-122"/>
+                  <a:cs typeface="Calibri" pitchFamily="34" charset="-120"/>
+                </a:rPr>
+                <a:t> </a:t>
+              </a:r>
+              <a:r>
+                <a:rPr lang="en-US" sz="1600" dirty="0">
+                  <a:solidFill>
+                    <a:srgbClr val="475569"/>
+                  </a:solidFill>
+                  <a:latin typeface="Calibri" pitchFamily="34" charset="0"/>
+                  <a:ea typeface="Calibri" pitchFamily="34" charset="-122"/>
+                  <a:cs typeface="Calibri" pitchFamily="34" charset="-120"/>
+                </a:rPr>
+                <a:t>fuzja </a:t>
+              </a:r>
+              <a:r>
+                <a:rPr lang="en-US" sz="1600" dirty="0" err="1">
+                  <a:solidFill>
+                    <a:srgbClr val="475569"/>
+                  </a:solidFill>
+                  <a:latin typeface="Calibri" pitchFamily="34" charset="0"/>
+                  <a:ea typeface="Calibri" pitchFamily="34" charset="-122"/>
+                  <a:cs typeface="Calibri" pitchFamily="34" charset="-120"/>
+                </a:rPr>
+                <a:t>sensoryczna</a:t>
+              </a:r>
+              <a:r>
+                <a:rPr lang="en-US" sz="1600" dirty="0">
+                  <a:solidFill>
+                    <a:srgbClr val="475569"/>
+                  </a:solidFill>
+                  <a:latin typeface="Calibri" pitchFamily="34" charset="0"/>
+                  <a:ea typeface="Calibri" pitchFamily="34" charset="-122"/>
+                  <a:cs typeface="Calibri" pitchFamily="34" charset="-120"/>
+                </a:rPr>
+                <a:t> </a:t>
+              </a:r>
+              <a:r>
+                <a:rPr lang="pl-PL" sz="1600" dirty="0" smtClean="0">
+                  <a:solidFill>
+                    <a:srgbClr val="475569"/>
+                  </a:solidFill>
+                  <a:latin typeface="Calibri" pitchFamily="34" charset="0"/>
+                  <a:ea typeface="Calibri" pitchFamily="34" charset="-122"/>
+                  <a:cs typeface="Calibri" pitchFamily="34" charset="-120"/>
+                </a:rPr>
+                <a:t/>
+              </a:r>
+              <a:br>
+                <a:rPr lang="pl-PL" sz="1600" dirty="0" smtClean="0">
+                  <a:solidFill>
+                    <a:srgbClr val="475569"/>
+                  </a:solidFill>
+                  <a:latin typeface="Calibri" pitchFamily="34" charset="0"/>
+                  <a:ea typeface="Calibri" pitchFamily="34" charset="-122"/>
+                  <a:cs typeface="Calibri" pitchFamily="34" charset="-120"/>
+                </a:rPr>
+              </a:br>
+              <a:r>
+                <a:rPr lang="en-US" sz="1600" dirty="0" err="1" smtClean="0">
+                  <a:solidFill>
+                    <a:srgbClr val="475569"/>
+                  </a:solidFill>
+                  <a:latin typeface="Calibri" pitchFamily="34" charset="0"/>
+                  <a:ea typeface="Calibri" pitchFamily="34" charset="-122"/>
+                  <a:cs typeface="Calibri" pitchFamily="34" charset="-120"/>
+                </a:rPr>
+                <a:t>i</a:t>
+              </a:r>
+              <a:r>
+                <a:rPr lang="en-US" sz="1600" dirty="0" smtClean="0">
+                  <a:solidFill>
+                    <a:srgbClr val="475569"/>
+                  </a:solidFill>
+                  <a:latin typeface="Calibri" pitchFamily="34" charset="0"/>
+                  <a:ea typeface="Calibri" pitchFamily="34" charset="-122"/>
+                  <a:cs typeface="Calibri" pitchFamily="34" charset="-120"/>
+                </a:rPr>
+                <a:t> </a:t>
+              </a:r>
+              <a:r>
+                <a:rPr lang="en-US" sz="1600" dirty="0">
+                  <a:solidFill>
+                    <a:srgbClr val="475569"/>
+                  </a:solidFill>
+                  <a:latin typeface="Calibri" pitchFamily="34" charset="0"/>
+                  <a:ea typeface="Calibri" pitchFamily="34" charset="-122"/>
+                  <a:cs typeface="Calibri" pitchFamily="34" charset="-120"/>
+                </a:rPr>
+                <a:t>estymacja stanu</a:t>
+              </a:r>
+              <a:endParaRPr lang="en-US" sz="1600" dirty="0"/>
+            </a:p>
+          </p:txBody>
+        </p:sp>
+        <p:sp>
+          <p:nvSpPr>
+            <p:cNvPr id="11" name="Shape 9"/>
+            <p:cNvSpPr/>
+            <p:nvPr/>
+          </p:nvSpPr>
+          <p:spPr>
+            <a:xfrm>
+              <a:off x="2423160" y="1097280"/>
+              <a:ext cx="2011680" cy="2842260"/>
+            </a:xfrm>
+            <a:prstGeom prst="rect">
+              <a:avLst/>
+            </a:prstGeom>
             <a:solidFill>
-              <a:srgbClr val="E2EBF3"/>
+              <a:srgbClr val="FFFFFF"/>
             </a:solidFill>
-            <a:prstDash val="solid"/>
-          </a:ln>
-          <a:effectLst>
-            <a:outerShdw blurRad="76200" dist="25400" dir="8100000" algn="bl" rotWithShape="0">
-              <a:srgbClr val="000000">
-                <a:alpha val="12000"/>
-              </a:srgbClr>
-            </a:outerShdw>
-          </a:effectLst>
-        </p:spPr>
-      </p:sp>
-      <p:sp>
-        <p:nvSpPr>
-          <p:cNvPr id="12" name="Shape 10"/>
-          <p:cNvSpPr/>
-          <p:nvPr/>
-        </p:nvSpPr>
-        <p:spPr>
-          <a:xfrm>
-            <a:off x="3136392" y="1188720"/>
-            <a:ext cx="585216" cy="585216"/>
-          </a:xfrm>
-          <a:prstGeom prst="ellipse">
-            <a:avLst/>
-          </a:prstGeom>
-          <a:solidFill>
-            <a:srgbClr val="00B4D8"/>
-          </a:solidFill>
-          <a:ln w="12700">
+            <a:ln w="12700">
+              <a:solidFill>
+                <a:srgbClr val="E2EBF3"/>
+              </a:solidFill>
+              <a:prstDash val="solid"/>
+            </a:ln>
+            <a:effectLst>
+              <a:outerShdw blurRad="76200" dist="25400" dir="8100000" algn="bl" rotWithShape="0">
+                <a:srgbClr val="000000">
+                  <a:alpha val="12000"/>
+                </a:srgbClr>
+              </a:outerShdw>
+            </a:effectLst>
+          </p:spPr>
+        </p:sp>
+        <p:sp>
+          <p:nvSpPr>
+            <p:cNvPr id="12" name="Shape 10"/>
+            <p:cNvSpPr/>
+            <p:nvPr/>
+          </p:nvSpPr>
+          <p:spPr>
+            <a:xfrm>
+              <a:off x="3136392" y="1234440"/>
+              <a:ext cx="585216" cy="585216"/>
+            </a:xfrm>
+            <a:prstGeom prst="ellipse">
+              <a:avLst/>
+            </a:prstGeom>
             <a:solidFill>
               <a:srgbClr val="00B4D8"/>
             </a:solidFill>
-            <a:prstDash val="solid"/>
-          </a:ln>
-        </p:spPr>
-      </p:sp>
-      <p:sp>
-        <p:nvSpPr>
-          <p:cNvPr id="13" name="Text 11"/>
-          <p:cNvSpPr/>
-          <p:nvPr/>
-        </p:nvSpPr>
-        <p:spPr>
-          <a:xfrm>
-            <a:off x="3136392" y="1188720"/>
-            <a:ext cx="585216" cy="585216"/>
-          </a:xfrm>
-          <a:prstGeom prst="rect">
-            <a:avLst/>
-          </a:prstGeom>
-          <a:noFill/>
-          <a:ln/>
-        </p:spPr>
-        <p:txBody>
-          <a:bodyPr wrap="square" lIns="0" tIns="0" rIns="0" bIns="0" rtlCol="0" anchor="ctr"/>
-          <a:lstStyle/>
-          <a:p>
-            <a:pPr marL="0" indent="0" algn="ctr">
-              <a:buNone/>
-            </a:pPr>
-            <a:r>
-              <a:rPr lang="en-US" sz="2400" b="1" dirty="0">
-                <a:solidFill>
-                  <a:srgbClr val="FFFFFF"/>
-                </a:solidFill>
-                <a:latin typeface="Trebuchet MS" pitchFamily="34" charset="0"/>
-                <a:ea typeface="Trebuchet MS" pitchFamily="34" charset="-122"/>
-                <a:cs typeface="Trebuchet MS" pitchFamily="34" charset="-120"/>
-              </a:rPr>
-              <a:t>2</a:t>
-            </a:r>
-            <a:endParaRPr lang="en-US" sz="2400" dirty="0"/>
-          </a:p>
-        </p:txBody>
-      </p:sp>
-      <p:sp>
-        <p:nvSpPr>
-          <p:cNvPr id="14" name="Text 12"/>
-          <p:cNvSpPr/>
-          <p:nvPr/>
-        </p:nvSpPr>
-        <p:spPr>
-          <a:xfrm>
-            <a:off x="2514600" y="1874520"/>
-            <a:ext cx="1828800" cy="502920"/>
-          </a:xfrm>
-          <a:prstGeom prst="rect">
-            <a:avLst/>
-          </a:prstGeom>
-          <a:noFill/>
-          <a:ln/>
-        </p:spPr>
-        <p:txBody>
-          <a:bodyPr wrap="square" lIns="0" tIns="0" rIns="0" bIns="0" rtlCol="0" anchor="ctr"/>
-          <a:lstStyle/>
-          <a:p>
-            <a:pPr marL="0" indent="0" algn="ctr">
-              <a:buNone/>
-            </a:pPr>
-            <a:r>
-              <a:rPr lang="en-US" b="1" dirty="0">
-                <a:solidFill>
-                  <a:srgbClr val="0D1B2A"/>
-                </a:solidFill>
-                <a:latin typeface="Trebuchet MS" pitchFamily="34" charset="0"/>
-                <a:ea typeface="Trebuchet MS" pitchFamily="34" charset="-122"/>
-                <a:cs typeface="Trebuchet MS" pitchFamily="34" charset="-120"/>
-              </a:rPr>
-              <a:t>Planowanie</a:t>
-            </a:r>
-            <a:endParaRPr lang="en-US" dirty="0"/>
-          </a:p>
-        </p:txBody>
-      </p:sp>
-      <p:sp>
-        <p:nvSpPr>
-          <p:cNvPr id="15" name="Text 13"/>
-          <p:cNvSpPr/>
-          <p:nvPr/>
-        </p:nvSpPr>
-        <p:spPr>
-          <a:xfrm>
-            <a:off x="2514600" y="2423160"/>
-            <a:ext cx="1828800" cy="1965960"/>
-          </a:xfrm>
-          <a:prstGeom prst="rect">
-            <a:avLst/>
-          </a:prstGeom>
-          <a:noFill/>
-          <a:ln/>
-        </p:spPr>
-        <p:txBody>
-          <a:bodyPr wrap="square" lIns="0" tIns="0" rIns="0" bIns="0" rtlCol="0" anchor="ctr"/>
-          <a:lstStyle/>
-          <a:p>
-            <a:pPr marL="0" indent="0" algn="ctr">
-              <a:buNone/>
-            </a:pPr>
-            <a:r>
-              <a:rPr lang="en-US" sz="1600" dirty="0">
-                <a:solidFill>
-                  <a:srgbClr val="475569"/>
-                </a:solidFill>
-                <a:latin typeface="Calibri" pitchFamily="34" charset="0"/>
-                <a:ea typeface="Calibri" pitchFamily="34" charset="-122"/>
-                <a:cs typeface="Calibri" pitchFamily="34" charset="-120"/>
-              </a:rPr>
-              <a:t>A* + DWA: ścieżka globalna i lokalna przekazana do planisty footstep</a:t>
-            </a:r>
-            <a:endParaRPr lang="en-US" sz="1600" dirty="0"/>
-          </a:p>
-        </p:txBody>
-      </p:sp>
-      <p:sp>
-        <p:nvSpPr>
-          <p:cNvPr id="16" name="Shape 14"/>
-          <p:cNvSpPr/>
-          <p:nvPr/>
-        </p:nvSpPr>
-        <p:spPr>
-          <a:xfrm>
-            <a:off x="4572000" y="1097280"/>
-            <a:ext cx="2011680" cy="3383280"/>
-          </a:xfrm>
-          <a:prstGeom prst="rect">
-            <a:avLst/>
-          </a:prstGeom>
-          <a:solidFill>
-            <a:srgbClr val="FFFFFF"/>
-          </a:solidFill>
-          <a:ln w="12700">
+            <a:ln w="12700">
+              <a:solidFill>
+                <a:srgbClr val="00B4D8"/>
+              </a:solidFill>
+              <a:prstDash val="solid"/>
+            </a:ln>
+          </p:spPr>
+        </p:sp>
+        <p:sp>
+          <p:nvSpPr>
+            <p:cNvPr id="13" name="Text 11"/>
+            <p:cNvSpPr/>
+            <p:nvPr/>
+          </p:nvSpPr>
+          <p:spPr>
+            <a:xfrm>
+              <a:off x="3136392" y="1234440"/>
+              <a:ext cx="585216" cy="585216"/>
+            </a:xfrm>
+            <a:prstGeom prst="rect">
+              <a:avLst/>
+            </a:prstGeom>
+            <a:noFill/>
+            <a:ln/>
+          </p:spPr>
+          <p:txBody>
+            <a:bodyPr wrap="square" lIns="0" tIns="0" rIns="0" bIns="0" rtlCol="0" anchor="ctr"/>
+            <a:lstStyle/>
+            <a:p>
+              <a:pPr marL="0" indent="0" algn="ctr">
+                <a:buNone/>
+              </a:pPr>
+              <a:r>
+                <a:rPr lang="en-US" sz="2400" b="1" dirty="0">
+                  <a:solidFill>
+                    <a:srgbClr val="FFFFFF"/>
+                  </a:solidFill>
+                  <a:latin typeface="Trebuchet MS" pitchFamily="34" charset="0"/>
+                  <a:ea typeface="Trebuchet MS" pitchFamily="34" charset="-122"/>
+                  <a:cs typeface="Trebuchet MS" pitchFamily="34" charset="-120"/>
+                </a:rPr>
+                <a:t>2</a:t>
+              </a:r>
+              <a:endParaRPr lang="en-US" sz="2400" dirty="0"/>
+            </a:p>
+          </p:txBody>
+        </p:sp>
+        <p:sp>
+          <p:nvSpPr>
+            <p:cNvPr id="14" name="Text 12"/>
+            <p:cNvSpPr/>
+            <p:nvPr/>
+          </p:nvSpPr>
+          <p:spPr>
+            <a:xfrm>
+              <a:off x="2514600" y="1912620"/>
+              <a:ext cx="1828800" cy="502920"/>
+            </a:xfrm>
+            <a:prstGeom prst="rect">
+              <a:avLst/>
+            </a:prstGeom>
+            <a:noFill/>
+            <a:ln/>
+          </p:spPr>
+          <p:txBody>
+            <a:bodyPr wrap="square" lIns="0" tIns="0" rIns="0" bIns="0" rtlCol="0" anchor="ctr"/>
+            <a:lstStyle/>
+            <a:p>
+              <a:pPr marL="0" indent="0" algn="ctr">
+                <a:buNone/>
+              </a:pPr>
+              <a:r>
+                <a:rPr lang="en-US" b="1" dirty="0">
+                  <a:solidFill>
+                    <a:srgbClr val="0D1B2A"/>
+                  </a:solidFill>
+                  <a:latin typeface="Trebuchet MS" pitchFamily="34" charset="0"/>
+                  <a:ea typeface="Trebuchet MS" pitchFamily="34" charset="-122"/>
+                  <a:cs typeface="Trebuchet MS" pitchFamily="34" charset="-120"/>
+                </a:rPr>
+                <a:t>Planowanie</a:t>
+              </a:r>
+              <a:endParaRPr lang="en-US" dirty="0"/>
+            </a:p>
+          </p:txBody>
+        </p:sp>
+        <p:sp>
+          <p:nvSpPr>
+            <p:cNvPr id="15" name="Text 13"/>
+            <p:cNvSpPr/>
+            <p:nvPr/>
+          </p:nvSpPr>
+          <p:spPr>
+            <a:xfrm>
+              <a:off x="2514600" y="2423160"/>
+              <a:ext cx="1828800" cy="1409700"/>
+            </a:xfrm>
+            <a:prstGeom prst="rect">
+              <a:avLst/>
+            </a:prstGeom>
+            <a:noFill/>
+            <a:ln/>
+          </p:spPr>
+          <p:txBody>
+            <a:bodyPr wrap="square" lIns="0" tIns="0" rIns="0" bIns="0" rtlCol="0" anchor="ctr"/>
+            <a:lstStyle/>
+            <a:p>
+              <a:pPr marL="0" indent="0" algn="ctr">
+                <a:buNone/>
+              </a:pPr>
+              <a:r>
+                <a:rPr lang="en-US" sz="1600" dirty="0">
+                  <a:solidFill>
+                    <a:srgbClr val="475569"/>
+                  </a:solidFill>
+                  <a:latin typeface="Calibri" pitchFamily="34" charset="0"/>
+                  <a:ea typeface="Calibri" pitchFamily="34" charset="-122"/>
+                  <a:cs typeface="Calibri" pitchFamily="34" charset="-120"/>
+                </a:rPr>
+                <a:t>A* + DWA: ścieżka globalna i lokalna przekazana do planisty footstep</a:t>
+              </a:r>
+              <a:endParaRPr lang="en-US" sz="1600" dirty="0"/>
+            </a:p>
+          </p:txBody>
+        </p:sp>
+        <p:sp>
+          <p:nvSpPr>
+            <p:cNvPr id="16" name="Shape 14"/>
+            <p:cNvSpPr/>
+            <p:nvPr/>
+          </p:nvSpPr>
+          <p:spPr>
+            <a:xfrm>
+              <a:off x="4572000" y="1097280"/>
+              <a:ext cx="2011680" cy="2842260"/>
+            </a:xfrm>
+            <a:prstGeom prst="rect">
+              <a:avLst/>
+            </a:prstGeom>
             <a:solidFill>
-              <a:srgbClr val="E2EBF3"/>
+              <a:srgbClr val="FFFFFF"/>
             </a:solidFill>
-            <a:prstDash val="solid"/>
-          </a:ln>
-          <a:effectLst>
-            <a:outerShdw blurRad="76200" dist="25400" dir="8100000" algn="bl" rotWithShape="0">
-              <a:srgbClr val="000000">
-                <a:alpha val="12000"/>
-              </a:srgbClr>
-            </a:outerShdw>
-          </a:effectLst>
-        </p:spPr>
-      </p:sp>
-      <p:sp>
-        <p:nvSpPr>
-          <p:cNvPr id="17" name="Shape 15"/>
-          <p:cNvSpPr/>
-          <p:nvPr/>
-        </p:nvSpPr>
-        <p:spPr>
-          <a:xfrm>
-            <a:off x="5285232" y="1188720"/>
-            <a:ext cx="585216" cy="585216"/>
-          </a:xfrm>
-          <a:prstGeom prst="ellipse">
-            <a:avLst/>
-          </a:prstGeom>
-          <a:solidFill>
-            <a:srgbClr val="00B4D8"/>
-          </a:solidFill>
-          <a:ln w="12700">
+            <a:ln w="12700">
+              <a:solidFill>
+                <a:srgbClr val="E2EBF3"/>
+              </a:solidFill>
+              <a:prstDash val="solid"/>
+            </a:ln>
+            <a:effectLst>
+              <a:outerShdw blurRad="76200" dist="25400" dir="8100000" algn="bl" rotWithShape="0">
+                <a:srgbClr val="000000">
+                  <a:alpha val="12000"/>
+                </a:srgbClr>
+              </a:outerShdw>
+            </a:effectLst>
+          </p:spPr>
+        </p:sp>
+        <p:sp>
+          <p:nvSpPr>
+            <p:cNvPr id="17" name="Shape 15"/>
+            <p:cNvSpPr/>
+            <p:nvPr/>
+          </p:nvSpPr>
+          <p:spPr>
+            <a:xfrm>
+              <a:off x="5285232" y="1234440"/>
+              <a:ext cx="585216" cy="585216"/>
+            </a:xfrm>
+            <a:prstGeom prst="ellipse">
+              <a:avLst/>
+            </a:prstGeom>
             <a:solidFill>
               <a:srgbClr val="00B4D8"/>
             </a:solidFill>
-            <a:prstDash val="solid"/>
-          </a:ln>
-        </p:spPr>
-      </p:sp>
-      <p:sp>
-        <p:nvSpPr>
-          <p:cNvPr id="18" name="Text 16"/>
-          <p:cNvSpPr/>
-          <p:nvPr/>
-        </p:nvSpPr>
-        <p:spPr>
-          <a:xfrm>
-            <a:off x="5285232" y="1188720"/>
-            <a:ext cx="585216" cy="585216"/>
-          </a:xfrm>
-          <a:prstGeom prst="rect">
-            <a:avLst/>
-          </a:prstGeom>
-          <a:noFill/>
-          <a:ln/>
-        </p:spPr>
-        <p:txBody>
-          <a:bodyPr wrap="square" lIns="0" tIns="0" rIns="0" bIns="0" rtlCol="0" anchor="ctr"/>
-          <a:lstStyle/>
-          <a:p>
-            <a:pPr marL="0" indent="0" algn="ctr">
-              <a:buNone/>
-            </a:pPr>
-            <a:r>
-              <a:rPr lang="en-US" sz="2400" b="1" dirty="0">
-                <a:solidFill>
-                  <a:srgbClr val="FFFFFF"/>
-                </a:solidFill>
-                <a:latin typeface="Trebuchet MS" pitchFamily="34" charset="0"/>
-                <a:ea typeface="Trebuchet MS" pitchFamily="34" charset="-122"/>
-                <a:cs typeface="Trebuchet MS" pitchFamily="34" charset="-120"/>
-              </a:rPr>
-              <a:t>3</a:t>
-            </a:r>
-            <a:endParaRPr lang="en-US" sz="2400" dirty="0"/>
-          </a:p>
-        </p:txBody>
-      </p:sp>
-      <p:sp>
-        <p:nvSpPr>
-          <p:cNvPr id="19" name="Text 17"/>
-          <p:cNvSpPr/>
-          <p:nvPr/>
-        </p:nvSpPr>
-        <p:spPr>
-          <a:xfrm>
-            <a:off x="4663440" y="1874520"/>
-            <a:ext cx="1828800" cy="502920"/>
-          </a:xfrm>
-          <a:prstGeom prst="rect">
-            <a:avLst/>
-          </a:prstGeom>
-          <a:noFill/>
-          <a:ln/>
-        </p:spPr>
-        <p:txBody>
-          <a:bodyPr wrap="square" lIns="0" tIns="0" rIns="0" bIns="0" rtlCol="0" anchor="ctr"/>
-          <a:lstStyle/>
-          <a:p>
-            <a:pPr marL="0" indent="0" algn="ctr">
-              <a:buNone/>
-            </a:pPr>
-            <a:r>
-              <a:rPr lang="en-US" b="1" dirty="0">
-                <a:solidFill>
-                  <a:srgbClr val="0D1B2A"/>
-                </a:solidFill>
-                <a:latin typeface="Trebuchet MS" pitchFamily="34" charset="0"/>
-                <a:ea typeface="Trebuchet MS" pitchFamily="34" charset="-122"/>
-                <a:cs typeface="Trebuchet MS" pitchFamily="34" charset="-120"/>
-              </a:rPr>
-              <a:t>Generacja kroków</a:t>
-            </a:r>
-            <a:endParaRPr lang="en-US" dirty="0"/>
-          </a:p>
-        </p:txBody>
-      </p:sp>
-      <p:sp>
-        <p:nvSpPr>
-          <p:cNvPr id="20" name="Text 18"/>
-          <p:cNvSpPr/>
-          <p:nvPr/>
-        </p:nvSpPr>
-        <p:spPr>
-          <a:xfrm>
-            <a:off x="4663440" y="2423160"/>
-            <a:ext cx="1828800" cy="1965960"/>
-          </a:xfrm>
-          <a:prstGeom prst="rect">
-            <a:avLst/>
-          </a:prstGeom>
-          <a:noFill/>
-          <a:ln/>
-        </p:spPr>
-        <p:txBody>
-          <a:bodyPr wrap="square" lIns="0" tIns="0" rIns="0" bIns="0" rtlCol="0" anchor="ctr"/>
-          <a:lstStyle/>
-          <a:p>
-            <a:pPr marL="0" indent="0" algn="ctr">
-              <a:buNone/>
-            </a:pPr>
-            <a:r>
-              <a:rPr lang="en-US" sz="1600" dirty="0">
-                <a:solidFill>
-                  <a:srgbClr val="475569"/>
-                </a:solidFill>
-                <a:latin typeface="Calibri" pitchFamily="34" charset="0"/>
-                <a:ea typeface="Calibri" pitchFamily="34" charset="-122"/>
-                <a:cs typeface="Calibri" pitchFamily="34" charset="-120"/>
-              </a:rPr>
-              <a:t>Sekwencja stóp, trajektoria CoM z modelu LIPM, weryfikacja ZMP</a:t>
-            </a:r>
-            <a:endParaRPr lang="en-US" sz="1600" dirty="0"/>
-          </a:p>
-        </p:txBody>
-      </p:sp>
-      <p:sp>
-        <p:nvSpPr>
-          <p:cNvPr id="21" name="Shape 19"/>
-          <p:cNvSpPr/>
-          <p:nvPr/>
-        </p:nvSpPr>
-        <p:spPr>
-          <a:xfrm>
-            <a:off x="6720840" y="1097280"/>
-            <a:ext cx="2011680" cy="3383280"/>
-          </a:xfrm>
-          <a:prstGeom prst="rect">
-            <a:avLst/>
-          </a:prstGeom>
-          <a:solidFill>
-            <a:srgbClr val="FFFFFF"/>
-          </a:solidFill>
-          <a:ln w="12700">
+            <a:ln w="12700">
+              <a:solidFill>
+                <a:srgbClr val="00B4D8"/>
+              </a:solidFill>
+              <a:prstDash val="solid"/>
+            </a:ln>
+          </p:spPr>
+        </p:sp>
+        <p:sp>
+          <p:nvSpPr>
+            <p:cNvPr id="18" name="Text 16"/>
+            <p:cNvSpPr/>
+            <p:nvPr/>
+          </p:nvSpPr>
+          <p:spPr>
+            <a:xfrm>
+              <a:off x="5285232" y="1234440"/>
+              <a:ext cx="585216" cy="585216"/>
+            </a:xfrm>
+            <a:prstGeom prst="rect">
+              <a:avLst/>
+            </a:prstGeom>
+            <a:noFill/>
+            <a:ln/>
+          </p:spPr>
+          <p:txBody>
+            <a:bodyPr wrap="square" lIns="0" tIns="0" rIns="0" bIns="0" rtlCol="0" anchor="ctr"/>
+            <a:lstStyle/>
+            <a:p>
+              <a:pPr marL="0" indent="0" algn="ctr">
+                <a:buNone/>
+              </a:pPr>
+              <a:r>
+                <a:rPr lang="en-US" sz="2400" b="1" dirty="0">
+                  <a:solidFill>
+                    <a:srgbClr val="FFFFFF"/>
+                  </a:solidFill>
+                  <a:latin typeface="Trebuchet MS" pitchFamily="34" charset="0"/>
+                  <a:ea typeface="Trebuchet MS" pitchFamily="34" charset="-122"/>
+                  <a:cs typeface="Trebuchet MS" pitchFamily="34" charset="-120"/>
+                </a:rPr>
+                <a:t>3</a:t>
+              </a:r>
+              <a:endParaRPr lang="en-US" sz="2400" dirty="0"/>
+            </a:p>
+          </p:txBody>
+        </p:sp>
+        <p:sp>
+          <p:nvSpPr>
+            <p:cNvPr id="19" name="Text 17"/>
+            <p:cNvSpPr/>
+            <p:nvPr/>
+          </p:nvSpPr>
+          <p:spPr>
+            <a:xfrm>
+              <a:off x="4663440" y="1912620"/>
+              <a:ext cx="1828800" cy="502920"/>
+            </a:xfrm>
+            <a:prstGeom prst="rect">
+              <a:avLst/>
+            </a:prstGeom>
+            <a:noFill/>
+            <a:ln/>
+          </p:spPr>
+          <p:txBody>
+            <a:bodyPr wrap="square" lIns="0" tIns="0" rIns="0" bIns="0" rtlCol="0" anchor="ctr"/>
+            <a:lstStyle/>
+            <a:p>
+              <a:pPr marL="0" indent="0" algn="ctr">
+                <a:buNone/>
+              </a:pPr>
+              <a:r>
+                <a:rPr lang="en-US" b="1" dirty="0">
+                  <a:solidFill>
+                    <a:srgbClr val="0D1B2A"/>
+                  </a:solidFill>
+                  <a:latin typeface="Trebuchet MS" pitchFamily="34" charset="0"/>
+                  <a:ea typeface="Trebuchet MS" pitchFamily="34" charset="-122"/>
+                  <a:cs typeface="Trebuchet MS" pitchFamily="34" charset="-120"/>
+                </a:rPr>
+                <a:t>Generacja kroków</a:t>
+              </a:r>
+              <a:endParaRPr lang="en-US" dirty="0"/>
+            </a:p>
+          </p:txBody>
+        </p:sp>
+        <p:sp>
+          <p:nvSpPr>
+            <p:cNvPr id="20" name="Text 18"/>
+            <p:cNvSpPr/>
+            <p:nvPr/>
+          </p:nvSpPr>
+          <p:spPr>
+            <a:xfrm>
+              <a:off x="4663440" y="2423160"/>
+              <a:ext cx="1828800" cy="1409700"/>
+            </a:xfrm>
+            <a:prstGeom prst="rect">
+              <a:avLst/>
+            </a:prstGeom>
+            <a:noFill/>
+            <a:ln/>
+          </p:spPr>
+          <p:txBody>
+            <a:bodyPr wrap="square" lIns="0" tIns="0" rIns="0" bIns="0" rtlCol="0" anchor="ctr"/>
+            <a:lstStyle/>
+            <a:p>
+              <a:pPr marL="0" indent="0" algn="ctr">
+                <a:buNone/>
+              </a:pPr>
+              <a:r>
+                <a:rPr lang="en-US" sz="1600" dirty="0">
+                  <a:solidFill>
+                    <a:srgbClr val="475569"/>
+                  </a:solidFill>
+                  <a:latin typeface="Calibri" pitchFamily="34" charset="0"/>
+                  <a:ea typeface="Calibri" pitchFamily="34" charset="-122"/>
+                  <a:cs typeface="Calibri" pitchFamily="34" charset="-120"/>
+                </a:rPr>
+                <a:t>Sekwencja stóp, trajektoria </a:t>
+              </a:r>
+              <a:r>
+                <a:rPr lang="en-US" sz="1600" dirty="0" err="1">
+                  <a:solidFill>
+                    <a:srgbClr val="475569"/>
+                  </a:solidFill>
+                  <a:latin typeface="Calibri" pitchFamily="34" charset="0"/>
+                  <a:ea typeface="Calibri" pitchFamily="34" charset="-122"/>
+                  <a:cs typeface="Calibri" pitchFamily="34" charset="-120"/>
+                </a:rPr>
+                <a:t>CoM</a:t>
+              </a:r>
+              <a:r>
+                <a:rPr lang="en-US" sz="1600" dirty="0">
+                  <a:solidFill>
+                    <a:srgbClr val="475569"/>
+                  </a:solidFill>
+                  <a:latin typeface="Calibri" pitchFamily="34" charset="0"/>
+                  <a:ea typeface="Calibri" pitchFamily="34" charset="-122"/>
+                  <a:cs typeface="Calibri" pitchFamily="34" charset="-120"/>
+                </a:rPr>
+                <a:t> </a:t>
+              </a:r>
+              <a:r>
+                <a:rPr lang="pl-PL" sz="1600" dirty="0" smtClean="0">
+                  <a:solidFill>
+                    <a:srgbClr val="475569"/>
+                  </a:solidFill>
+                  <a:latin typeface="Calibri" pitchFamily="34" charset="0"/>
+                  <a:ea typeface="Calibri" pitchFamily="34" charset="-122"/>
+                  <a:cs typeface="Calibri" pitchFamily="34" charset="-120"/>
+                </a:rPr>
+                <a:t/>
+              </a:r>
+              <a:br>
+                <a:rPr lang="pl-PL" sz="1600" dirty="0" smtClean="0">
+                  <a:solidFill>
+                    <a:srgbClr val="475569"/>
+                  </a:solidFill>
+                  <a:latin typeface="Calibri" pitchFamily="34" charset="0"/>
+                  <a:ea typeface="Calibri" pitchFamily="34" charset="-122"/>
+                  <a:cs typeface="Calibri" pitchFamily="34" charset="-120"/>
+                </a:rPr>
+              </a:br>
+              <a:r>
+                <a:rPr lang="en-US" sz="1600" dirty="0" smtClean="0">
+                  <a:solidFill>
+                    <a:srgbClr val="475569"/>
+                  </a:solidFill>
+                  <a:latin typeface="Calibri" pitchFamily="34" charset="0"/>
+                  <a:ea typeface="Calibri" pitchFamily="34" charset="-122"/>
+                  <a:cs typeface="Calibri" pitchFamily="34" charset="-120"/>
+                </a:rPr>
+                <a:t>z </a:t>
+              </a:r>
+              <a:r>
+                <a:rPr lang="en-US" sz="1600" dirty="0">
+                  <a:solidFill>
+                    <a:srgbClr val="475569"/>
+                  </a:solidFill>
+                  <a:latin typeface="Calibri" pitchFamily="34" charset="0"/>
+                  <a:ea typeface="Calibri" pitchFamily="34" charset="-122"/>
+                  <a:cs typeface="Calibri" pitchFamily="34" charset="-120"/>
+                </a:rPr>
+                <a:t>modelu LIPM, weryfikacja ZMP</a:t>
+              </a:r>
+              <a:endParaRPr lang="en-US" sz="1600" dirty="0"/>
+            </a:p>
+          </p:txBody>
+        </p:sp>
+        <p:sp>
+          <p:nvSpPr>
+            <p:cNvPr id="21" name="Shape 19"/>
+            <p:cNvSpPr/>
+            <p:nvPr/>
+          </p:nvSpPr>
+          <p:spPr>
+            <a:xfrm>
+              <a:off x="6720840" y="1097280"/>
+              <a:ext cx="2011680" cy="2842260"/>
+            </a:xfrm>
+            <a:prstGeom prst="rect">
+              <a:avLst/>
+            </a:prstGeom>
             <a:solidFill>
-              <a:srgbClr val="E2EBF3"/>
+              <a:srgbClr val="FFFFFF"/>
             </a:solidFill>
-            <a:prstDash val="solid"/>
-          </a:ln>
-          <a:effectLst>
-            <a:outerShdw blurRad="76200" dist="25400" dir="8100000" algn="bl" rotWithShape="0">
-              <a:srgbClr val="000000">
-                <a:alpha val="12000"/>
-              </a:srgbClr>
-            </a:outerShdw>
-          </a:effectLst>
-        </p:spPr>
-      </p:sp>
-      <p:sp>
-        <p:nvSpPr>
-          <p:cNvPr id="22" name="Shape 20"/>
-          <p:cNvSpPr/>
-          <p:nvPr/>
-        </p:nvSpPr>
-        <p:spPr>
-          <a:xfrm>
-            <a:off x="7434072" y="1188720"/>
-            <a:ext cx="585216" cy="585216"/>
-          </a:xfrm>
-          <a:prstGeom prst="ellipse">
-            <a:avLst/>
-          </a:prstGeom>
-          <a:solidFill>
-            <a:srgbClr val="00B4D8"/>
-          </a:solidFill>
-          <a:ln w="12700">
+            <a:ln w="12700">
+              <a:solidFill>
+                <a:srgbClr val="E2EBF3"/>
+              </a:solidFill>
+              <a:prstDash val="solid"/>
+            </a:ln>
+            <a:effectLst>
+              <a:outerShdw blurRad="76200" dist="25400" dir="8100000" algn="bl" rotWithShape="0">
+                <a:srgbClr val="000000">
+                  <a:alpha val="12000"/>
+                </a:srgbClr>
+              </a:outerShdw>
+            </a:effectLst>
+          </p:spPr>
+        </p:sp>
+        <p:sp>
+          <p:nvSpPr>
+            <p:cNvPr id="22" name="Shape 20"/>
+            <p:cNvSpPr/>
+            <p:nvPr/>
+          </p:nvSpPr>
+          <p:spPr>
+            <a:xfrm>
+              <a:off x="7434072" y="1234440"/>
+              <a:ext cx="585216" cy="585216"/>
+            </a:xfrm>
+            <a:prstGeom prst="ellipse">
+              <a:avLst/>
+            </a:prstGeom>
             <a:solidFill>
               <a:srgbClr val="00B4D8"/>
             </a:solidFill>
-            <a:prstDash val="solid"/>
-          </a:ln>
-        </p:spPr>
-      </p:sp>
-      <p:sp>
-        <p:nvSpPr>
-          <p:cNvPr id="23" name="Text 21"/>
-          <p:cNvSpPr/>
-          <p:nvPr/>
-        </p:nvSpPr>
-        <p:spPr>
-          <a:xfrm>
-            <a:off x="7434072" y="1188720"/>
-            <a:ext cx="585216" cy="585216"/>
-          </a:xfrm>
-          <a:prstGeom prst="rect">
-            <a:avLst/>
-          </a:prstGeom>
-          <a:noFill/>
-          <a:ln/>
-        </p:spPr>
-        <p:txBody>
-          <a:bodyPr wrap="square" lIns="0" tIns="0" rIns="0" bIns="0" rtlCol="0" anchor="ctr"/>
-          <a:lstStyle/>
-          <a:p>
-            <a:pPr marL="0" indent="0" algn="ctr">
-              <a:buNone/>
-            </a:pPr>
-            <a:r>
-              <a:rPr lang="en-US" sz="2400" b="1" dirty="0">
-                <a:solidFill>
-                  <a:srgbClr val="FFFFFF"/>
-                </a:solidFill>
-                <a:latin typeface="Trebuchet MS" pitchFamily="34" charset="0"/>
-                <a:ea typeface="Trebuchet MS" pitchFamily="34" charset="-122"/>
-                <a:cs typeface="Trebuchet MS" pitchFamily="34" charset="-120"/>
-              </a:rPr>
-              <a:t>4</a:t>
-            </a:r>
-            <a:endParaRPr lang="en-US" sz="2400" dirty="0"/>
-          </a:p>
-        </p:txBody>
-      </p:sp>
-      <p:sp>
-        <p:nvSpPr>
-          <p:cNvPr id="24" name="Text 22"/>
-          <p:cNvSpPr/>
-          <p:nvPr/>
-        </p:nvSpPr>
-        <p:spPr>
-          <a:xfrm>
-            <a:off x="6812280" y="1874520"/>
-            <a:ext cx="1828800" cy="502920"/>
-          </a:xfrm>
-          <a:prstGeom prst="rect">
-            <a:avLst/>
-          </a:prstGeom>
-          <a:noFill/>
-          <a:ln/>
-        </p:spPr>
-        <p:txBody>
-          <a:bodyPr wrap="square" lIns="0" tIns="0" rIns="0" bIns="0" rtlCol="0" anchor="ctr"/>
-          <a:lstStyle/>
-          <a:p>
-            <a:pPr marL="0" indent="0" algn="ctr">
-              <a:buNone/>
-            </a:pPr>
-            <a:r>
-              <a:rPr lang="en-US" b="1" dirty="0">
-                <a:solidFill>
-                  <a:srgbClr val="0D1B2A"/>
-                </a:solidFill>
-                <a:latin typeface="Trebuchet MS" pitchFamily="34" charset="0"/>
-                <a:ea typeface="Trebuchet MS" pitchFamily="34" charset="-122"/>
-                <a:cs typeface="Trebuchet MS" pitchFamily="34" charset="-120"/>
-              </a:rPr>
-              <a:t>Wykonanie</a:t>
-            </a:r>
-            <a:endParaRPr lang="en-US" dirty="0"/>
-          </a:p>
-        </p:txBody>
-      </p:sp>
-      <p:sp>
-        <p:nvSpPr>
-          <p:cNvPr id="25" name="Text 23"/>
-          <p:cNvSpPr/>
-          <p:nvPr/>
-        </p:nvSpPr>
-        <p:spPr>
-          <a:xfrm>
-            <a:off x="6812280" y="2423160"/>
-            <a:ext cx="1828800" cy="1965960"/>
-          </a:xfrm>
-          <a:prstGeom prst="rect">
-            <a:avLst/>
-          </a:prstGeom>
-          <a:noFill/>
-          <a:ln/>
-        </p:spPr>
-        <p:txBody>
-          <a:bodyPr wrap="square" lIns="0" tIns="0" rIns="0" bIns="0" rtlCol="0" anchor="ctr"/>
-          <a:lstStyle/>
-          <a:p>
-            <a:pPr marL="0" indent="0" algn="ctr">
-              <a:buNone/>
-            </a:pPr>
-            <a:r>
-              <a:rPr lang="en-US" sz="1600" dirty="0">
-                <a:solidFill>
-                  <a:srgbClr val="475569"/>
-                </a:solidFill>
-                <a:latin typeface="Calibri" pitchFamily="34" charset="0"/>
-                <a:ea typeface="Calibri" pitchFamily="34" charset="-122"/>
-                <a:cs typeface="Calibri" pitchFamily="34" charset="-120"/>
-              </a:rPr>
-              <a:t>WBC + PID: komendy momentów do aktuatorów, odczyt stanu i zamknięcie pętli</a:t>
-            </a:r>
-            <a:endParaRPr lang="en-US" sz="1600" dirty="0"/>
-          </a:p>
-        </p:txBody>
-      </p:sp>
+            <a:ln w="12700">
+              <a:solidFill>
+                <a:srgbClr val="00B4D8"/>
+              </a:solidFill>
+              <a:prstDash val="solid"/>
+            </a:ln>
+          </p:spPr>
+        </p:sp>
+        <p:sp>
+          <p:nvSpPr>
+            <p:cNvPr id="23" name="Text 21"/>
+            <p:cNvSpPr/>
+            <p:nvPr/>
+          </p:nvSpPr>
+          <p:spPr>
+            <a:xfrm>
+              <a:off x="7434072" y="1234440"/>
+              <a:ext cx="585216" cy="585216"/>
+            </a:xfrm>
+            <a:prstGeom prst="rect">
+              <a:avLst/>
+            </a:prstGeom>
+            <a:noFill/>
+            <a:ln/>
+          </p:spPr>
+          <p:txBody>
+            <a:bodyPr wrap="square" lIns="0" tIns="0" rIns="0" bIns="0" rtlCol="0" anchor="ctr"/>
+            <a:lstStyle/>
+            <a:p>
+              <a:pPr marL="0" indent="0" algn="ctr">
+                <a:buNone/>
+              </a:pPr>
+              <a:r>
+                <a:rPr lang="en-US" sz="2400" b="1" dirty="0">
+                  <a:solidFill>
+                    <a:srgbClr val="FFFFFF"/>
+                  </a:solidFill>
+                  <a:latin typeface="Trebuchet MS" pitchFamily="34" charset="0"/>
+                  <a:ea typeface="Trebuchet MS" pitchFamily="34" charset="-122"/>
+                  <a:cs typeface="Trebuchet MS" pitchFamily="34" charset="-120"/>
+                </a:rPr>
+                <a:t>4</a:t>
+              </a:r>
+              <a:endParaRPr lang="en-US" sz="2400" dirty="0"/>
+            </a:p>
+          </p:txBody>
+        </p:sp>
+        <p:sp>
+          <p:nvSpPr>
+            <p:cNvPr id="24" name="Text 22"/>
+            <p:cNvSpPr/>
+            <p:nvPr/>
+          </p:nvSpPr>
+          <p:spPr>
+            <a:xfrm>
+              <a:off x="6812280" y="1912620"/>
+              <a:ext cx="1828800" cy="502920"/>
+            </a:xfrm>
+            <a:prstGeom prst="rect">
+              <a:avLst/>
+            </a:prstGeom>
+            <a:noFill/>
+            <a:ln/>
+          </p:spPr>
+          <p:txBody>
+            <a:bodyPr wrap="square" lIns="0" tIns="0" rIns="0" bIns="0" rtlCol="0" anchor="ctr"/>
+            <a:lstStyle/>
+            <a:p>
+              <a:pPr marL="0" indent="0" algn="ctr">
+                <a:buNone/>
+              </a:pPr>
+              <a:r>
+                <a:rPr lang="en-US" b="1" dirty="0">
+                  <a:solidFill>
+                    <a:srgbClr val="0D1B2A"/>
+                  </a:solidFill>
+                  <a:latin typeface="Trebuchet MS" pitchFamily="34" charset="0"/>
+                  <a:ea typeface="Trebuchet MS" pitchFamily="34" charset="-122"/>
+                  <a:cs typeface="Trebuchet MS" pitchFamily="34" charset="-120"/>
+                </a:rPr>
+                <a:t>Wykonanie</a:t>
+              </a:r>
+              <a:endParaRPr lang="en-US" dirty="0"/>
+            </a:p>
+          </p:txBody>
+        </p:sp>
+        <p:sp>
+          <p:nvSpPr>
+            <p:cNvPr id="25" name="Text 23"/>
+            <p:cNvSpPr/>
+            <p:nvPr/>
+          </p:nvSpPr>
+          <p:spPr>
+            <a:xfrm>
+              <a:off x="6812280" y="2423160"/>
+              <a:ext cx="1828800" cy="1409700"/>
+            </a:xfrm>
+            <a:prstGeom prst="rect">
+              <a:avLst/>
+            </a:prstGeom>
+            <a:noFill/>
+            <a:ln/>
+          </p:spPr>
+          <p:txBody>
+            <a:bodyPr wrap="square" lIns="0" tIns="0" rIns="0" bIns="0" rtlCol="0" anchor="ctr"/>
+            <a:lstStyle/>
+            <a:p>
+              <a:pPr marL="0" indent="0" algn="ctr">
+                <a:buNone/>
+              </a:pPr>
+              <a:r>
+                <a:rPr lang="en-US" sz="1600" spc="-20" dirty="0">
+                  <a:solidFill>
+                    <a:srgbClr val="475569"/>
+                  </a:solidFill>
+                  <a:latin typeface="Calibri" pitchFamily="34" charset="0"/>
+                  <a:ea typeface="Calibri" pitchFamily="34" charset="-122"/>
+                  <a:cs typeface="Calibri" pitchFamily="34" charset="-120"/>
+                </a:rPr>
+                <a:t>WBC + PID: komendy momentów do aktuatorów, odczyt stanu i zamknięcie pętli</a:t>
+              </a:r>
+              <a:endParaRPr lang="en-US" sz="1600" spc="-20" dirty="0"/>
+            </a:p>
+          </p:txBody>
+        </p:sp>
+      </p:grpSp>
     </p:spTree>
   </p:cSld>
   <p:clrMapOvr>
@@ -29850,7 +31439,7 @@
               <a:buNone/>
             </a:pPr>
             <a:r>
-              <a:rPr lang="en-US" sz="2800" b="1" dirty="0">
+              <a:rPr lang="en-US" sz="2800" b="1" dirty="0" err="1">
                 <a:solidFill>
                   <a:srgbClr val="FFFFFF"/>
                 </a:solidFill>
@@ -29858,7 +31447,62 @@
                 <a:ea typeface="Trebuchet MS" pitchFamily="34" charset="-122"/>
                 <a:cs typeface="Trebuchet MS" pitchFamily="34" charset="-120"/>
               </a:rPr>
-              <a:t>Chód statyczny a chód dynamiczny</a:t>
+              <a:t>Chód</a:t>
+            </a:r>
+            <a:r>
+              <a:rPr lang="en-US" sz="2800" b="1" dirty="0">
+                <a:solidFill>
+                  <a:srgbClr val="FFFFFF"/>
+                </a:solidFill>
+                <a:latin typeface="Trebuchet MS" pitchFamily="34" charset="0"/>
+                <a:ea typeface="Trebuchet MS" pitchFamily="34" charset="-122"/>
+                <a:cs typeface="Trebuchet MS" pitchFamily="34" charset="-120"/>
+              </a:rPr>
+              <a:t> </a:t>
+            </a:r>
+            <a:r>
+              <a:rPr lang="en-US" sz="2800" b="1" dirty="0" err="1" smtClean="0">
+                <a:solidFill>
+                  <a:srgbClr val="FFFFFF"/>
+                </a:solidFill>
+                <a:latin typeface="Trebuchet MS" pitchFamily="34" charset="0"/>
+                <a:ea typeface="Trebuchet MS" pitchFamily="34" charset="-122"/>
+                <a:cs typeface="Trebuchet MS" pitchFamily="34" charset="-120"/>
+              </a:rPr>
+              <a:t>statyczny</a:t>
+            </a:r>
+            <a:r>
+              <a:rPr lang="pl-PL" sz="2800" b="1" dirty="0" smtClean="0">
+                <a:solidFill>
+                  <a:srgbClr val="FFFFFF"/>
+                </a:solidFill>
+                <a:latin typeface="Trebuchet MS" pitchFamily="34" charset="0"/>
+                <a:ea typeface="Trebuchet MS" pitchFamily="34" charset="-122"/>
+                <a:cs typeface="Trebuchet MS" pitchFamily="34" charset="-120"/>
+              </a:rPr>
+              <a:t>,</a:t>
+            </a:r>
+            <a:r>
+              <a:rPr lang="en-US" sz="2800" b="1" dirty="0" smtClean="0">
+                <a:solidFill>
+                  <a:srgbClr val="FFFFFF"/>
+                </a:solidFill>
+                <a:latin typeface="Trebuchet MS" pitchFamily="34" charset="0"/>
+                <a:ea typeface="Trebuchet MS" pitchFamily="34" charset="-122"/>
+                <a:cs typeface="Trebuchet MS" pitchFamily="34" charset="-120"/>
+              </a:rPr>
+              <a:t> </a:t>
+            </a:r>
+            <a:r>
+              <a:rPr lang="en-US" sz="2800" b="1" dirty="0">
+                <a:solidFill>
+                  <a:srgbClr val="FFFFFF"/>
+                </a:solidFill>
+                <a:latin typeface="Trebuchet MS" pitchFamily="34" charset="0"/>
+                <a:ea typeface="Trebuchet MS" pitchFamily="34" charset="-122"/>
+                <a:cs typeface="Trebuchet MS" pitchFamily="34" charset="-120"/>
+              </a:rPr>
+              <a:t>a chód dynamiczny</a:t>
             </a:r>
             <a:endParaRPr lang="en-US" sz="2800" dirty="0"/>
           </a:p>
@@ -29873,7 +31517,7 @@
         <p:spPr>
           <a:xfrm>
             <a:off x="274320" y="1097280"/>
-            <a:ext cx="4160520" cy="3749040"/>
+            <a:ext cx="4160520" cy="2506980"/>
           </a:xfrm>
           <a:prstGeom prst="rect">
             <a:avLst/>
@@ -29905,7 +31549,7 @@
         <p:spPr>
           <a:xfrm>
             <a:off x="4709160" y="1097280"/>
-            <a:ext cx="4160520" cy="3749040"/>
+            <a:ext cx="4160520" cy="2506980"/>
           </a:xfrm>
           <a:prstGeom prst="rect">
             <a:avLst/>
@@ -29978,7 +31622,7 @@
               <a:buNone/>
             </a:pPr>
             <a:r>
-              <a:rPr lang="en-US" sz="1600" b="1" dirty="0">
+              <a:rPr lang="en-US" b="1" dirty="0">
                 <a:solidFill>
                   <a:srgbClr val="FFFFFF"/>
                 </a:solidFill>
@@ -29988,7 +31632,7 @@
               </a:rPr>
               <a:t>Chód statyczny</a:t>
             </a:r>
-            <a:endParaRPr lang="en-US" sz="1600" dirty="0"/>
+            <a:endParaRPr lang="en-US" dirty="0"/>
           </a:p>
         </p:txBody>
       </p:sp>
@@ -30042,7 +31686,7 @@
               <a:buNone/>
             </a:pPr>
             <a:r>
-              <a:rPr lang="en-US" sz="1600" b="1" dirty="0">
+              <a:rPr lang="en-US" b="1" dirty="0">
                 <a:solidFill>
                   <a:srgbClr val="FFFFFF"/>
                 </a:solidFill>
@@ -30052,7 +31696,7 @@
               </a:rPr>
               <a:t>Chód dynamiczny</a:t>
             </a:r>
-            <a:endParaRPr lang="en-US" sz="1600" dirty="0"/>
+            <a:endParaRPr lang="en-US" dirty="0"/>
           </a:p>
         </p:txBody>
       </p:sp>
@@ -30065,7 +31709,7 @@
         <p:spPr>
           <a:xfrm>
             <a:off x="457200" y="1600200"/>
-            <a:ext cx="3794760" cy="3108960"/>
+            <a:ext cx="3794760" cy="1841974"/>
           </a:xfrm>
           <a:prstGeom prst="rect">
             <a:avLst/>
@@ -30074,10 +31718,12 @@
           <a:ln/>
         </p:spPr>
         <p:txBody>
-          <a:bodyPr wrap="square" lIns="63500" tIns="101600" rIns="101600" bIns="63500" rtlCol="0" anchor="t"/>
+          <a:bodyPr wrap="square" lIns="63500" tIns="36000" rIns="101600" bIns="0" rtlCol="0" anchor="t">
+            <a:spAutoFit/>
+          </a:bodyPr>
           <a:lstStyle/>
           <a:p>
-            <a:pPr marL="342900" indent="-342900">
+            <a:pPr marL="180000" indent="-180000">
               <a:spcAft>
                 <a:spcPts val="800"/>
               </a:spcAft>
@@ -30098,7 +31744,7 @@
             <a:endParaRPr lang="en-US" sz="1400" dirty="0"/>
           </a:p>
           <a:p>
-            <a:pPr marL="342900" indent="-342900">
+            <a:pPr marL="180000" indent="-180000">
               <a:spcAft>
                 <a:spcPts val="800"/>
               </a:spcAft>
@@ -30119,7 +31765,7 @@
             <a:endParaRPr lang="en-US" sz="1400" dirty="0"/>
           </a:p>
           <a:p>
-            <a:pPr marL="342900" indent="-342900">
+            <a:pPr marL="180000" indent="-180000">
               <a:spcAft>
                 <a:spcPts val="800"/>
               </a:spcAft>
@@ -30140,7 +31786,7 @@
             <a:endParaRPr lang="en-US" sz="1400" dirty="0"/>
           </a:p>
           <a:p>
-            <a:pPr marL="342900" indent="-342900">
+            <a:pPr marL="180000" indent="-180000">
               <a:spcAft>
                 <a:spcPts val="800"/>
               </a:spcAft>
@@ -30161,7 +31807,7 @@
             <a:endParaRPr lang="en-US" sz="1400" dirty="0"/>
           </a:p>
           <a:p>
-            <a:pPr marL="342900" indent="-342900">
+            <a:pPr marL="180000" indent="-180000">
               <a:spcAft>
                 <a:spcPts val="800"/>
               </a:spcAft>
@@ -30182,7 +31828,7 @@
             <a:endParaRPr lang="en-US" sz="1400" dirty="0"/>
           </a:p>
           <a:p>
-            <a:pPr marL="342900" indent="-342900">
+            <a:pPr marL="180000" indent="-180000">
               <a:spcAft>
                 <a:spcPts val="800"/>
               </a:spcAft>
@@ -30212,8 +31858,8 @@
         </p:nvSpPr>
         <p:spPr>
           <a:xfrm>
-            <a:off x="4892040" y="1600200"/>
-            <a:ext cx="3794760" cy="3108960"/>
+            <a:off x="4808220" y="1600200"/>
+            <a:ext cx="4061460" cy="1841974"/>
           </a:xfrm>
           <a:prstGeom prst="rect">
             <a:avLst/>
@@ -30222,10 +31868,12 @@
           <a:ln/>
         </p:spPr>
         <p:txBody>
-          <a:bodyPr wrap="square" lIns="63500" tIns="101600" rIns="101600" bIns="63500" rtlCol="0" anchor="t"/>
+          <a:bodyPr wrap="square" lIns="63500" tIns="36000" rIns="36000" bIns="0" rtlCol="0" anchor="t">
+            <a:spAutoFit/>
+          </a:bodyPr>
           <a:lstStyle/>
           <a:p>
-            <a:pPr marL="342900" indent="-342900">
+            <a:pPr marL="180000" indent="-180000">
               <a:spcAft>
                 <a:spcPts val="800"/>
               </a:spcAft>
@@ -30246,7 +31894,7 @@
             <a:endParaRPr lang="en-US" sz="1400" dirty="0"/>
           </a:p>
           <a:p>
-            <a:pPr marL="342900" indent="-342900">
+            <a:pPr marL="180000" indent="-180000">
               <a:spcAft>
                 <a:spcPts val="800"/>
               </a:spcAft>
@@ -30267,7 +31915,7 @@
             <a:endParaRPr lang="en-US" sz="1400" dirty="0"/>
           </a:p>
           <a:p>
-            <a:pPr marL="342900" indent="-342900">
+            <a:pPr marL="180000" indent="-180000">
               <a:spcAft>
                 <a:spcPts val="800"/>
               </a:spcAft>
@@ -30288,7 +31936,7 @@
             <a:endParaRPr lang="en-US" sz="1400" dirty="0"/>
           </a:p>
           <a:p>
-            <a:pPr marL="342900" indent="-342900">
+            <a:pPr marL="180000" indent="-180000">
               <a:spcAft>
                 <a:spcPts val="800"/>
               </a:spcAft>
@@ -30309,7 +31957,7 @@
             <a:endParaRPr lang="en-US" sz="1400" dirty="0"/>
           </a:p>
           <a:p>
-            <a:pPr marL="342900" indent="-342900">
+            <a:pPr marL="180000" indent="-180000">
               <a:spcAft>
                 <a:spcPts val="800"/>
               </a:spcAft>
@@ -30330,7 +31978,7 @@
             <a:endParaRPr lang="en-US" sz="1400" dirty="0"/>
           </a:p>
           <a:p>
-            <a:pPr marL="342900" indent="-342900">
+            <a:pPr marL="180000" indent="-180000">
               <a:spcAft>
                 <a:spcPts val="800"/>
               </a:spcAft>
@@ -30522,7 +32170,7 @@
         <p:spPr>
           <a:xfrm>
             <a:off x="274320" y="1097280"/>
-            <a:ext cx="8595360" cy="3749040"/>
+            <a:ext cx="8595360" cy="2423160"/>
           </a:xfrm>
           <a:prstGeom prst="rect">
             <a:avLst/>
@@ -30554,7 +32202,7 @@
         <p:spPr>
           <a:xfrm>
             <a:off x="457200" y="1188720"/>
-            <a:ext cx="8229600" cy="3520440"/>
+            <a:ext cx="8229600" cy="2200602"/>
           </a:xfrm>
           <a:prstGeom prst="rect">
             <a:avLst/>
@@ -30563,7 +32211,9 @@
           <a:ln/>
         </p:spPr>
         <p:txBody>
-          <a:bodyPr wrap="square" lIns="127000" tIns="127000" rIns="127000" bIns="127000" rtlCol="0" anchor="t"/>
+          <a:bodyPr wrap="square" lIns="0" tIns="0" rIns="0" bIns="0" rtlCol="0" anchor="t">
+            <a:spAutoFit/>
+          </a:bodyPr>
           <a:lstStyle/>
           <a:p>
             <a:pPr marL="342900" indent="-342900">
@@ -30934,11 +32584,8 @@
           <a:bodyPr wrap="square" lIns="0" tIns="0" rIns="0" bIns="0" rtlCol="0" anchor="ctr"/>
           <a:lstStyle/>
           <a:p>
-            <a:pPr marL="0" indent="0">
-              <a:buNone/>
-            </a:pPr>
-            <a:r>
-              <a:rPr lang="en-US" sz="2800" b="1" dirty="0">
+            <a:r>
+              <a:rPr lang="pl-PL" sz="2800" b="1" dirty="0" smtClean="0">
                 <a:solidFill>
                   <a:srgbClr val="FFFFFF"/>
                 </a:solidFill>
@@ -30946,7 +32593,84 @@
                 <a:ea typeface="Trebuchet MS" pitchFamily="34" charset="-122"/>
                 <a:cs typeface="Trebuchet MS" pitchFamily="34" charset="-120"/>
               </a:rPr>
-              <a:t>Zero Moment Point – definicja i znaczenie</a:t>
+              <a:t>D</a:t>
+            </a:r>
+            <a:r>
+              <a:rPr lang="en-US" sz="2800" b="1" dirty="0" err="1" smtClean="0">
+                <a:solidFill>
+                  <a:srgbClr val="FFFFFF"/>
+                </a:solidFill>
+                <a:latin typeface="Trebuchet MS" pitchFamily="34" charset="0"/>
+                <a:ea typeface="Trebuchet MS" pitchFamily="34" charset="-122"/>
+                <a:cs typeface="Trebuchet MS" pitchFamily="34" charset="-120"/>
+              </a:rPr>
+              <a:t>efinicja</a:t>
+            </a:r>
+            <a:r>
+              <a:rPr lang="en-US" sz="2800" b="1" dirty="0" smtClean="0">
+                <a:solidFill>
+                  <a:srgbClr val="FFFFFF"/>
+                </a:solidFill>
+                <a:latin typeface="Trebuchet MS" pitchFamily="34" charset="0"/>
+                <a:ea typeface="Trebuchet MS" pitchFamily="34" charset="-122"/>
+                <a:cs typeface="Trebuchet MS" pitchFamily="34" charset="-120"/>
+              </a:rPr>
+              <a:t> </a:t>
+            </a:r>
+            <a:r>
+              <a:rPr lang="en-US" sz="2800" b="1" dirty="0" err="1">
+                <a:solidFill>
+                  <a:srgbClr val="FFFFFF"/>
+                </a:solidFill>
+                <a:latin typeface="Trebuchet MS" pitchFamily="34" charset="0"/>
+                <a:ea typeface="Trebuchet MS" pitchFamily="34" charset="-122"/>
+                <a:cs typeface="Trebuchet MS" pitchFamily="34" charset="-120"/>
+              </a:rPr>
+              <a:t>i</a:t>
+            </a:r>
+            <a:r>
+              <a:rPr lang="en-US" sz="2800" b="1" dirty="0">
+                <a:solidFill>
+                  <a:srgbClr val="FFFFFF"/>
+                </a:solidFill>
+                <a:latin typeface="Trebuchet MS" pitchFamily="34" charset="0"/>
+                <a:ea typeface="Trebuchet MS" pitchFamily="34" charset="-122"/>
+                <a:cs typeface="Trebuchet MS" pitchFamily="34" charset="-120"/>
+              </a:rPr>
+              <a:t> </a:t>
+            </a:r>
+            <a:r>
+              <a:rPr lang="en-US" sz="2800" b="1" dirty="0" err="1" smtClean="0">
+                <a:solidFill>
+                  <a:srgbClr val="FFFFFF"/>
+                </a:solidFill>
+                <a:latin typeface="Trebuchet MS" pitchFamily="34" charset="0"/>
+                <a:ea typeface="Trebuchet MS" pitchFamily="34" charset="-122"/>
+                <a:cs typeface="Trebuchet MS" pitchFamily="34" charset="-120"/>
+              </a:rPr>
+              <a:t>znaczenie</a:t>
+            </a:r>
+            <a:r>
+              <a:rPr lang="pl-PL" sz="2800" b="1" dirty="0" smtClean="0">
+                <a:solidFill>
+                  <a:srgbClr val="FFFFFF"/>
+                </a:solidFill>
+                <a:latin typeface="Trebuchet MS" pitchFamily="34" charset="0"/>
+                <a:ea typeface="Trebuchet MS" pitchFamily="34" charset="-122"/>
+                <a:cs typeface="Trebuchet MS" pitchFamily="34" charset="-120"/>
+              </a:rPr>
+              <a:t> </a:t>
+            </a:r>
+            <a:r>
+              <a:rPr lang="en-US" sz="2800" b="1" dirty="0">
+                <a:solidFill>
+                  <a:srgbClr val="FFFFFF"/>
+                </a:solidFill>
+                <a:latin typeface="Trebuchet MS" pitchFamily="34" charset="0"/>
+                <a:ea typeface="Trebuchet MS" pitchFamily="34" charset="-122"/>
+                <a:cs typeface="Trebuchet MS" pitchFamily="34" charset="-120"/>
+              </a:rPr>
+              <a:t>Zero Moment Point </a:t>
             </a:r>
             <a:endParaRPr lang="en-US" sz="2800" dirty="0"/>
           </a:p>
@@ -30961,7 +32685,7 @@
         <p:spPr>
           <a:xfrm>
             <a:off x="274320" y="1097280"/>
-            <a:ext cx="8595360" cy="3749040"/>
+            <a:ext cx="8595360" cy="2484120"/>
           </a:xfrm>
           <a:prstGeom prst="rect">
             <a:avLst/>
@@ -30993,7 +32717,7 @@
         <p:spPr>
           <a:xfrm>
             <a:off x="457200" y="1188720"/>
-            <a:ext cx="8229600" cy="3520440"/>
+            <a:ext cx="8229600" cy="2254463"/>
           </a:xfrm>
           <a:prstGeom prst="rect">
             <a:avLst/>
@@ -31002,7 +32726,9 @@
           <a:ln/>
         </p:spPr>
         <p:txBody>
-          <a:bodyPr wrap="square" lIns="127000" tIns="127000" rIns="127000" bIns="127000" rtlCol="0" anchor="t"/>
+          <a:bodyPr wrap="square" lIns="0" tIns="0" rIns="0" bIns="0" rtlCol="0" anchor="t">
+            <a:spAutoFit/>
+          </a:bodyPr>
           <a:lstStyle/>
           <a:p>
             <a:pPr marL="342900" indent="-342900">
@@ -31400,7 +33126,7 @@
         <p:spPr>
           <a:xfrm>
             <a:off x="274320" y="1097280"/>
-            <a:ext cx="4160520" cy="3749040"/>
+            <a:ext cx="4160520" cy="2636520"/>
           </a:xfrm>
           <a:prstGeom prst="rect">
             <a:avLst/>
@@ -31432,7 +33158,7 @@
         <p:spPr>
           <a:xfrm>
             <a:off x="4709160" y="1097280"/>
-            <a:ext cx="4160520" cy="3749040"/>
+            <a:ext cx="4290060" cy="2636520"/>
           </a:xfrm>
           <a:prstGeom prst="rect">
             <a:avLst/>
@@ -31505,7 +33231,7 @@
               <a:buNone/>
             </a:pPr>
             <a:r>
-              <a:rPr lang="en-US" sz="1300" b="1" dirty="0">
+              <a:rPr lang="en-US" sz="1600" b="1" dirty="0">
                 <a:solidFill>
                   <a:srgbClr val="FFFFFF"/>
                 </a:solidFill>
@@ -31515,7 +33241,7 @@
               </a:rPr>
               <a:t>Capture Point (CP)</a:t>
             </a:r>
-            <a:endParaRPr lang="en-US" sz="1300" dirty="0"/>
+            <a:endParaRPr lang="en-US" sz="1600" dirty="0"/>
           </a:p>
         </p:txBody>
       </p:sp>
@@ -31528,7 +33254,7 @@
         <p:spPr>
           <a:xfrm>
             <a:off x="4709160" y="1097280"/>
-            <a:ext cx="4160520" cy="384048"/>
+            <a:ext cx="4290060" cy="384048"/>
           </a:xfrm>
           <a:prstGeom prst="rect">
             <a:avLst/>
@@ -31569,7 +33295,7 @@
               <a:buNone/>
             </a:pPr>
             <a:r>
-              <a:rPr lang="en-US" sz="1300" b="1" dirty="0">
+              <a:rPr lang="en-US" sz="1600" b="1" dirty="0">
                 <a:solidFill>
                   <a:srgbClr val="FFFFFF"/>
                 </a:solidFill>
@@ -31579,7 +33305,7 @@
               </a:rPr>
               <a:t>LIPM – uproszczona dynamika chodu</a:t>
             </a:r>
-            <a:endParaRPr lang="en-US" sz="1300" dirty="0"/>
+            <a:endParaRPr lang="en-US" sz="1600" dirty="0"/>
           </a:p>
         </p:txBody>
       </p:sp>
@@ -31591,8 +33317,8 @@
         </p:nvSpPr>
         <p:spPr>
           <a:xfrm>
-            <a:off x="457200" y="1600200"/>
-            <a:ext cx="3794760" cy="3108960"/>
+            <a:off x="373380" y="1546860"/>
+            <a:ext cx="4061460" cy="1885576"/>
           </a:xfrm>
           <a:prstGeom prst="rect">
             <a:avLst/>
@@ -31601,10 +33327,12 @@
           <a:ln/>
         </p:spPr>
         <p:txBody>
-          <a:bodyPr wrap="square" lIns="63500" tIns="101600" rIns="63500" bIns="63500" rtlCol="0" anchor="t"/>
+          <a:bodyPr wrap="square" lIns="36000" tIns="36000" rIns="0" bIns="0" rtlCol="0" anchor="t">
+            <a:spAutoFit/>
+          </a:bodyPr>
           <a:lstStyle/>
           <a:p>
-            <a:pPr marL="342900" indent="-342900">
+            <a:pPr marL="144000" indent="-144000">
               <a:spcAft>
                 <a:spcPts val="700"/>
               </a:spcAft>
@@ -31625,7 +33353,7 @@
             <a:endParaRPr lang="en-US" sz="1300" dirty="0"/>
           </a:p>
           <a:p>
-            <a:pPr marL="342900" indent="-342900">
+            <a:pPr marL="144000" indent="-144000">
               <a:spcAft>
                 <a:spcPts val="700"/>
               </a:spcAft>
@@ -31646,7 +33374,7 @@
             <a:endParaRPr lang="en-US" sz="1300" dirty="0"/>
           </a:p>
           <a:p>
-            <a:pPr marL="342900" indent="-342900">
+            <a:pPr marL="144000" indent="-144000">
               <a:spcAft>
                 <a:spcPts val="700"/>
               </a:spcAft>
@@ -31667,7 +33395,7 @@
             <a:endParaRPr lang="en-US" sz="1300" dirty="0"/>
           </a:p>
           <a:p>
-            <a:pPr marL="342900" indent="-342900">
+            <a:pPr marL="144000" indent="-144000">
               <a:spcAft>
                 <a:spcPts val="700"/>
               </a:spcAft>
@@ -31688,7 +33416,7 @@
             <a:endParaRPr lang="en-US" sz="1300" dirty="0"/>
           </a:p>
           <a:p>
-            <a:pPr marL="342900" indent="-342900">
+            <a:pPr marL="144000" indent="-144000">
               <a:spcAft>
                 <a:spcPts val="700"/>
               </a:spcAft>
@@ -31709,7 +33437,7 @@
             <a:endParaRPr lang="en-US" sz="1300" dirty="0"/>
           </a:p>
           <a:p>
-            <a:pPr marL="342900" indent="-342900">
+            <a:pPr marL="144000" indent="-144000">
               <a:spcAft>
                 <a:spcPts val="700"/>
               </a:spcAft>
@@ -31739,8 +33467,8 @@
         </p:nvSpPr>
         <p:spPr>
           <a:xfrm>
-            <a:off x="4892040" y="1600200"/>
-            <a:ext cx="3794760" cy="3108960"/>
+            <a:off x="4777740" y="1531620"/>
+            <a:ext cx="4137660" cy="2085631"/>
           </a:xfrm>
           <a:prstGeom prst="rect">
             <a:avLst/>
@@ -31749,10 +33477,12 @@
           <a:ln/>
         </p:spPr>
         <p:txBody>
-          <a:bodyPr wrap="square" lIns="63500" tIns="101600" rIns="63500" bIns="63500" rtlCol="0" anchor="t"/>
+          <a:bodyPr wrap="square" lIns="36000" tIns="36000" rIns="0" bIns="0" rtlCol="0" anchor="t">
+            <a:spAutoFit/>
+          </a:bodyPr>
           <a:lstStyle/>
           <a:p>
-            <a:pPr marL="342900" indent="-342900">
+            <a:pPr marL="144000" indent="-144000">
               <a:spcAft>
                 <a:spcPts val="700"/>
               </a:spcAft>
@@ -31773,7 +33503,7 @@
             <a:endParaRPr lang="en-US" sz="1300" dirty="0"/>
           </a:p>
           <a:p>
-            <a:pPr marL="342900" indent="-342900">
+            <a:pPr marL="144000" indent="-144000">
               <a:spcAft>
                 <a:spcPts val="700"/>
               </a:spcAft>
@@ -31794,7 +33524,7 @@
             <a:endParaRPr lang="en-US" sz="1300" dirty="0"/>
           </a:p>
           <a:p>
-            <a:pPr marL="342900" indent="-342900">
+            <a:pPr marL="144000" indent="-144000">
               <a:spcAft>
                 <a:spcPts val="700"/>
               </a:spcAft>
@@ -31815,7 +33545,7 @@
             <a:endParaRPr lang="en-US" sz="1300" dirty="0"/>
           </a:p>
           <a:p>
-            <a:pPr marL="342900" indent="-342900">
+            <a:pPr marL="144000" indent="-144000">
               <a:spcAft>
                 <a:spcPts val="700"/>
               </a:spcAft>
@@ -31836,7 +33566,7 @@
             <a:endParaRPr lang="en-US" sz="1300" dirty="0"/>
           </a:p>
           <a:p>
-            <a:pPr marL="342900" indent="-342900">
+            <a:pPr marL="144000" indent="-144000">
               <a:spcAft>
                 <a:spcPts val="700"/>
               </a:spcAft>
@@ -31857,7 +33587,7 @@
             <a:endParaRPr lang="en-US" sz="1300" dirty="0"/>
           </a:p>
           <a:p>
-            <a:pPr marL="342900" indent="-342900">
+            <a:pPr marL="144000" indent="-144000">
               <a:spcAft>
                 <a:spcPts val="700"/>
               </a:spcAft>

--- a/zajecia/robo/robo_w4.pptx
+++ b/zajecia/robo/robo_w4.pptx
@@ -4891,13 +4891,13 @@
               <a:t># </a:t>
             </a:r>
             <a:r>
-              <a:rPr lang="pl-PL" sz="1200" dirty="0" err="1">
+              <a:rPr lang="pl-PL" sz="1200" dirty="0" smtClean="0">
                 <a:solidFill>
                   <a:srgbClr val="6A9955"/>
                 </a:solidFill>
                 <a:latin typeface="Consolas" panose="020B0609020204030204" pitchFamily="49" charset="0"/>
               </a:rPr>
-              <a:t>czestotliwosc</a:t>
+              <a:t>częstotliwość </a:t>
             </a:r>
             <a:r>
               <a:rPr lang="pl-PL" sz="1200" dirty="0">
@@ -4906,7 +4906,7 @@
                 </a:solidFill>
                 <a:latin typeface="Consolas" panose="020B0609020204030204" pitchFamily="49" charset="0"/>
               </a:rPr>
-              <a:t> LIPM [rad/s]</a:t>
+              <a:t>LIPM [rad/s]</a:t>
             </a:r>
             <a:endParaRPr lang="pl-PL" sz="1200" dirty="0">
               <a:solidFill>
@@ -5123,22 +5123,13 @@
               <a:t># </a:t>
             </a:r>
             <a:r>
-              <a:rPr lang="pl-PL" sz="1200" dirty="0" err="1">
+              <a:rPr lang="pl-PL" sz="1200" dirty="0" smtClean="0">
                 <a:solidFill>
                   <a:srgbClr val="6A9955"/>
                 </a:solidFill>
                 <a:latin typeface="Consolas" panose="020B0609020204030204" pitchFamily="49" charset="0"/>
               </a:rPr>
-              <a:t>predkosc</a:t>
-            </a:r>
-            <a:r>
-              <a:rPr lang="pl-PL" sz="1200" dirty="0">
-                <a:solidFill>
-                  <a:srgbClr val="6A9955"/>
-                </a:solidFill>
-                <a:latin typeface="Consolas" panose="020B0609020204030204" pitchFamily="49" charset="0"/>
-              </a:rPr>
-              <a:t> </a:t>
+              <a:t>prędkość </a:t>
             </a:r>
             <a:r>
               <a:rPr lang="pl-PL" sz="1200" dirty="0" err="1">
@@ -6417,7 +6408,7 @@
                 </a:solidFill>
                 <a:latin typeface="Consolas" panose="020B0609020204030204" pitchFamily="49" charset="0"/>
               </a:rPr>
-              <a:t>stopa</a:t>
+              <a:t>stopą</a:t>
             </a:r>
             <a:endParaRPr lang="pl-PL" sz="1200" dirty="0">
               <a:solidFill>
@@ -22016,7 +22007,7 @@
               </a:lnSpc>
             </a:pPr>
             <a:r>
-              <a:rPr lang="pl-PL" sz="1050" dirty="0">
+              <a:rPr lang="pl-PL" sz="1050" dirty="0" smtClean="0">
                 <a:solidFill>
                   <a:srgbClr val="C586C0"/>
                 </a:solidFill>
@@ -22025,7 +22016,7 @@
               <a:t>import</a:t>
             </a:r>
             <a:r>
-              <a:rPr lang="pl-PL" sz="1050" dirty="0">
+              <a:rPr lang="pl-PL" sz="1050" dirty="0" smtClean="0">
                 <a:solidFill>
                   <a:srgbClr val="CCCCCC"/>
                 </a:solidFill>
@@ -22034,7 +22025,7 @@
               <a:t> </a:t>
             </a:r>
             <a:r>
-              <a:rPr lang="pl-PL" sz="1050" dirty="0" err="1">
+              <a:rPr lang="pl-PL" sz="1050" dirty="0" err="1" smtClean="0">
                 <a:solidFill>
                   <a:srgbClr val="4EC9B0"/>
                 </a:solidFill>
@@ -22042,7 +22033,7 @@
               </a:rPr>
               <a:t>rclpy</a:t>
             </a:r>
-            <a:endParaRPr lang="pl-PL" sz="1050" dirty="0">
+            <a:endParaRPr lang="pl-PL" sz="1050" dirty="0" smtClean="0">
               <a:solidFill>
                 <a:srgbClr val="CCCCCC"/>
               </a:solidFill>
@@ -22056,7 +22047,7 @@
               </a:lnSpc>
             </a:pPr>
             <a:r>
-              <a:rPr lang="pl-PL" sz="1050" dirty="0">
+              <a:rPr lang="pl-PL" sz="1050" dirty="0" smtClean="0">
                 <a:solidFill>
                   <a:srgbClr val="C586C0"/>
                 </a:solidFill>
@@ -22065,7 +22056,7 @@
               <a:t>from</a:t>
             </a:r>
             <a:r>
-              <a:rPr lang="pl-PL" sz="1050" dirty="0">
+              <a:rPr lang="pl-PL" sz="1050" dirty="0" smtClean="0">
                 <a:solidFill>
                   <a:srgbClr val="CCCCCC"/>
                 </a:solidFill>
@@ -22074,7 +22065,7 @@
               <a:t> </a:t>
             </a:r>
             <a:r>
-              <a:rPr lang="pl-PL" sz="1050" dirty="0" err="1">
+              <a:rPr lang="pl-PL" sz="1050" dirty="0" err="1" smtClean="0">
                 <a:solidFill>
                   <a:srgbClr val="CCCCCC"/>
                 </a:solidFill>
@@ -22083,7 +22074,7 @@
               <a:t>rclpy.node</a:t>
             </a:r>
             <a:r>
-              <a:rPr lang="pl-PL" sz="1050" dirty="0">
+              <a:rPr lang="pl-PL" sz="1050" dirty="0" smtClean="0">
                 <a:solidFill>
                   <a:srgbClr val="CCCCCC"/>
                 </a:solidFill>
@@ -22092,7 +22083,7 @@
               <a:t> </a:t>
             </a:r>
             <a:r>
-              <a:rPr lang="pl-PL" sz="1050" dirty="0">
+              <a:rPr lang="pl-PL" sz="1050" dirty="0" smtClean="0">
                 <a:solidFill>
                   <a:srgbClr val="C586C0"/>
                 </a:solidFill>
@@ -22101,7 +22092,7 @@
               <a:t>import</a:t>
             </a:r>
             <a:r>
-              <a:rPr lang="pl-PL" sz="1050" dirty="0">
+              <a:rPr lang="pl-PL" sz="1050" dirty="0" smtClean="0">
                 <a:solidFill>
                   <a:srgbClr val="CCCCCC"/>
                 </a:solidFill>
@@ -22110,7 +22101,7 @@
               <a:t> </a:t>
             </a:r>
             <a:r>
-              <a:rPr lang="pl-PL" sz="1050" dirty="0" err="1">
+              <a:rPr lang="pl-PL" sz="1050" dirty="0" err="1" smtClean="0">
                 <a:solidFill>
                   <a:srgbClr val="CCCCCC"/>
                 </a:solidFill>
@@ -22118,7 +22109,7 @@
               </a:rPr>
               <a:t>Node</a:t>
             </a:r>
-            <a:endParaRPr lang="pl-PL" sz="1050" dirty="0">
+            <a:endParaRPr lang="pl-PL" sz="1050" dirty="0" smtClean="0">
               <a:solidFill>
                 <a:srgbClr val="CCCCCC"/>
               </a:solidFill>
@@ -22132,7 +22123,7 @@
               </a:lnSpc>
             </a:pPr>
             <a:r>
-              <a:rPr lang="pl-PL" sz="1050" dirty="0">
+              <a:rPr lang="pl-PL" sz="1050" dirty="0" smtClean="0">
                 <a:solidFill>
                   <a:srgbClr val="C586C0"/>
                 </a:solidFill>
@@ -22141,7 +22132,7 @@
               <a:t>from</a:t>
             </a:r>
             <a:r>
-              <a:rPr lang="pl-PL" sz="1050" dirty="0">
+              <a:rPr lang="pl-PL" sz="1050" dirty="0" smtClean="0">
                 <a:solidFill>
                   <a:srgbClr val="CCCCCC"/>
                 </a:solidFill>
@@ -22150,7 +22141,7 @@
               <a:t> geometry_msgs.msg </a:t>
             </a:r>
             <a:r>
-              <a:rPr lang="pl-PL" sz="1050" dirty="0">
+              <a:rPr lang="pl-PL" sz="1050" dirty="0" smtClean="0">
                 <a:solidFill>
                   <a:srgbClr val="C586C0"/>
                 </a:solidFill>
@@ -22159,7 +22150,7 @@
               <a:t>import</a:t>
             </a:r>
             <a:r>
-              <a:rPr lang="pl-PL" sz="1050" dirty="0">
+              <a:rPr lang="pl-PL" sz="1050" dirty="0" smtClean="0">
                 <a:solidFill>
                   <a:srgbClr val="CCCCCC"/>
                 </a:solidFill>
@@ -22168,7 +22159,7 @@
               <a:t> </a:t>
             </a:r>
             <a:r>
-              <a:rPr lang="pl-PL" sz="1050" dirty="0" err="1">
+              <a:rPr lang="pl-PL" sz="1050" dirty="0" err="1" smtClean="0">
                 <a:solidFill>
                   <a:srgbClr val="CCCCCC"/>
                 </a:solidFill>
@@ -22176,7 +22167,7 @@
               </a:rPr>
               <a:t>PoseStamped</a:t>
             </a:r>
-            <a:endParaRPr lang="pl-PL" sz="1050" dirty="0">
+            <a:endParaRPr lang="pl-PL" sz="1050" dirty="0" smtClean="0">
               <a:solidFill>
                 <a:srgbClr val="CCCCCC"/>
               </a:solidFill>
@@ -22190,7 +22181,7 @@
               </a:lnSpc>
             </a:pPr>
             <a:r>
-              <a:rPr lang="pl-PL" sz="1050" dirty="0">
+              <a:rPr lang="pl-PL" sz="1050" dirty="0" smtClean="0">
                 <a:solidFill>
                   <a:srgbClr val="C586C0"/>
                 </a:solidFill>
@@ -22199,7 +22190,7 @@
               <a:t>from</a:t>
             </a:r>
             <a:r>
-              <a:rPr lang="pl-PL" sz="1050" dirty="0">
+              <a:rPr lang="pl-PL" sz="1050" dirty="0" smtClean="0">
                 <a:solidFill>
                   <a:srgbClr val="CCCCCC"/>
                 </a:solidFill>
@@ -22208,7 +22199,7 @@
               <a:t> nav_msgs.msg </a:t>
             </a:r>
             <a:r>
-              <a:rPr lang="pl-PL" sz="1050" dirty="0">
+              <a:rPr lang="pl-PL" sz="1050" dirty="0" smtClean="0">
                 <a:solidFill>
                   <a:srgbClr val="C586C0"/>
                 </a:solidFill>
@@ -22217,7 +22208,7 @@
               <a:t>import</a:t>
             </a:r>
             <a:r>
-              <a:rPr lang="pl-PL" sz="1050" dirty="0">
+              <a:rPr lang="pl-PL" sz="1050" dirty="0" smtClean="0">
                 <a:solidFill>
                   <a:srgbClr val="CCCCCC"/>
                 </a:solidFill>
@@ -22226,7 +22217,7 @@
               <a:t> </a:t>
             </a:r>
             <a:r>
-              <a:rPr lang="pl-PL" sz="1050" dirty="0" err="1">
+              <a:rPr lang="pl-PL" sz="1050" dirty="0" err="1" smtClean="0">
                 <a:solidFill>
                   <a:srgbClr val="CCCCCC"/>
                 </a:solidFill>
@@ -22234,7 +22225,7 @@
               </a:rPr>
               <a:t>Odometry</a:t>
             </a:r>
-            <a:endParaRPr lang="pl-PL" sz="1050" dirty="0">
+            <a:endParaRPr lang="pl-PL" sz="1050" dirty="0" smtClean="0">
               <a:solidFill>
                 <a:srgbClr val="CCCCCC"/>
               </a:solidFill>
@@ -22248,7 +22239,7 @@
               </a:lnSpc>
             </a:pPr>
             <a:r>
-              <a:rPr lang="pl-PL" sz="1050" dirty="0">
+              <a:rPr lang="pl-PL" sz="1050" dirty="0" smtClean="0">
                 <a:solidFill>
                   <a:srgbClr val="CCCCCC"/>
                 </a:solidFill>
@@ -22257,7 +22248,7 @@
               <a:t/>
             </a:r>
             <a:br>
-              <a:rPr lang="pl-PL" sz="1050" dirty="0">
+              <a:rPr lang="pl-PL" sz="1050" dirty="0" smtClean="0">
                 <a:solidFill>
                   <a:srgbClr val="CCCCCC"/>
                 </a:solidFill>
@@ -22265,7 +22256,7 @@
               </a:rPr>
             </a:br>
             <a:r>
-              <a:rPr lang="pl-PL" sz="1050" dirty="0">
+              <a:rPr lang="pl-PL" sz="1050" dirty="0" err="1" smtClean="0">
                 <a:solidFill>
                   <a:srgbClr val="569CD6"/>
                 </a:solidFill>
@@ -22274,7 +22265,7 @@
               <a:t>class</a:t>
             </a:r>
             <a:r>
-              <a:rPr lang="pl-PL" sz="1050" dirty="0">
+              <a:rPr lang="pl-PL" sz="1050" dirty="0" smtClean="0">
                 <a:solidFill>
                   <a:srgbClr val="CCCCCC"/>
                 </a:solidFill>
@@ -22283,7 +22274,7 @@
               <a:t> </a:t>
             </a:r>
             <a:r>
-              <a:rPr lang="pl-PL" sz="1050" dirty="0" err="1">
+              <a:rPr lang="pl-PL" sz="1050" dirty="0" err="1" smtClean="0">
                 <a:solidFill>
                   <a:srgbClr val="4EC9B0"/>
                 </a:solidFill>
@@ -22292,7 +22283,7 @@
               <a:t>NavClient</a:t>
             </a:r>
             <a:r>
-              <a:rPr lang="pl-PL" sz="1050" dirty="0">
+              <a:rPr lang="pl-PL" sz="1050" dirty="0" smtClean="0">
                 <a:solidFill>
                   <a:srgbClr val="CCCCCC"/>
                 </a:solidFill>
@@ -22301,7 +22292,7 @@
               <a:t>(</a:t>
             </a:r>
             <a:r>
-              <a:rPr lang="pl-PL" sz="1050" dirty="0" err="1">
+              <a:rPr lang="pl-PL" sz="1050" dirty="0" err="1" smtClean="0">
                 <a:solidFill>
                   <a:srgbClr val="4EC9B0"/>
                 </a:solidFill>
@@ -22310,7 +22301,7 @@
               <a:t>Node</a:t>
             </a:r>
             <a:r>
-              <a:rPr lang="pl-PL" sz="1050" dirty="0">
+              <a:rPr lang="pl-PL" sz="1050" dirty="0" smtClean="0">
                 <a:solidFill>
                   <a:srgbClr val="CCCCCC"/>
                 </a:solidFill>
@@ -22326,7 +22317,7 @@
               </a:lnSpc>
             </a:pPr>
             <a:r>
-              <a:rPr lang="pl-PL" sz="1050" dirty="0">
+              <a:rPr lang="pl-PL" sz="1050" dirty="0" smtClean="0">
                 <a:solidFill>
                   <a:srgbClr val="CCCCCC"/>
                 </a:solidFill>
@@ -22335,7 +22326,7 @@
               <a:t>    </a:t>
             </a:r>
             <a:r>
-              <a:rPr lang="pl-PL" sz="1050" dirty="0">
+              <a:rPr lang="pl-PL" sz="1050" dirty="0" smtClean="0">
                 <a:solidFill>
                   <a:srgbClr val="569CD6"/>
                 </a:solidFill>
@@ -22344,7 +22335,7 @@
               <a:t>def</a:t>
             </a:r>
             <a:r>
-              <a:rPr lang="pl-PL" sz="1050" dirty="0">
+              <a:rPr lang="pl-PL" sz="1050" dirty="0" smtClean="0">
                 <a:solidFill>
                   <a:srgbClr val="CCCCCC"/>
                 </a:solidFill>
@@ -22353,7 +22344,7 @@
               <a:t> </a:t>
             </a:r>
             <a:r>
-              <a:rPr lang="pl-PL" sz="1050" dirty="0">
+              <a:rPr lang="pl-PL" sz="1050" dirty="0" smtClean="0">
                 <a:solidFill>
                   <a:srgbClr val="DCDCAA"/>
                 </a:solidFill>
@@ -22362,7 +22353,7 @@
               <a:t>__</a:t>
             </a:r>
             <a:r>
-              <a:rPr lang="pl-PL" sz="1050" dirty="0" err="1">
+              <a:rPr lang="pl-PL" sz="1050" dirty="0" err="1" smtClean="0">
                 <a:solidFill>
                   <a:srgbClr val="DCDCAA"/>
                 </a:solidFill>
@@ -22371,7 +22362,7 @@
               <a:t>init</a:t>
             </a:r>
             <a:r>
-              <a:rPr lang="pl-PL" sz="1050" dirty="0">
+              <a:rPr lang="pl-PL" sz="1050" dirty="0" smtClean="0">
                 <a:solidFill>
                   <a:srgbClr val="DCDCAA"/>
                 </a:solidFill>
@@ -22380,7 +22371,7 @@
               <a:t>__</a:t>
             </a:r>
             <a:r>
-              <a:rPr lang="pl-PL" sz="1050" dirty="0">
+              <a:rPr lang="pl-PL" sz="1050" dirty="0" smtClean="0">
                 <a:solidFill>
                   <a:srgbClr val="CCCCCC"/>
                 </a:solidFill>
@@ -22389,7 +22380,7 @@
               <a:t>(</a:t>
             </a:r>
             <a:r>
-              <a:rPr lang="pl-PL" sz="1050" dirty="0" err="1">
+              <a:rPr lang="pl-PL" sz="1050" dirty="0" err="1" smtClean="0">
                 <a:solidFill>
                   <a:srgbClr val="9CDCFE"/>
                 </a:solidFill>
@@ -22398,7 +22389,7 @@
               <a:t>self</a:t>
             </a:r>
             <a:r>
-              <a:rPr lang="pl-PL" sz="1050" dirty="0">
+              <a:rPr lang="pl-PL" sz="1050" dirty="0" smtClean="0">
                 <a:solidFill>
                   <a:srgbClr val="CCCCCC"/>
                 </a:solidFill>
@@ -22414,7 +22405,7 @@
               </a:lnSpc>
             </a:pPr>
             <a:r>
-              <a:rPr lang="pl-PL" sz="1050" dirty="0">
+              <a:rPr lang="pl-PL" sz="1050" dirty="0" smtClean="0">
                 <a:solidFill>
                   <a:srgbClr val="CCCCCC"/>
                 </a:solidFill>
@@ -22423,7 +22414,7 @@
               <a:t>        </a:t>
             </a:r>
             <a:r>
-              <a:rPr lang="pl-PL" sz="1050" dirty="0">
+              <a:rPr lang="pl-PL" sz="1050" dirty="0" smtClean="0">
                 <a:solidFill>
                   <a:srgbClr val="4EC9B0"/>
                 </a:solidFill>
@@ -22432,7 +22423,7 @@
               <a:t>super</a:t>
             </a:r>
             <a:r>
-              <a:rPr lang="pl-PL" sz="1050" dirty="0">
+              <a:rPr lang="pl-PL" sz="1050" dirty="0" smtClean="0">
                 <a:solidFill>
                   <a:srgbClr val="CCCCCC"/>
                 </a:solidFill>
@@ -22441,7 +22432,7 @@
               <a:t>().</a:t>
             </a:r>
             <a:r>
-              <a:rPr lang="pl-PL" sz="1050" dirty="0">
+              <a:rPr lang="pl-PL" sz="1050" dirty="0" smtClean="0">
                 <a:solidFill>
                   <a:srgbClr val="DCDCAA"/>
                 </a:solidFill>
@@ -22450,7 +22441,7 @@
               <a:t>__</a:t>
             </a:r>
             <a:r>
-              <a:rPr lang="pl-PL" sz="1050" dirty="0" err="1">
+              <a:rPr lang="pl-PL" sz="1050" dirty="0" err="1" smtClean="0">
                 <a:solidFill>
                   <a:srgbClr val="DCDCAA"/>
                 </a:solidFill>
@@ -22459,7 +22450,7 @@
               <a:t>init</a:t>
             </a:r>
             <a:r>
-              <a:rPr lang="pl-PL" sz="1050" dirty="0">
+              <a:rPr lang="pl-PL" sz="1050" dirty="0" smtClean="0">
                 <a:solidFill>
                   <a:srgbClr val="DCDCAA"/>
                 </a:solidFill>
@@ -22468,7 +22459,7 @@
               <a:t>__</a:t>
             </a:r>
             <a:r>
-              <a:rPr lang="pl-PL" sz="1050" dirty="0">
+              <a:rPr lang="pl-PL" sz="1050" dirty="0" smtClean="0">
                 <a:solidFill>
                   <a:srgbClr val="CCCCCC"/>
                 </a:solidFill>
@@ -22477,7 +22468,7 @@
               <a:t>(</a:t>
             </a:r>
             <a:r>
-              <a:rPr lang="pl-PL" sz="1050" dirty="0">
+              <a:rPr lang="pl-PL" sz="1050" dirty="0" smtClean="0">
                 <a:solidFill>
                   <a:srgbClr val="CE9178"/>
                 </a:solidFill>
@@ -22486,7 +22477,7 @@
               <a:t>'</a:t>
             </a:r>
             <a:r>
-              <a:rPr lang="pl-PL" sz="1050" dirty="0" err="1">
+              <a:rPr lang="pl-PL" sz="1050" dirty="0" err="1" smtClean="0">
                 <a:solidFill>
                   <a:srgbClr val="CE9178"/>
                 </a:solidFill>
@@ -22495,7 +22486,7 @@
               <a:t>nav_client</a:t>
             </a:r>
             <a:r>
-              <a:rPr lang="pl-PL" sz="1050" dirty="0">
+              <a:rPr lang="pl-PL" sz="1050" dirty="0" smtClean="0">
                 <a:solidFill>
                   <a:srgbClr val="CE9178"/>
                 </a:solidFill>
@@ -22504,7 +22495,7 @@
               <a:t>'</a:t>
             </a:r>
             <a:r>
-              <a:rPr lang="pl-PL" sz="1050" dirty="0">
+              <a:rPr lang="pl-PL" sz="1050" dirty="0" smtClean="0">
                 <a:solidFill>
                   <a:srgbClr val="CCCCCC"/>
                 </a:solidFill>
@@ -22520,7 +22511,7 @@
               </a:lnSpc>
             </a:pPr>
             <a:r>
-              <a:rPr lang="pl-PL" sz="1050" dirty="0">
+              <a:rPr lang="pl-PL" sz="1050" dirty="0" smtClean="0">
                 <a:solidFill>
                   <a:srgbClr val="CCCCCC"/>
                 </a:solidFill>
@@ -22529,7 +22520,7 @@
               <a:t>        </a:t>
             </a:r>
             <a:r>
-              <a:rPr lang="pl-PL" sz="1050" dirty="0" err="1">
+              <a:rPr lang="pl-PL" sz="1050" dirty="0" err="1" smtClean="0">
                 <a:solidFill>
                   <a:srgbClr val="9CDCFE"/>
                 </a:solidFill>
@@ -22538,7 +22529,7 @@
               <a:t>self</a:t>
             </a:r>
             <a:r>
-              <a:rPr lang="pl-PL" sz="1050" dirty="0" err="1">
+              <a:rPr lang="pl-PL" sz="1050" dirty="0" err="1" smtClean="0">
                 <a:solidFill>
                   <a:srgbClr val="CCCCCC"/>
                 </a:solidFill>
@@ -22547,7 +22538,7 @@
               <a:t>.</a:t>
             </a:r>
             <a:r>
-              <a:rPr lang="pl-PL" sz="1050" dirty="0" err="1">
+              <a:rPr lang="pl-PL" sz="1050" dirty="0" err="1" smtClean="0">
                 <a:solidFill>
                   <a:srgbClr val="9CDCFE"/>
                 </a:solidFill>
@@ -22556,7 +22547,7 @@
               <a:t>goal_pub</a:t>
             </a:r>
             <a:r>
-              <a:rPr lang="pl-PL" sz="1050" dirty="0">
+              <a:rPr lang="pl-PL" sz="1050" dirty="0" smtClean="0">
                 <a:solidFill>
                   <a:srgbClr val="CCCCCC"/>
                 </a:solidFill>
@@ -22565,7 +22556,7 @@
               <a:t> </a:t>
             </a:r>
             <a:r>
-              <a:rPr lang="pl-PL" sz="1050" dirty="0">
+              <a:rPr lang="pl-PL" sz="1050" dirty="0" smtClean="0">
                 <a:solidFill>
                   <a:srgbClr val="D4D4D4"/>
                 </a:solidFill>
@@ -22574,7 +22565,7 @@
               <a:t>=</a:t>
             </a:r>
             <a:r>
-              <a:rPr lang="pl-PL" sz="1050" dirty="0">
+              <a:rPr lang="pl-PL" sz="1050" dirty="0" smtClean="0">
                 <a:solidFill>
                   <a:srgbClr val="CCCCCC"/>
                 </a:solidFill>
@@ -22583,7 +22574,7 @@
               <a:t> </a:t>
             </a:r>
             <a:r>
-              <a:rPr lang="pl-PL" sz="1050" dirty="0" err="1">
+              <a:rPr lang="pl-PL" sz="1050" dirty="0" err="1" smtClean="0">
                 <a:solidFill>
                   <a:srgbClr val="9CDCFE"/>
                 </a:solidFill>
@@ -22592,7 +22583,7 @@
               <a:t>self</a:t>
             </a:r>
             <a:r>
-              <a:rPr lang="pl-PL" sz="1050" dirty="0" err="1">
+              <a:rPr lang="pl-PL" sz="1050" dirty="0" err="1" smtClean="0">
                 <a:solidFill>
                   <a:srgbClr val="CCCCCC"/>
                 </a:solidFill>
@@ -22601,7 +22592,7 @@
               <a:t>.create_publisher</a:t>
             </a:r>
             <a:r>
-              <a:rPr lang="pl-PL" sz="1050" dirty="0">
+              <a:rPr lang="pl-PL" sz="1050" dirty="0" smtClean="0">
                 <a:solidFill>
                   <a:srgbClr val="CCCCCC"/>
                 </a:solidFill>
@@ -22617,7 +22608,7 @@
               </a:lnSpc>
             </a:pPr>
             <a:r>
-              <a:rPr lang="pl-PL" sz="1050" dirty="0">
+              <a:rPr lang="pl-PL" sz="1050" dirty="0" smtClean="0">
                 <a:solidFill>
                   <a:srgbClr val="CCCCCC"/>
                 </a:solidFill>
@@ -22626,7 +22617,7 @@
               <a:t>            </a:t>
             </a:r>
             <a:r>
-              <a:rPr lang="pl-PL" sz="1050" dirty="0" err="1">
+              <a:rPr lang="pl-PL" sz="1050" dirty="0" err="1" smtClean="0">
                 <a:solidFill>
                   <a:srgbClr val="CCCCCC"/>
                 </a:solidFill>
@@ -22635,7 +22626,7 @@
               <a:t>PoseStamped</a:t>
             </a:r>
             <a:r>
-              <a:rPr lang="pl-PL" sz="1050" dirty="0">
+              <a:rPr lang="pl-PL" sz="1050" dirty="0" smtClean="0">
                 <a:solidFill>
                   <a:srgbClr val="CCCCCC"/>
                 </a:solidFill>
@@ -22644,7 +22635,7 @@
               <a:t>, </a:t>
             </a:r>
             <a:r>
-              <a:rPr lang="pl-PL" sz="1050" dirty="0">
+              <a:rPr lang="pl-PL" sz="1050" dirty="0" smtClean="0">
                 <a:solidFill>
                   <a:srgbClr val="CE9178"/>
                 </a:solidFill>
@@ -22653,7 +22644,7 @@
               <a:t>'/</a:t>
             </a:r>
             <a:r>
-              <a:rPr lang="pl-PL" sz="1050" dirty="0" err="1">
+              <a:rPr lang="pl-PL" sz="1050" dirty="0" err="1" smtClean="0">
                 <a:solidFill>
                   <a:srgbClr val="CE9178"/>
                 </a:solidFill>
@@ -22662,7 +22653,7 @@
               <a:t>goal_pose</a:t>
             </a:r>
             <a:r>
-              <a:rPr lang="pl-PL" sz="1050" dirty="0">
+              <a:rPr lang="pl-PL" sz="1050" dirty="0" smtClean="0">
                 <a:solidFill>
                   <a:srgbClr val="CE9178"/>
                 </a:solidFill>
@@ -22671,7 +22662,7 @@
               <a:t>'</a:t>
             </a:r>
             <a:r>
-              <a:rPr lang="pl-PL" sz="1050" dirty="0">
+              <a:rPr lang="pl-PL" sz="1050" dirty="0" smtClean="0">
                 <a:solidFill>
                   <a:srgbClr val="CCCCCC"/>
                 </a:solidFill>
@@ -22680,7 +22671,7 @@
               <a:t>, </a:t>
             </a:r>
             <a:r>
-              <a:rPr lang="pl-PL" sz="1050" dirty="0">
+              <a:rPr lang="pl-PL" sz="1050" dirty="0" smtClean="0">
                 <a:solidFill>
                   <a:srgbClr val="B5CEA8"/>
                 </a:solidFill>
@@ -22689,7 +22680,7 @@
               <a:t>10</a:t>
             </a:r>
             <a:r>
-              <a:rPr lang="pl-PL" sz="1050" dirty="0">
+              <a:rPr lang="pl-PL" sz="1050" dirty="0" smtClean="0">
                 <a:solidFill>
                   <a:srgbClr val="CCCCCC"/>
                 </a:solidFill>
@@ -22705,7 +22696,7 @@
               </a:lnSpc>
             </a:pPr>
             <a:r>
-              <a:rPr lang="pl-PL" sz="1050" dirty="0">
+              <a:rPr lang="pl-PL" sz="1050" dirty="0" smtClean="0">
                 <a:solidFill>
                   <a:srgbClr val="CCCCCC"/>
                 </a:solidFill>
@@ -22714,7 +22705,7 @@
               <a:t>        </a:t>
             </a:r>
             <a:r>
-              <a:rPr lang="pl-PL" sz="1050" dirty="0" err="1">
+              <a:rPr lang="pl-PL" sz="1050" dirty="0" err="1" smtClean="0">
                 <a:solidFill>
                   <a:srgbClr val="9CDCFE"/>
                 </a:solidFill>
@@ -22723,7 +22714,7 @@
               <a:t>self</a:t>
             </a:r>
             <a:r>
-              <a:rPr lang="pl-PL" sz="1050" dirty="0" err="1">
+              <a:rPr lang="pl-PL" sz="1050" dirty="0" err="1" smtClean="0">
                 <a:solidFill>
                   <a:srgbClr val="CCCCCC"/>
                 </a:solidFill>
@@ -22732,7 +22723,7 @@
               <a:t>.</a:t>
             </a:r>
             <a:r>
-              <a:rPr lang="pl-PL" sz="1050" dirty="0" err="1">
+              <a:rPr lang="pl-PL" sz="1050" dirty="0" err="1" smtClean="0">
                 <a:solidFill>
                   <a:srgbClr val="9CDCFE"/>
                 </a:solidFill>
@@ -22741,7 +22732,7 @@
               <a:t>odom_sub</a:t>
             </a:r>
             <a:r>
-              <a:rPr lang="pl-PL" sz="1050" dirty="0">
+              <a:rPr lang="pl-PL" sz="1050" dirty="0" smtClean="0">
                 <a:solidFill>
                   <a:srgbClr val="CCCCCC"/>
                 </a:solidFill>
@@ -22750,7 +22741,7 @@
               <a:t> </a:t>
             </a:r>
             <a:r>
-              <a:rPr lang="pl-PL" sz="1050" dirty="0">
+              <a:rPr lang="pl-PL" sz="1050" dirty="0" smtClean="0">
                 <a:solidFill>
                   <a:srgbClr val="D4D4D4"/>
                 </a:solidFill>
@@ -22759,7 +22750,7 @@
               <a:t>=</a:t>
             </a:r>
             <a:r>
-              <a:rPr lang="pl-PL" sz="1050" dirty="0">
+              <a:rPr lang="pl-PL" sz="1050" dirty="0" smtClean="0">
                 <a:solidFill>
                   <a:srgbClr val="CCCCCC"/>
                 </a:solidFill>
@@ -22768,7 +22759,7 @@
               <a:t> </a:t>
             </a:r>
             <a:r>
-              <a:rPr lang="pl-PL" sz="1050" dirty="0" err="1">
+              <a:rPr lang="pl-PL" sz="1050" dirty="0" err="1" smtClean="0">
                 <a:solidFill>
                   <a:srgbClr val="9CDCFE"/>
                 </a:solidFill>
@@ -22777,7 +22768,7 @@
               <a:t>self</a:t>
             </a:r>
             <a:r>
-              <a:rPr lang="pl-PL" sz="1050" dirty="0" err="1">
+              <a:rPr lang="pl-PL" sz="1050" dirty="0" err="1" smtClean="0">
                 <a:solidFill>
                   <a:srgbClr val="CCCCCC"/>
                 </a:solidFill>
@@ -22786,7 +22777,7 @@
               <a:t>.create_subscription</a:t>
             </a:r>
             <a:r>
-              <a:rPr lang="pl-PL" sz="1050" dirty="0">
+              <a:rPr lang="pl-PL" sz="1050" dirty="0" smtClean="0">
                 <a:solidFill>
                   <a:srgbClr val="CCCCCC"/>
                 </a:solidFill>
@@ -22802,7 +22793,7 @@
               </a:lnSpc>
             </a:pPr>
             <a:r>
-              <a:rPr lang="pl-PL" sz="1050" dirty="0">
+              <a:rPr lang="pl-PL" sz="1050" dirty="0" smtClean="0">
                 <a:solidFill>
                   <a:srgbClr val="CCCCCC"/>
                 </a:solidFill>
@@ -22811,7 +22802,7 @@
               <a:t>            </a:t>
             </a:r>
             <a:r>
-              <a:rPr lang="pl-PL" sz="1050" dirty="0" err="1">
+              <a:rPr lang="pl-PL" sz="1050" dirty="0" err="1" smtClean="0">
                 <a:solidFill>
                   <a:srgbClr val="CCCCCC"/>
                 </a:solidFill>
@@ -22820,7 +22811,7 @@
               <a:t>Odometry</a:t>
             </a:r>
             <a:r>
-              <a:rPr lang="pl-PL" sz="1050" dirty="0">
+              <a:rPr lang="pl-PL" sz="1050" dirty="0" smtClean="0">
                 <a:solidFill>
                   <a:srgbClr val="CCCCCC"/>
                 </a:solidFill>
@@ -22829,7 +22820,7 @@
               <a:t>, </a:t>
             </a:r>
             <a:r>
-              <a:rPr lang="pl-PL" sz="1050" dirty="0">
+              <a:rPr lang="pl-PL" sz="1050" dirty="0" smtClean="0">
                 <a:solidFill>
                   <a:srgbClr val="CE9178"/>
                 </a:solidFill>
@@ -22838,7 +22829,7 @@
               <a:t>'/odom'</a:t>
             </a:r>
             <a:r>
-              <a:rPr lang="pl-PL" sz="1050" dirty="0">
+              <a:rPr lang="pl-PL" sz="1050" dirty="0" smtClean="0">
                 <a:solidFill>
                   <a:srgbClr val="CCCCCC"/>
                 </a:solidFill>
@@ -22854,7 +22845,7 @@
               </a:lnSpc>
             </a:pPr>
             <a:r>
-              <a:rPr lang="pl-PL" sz="1050" dirty="0">
+              <a:rPr lang="pl-PL" sz="1050" dirty="0" smtClean="0">
                 <a:solidFill>
                   <a:srgbClr val="CCCCCC"/>
                 </a:solidFill>
@@ -22863,7 +22854,7 @@
               <a:t>            </a:t>
             </a:r>
             <a:r>
-              <a:rPr lang="pl-PL" sz="1050" dirty="0" err="1">
+              <a:rPr lang="pl-PL" sz="1050" dirty="0" err="1" smtClean="0">
                 <a:solidFill>
                   <a:srgbClr val="9CDCFE"/>
                 </a:solidFill>
@@ -22872,7 +22863,7 @@
               <a:t>self</a:t>
             </a:r>
             <a:r>
-              <a:rPr lang="pl-PL" sz="1050" dirty="0" err="1">
+              <a:rPr lang="pl-PL" sz="1050" dirty="0" err="1" smtClean="0">
                 <a:solidFill>
                   <a:srgbClr val="CCCCCC"/>
                 </a:solidFill>
@@ -22881,7 +22872,7 @@
               <a:t>.</a:t>
             </a:r>
             <a:r>
-              <a:rPr lang="pl-PL" sz="1050" dirty="0" err="1">
+              <a:rPr lang="pl-PL" sz="1050" dirty="0" err="1" smtClean="0">
                 <a:solidFill>
                   <a:srgbClr val="DCDCAA"/>
                 </a:solidFill>
@@ -22890,7 +22881,7 @@
               <a:t>odom_callback</a:t>
             </a:r>
             <a:r>
-              <a:rPr lang="pl-PL" sz="1050" dirty="0">
+              <a:rPr lang="pl-PL" sz="1050" dirty="0" smtClean="0">
                 <a:solidFill>
                   <a:srgbClr val="CCCCCC"/>
                 </a:solidFill>
@@ -22899,7 +22890,7 @@
               <a:t>, </a:t>
             </a:r>
             <a:r>
-              <a:rPr lang="pl-PL" sz="1050" dirty="0">
+              <a:rPr lang="pl-PL" sz="1050" dirty="0" smtClean="0">
                 <a:solidFill>
                   <a:srgbClr val="B5CEA8"/>
                 </a:solidFill>
@@ -22908,7 +22899,7 @@
               <a:t>10</a:t>
             </a:r>
             <a:r>
-              <a:rPr lang="pl-PL" sz="1050" dirty="0">
+              <a:rPr lang="pl-PL" sz="1050" dirty="0" smtClean="0">
                 <a:solidFill>
                   <a:srgbClr val="CCCCCC"/>
                 </a:solidFill>
@@ -22924,7 +22915,7 @@
               </a:lnSpc>
             </a:pPr>
             <a:r>
-              <a:rPr lang="pl-PL" sz="1050" dirty="0">
+              <a:rPr lang="pl-PL" sz="1050" dirty="0" smtClean="0">
                 <a:solidFill>
                   <a:srgbClr val="CCCCCC"/>
                 </a:solidFill>
@@ -22933,7 +22924,7 @@
               <a:t>    </a:t>
             </a:r>
             <a:r>
-              <a:rPr lang="pl-PL" sz="1050" dirty="0">
+              <a:rPr lang="pl-PL" sz="1050" dirty="0" smtClean="0">
                 <a:solidFill>
                   <a:srgbClr val="569CD6"/>
                 </a:solidFill>
@@ -22942,7 +22933,7 @@
               <a:t>def</a:t>
             </a:r>
             <a:r>
-              <a:rPr lang="pl-PL" sz="1050" dirty="0">
+              <a:rPr lang="pl-PL" sz="1050" dirty="0" smtClean="0">
                 <a:solidFill>
                   <a:srgbClr val="CCCCCC"/>
                 </a:solidFill>
@@ -22951,7 +22942,7 @@
               <a:t> </a:t>
             </a:r>
             <a:r>
-              <a:rPr lang="pl-PL" sz="1050" dirty="0" err="1">
+              <a:rPr lang="pl-PL" sz="1050" dirty="0" err="1" smtClean="0">
                 <a:solidFill>
                   <a:srgbClr val="DCDCAA"/>
                 </a:solidFill>
@@ -22960,7 +22951,7 @@
               <a:t>odom_callback</a:t>
             </a:r>
             <a:r>
-              <a:rPr lang="pl-PL" sz="1050" dirty="0">
+              <a:rPr lang="pl-PL" sz="1050" dirty="0" smtClean="0">
                 <a:solidFill>
                   <a:srgbClr val="CCCCCC"/>
                 </a:solidFill>
@@ -22969,7 +22960,7 @@
               <a:t>(</a:t>
             </a:r>
             <a:r>
-              <a:rPr lang="pl-PL" sz="1050" dirty="0" err="1">
+              <a:rPr lang="pl-PL" sz="1050" dirty="0" err="1" smtClean="0">
                 <a:solidFill>
                   <a:srgbClr val="9CDCFE"/>
                 </a:solidFill>
@@ -22978,7 +22969,7 @@
               <a:t>self</a:t>
             </a:r>
             <a:r>
-              <a:rPr lang="pl-PL" sz="1050" dirty="0">
+              <a:rPr lang="pl-PL" sz="1050" dirty="0" smtClean="0">
                 <a:solidFill>
                   <a:srgbClr val="CCCCCC"/>
                 </a:solidFill>
@@ -22987,7 +22978,7 @@
               <a:t>, </a:t>
             </a:r>
             <a:r>
-              <a:rPr lang="pl-PL" sz="1050" dirty="0" err="1">
+              <a:rPr lang="pl-PL" sz="1050" dirty="0" err="1" smtClean="0">
                 <a:solidFill>
                   <a:srgbClr val="9CDCFE"/>
                 </a:solidFill>
@@ -22996,7 +22987,7 @@
               <a:t>msg</a:t>
             </a:r>
             <a:r>
-              <a:rPr lang="pl-PL" sz="1050" dirty="0">
+              <a:rPr lang="pl-PL" sz="1050" dirty="0" smtClean="0">
                 <a:solidFill>
                   <a:srgbClr val="CCCCCC"/>
                 </a:solidFill>
@@ -23005,7 +22996,7 @@
               <a:t>: </a:t>
             </a:r>
             <a:r>
-              <a:rPr lang="pl-PL" sz="1050" dirty="0" err="1">
+              <a:rPr lang="pl-PL" sz="1050" dirty="0" err="1" smtClean="0">
                 <a:solidFill>
                   <a:srgbClr val="4EC9B0"/>
                 </a:solidFill>
@@ -23014,7 +23005,7 @@
               <a:t>Odometry</a:t>
             </a:r>
             <a:r>
-              <a:rPr lang="pl-PL" sz="1050" dirty="0">
+              <a:rPr lang="pl-PL" sz="1050" dirty="0" smtClean="0">
                 <a:solidFill>
                   <a:srgbClr val="CCCCCC"/>
                 </a:solidFill>
@@ -23030,7 +23021,7 @@
               </a:lnSpc>
             </a:pPr>
             <a:r>
-              <a:rPr lang="pl-PL" sz="1050" dirty="0">
+              <a:rPr lang="pl-PL" sz="1050" dirty="0" smtClean="0">
                 <a:solidFill>
                   <a:srgbClr val="CCCCCC"/>
                 </a:solidFill>
@@ -23039,7 +23030,7 @@
               <a:t>        </a:t>
             </a:r>
             <a:r>
-              <a:rPr lang="pl-PL" sz="1050" dirty="0">
+              <a:rPr lang="pl-PL" sz="1050" dirty="0" smtClean="0">
                 <a:solidFill>
                   <a:srgbClr val="9CDCFE"/>
                 </a:solidFill>
@@ -23048,7 +23039,7 @@
               <a:t>x</a:t>
             </a:r>
             <a:r>
-              <a:rPr lang="pl-PL" sz="1050" dirty="0">
+              <a:rPr lang="pl-PL" sz="1050" dirty="0" smtClean="0">
                 <a:solidFill>
                   <a:srgbClr val="CCCCCC"/>
                 </a:solidFill>
@@ -23057,7 +23048,7 @@
               <a:t> </a:t>
             </a:r>
             <a:r>
-              <a:rPr lang="pl-PL" sz="1050" dirty="0">
+              <a:rPr lang="pl-PL" sz="1050" dirty="0" smtClean="0">
                 <a:solidFill>
                   <a:srgbClr val="D4D4D4"/>
                 </a:solidFill>
@@ -23066,7 +23057,7 @@
               <a:t>=</a:t>
             </a:r>
             <a:r>
-              <a:rPr lang="pl-PL" sz="1050" dirty="0">
+              <a:rPr lang="pl-PL" sz="1050" dirty="0" smtClean="0">
                 <a:solidFill>
                   <a:srgbClr val="CCCCCC"/>
                 </a:solidFill>
@@ -23075,7 +23066,7 @@
               <a:t> </a:t>
             </a:r>
             <a:r>
-              <a:rPr lang="pl-PL" sz="1050" dirty="0" err="1">
+              <a:rPr lang="pl-PL" sz="1050" dirty="0" err="1" smtClean="0">
                 <a:solidFill>
                   <a:srgbClr val="9CDCFE"/>
                 </a:solidFill>
@@ -23084,7 +23075,7 @@
               <a:t>msg</a:t>
             </a:r>
             <a:r>
-              <a:rPr lang="pl-PL" sz="1050" dirty="0" err="1">
+              <a:rPr lang="pl-PL" sz="1050" dirty="0" err="1" smtClean="0">
                 <a:solidFill>
                   <a:srgbClr val="CCCCCC"/>
                 </a:solidFill>
@@ -23092,7 +23083,7 @@
               </a:rPr>
               <a:t>.pose.pose.position.x</a:t>
             </a:r>
-            <a:endParaRPr lang="pl-PL" sz="1050" dirty="0">
+            <a:endParaRPr lang="pl-PL" sz="1050" dirty="0" smtClean="0">
               <a:solidFill>
                 <a:srgbClr val="CCCCCC"/>
               </a:solidFill>
@@ -23106,7 +23097,7 @@
               </a:lnSpc>
             </a:pPr>
             <a:r>
-              <a:rPr lang="pl-PL" sz="1050" dirty="0">
+              <a:rPr lang="pl-PL" sz="1050" dirty="0" smtClean="0">
                 <a:solidFill>
                   <a:srgbClr val="CCCCCC"/>
                 </a:solidFill>
@@ -23115,7 +23106,7 @@
               <a:t>        </a:t>
             </a:r>
             <a:r>
-              <a:rPr lang="pl-PL" sz="1050" dirty="0">
+              <a:rPr lang="pl-PL" sz="1050" dirty="0" smtClean="0">
                 <a:solidFill>
                   <a:srgbClr val="9CDCFE"/>
                 </a:solidFill>
@@ -23124,7 +23115,7 @@
               <a:t>y</a:t>
             </a:r>
             <a:r>
-              <a:rPr lang="pl-PL" sz="1050" dirty="0">
+              <a:rPr lang="pl-PL" sz="1050" dirty="0" smtClean="0">
                 <a:solidFill>
                   <a:srgbClr val="CCCCCC"/>
                 </a:solidFill>
@@ -23133,7 +23124,7 @@
               <a:t> </a:t>
             </a:r>
             <a:r>
-              <a:rPr lang="pl-PL" sz="1050" dirty="0">
+              <a:rPr lang="pl-PL" sz="1050" dirty="0" smtClean="0">
                 <a:solidFill>
                   <a:srgbClr val="D4D4D4"/>
                 </a:solidFill>
@@ -23142,7 +23133,7 @@
               <a:t>=</a:t>
             </a:r>
             <a:r>
-              <a:rPr lang="pl-PL" sz="1050" dirty="0">
+              <a:rPr lang="pl-PL" sz="1050" dirty="0" smtClean="0">
                 <a:solidFill>
                   <a:srgbClr val="CCCCCC"/>
                 </a:solidFill>
@@ -23151,7 +23142,7 @@
               <a:t> </a:t>
             </a:r>
             <a:r>
-              <a:rPr lang="pl-PL" sz="1050" dirty="0" err="1">
+              <a:rPr lang="pl-PL" sz="1050" dirty="0" err="1" smtClean="0">
                 <a:solidFill>
                   <a:srgbClr val="9CDCFE"/>
                 </a:solidFill>
@@ -23160,7 +23151,7 @@
               <a:t>msg</a:t>
             </a:r>
             <a:r>
-              <a:rPr lang="pl-PL" sz="1050" dirty="0" err="1">
+              <a:rPr lang="pl-PL" sz="1050" dirty="0" err="1" smtClean="0">
                 <a:solidFill>
                   <a:srgbClr val="CCCCCC"/>
                 </a:solidFill>
@@ -23168,7 +23159,7 @@
               </a:rPr>
               <a:t>.pose.pose.position.y</a:t>
             </a:r>
-            <a:endParaRPr lang="pl-PL" sz="1050" dirty="0">
+            <a:endParaRPr lang="pl-PL" sz="1050" dirty="0" smtClean="0">
               <a:solidFill>
                 <a:srgbClr val="CCCCCC"/>
               </a:solidFill>
@@ -23182,7 +23173,7 @@
               </a:lnSpc>
             </a:pPr>
             <a:r>
-              <a:rPr lang="pl-PL" sz="1050" dirty="0">
+              <a:rPr lang="pl-PL" sz="1050" dirty="0" smtClean="0">
                 <a:solidFill>
                   <a:srgbClr val="CCCCCC"/>
                 </a:solidFill>
@@ -23191,7 +23182,7 @@
               <a:t>        </a:t>
             </a:r>
             <a:r>
-              <a:rPr lang="pl-PL" sz="1050" dirty="0" err="1">
+              <a:rPr lang="pl-PL" sz="1050" dirty="0" err="1" smtClean="0">
                 <a:solidFill>
                   <a:srgbClr val="9CDCFE"/>
                 </a:solidFill>
@@ -23200,7 +23191,7 @@
               <a:t>self</a:t>
             </a:r>
             <a:r>
-              <a:rPr lang="pl-PL" sz="1050" dirty="0" err="1">
+              <a:rPr lang="pl-PL" sz="1050" dirty="0" err="1" smtClean="0">
                 <a:solidFill>
                   <a:srgbClr val="CCCCCC"/>
                 </a:solidFill>
@@ -23209,7 +23200,7 @@
               <a:t>.get_logger</a:t>
             </a:r>
             <a:r>
-              <a:rPr lang="pl-PL" sz="1050" dirty="0">
+              <a:rPr lang="pl-PL" sz="1050" dirty="0" smtClean="0">
                 <a:solidFill>
                   <a:srgbClr val="CCCCCC"/>
                 </a:solidFill>
@@ -23218,7 +23209,7 @@
               <a:t>().info(</a:t>
             </a:r>
             <a:r>
-              <a:rPr lang="pl-PL" sz="1050" dirty="0" err="1">
+              <a:rPr lang="pl-PL" sz="1050" dirty="0" err="1" smtClean="0">
                 <a:solidFill>
                   <a:srgbClr val="569CD6"/>
                 </a:solidFill>
@@ -23227,7 +23218,7 @@
               <a:t>f</a:t>
             </a:r>
             <a:r>
-              <a:rPr lang="pl-PL" sz="1050" dirty="0" err="1">
+              <a:rPr lang="pl-PL" sz="1050" dirty="0" err="1" smtClean="0">
                 <a:solidFill>
                   <a:srgbClr val="CE9178"/>
                 </a:solidFill>
@@ -23236,7 +23227,7 @@
               <a:t>'Pos</a:t>
             </a:r>
             <a:r>
-              <a:rPr lang="pl-PL" sz="1050" dirty="0">
+              <a:rPr lang="pl-PL" sz="1050" dirty="0" smtClean="0">
                 <a:solidFill>
                   <a:srgbClr val="CE9178"/>
                 </a:solidFill>
@@ -23245,7 +23236,7 @@
               <a:t>: (</a:t>
             </a:r>
             <a:r>
-              <a:rPr lang="pl-PL" sz="1050" dirty="0">
+              <a:rPr lang="pl-PL" sz="1050" dirty="0" smtClean="0">
                 <a:solidFill>
                   <a:srgbClr val="569CD6"/>
                 </a:solidFill>
@@ -23254,7 +23245,7 @@
               <a:t>{</a:t>
             </a:r>
             <a:r>
-              <a:rPr lang="pl-PL" sz="1050" dirty="0">
+              <a:rPr lang="pl-PL" sz="1050" dirty="0" smtClean="0">
                 <a:solidFill>
                   <a:srgbClr val="9CDCFE"/>
                 </a:solidFill>
@@ -23263,7 +23254,7 @@
               <a:t>x</a:t>
             </a:r>
             <a:r>
-              <a:rPr lang="pl-PL" sz="1050" dirty="0">
+              <a:rPr lang="pl-PL" sz="1050" dirty="0" smtClean="0">
                 <a:solidFill>
                   <a:srgbClr val="569CD6"/>
                 </a:solidFill>
@@ -23272,7 +23263,7 @@
               <a:t>:.2f}</a:t>
             </a:r>
             <a:r>
-              <a:rPr lang="pl-PL" sz="1050" dirty="0">
+              <a:rPr lang="pl-PL" sz="1050" dirty="0" smtClean="0">
                 <a:solidFill>
                   <a:srgbClr val="CE9178"/>
                 </a:solidFill>
@@ -23281,7 +23272,7 @@
               <a:t>, </a:t>
             </a:r>
             <a:r>
-              <a:rPr lang="pl-PL" sz="1050" dirty="0">
+              <a:rPr lang="pl-PL" sz="1050" dirty="0" smtClean="0">
                 <a:solidFill>
                   <a:srgbClr val="569CD6"/>
                 </a:solidFill>
@@ -23290,7 +23281,7 @@
               <a:t>{</a:t>
             </a:r>
             <a:r>
-              <a:rPr lang="pl-PL" sz="1050" dirty="0">
+              <a:rPr lang="pl-PL" sz="1050" dirty="0" smtClean="0">
                 <a:solidFill>
                   <a:srgbClr val="9CDCFE"/>
                 </a:solidFill>
@@ -23299,7 +23290,7 @@
               <a:t>y</a:t>
             </a:r>
             <a:r>
-              <a:rPr lang="pl-PL" sz="1050" dirty="0">
+              <a:rPr lang="pl-PL" sz="1050" dirty="0" smtClean="0">
                 <a:solidFill>
                   <a:srgbClr val="569CD6"/>
                 </a:solidFill>
@@ -23308,7 +23299,7 @@
               <a:t>:.2f}</a:t>
             </a:r>
             <a:r>
-              <a:rPr lang="pl-PL" sz="1050" dirty="0">
+              <a:rPr lang="pl-PL" sz="1050" dirty="0" smtClean="0">
                 <a:solidFill>
                   <a:srgbClr val="CE9178"/>
                 </a:solidFill>
@@ -23317,7 +23308,7 @@
               <a:t>)'</a:t>
             </a:r>
             <a:r>
-              <a:rPr lang="pl-PL" sz="1050" dirty="0">
+              <a:rPr lang="pl-PL" sz="1050" dirty="0" smtClean="0">
                 <a:solidFill>
                   <a:srgbClr val="CCCCCC"/>
                 </a:solidFill>
@@ -23333,7 +23324,7 @@
               </a:lnSpc>
             </a:pPr>
             <a:r>
-              <a:rPr lang="pl-PL" sz="1050" dirty="0">
+              <a:rPr lang="pl-PL" sz="1050" dirty="0" smtClean="0">
                 <a:solidFill>
                   <a:srgbClr val="CCCCCC"/>
                 </a:solidFill>
@@ -23342,7 +23333,7 @@
               <a:t>    </a:t>
             </a:r>
             <a:r>
-              <a:rPr lang="pl-PL" sz="1050" dirty="0">
+              <a:rPr lang="pl-PL" sz="1050" dirty="0" smtClean="0">
                 <a:solidFill>
                   <a:srgbClr val="569CD6"/>
                 </a:solidFill>
@@ -23351,7 +23342,7 @@
               <a:t>def</a:t>
             </a:r>
             <a:r>
-              <a:rPr lang="pl-PL" sz="1050" dirty="0">
+              <a:rPr lang="pl-PL" sz="1050" dirty="0" smtClean="0">
                 <a:solidFill>
                   <a:srgbClr val="CCCCCC"/>
                 </a:solidFill>
@@ -23360,7 +23351,7 @@
               <a:t> </a:t>
             </a:r>
             <a:r>
-              <a:rPr lang="pl-PL" sz="1050" dirty="0" err="1">
+              <a:rPr lang="pl-PL" sz="1050" dirty="0" err="1" smtClean="0">
                 <a:solidFill>
                   <a:srgbClr val="DCDCAA"/>
                 </a:solidFill>
@@ -23369,7 +23360,7 @@
               <a:t>send_goal</a:t>
             </a:r>
             <a:r>
-              <a:rPr lang="pl-PL" sz="1050" dirty="0">
+              <a:rPr lang="pl-PL" sz="1050" dirty="0" smtClean="0">
                 <a:solidFill>
                   <a:srgbClr val="CCCCCC"/>
                 </a:solidFill>
@@ -23378,7 +23369,7 @@
               <a:t>(</a:t>
             </a:r>
             <a:r>
-              <a:rPr lang="pl-PL" sz="1050" dirty="0" err="1">
+              <a:rPr lang="pl-PL" sz="1050" dirty="0" err="1" smtClean="0">
                 <a:solidFill>
                   <a:srgbClr val="9CDCFE"/>
                 </a:solidFill>
@@ -23387,7 +23378,7 @@
               <a:t>self</a:t>
             </a:r>
             <a:r>
-              <a:rPr lang="pl-PL" sz="1050" dirty="0">
+              <a:rPr lang="pl-PL" sz="1050" dirty="0" smtClean="0">
                 <a:solidFill>
                   <a:srgbClr val="CCCCCC"/>
                 </a:solidFill>
@@ -23396,7 +23387,7 @@
               <a:t>, </a:t>
             </a:r>
             <a:r>
-              <a:rPr lang="pl-PL" sz="1050" dirty="0">
+              <a:rPr lang="pl-PL" sz="1050" dirty="0" smtClean="0">
                 <a:solidFill>
                   <a:srgbClr val="9CDCFE"/>
                 </a:solidFill>
@@ -23405,7 +23396,7 @@
               <a:t>x</a:t>
             </a:r>
             <a:r>
-              <a:rPr lang="pl-PL" sz="1050" dirty="0">
+              <a:rPr lang="pl-PL" sz="1050" dirty="0" smtClean="0">
                 <a:solidFill>
                   <a:srgbClr val="CCCCCC"/>
                 </a:solidFill>
@@ -23414,7 +23405,7 @@
               <a:t>, </a:t>
             </a:r>
             <a:r>
-              <a:rPr lang="pl-PL" sz="1050" dirty="0">
+              <a:rPr lang="pl-PL" sz="1050" dirty="0" smtClean="0">
                 <a:solidFill>
                   <a:srgbClr val="9CDCFE"/>
                 </a:solidFill>
@@ -23423,7 +23414,7 @@
               <a:t>y</a:t>
             </a:r>
             <a:r>
-              <a:rPr lang="pl-PL" sz="1050" dirty="0">
+              <a:rPr lang="pl-PL" sz="1050" dirty="0" smtClean="0">
                 <a:solidFill>
                   <a:srgbClr val="CCCCCC"/>
                 </a:solidFill>
@@ -23439,7 +23430,7 @@
               </a:lnSpc>
             </a:pPr>
             <a:r>
-              <a:rPr lang="pl-PL" sz="1050" dirty="0">
+              <a:rPr lang="pl-PL" sz="1050" dirty="0" smtClean="0">
                 <a:solidFill>
                   <a:srgbClr val="CCCCCC"/>
                 </a:solidFill>
@@ -23448,7 +23439,7 @@
               <a:t>        </a:t>
             </a:r>
             <a:r>
-              <a:rPr lang="pl-PL" sz="1050" dirty="0" err="1">
+              <a:rPr lang="pl-PL" sz="1050" dirty="0" err="1" smtClean="0">
                 <a:solidFill>
                   <a:srgbClr val="9CDCFE"/>
                 </a:solidFill>
@@ -23457,7 +23448,7 @@
               <a:t>msg</a:t>
             </a:r>
             <a:r>
-              <a:rPr lang="pl-PL" sz="1050" dirty="0">
+              <a:rPr lang="pl-PL" sz="1050" dirty="0" smtClean="0">
                 <a:solidFill>
                   <a:srgbClr val="CCCCCC"/>
                 </a:solidFill>
@@ -23466,7 +23457,7 @@
               <a:t> </a:t>
             </a:r>
             <a:r>
-              <a:rPr lang="pl-PL" sz="1050" dirty="0">
+              <a:rPr lang="pl-PL" sz="1050" dirty="0" smtClean="0">
                 <a:solidFill>
                   <a:srgbClr val="D4D4D4"/>
                 </a:solidFill>
@@ -23475,7 +23466,7 @@
               <a:t>=</a:t>
             </a:r>
             <a:r>
-              <a:rPr lang="pl-PL" sz="1050" dirty="0">
+              <a:rPr lang="pl-PL" sz="1050" dirty="0" smtClean="0">
                 <a:solidFill>
                   <a:srgbClr val="CCCCCC"/>
                 </a:solidFill>
@@ -23484,7 +23475,7 @@
               <a:t> </a:t>
             </a:r>
             <a:r>
-              <a:rPr lang="pl-PL" sz="1050" dirty="0" err="1">
+              <a:rPr lang="pl-PL" sz="1050" dirty="0" err="1" smtClean="0">
                 <a:solidFill>
                   <a:srgbClr val="CCCCCC"/>
                 </a:solidFill>
@@ -23493,7 +23484,7 @@
               <a:t>PoseStamped</a:t>
             </a:r>
             <a:r>
-              <a:rPr lang="pl-PL" sz="1050" dirty="0">
+              <a:rPr lang="pl-PL" sz="1050" dirty="0" smtClean="0">
                 <a:solidFill>
                   <a:srgbClr val="CCCCCC"/>
                 </a:solidFill>
@@ -23509,7 +23500,7 @@
               </a:lnSpc>
             </a:pPr>
             <a:r>
-              <a:rPr lang="pl-PL" sz="1050" dirty="0">
+              <a:rPr lang="pl-PL" sz="1050" dirty="0" smtClean="0">
                 <a:solidFill>
                   <a:srgbClr val="CCCCCC"/>
                 </a:solidFill>
@@ -23518,7 +23509,7 @@
               <a:t>        </a:t>
             </a:r>
             <a:r>
-              <a:rPr lang="pl-PL" sz="1050" dirty="0" err="1">
+              <a:rPr lang="pl-PL" sz="1050" dirty="0" err="1" smtClean="0">
                 <a:solidFill>
                   <a:srgbClr val="9CDCFE"/>
                 </a:solidFill>
@@ -23527,7 +23518,7 @@
               <a:t>msg</a:t>
             </a:r>
             <a:r>
-              <a:rPr lang="pl-PL" sz="1050" dirty="0" err="1">
+              <a:rPr lang="pl-PL" sz="1050" dirty="0" err="1" smtClean="0">
                 <a:solidFill>
                   <a:srgbClr val="CCCCCC"/>
                 </a:solidFill>
@@ -23536,7 +23527,7 @@
               <a:t>.header.frame_id</a:t>
             </a:r>
             <a:r>
-              <a:rPr lang="pl-PL" sz="1050" dirty="0">
+              <a:rPr lang="pl-PL" sz="1050" dirty="0" smtClean="0">
                 <a:solidFill>
                   <a:srgbClr val="CCCCCC"/>
                 </a:solidFill>
@@ -23545,7 +23536,7 @@
               <a:t> </a:t>
             </a:r>
             <a:r>
-              <a:rPr lang="pl-PL" sz="1050" dirty="0">
+              <a:rPr lang="pl-PL" sz="1050" dirty="0" smtClean="0">
                 <a:solidFill>
                   <a:srgbClr val="D4D4D4"/>
                 </a:solidFill>
@@ -23554,7 +23545,7 @@
               <a:t>=</a:t>
             </a:r>
             <a:r>
-              <a:rPr lang="pl-PL" sz="1050" dirty="0">
+              <a:rPr lang="pl-PL" sz="1050" dirty="0" smtClean="0">
                 <a:solidFill>
                   <a:srgbClr val="CCCCCC"/>
                 </a:solidFill>
@@ -23563,7 +23554,7 @@
               <a:t> </a:t>
             </a:r>
             <a:r>
-              <a:rPr lang="pl-PL" sz="1050" dirty="0">
+              <a:rPr lang="pl-PL" sz="1050" dirty="0" smtClean="0">
                 <a:solidFill>
                   <a:srgbClr val="CE9178"/>
                 </a:solidFill>
@@ -23571,7 +23562,7 @@
               </a:rPr>
               <a:t>'map'</a:t>
             </a:r>
-            <a:endParaRPr lang="pl-PL" sz="1050" dirty="0">
+            <a:endParaRPr lang="pl-PL" sz="1050" dirty="0" smtClean="0">
               <a:solidFill>
                 <a:srgbClr val="CCCCCC"/>
               </a:solidFill>
@@ -23585,7 +23576,7 @@
               </a:lnSpc>
             </a:pPr>
             <a:r>
-              <a:rPr lang="pl-PL" sz="1050" dirty="0">
+              <a:rPr lang="pl-PL" sz="1050" dirty="0" smtClean="0">
                 <a:solidFill>
                   <a:srgbClr val="CCCCCC"/>
                 </a:solidFill>
@@ -23594,7 +23585,7 @@
               <a:t>        </a:t>
             </a:r>
             <a:r>
-              <a:rPr lang="pl-PL" sz="1050" dirty="0" err="1">
+              <a:rPr lang="pl-PL" sz="1050" dirty="0" err="1" smtClean="0">
                 <a:solidFill>
                   <a:srgbClr val="9CDCFE"/>
                 </a:solidFill>
@@ -23603,7 +23594,7 @@
               <a:t>msg</a:t>
             </a:r>
             <a:r>
-              <a:rPr lang="pl-PL" sz="1050" dirty="0" err="1">
+              <a:rPr lang="pl-PL" sz="1050" dirty="0" err="1" smtClean="0">
                 <a:solidFill>
                   <a:srgbClr val="CCCCCC"/>
                 </a:solidFill>
@@ -23612,7 +23603,7 @@
               <a:t>.pose.position.x</a:t>
             </a:r>
             <a:r>
-              <a:rPr lang="pl-PL" sz="1050" dirty="0">
+              <a:rPr lang="pl-PL" sz="1050" dirty="0" smtClean="0">
                 <a:solidFill>
                   <a:srgbClr val="CCCCCC"/>
                 </a:solidFill>
@@ -23621,7 +23612,7 @@
               <a:t> </a:t>
             </a:r>
             <a:r>
-              <a:rPr lang="pl-PL" sz="1050" dirty="0">
+              <a:rPr lang="pl-PL" sz="1050" dirty="0" smtClean="0">
                 <a:solidFill>
                   <a:srgbClr val="D4D4D4"/>
                 </a:solidFill>
@@ -23630,7 +23621,7 @@
               <a:t>=</a:t>
             </a:r>
             <a:r>
-              <a:rPr lang="pl-PL" sz="1050" dirty="0">
+              <a:rPr lang="pl-PL" sz="1050" dirty="0" smtClean="0">
                 <a:solidFill>
                   <a:srgbClr val="CCCCCC"/>
                 </a:solidFill>
@@ -23639,7 +23630,7 @@
               <a:t> </a:t>
             </a:r>
             <a:r>
-              <a:rPr lang="pl-PL" sz="1050" dirty="0">
+              <a:rPr lang="pl-PL" sz="1050" dirty="0" smtClean="0">
                 <a:solidFill>
                   <a:srgbClr val="9CDCFE"/>
                 </a:solidFill>
@@ -23648,7 +23639,7 @@
               <a:t>x</a:t>
             </a:r>
             <a:r>
-              <a:rPr lang="pl-PL" sz="1050" dirty="0">
+              <a:rPr lang="pl-PL" sz="1050" dirty="0" smtClean="0">
                 <a:solidFill>
                   <a:srgbClr val="CCCCCC"/>
                 </a:solidFill>
@@ -23657,7 +23648,7 @@
               <a:t>;  </a:t>
             </a:r>
             <a:r>
-              <a:rPr lang="pl-PL" sz="1050" dirty="0" err="1">
+              <a:rPr lang="pl-PL" sz="1050" dirty="0" err="1" smtClean="0">
                 <a:solidFill>
                   <a:srgbClr val="9CDCFE"/>
                 </a:solidFill>
@@ -23666,7 +23657,7 @@
               <a:t>msg</a:t>
             </a:r>
             <a:r>
-              <a:rPr lang="pl-PL" sz="1050" dirty="0" err="1">
+              <a:rPr lang="pl-PL" sz="1050" dirty="0" err="1" smtClean="0">
                 <a:solidFill>
                   <a:srgbClr val="CCCCCC"/>
                 </a:solidFill>
@@ -23675,7 +23666,7 @@
               <a:t>.pose.position.y</a:t>
             </a:r>
             <a:r>
-              <a:rPr lang="pl-PL" sz="1050" dirty="0">
+              <a:rPr lang="pl-PL" sz="1050" dirty="0" smtClean="0">
                 <a:solidFill>
                   <a:srgbClr val="CCCCCC"/>
                 </a:solidFill>
@@ -23684,7 +23675,7 @@
               <a:t> </a:t>
             </a:r>
             <a:r>
-              <a:rPr lang="pl-PL" sz="1050" dirty="0">
+              <a:rPr lang="pl-PL" sz="1050" dirty="0" smtClean="0">
                 <a:solidFill>
                   <a:srgbClr val="D4D4D4"/>
                 </a:solidFill>
@@ -23693,7 +23684,7 @@
               <a:t>=</a:t>
             </a:r>
             <a:r>
-              <a:rPr lang="pl-PL" sz="1050" dirty="0">
+              <a:rPr lang="pl-PL" sz="1050" dirty="0" smtClean="0">
                 <a:solidFill>
                   <a:srgbClr val="CCCCCC"/>
                 </a:solidFill>
@@ -23702,7 +23693,7 @@
               <a:t> </a:t>
             </a:r>
             <a:r>
-              <a:rPr lang="pl-PL" sz="1050" dirty="0">
+              <a:rPr lang="pl-PL" sz="1050" dirty="0" smtClean="0">
                 <a:solidFill>
                   <a:srgbClr val="9CDCFE"/>
                 </a:solidFill>
@@ -23710,7 +23701,7 @@
               </a:rPr>
               <a:t>y</a:t>
             </a:r>
-            <a:endParaRPr lang="pl-PL" sz="1050" dirty="0">
+            <a:endParaRPr lang="pl-PL" sz="1050" dirty="0" smtClean="0">
               <a:solidFill>
                 <a:srgbClr val="CCCCCC"/>
               </a:solidFill>
@@ -23724,7 +23715,7 @@
               </a:lnSpc>
             </a:pPr>
             <a:r>
-              <a:rPr lang="pl-PL" sz="1050" dirty="0">
+              <a:rPr lang="pl-PL" sz="1050" dirty="0" smtClean="0">
                 <a:solidFill>
                   <a:srgbClr val="CCCCCC"/>
                 </a:solidFill>
@@ -23733,7 +23724,7 @@
               <a:t>        </a:t>
             </a:r>
             <a:r>
-              <a:rPr lang="pl-PL" sz="1050" dirty="0" err="1">
+              <a:rPr lang="pl-PL" sz="1050" dirty="0" err="1" smtClean="0">
                 <a:solidFill>
                   <a:srgbClr val="9CDCFE"/>
                 </a:solidFill>
@@ -23742,7 +23733,7 @@
               <a:t>self</a:t>
             </a:r>
             <a:r>
-              <a:rPr lang="pl-PL" sz="1050" dirty="0" err="1">
+              <a:rPr lang="pl-PL" sz="1050" dirty="0" err="1" smtClean="0">
                 <a:solidFill>
                   <a:srgbClr val="CCCCCC"/>
                 </a:solidFill>
@@ -23751,7 +23742,7 @@
               <a:t>.</a:t>
             </a:r>
             <a:r>
-              <a:rPr lang="pl-PL" sz="1050" dirty="0" err="1">
+              <a:rPr lang="pl-PL" sz="1050" dirty="0" err="1" smtClean="0">
                 <a:solidFill>
                   <a:srgbClr val="9CDCFE"/>
                 </a:solidFill>
@@ -23760,7 +23751,7 @@
               <a:t>goal_pub</a:t>
             </a:r>
             <a:r>
-              <a:rPr lang="pl-PL" sz="1050" dirty="0" err="1">
+              <a:rPr lang="pl-PL" sz="1050" dirty="0" err="1" smtClean="0">
                 <a:solidFill>
                   <a:srgbClr val="CCCCCC"/>
                 </a:solidFill>
@@ -23769,7 +23760,7 @@
               <a:t>.publish</a:t>
             </a:r>
             <a:r>
-              <a:rPr lang="pl-PL" sz="1050" dirty="0">
+              <a:rPr lang="pl-PL" sz="1050" dirty="0" smtClean="0">
                 <a:solidFill>
                   <a:srgbClr val="CCCCCC"/>
                 </a:solidFill>
@@ -23778,7 +23769,7 @@
               <a:t>(</a:t>
             </a:r>
             <a:r>
-              <a:rPr lang="pl-PL" sz="1050" dirty="0" err="1">
+              <a:rPr lang="pl-PL" sz="1050" dirty="0" err="1" smtClean="0">
                 <a:solidFill>
                   <a:srgbClr val="9CDCFE"/>
                 </a:solidFill>
@@ -26841,7 +26832,7 @@
               <a:buNone/>
             </a:pPr>
             <a:r>
-              <a:rPr lang="en-US" sz="2800" b="1" dirty="0">
+              <a:rPr lang="en-US" sz="2400" b="1" dirty="0">
                 <a:solidFill>
                   <a:srgbClr val="FFFFFF"/>
                 </a:solidFill>
@@ -26851,7 +26842,7 @@
               </a:rPr>
               <a:t>Najczęstsze błędy projektowe</a:t>
             </a:r>
-            <a:endParaRPr lang="en-US" sz="2800" dirty="0"/>
+            <a:endParaRPr lang="en-US" sz="2400" dirty="0"/>
           </a:p>
         </p:txBody>
       </p:sp>
@@ -27812,6 +27803,17 @@
               <a:buNone/>
             </a:pPr>
             <a:r>
+              <a:rPr lang="en-US" sz="1500" b="1" spc="-50" dirty="0">
+                <a:solidFill>
+                  <a:srgbClr val="E2EBF3"/>
+                </a:solidFill>
+                <a:latin typeface="Calibri" pitchFamily="34" charset="0"/>
+                <a:ea typeface="Calibri" pitchFamily="34" charset="-122"/>
+                <a:cs typeface="Calibri" pitchFamily="34" charset="-120"/>
+              </a:rPr>
+              <a:t>ZMP i Capture Point </a:t>
+            </a:r>
+            <a:r>
               <a:rPr lang="en-US" sz="1500" spc="-50" dirty="0">
                 <a:solidFill>
                   <a:srgbClr val="E2EBF3"/>
@@ -27820,7 +27822,7 @@
                 <a:ea typeface="Calibri" pitchFamily="34" charset="-122"/>
                 <a:cs typeface="Calibri" pitchFamily="34" charset="-120"/>
               </a:rPr>
-              <a:t>ZMP i Capture Point to fundamenty równowagi dynamicznej; planista CoM musi przestrzegać </a:t>
+              <a:t>to fundamenty równowagi dynamicznej; planista CoM musi przestrzegać </a:t>
             </a:r>
             <a:r>
               <a:rPr lang="en-US" sz="1500" spc="-50" dirty="0" err="1">
@@ -27948,6 +27950,17 @@
               <a:buNone/>
             </a:pPr>
             <a:r>
+              <a:rPr lang="en-US" sz="1600" b="1" spc="-50" dirty="0">
+                <a:solidFill>
+                  <a:srgbClr val="E2EBF3"/>
+                </a:solidFill>
+                <a:latin typeface="Calibri" pitchFamily="34" charset="0"/>
+                <a:ea typeface="Calibri" pitchFamily="34" charset="-122"/>
+                <a:cs typeface="Calibri" pitchFamily="34" charset="-120"/>
+              </a:rPr>
+              <a:t>Whole-body control </a:t>
+            </a:r>
+            <a:r>
               <a:rPr lang="en-US" sz="1600" spc="-50" dirty="0">
                 <a:solidFill>
                   <a:srgbClr val="E2EBF3"/>
@@ -27956,7 +27969,7 @@
                 <a:ea typeface="Calibri" pitchFamily="34" charset="-122"/>
                 <a:cs typeface="Calibri" pitchFamily="34" charset="-120"/>
               </a:rPr>
-              <a:t>Whole-body control hierarchizuje zadania: stabilność &gt; kontakt stóp &gt; </a:t>
+              <a:t>hierarchizuje zadania: stabilność &gt; kontakt stóp &gt; </a:t>
             </a:r>
             <a:r>
               <a:rPr lang="en-US" sz="1600" spc="-50" dirty="0" err="1">
@@ -28084,6 +28097,17 @@
               <a:buNone/>
             </a:pPr>
             <a:r>
+              <a:rPr lang="en-US" sz="1600" b="1" spc="-50" dirty="0">
+                <a:solidFill>
+                  <a:srgbClr val="E2EBF3"/>
+                </a:solidFill>
+                <a:latin typeface="Calibri" pitchFamily="34" charset="0"/>
+                <a:ea typeface="Calibri" pitchFamily="34" charset="-122"/>
+                <a:cs typeface="Calibri" pitchFamily="34" charset="-120"/>
+              </a:rPr>
+              <a:t>PID, śledzenie trajektorii i saturacja aktuatorów </a:t>
+            </a:r>
+            <a:r>
               <a:rPr lang="en-US" sz="1600" spc="-50" dirty="0">
                 <a:solidFill>
                   <a:srgbClr val="E2EBF3"/>
@@ -28092,7 +28116,7 @@
                 <a:ea typeface="Calibri" pitchFamily="34" charset="-122"/>
                 <a:cs typeface="Calibri" pitchFamily="34" charset="-120"/>
               </a:rPr>
-              <a:t>PID, śledzenie trajektorii i saturacja aktuatorów to warunki bezpiecznego </a:t>
+              <a:t>to warunki bezpiecznego </a:t>
             </a:r>
             <a:r>
               <a:rPr lang="en-US" sz="1600" spc="-50" dirty="0" err="1">
@@ -28220,6 +28244,17 @@
               <a:buNone/>
             </a:pPr>
             <a:r>
+              <a:rPr lang="en-US" sz="1600" b="1" spc="-50" dirty="0">
+                <a:solidFill>
+                  <a:srgbClr val="E2EBF3"/>
+                </a:solidFill>
+                <a:latin typeface="Calibri" pitchFamily="34" charset="0"/>
+                <a:ea typeface="Calibri" pitchFamily="34" charset="-122"/>
+                <a:cs typeface="Calibri" pitchFamily="34" charset="-120"/>
+              </a:rPr>
+              <a:t>ROS 2 + TF2 integruje wszystkie moduły</a:t>
+            </a:r>
+            <a:r>
               <a:rPr lang="en-US" sz="1600" spc="-50" dirty="0">
                 <a:solidFill>
                   <a:srgbClr val="E2EBF3"/>
@@ -28228,7 +28263,7 @@
                 <a:ea typeface="Calibri" pitchFamily="34" charset="-122"/>
                 <a:cs typeface="Calibri" pitchFamily="34" charset="-120"/>
               </a:rPr>
-              <a:t>ROS 2 + TF2 integruje wszystkie moduły; synchronizacja i modularność są </a:t>
+              <a:t>; synchronizacja i modularność są </a:t>
             </a:r>
             <a:r>
               <a:rPr lang="en-US" sz="1600" spc="-50" dirty="0" err="1">
@@ -28356,6 +28391,17 @@
               <a:buNone/>
             </a:pPr>
             <a:r>
+              <a:rPr lang="en-US" sz="1600" b="1" spc="-50" dirty="0">
+                <a:solidFill>
+                  <a:srgbClr val="E2EBF3"/>
+                </a:solidFill>
+                <a:latin typeface="Calibri" pitchFamily="34" charset="0"/>
+                <a:ea typeface="Calibri" pitchFamily="34" charset="-122"/>
+                <a:cs typeface="Calibri" pitchFamily="34" charset="-120"/>
+              </a:rPr>
+              <a:t>Walidacja w symulacji </a:t>
+            </a:r>
+            <a:r>
               <a:rPr lang="en-US" sz="1600" spc="-50" dirty="0">
                 <a:solidFill>
                   <a:srgbClr val="E2EBF3"/>
@@ -28364,7 +28410,7 @@
                 <a:ea typeface="Calibri" pitchFamily="34" charset="-122"/>
                 <a:cs typeface="Calibri" pitchFamily="34" charset="-120"/>
               </a:rPr>
-              <a:t>Walidacja w symulacji (MuJoCo, Gazebo) poprzedza testy </a:t>
+              <a:t>(MuJoCo, Gazebo) poprzedza testy </a:t>
             </a:r>
             <a:r>
               <a:rPr lang="en-US" sz="1600" spc="-50" dirty="0" err="1">
@@ -28588,7 +28634,7 @@
               <a:buNone/>
             </a:pPr>
             <a:r>
-              <a:rPr lang="en-US" sz="2200" b="1" kern="0" spc="200" dirty="0">
+              <a:rPr lang="en-US" sz="2200" b="1" kern="0" spc="200" dirty="0" smtClean="0">
                 <a:solidFill>
                   <a:srgbClr val="00B4D8"/>
                 </a:solidFill>
@@ -28596,7 +28642,7 @@
                 <a:ea typeface="Trebuchet MS" pitchFamily="34" charset="-122"/>
                 <a:cs typeface="Trebuchet MS" pitchFamily="34" charset="-120"/>
               </a:rPr>
-              <a:t>PODSUMOWANIE CAŁEGO CYKLU</a:t>
+              <a:t>PODSUMOWANIE</a:t>
             </a:r>
             <a:endParaRPr lang="en-US" sz="2200" dirty="0"/>
           </a:p>
@@ -28803,8 +28849,8 @@
         </p:nvSpPr>
         <p:spPr>
           <a:xfrm>
-            <a:off x="320040" y="1874520"/>
-            <a:ext cx="1965960" cy="1097280"/>
+            <a:off x="320040" y="1993392"/>
+            <a:ext cx="1965960" cy="978408"/>
           </a:xfrm>
           <a:prstGeom prst="rect">
             <a:avLst/>
@@ -28820,7 +28866,7 @@
               <a:buNone/>
             </a:pPr>
             <a:r>
-              <a:rPr lang="en-US" sz="2000" dirty="0">
+              <a:rPr lang="en-US" dirty="0">
                 <a:solidFill>
                   <a:srgbClr val="FFFFFF"/>
                 </a:solidFill>
@@ -28830,14 +28876,14 @@
               </a:rPr>
               <a:t>Percepcja</a:t>
             </a:r>
-            <a:endParaRPr lang="en-US" sz="2000" dirty="0"/>
+            <a:endParaRPr lang="en-US" dirty="0"/>
           </a:p>
           <a:p>
             <a:pPr marL="0" indent="0" algn="ctr">
               <a:buNone/>
             </a:pPr>
             <a:r>
-              <a:rPr lang="en-US" sz="2000" dirty="0">
+              <a:rPr lang="en-US" dirty="0">
                 <a:solidFill>
                   <a:srgbClr val="FFFFFF"/>
                 </a:solidFill>
@@ -28847,7 +28893,7 @@
               </a:rPr>
               <a:t>i mapowanie</a:t>
             </a:r>
-            <a:endParaRPr lang="en-US" sz="2000" dirty="0"/>
+            <a:endParaRPr lang="en-US" dirty="0"/>
           </a:p>
         </p:txBody>
       </p:sp>
@@ -28955,8 +29001,8 @@
         </p:nvSpPr>
         <p:spPr>
           <a:xfrm>
-            <a:off x="2542032" y="1874520"/>
-            <a:ext cx="1814068" cy="1097280"/>
+            <a:off x="2542032" y="1993392"/>
+            <a:ext cx="1814068" cy="978408"/>
           </a:xfrm>
           <a:prstGeom prst="rect">
             <a:avLst/>
@@ -28972,7 +29018,7 @@
               <a:buNone/>
             </a:pPr>
             <a:r>
-              <a:rPr lang="en-US" sz="2000" dirty="0">
+              <a:rPr lang="en-US" dirty="0">
                 <a:solidFill>
                   <a:srgbClr val="FFFFFF"/>
                 </a:solidFill>
@@ -28982,14 +29028,14 @@
               </a:rPr>
               <a:t>Lokalizacja</a:t>
             </a:r>
-            <a:endParaRPr lang="en-US" sz="2000" dirty="0"/>
+            <a:endParaRPr lang="en-US" dirty="0"/>
           </a:p>
           <a:p>
             <a:pPr marL="0" indent="0" algn="ctr">
               <a:buNone/>
             </a:pPr>
             <a:r>
-              <a:rPr lang="en-US" sz="2000" dirty="0">
+              <a:rPr lang="en-US" dirty="0">
                 <a:solidFill>
                   <a:srgbClr val="FFFFFF"/>
                 </a:solidFill>
@@ -28999,7 +29045,7 @@
               </a:rPr>
               <a:t>i fuzja sensoryczna</a:t>
             </a:r>
-            <a:endParaRPr lang="en-US" sz="2000" dirty="0"/>
+            <a:endParaRPr lang="en-US" dirty="0"/>
           </a:p>
         </p:txBody>
       </p:sp>
@@ -29107,8 +29153,8 @@
         </p:nvSpPr>
         <p:spPr>
           <a:xfrm>
-            <a:off x="4617720" y="1874520"/>
-            <a:ext cx="1965960" cy="1097280"/>
+            <a:off x="4617720" y="1993392"/>
+            <a:ext cx="1965960" cy="978408"/>
           </a:xfrm>
           <a:prstGeom prst="rect">
             <a:avLst/>
@@ -29124,7 +29170,7 @@
               <a:buNone/>
             </a:pPr>
             <a:r>
-              <a:rPr lang="en-US" sz="2000" dirty="0">
+              <a:rPr lang="en-US" dirty="0">
                 <a:solidFill>
                   <a:srgbClr val="FFFFFF"/>
                 </a:solidFill>
@@ -29134,14 +29180,14 @@
               </a:rPr>
               <a:t>Planowanie ruchu</a:t>
             </a:r>
-            <a:endParaRPr lang="en-US" sz="2000" dirty="0"/>
+            <a:endParaRPr lang="en-US" dirty="0"/>
           </a:p>
           <a:p>
             <a:pPr marL="0" indent="0" algn="ctr">
               <a:buNone/>
             </a:pPr>
             <a:r>
-              <a:rPr lang="en-US" sz="2000" dirty="0">
+              <a:rPr lang="en-US" dirty="0">
                 <a:solidFill>
                   <a:srgbClr val="FFFFFF"/>
                 </a:solidFill>
@@ -29151,7 +29197,7 @@
               </a:rPr>
               <a:t>i unikanie przeszkód</a:t>
             </a:r>
-            <a:endParaRPr lang="en-US" sz="2000" dirty="0"/>
+            <a:endParaRPr lang="en-US" dirty="0"/>
           </a:p>
         </p:txBody>
       </p:sp>
@@ -29259,8 +29305,8 @@
         </p:nvSpPr>
         <p:spPr>
           <a:xfrm>
-            <a:off x="6766560" y="1874520"/>
-            <a:ext cx="1965960" cy="1097280"/>
+            <a:off x="6766560" y="1993392"/>
+            <a:ext cx="1965960" cy="978408"/>
           </a:xfrm>
           <a:prstGeom prst="rect">
             <a:avLst/>
@@ -29276,7 +29322,7 @@
               <a:buNone/>
             </a:pPr>
             <a:r>
-              <a:rPr lang="en-US" sz="2000" dirty="0">
+              <a:rPr lang="en-US" dirty="0">
                 <a:solidFill>
                   <a:srgbClr val="FFFFFF"/>
                 </a:solidFill>
@@ -29286,14 +29332,14 @@
               </a:rPr>
               <a:t>Chód, stabilność</a:t>
             </a:r>
-            <a:endParaRPr lang="en-US" sz="2000" dirty="0"/>
+            <a:endParaRPr lang="en-US" dirty="0"/>
           </a:p>
           <a:p>
             <a:pPr marL="0" indent="0" algn="ctr">
               <a:buNone/>
             </a:pPr>
             <a:r>
-              <a:rPr lang="en-US" sz="2000" dirty="0">
+              <a:rPr lang="en-US" dirty="0">
                 <a:solidFill>
                   <a:srgbClr val="FFFFFF"/>
                 </a:solidFill>
@@ -29303,7 +29349,7 @@
               </a:rPr>
               <a:t>i integracja systemu</a:t>
             </a:r>
-            <a:endParaRPr lang="en-US" sz="2000" dirty="0"/>
+            <a:endParaRPr lang="en-US" dirty="0"/>
           </a:p>
         </p:txBody>
       </p:sp>
@@ -30196,7 +30242,73 @@
                 <a:ea typeface="Calibri" pitchFamily="34" charset="-122"/>
                 <a:cs typeface="Calibri" pitchFamily="34" charset="-120"/>
               </a:rPr>
-              <a:t>: jednoczesna nawigacja i manipulacja – otwieranie drzwi w ruchu</a:t>
+              <a:t>: jednoczesna nawigacja </a:t>
+            </a:r>
+            <a:r>
+              <a:rPr lang="en-US" sz="1600" spc="-60" dirty="0" err="1">
+                <a:solidFill>
+                  <a:srgbClr val="0D1B2A"/>
+                </a:solidFill>
+                <a:latin typeface="Calibri" pitchFamily="34" charset="0"/>
+                <a:ea typeface="Calibri" pitchFamily="34" charset="-122"/>
+                <a:cs typeface="Calibri" pitchFamily="34" charset="-120"/>
+              </a:rPr>
+              <a:t>i</a:t>
+            </a:r>
+            <a:r>
+              <a:rPr lang="en-US" sz="1600" spc="-60" dirty="0">
+                <a:solidFill>
+                  <a:srgbClr val="0D1B2A"/>
+                </a:solidFill>
+                <a:latin typeface="Calibri" pitchFamily="34" charset="0"/>
+                <a:ea typeface="Calibri" pitchFamily="34" charset="-122"/>
+                <a:cs typeface="Calibri" pitchFamily="34" charset="-120"/>
+              </a:rPr>
+              <a:t> </a:t>
+            </a:r>
+            <a:r>
+              <a:rPr lang="en-US" sz="1600" spc="-60" dirty="0" err="1" smtClean="0">
+                <a:solidFill>
+                  <a:srgbClr val="0D1B2A"/>
+                </a:solidFill>
+                <a:latin typeface="Calibri" pitchFamily="34" charset="0"/>
+                <a:ea typeface="Calibri" pitchFamily="34" charset="-122"/>
+                <a:cs typeface="Calibri" pitchFamily="34" charset="-120"/>
+              </a:rPr>
+              <a:t>manipulacja</a:t>
+            </a:r>
+            <a:r>
+              <a:rPr lang="pl-PL" sz="1600" spc="-60" smtClean="0">
+                <a:solidFill>
+                  <a:srgbClr val="0D1B2A"/>
+                </a:solidFill>
+                <a:latin typeface="Calibri" pitchFamily="34" charset="0"/>
+                <a:ea typeface="Calibri" pitchFamily="34" charset="-122"/>
+                <a:cs typeface="Calibri" pitchFamily="34" charset="-120"/>
+              </a:rPr>
+              <a:t>,</a:t>
+            </a:r>
+            <a:r>
+              <a:rPr lang="en-US" sz="1600" spc="-60" smtClean="0">
+                <a:solidFill>
+                  <a:srgbClr val="0D1B2A"/>
+                </a:solidFill>
+                <a:latin typeface="Calibri" pitchFamily="34" charset="0"/>
+                <a:ea typeface="Calibri" pitchFamily="34" charset="-122"/>
+                <a:cs typeface="Calibri" pitchFamily="34" charset="-120"/>
+              </a:rPr>
+              <a:t> </a:t>
+            </a:r>
+            <a:r>
+              <a:rPr lang="en-US" sz="1600" spc="-60" dirty="0">
+                <a:solidFill>
+                  <a:srgbClr val="0D1B2A"/>
+                </a:solidFill>
+                <a:latin typeface="Calibri" pitchFamily="34" charset="0"/>
+                <a:ea typeface="Calibri" pitchFamily="34" charset="-122"/>
+                <a:cs typeface="Calibri" pitchFamily="34" charset="-120"/>
+              </a:rPr>
+              <a:t>otwieranie drzwi w ruchu</a:t>
             </a:r>
             <a:endParaRPr lang="en-US" sz="1600" spc="-60" dirty="0"/>
           </a:p>
